--- a/output-pptx/test-output.pptx
+++ b/output-pptx/test-output.pptx
@@ -7736,36 +7736,14 @@
       </p:sp>
       <p:sp>
         <p:nvSpPr>
-          <p:cNvPr id="5" name="Shape 3"/>
+          <p:cNvPr id="5" name="Text 3"/>
           <p:cNvSpPr/>
           <p:nvPr/>
         </p:nvSpPr>
         <p:spPr>
           <a:xfrm>
-            <a:off x="3829496" y="3751362"/>
-            <a:ext cx="704255" cy="369987"/>
-          </a:xfrm>
-          <a:prstGeom prst="roundRect">
-            <a:avLst>
-              <a:gd name="adj" fmla="val 76350"/>
-            </a:avLst>
-          </a:prstGeom>
-          <a:solidFill>
-            <a:srgbClr val="818B98"/>
-          </a:solidFill>
-          <a:ln/>
-        </p:spPr>
-      </p:sp>
-      <p:sp>
-        <p:nvSpPr>
-          <p:cNvPr id="6" name="Text 4"/>
-          <p:cNvSpPr/>
-          <p:nvPr/>
-        </p:nvSpPr>
-        <p:spPr>
-          <a:xfrm>
-            <a:off x="3829496" y="3751362"/>
-            <a:ext cx="704255" cy="369987"/>
+            <a:off x="909638" y="3702993"/>
+            <a:ext cx="4948238" cy="833289"/>
           </a:xfrm>
           <a:prstGeom prst="rect">
             <a:avLst/>
@@ -7774,12 +7752,63 @@
           <a:ln/>
         </p:spPr>
         <p:txBody>
-          <a:bodyPr wrap="square" lIns="0" tIns="0" rIns="0" bIns="0" rtlCol="0" anchor="ctr"/>
-          <a:lstStyle/>
-          <a:p>
-            <a:pPr algn="ctr" indent="0" marL="0">
-              <a:lnSpc>
-                <a:spcPct val="100000"/>
+          <a:bodyPr wrap="square" lIns="0" tIns="0" rIns="0" bIns="0" rtlCol="0" anchor="t"/>
+          <a:lstStyle/>
+          <a:p>
+            <a:pPr algn="l" indent="0" marL="0">
+              <a:lnSpc>
+                <a:spcPct val="150000"/>
+              </a:lnSpc>
+              <a:buNone/>
+            </a:pPr>
+            <a:r>
+              <a:rPr lang="en-US" sz="2175" dirty="0">
+                <a:solidFill>
+                  <a:srgbClr val="1F2328"/>
+                </a:solidFill>
+                <a:latin typeface="Segoe UI" pitchFamily="34" charset="0"/>
+                <a:ea typeface="Segoe UI" pitchFamily="34" charset="-122"/>
+                <a:cs typeface="Segoe UI" pitchFamily="34" charset="-120"/>
+              </a:rPr>
+              <a:t>A mix of text, </a:t>
+            </a:r>
+            <a:pPr algn="l" indent="0" marL="0">
+              <a:lnSpc>
+                <a:spcPct val="150000"/>
+              </a:lnSpc>
+              <a:buNone/>
+            </a:pPr>
+            <a:r>
+              <a:rPr lang="en-US" sz="2175" b="1" dirty="0">
+                <a:solidFill>
+                  <a:srgbClr val="1F2328"/>
+                </a:solidFill>
+                <a:latin typeface="Segoe UI" pitchFamily="34" charset="0"/>
+                <a:ea typeface="Segoe UI" pitchFamily="34" charset="-122"/>
+                <a:cs typeface="Segoe UI" pitchFamily="34" charset="-120"/>
+              </a:rPr>
+              <a:t>bold</a:t>
+            </a:r>
+            <a:pPr algn="l" indent="0" marL="0">
+              <a:lnSpc>
+                <a:spcPct val="150000"/>
+              </a:lnSpc>
+              <a:buNone/>
+            </a:pPr>
+            <a:r>
+              <a:rPr lang="en-US" sz="2175" dirty="0">
+                <a:solidFill>
+                  <a:srgbClr val="1F2328"/>
+                </a:solidFill>
+                <a:latin typeface="Segoe UI" pitchFamily="34" charset="0"/>
+                <a:ea typeface="Segoe UI" pitchFamily="34" charset="-122"/>
+                <a:cs typeface="Segoe UI" pitchFamily="34" charset="-120"/>
+              </a:rPr>
+              <a:t>, and </a:t>
+            </a:r>
+            <a:pPr algn="l" indent="0" marL="0">
+              <a:lnSpc>
+                <a:spcPct val="150000"/>
               </a:lnSpc>
               <a:buNone/>
             </a:pPr>
@@ -7788,37 +7817,15 @@
                 <a:solidFill>
                   <a:srgbClr val="1F2328"/>
                 </a:solidFill>
+                <a:highlight>
+                  <a:srgbClr val="F0F1F3"/>
+                </a:highlight>
                 <a:latin typeface="Consolas" pitchFamily="34" charset="0"/>
                 <a:ea typeface="Consolas" pitchFamily="34" charset="-122"/>
                 <a:cs typeface="Consolas" pitchFamily="34" charset="-120"/>
               </a:rPr>
               <a:t>code</a:t>
             </a:r>
-            <a:endParaRPr lang="en-US" sz="1849" dirty="0"/>
-          </a:p>
-        </p:txBody>
-      </p:sp>
-      <p:sp>
-        <p:nvSpPr>
-          <p:cNvPr id="7" name="Text 5"/>
-          <p:cNvSpPr/>
-          <p:nvPr/>
-        </p:nvSpPr>
-        <p:spPr>
-          <a:xfrm>
-            <a:off x="909638" y="3702993"/>
-            <a:ext cx="4948238" cy="833289"/>
-          </a:xfrm>
-          <a:prstGeom prst="rect">
-            <a:avLst/>
-          </a:prstGeom>
-          <a:noFill/>
-          <a:ln/>
-        </p:spPr>
-        <p:txBody>
-          <a:bodyPr wrap="square" lIns="0" tIns="0" rIns="0" bIns="0" rtlCol="0" anchor="t"/>
-          <a:lstStyle/>
-          <a:p>
             <a:pPr algn="l" indent="0" marL="0">
               <a:lnSpc>
                 <a:spcPct val="150000"/>
@@ -7834,25 +7841,17 @@
                 <a:ea typeface="Segoe UI" pitchFamily="34" charset="-122"/>
                 <a:cs typeface="Segoe UI" pitchFamily="34" charset="-120"/>
               </a:rPr>
-              <a:t>A mix of text, </a:t>
-            </a:r>
-            <a:pPr algn="l" indent="0" marL="0">
-              <a:lnSpc>
-                <a:spcPct val="150000"/>
-              </a:lnSpc>
-              <a:buNone/>
-            </a:pPr>
-            <a:r>
-              <a:rPr lang="en-US" sz="2175" b="1" dirty="0">
-                <a:solidFill>
-                  <a:srgbClr val="1F2328"/>
-                </a:solidFill>
-                <a:latin typeface="Segoe UI" pitchFamily="34" charset="0"/>
-                <a:ea typeface="Segoe UI" pitchFamily="34" charset="-122"/>
-                <a:cs typeface="Segoe UI" pitchFamily="34" charset="-120"/>
-              </a:rPr>
-              <a:t>bold</a:t>
-            </a:r>
+              <a:t>.</a:t>
+            </a:r>
+            <a:pPr algn="l" indent="0" marL="0">
+              <a:lnSpc>
+                <a:spcPct val="150000"/>
+              </a:lnSpc>
+              <a:buNone/>
+            </a:pPr>
+            <a:endParaRPr lang="en-US" sz="2175" dirty="0"/>
+          </a:p>
+          <a:p>
             <a:pPr algn="l" indent="0" marL="0">
               <a:lnSpc>
                 <a:spcPct val="150000"/>
@@ -7868,58 +7867,15 @@
                 <a:ea typeface="Segoe UI" pitchFamily="34" charset="-122"/>
                 <a:cs typeface="Segoe UI" pitchFamily="34" charset="-120"/>
               </a:rPr>
-              <a:t>, and </a:t>
-            </a:r>
-            <a:pPr algn="l" indent="0" marL="0">
-              <a:lnSpc>
-                <a:spcPct val="150000"/>
-              </a:lnSpc>
-              <a:buNone/>
-            </a:pPr>
-            <a:r>
-              <a:rPr lang="en-US" sz="2175" dirty="0">
-                <a:solidFill>
-                  <a:srgbClr val="1F2328"/>
-                </a:solidFill>
-                <a:latin typeface="Segoe UI" pitchFamily="34" charset="0"/>
-                <a:ea typeface="Segoe UI" pitchFamily="34" charset="-122"/>
-                <a:cs typeface="Segoe UI" pitchFamily="34" charset="-120"/>
-              </a:rPr>
-              <a:t>.</a:t>
-            </a:r>
-            <a:pPr algn="l" indent="0" marL="0">
-              <a:lnSpc>
-                <a:spcPct val="150000"/>
-              </a:lnSpc>
-              <a:buNone/>
-            </a:pPr>
+              <a:t>Emoji are also included.</a:t>
+            </a:r>
             <a:endParaRPr lang="en-US" sz="2175" dirty="0"/>
           </a:p>
-          <a:p>
-            <a:pPr algn="l" indent="0" marL="0">
-              <a:lnSpc>
-                <a:spcPct val="150000"/>
-              </a:lnSpc>
-              <a:buNone/>
-            </a:pPr>
-            <a:r>
-              <a:rPr lang="en-US" sz="2175" dirty="0">
-                <a:solidFill>
-                  <a:srgbClr val="1F2328"/>
-                </a:solidFill>
-                <a:latin typeface="Segoe UI" pitchFamily="34" charset="0"/>
-                <a:ea typeface="Segoe UI" pitchFamily="34" charset="-122"/>
-                <a:cs typeface="Segoe UI" pitchFamily="34" charset="-120"/>
-              </a:rPr>
-              <a:t>Emoji are also included.</a:t>
-            </a:r>
-            <a:endParaRPr lang="en-US" sz="2175" dirty="0"/>
-          </a:p>
-        </p:txBody>
-      </p:sp>
-      <p:sp>
-        <p:nvSpPr>
-          <p:cNvPr id="8" name="Shape 6"/>
+        </p:txBody>
+      </p:sp>
+      <p:sp>
+        <p:nvSpPr>
+          <p:cNvPr id="6" name="Shape 4"/>
           <p:cNvSpPr/>
           <p:nvPr/>
         </p:nvSpPr>
@@ -7946,7 +7902,7 @@
       </p:sp>
       <p:sp>
         <p:nvSpPr>
-          <p:cNvPr id="9" name="Text 7"/>
+          <p:cNvPr id="7" name="Text 5"/>
           <p:cNvSpPr/>
           <p:nvPr/>
         </p:nvSpPr>
@@ -8005,7 +7961,7 @@
       </p:sp>
       <p:sp>
         <p:nvSpPr>
-          <p:cNvPr id="10" name="Text 8"/>
+          <p:cNvPr id="8" name="Text 6"/>
           <p:cNvSpPr/>
           <p:nvPr/>
         </p:nvSpPr>
@@ -11491,70 +11447,6 @@
         </p:nvSpPr>
         <p:spPr>
           <a:xfrm>
-            <a:off x="5850880" y="4667548"/>
-            <a:ext cx="704255" cy="369987"/>
-          </a:xfrm>
-          <a:prstGeom prst="roundRect">
-            <a:avLst>
-              <a:gd name="adj" fmla="val 76350"/>
-            </a:avLst>
-          </a:prstGeom>
-          <a:solidFill>
-            <a:srgbClr val="818B98"/>
-          </a:solidFill>
-          <a:ln/>
-        </p:spPr>
-      </p:sp>
-      <p:sp>
-        <p:nvSpPr>
-          <p:cNvPr id="8" name="Text 6"/>
-          <p:cNvSpPr/>
-          <p:nvPr/>
-        </p:nvSpPr>
-        <p:spPr>
-          <a:xfrm>
-            <a:off x="5850880" y="4667548"/>
-            <a:ext cx="704255" cy="369987"/>
-          </a:xfrm>
-          <a:prstGeom prst="rect">
-            <a:avLst/>
-          </a:prstGeom>
-          <a:noFill/>
-          <a:ln/>
-        </p:spPr>
-        <p:txBody>
-          <a:bodyPr wrap="square" lIns="0" tIns="0" rIns="0" bIns="0" rtlCol="0" anchor="ctr"/>
-          <a:lstStyle/>
-          <a:p>
-            <a:pPr algn="ctr" indent="0" marL="0">
-              <a:lnSpc>
-                <a:spcPct val="100000"/>
-              </a:lnSpc>
-              <a:buNone/>
-            </a:pPr>
-            <a:r>
-              <a:rPr lang="en-US" sz="1849" dirty="0">
-                <a:solidFill>
-                  <a:srgbClr val="59636E"/>
-                </a:solidFill>
-                <a:latin typeface="Consolas" pitchFamily="34" charset="0"/>
-                <a:ea typeface="Consolas" pitchFamily="34" charset="-122"/>
-                <a:cs typeface="Consolas" pitchFamily="34" charset="-120"/>
-              </a:rPr>
-              <a:t>code</a:t>
-            </a:r>
-            <a:endParaRPr lang="en-US" sz="1849" dirty="0"/>
-          </a:p>
-        </p:txBody>
-      </p:sp>
-      <p:sp>
-        <p:nvSpPr>
-          <p:cNvPr id="9" name="Shape 7"/>
-          <p:cNvSpPr/>
-          <p:nvPr/>
-        </p:nvSpPr>
-        <p:spPr>
-          <a:xfrm>
             <a:off x="747713" y="4619179"/>
             <a:ext cx="66675" cy="418951"/>
           </a:xfrm>
@@ -11569,7 +11461,7 @@
       </p:sp>
       <p:sp>
         <p:nvSpPr>
-          <p:cNvPr id="10" name="Text 8"/>
+          <p:cNvPr id="8" name="Text 6"/>
           <p:cNvSpPr/>
           <p:nvPr/>
         </p:nvSpPr>
@@ -15402,25 +15294,167 @@
       </p:sp>
       <p:sp>
         <p:nvSpPr>
-          <p:cNvPr id="3" name="Shape 1"/>
+          <p:cNvPr id="3" name="Text 1"/>
           <p:cNvSpPr/>
           <p:nvPr/>
         </p:nvSpPr>
         <p:spPr>
           <a:xfrm>
-            <a:off x="4186684" y="2834134"/>
-            <a:ext cx="1607939" cy="369987"/>
-          </a:xfrm>
-          <a:prstGeom prst="roundRect">
-            <a:avLst>
-              <a:gd name="adj" fmla="val 76350"/>
-            </a:avLst>
-          </a:prstGeom>
-          <a:solidFill>
-            <a:srgbClr val="818B98"/>
-          </a:solidFill>
+            <a:off x="747713" y="2785765"/>
+            <a:ext cx="11001375" cy="418951"/>
+          </a:xfrm>
+          <a:prstGeom prst="rect">
+            <a:avLst/>
+          </a:prstGeom>
+          <a:noFill/>
           <a:ln/>
         </p:spPr>
+        <p:txBody>
+          <a:bodyPr wrap="square" lIns="0" tIns="0" rIns="0" bIns="0" rtlCol="0" anchor="t"/>
+          <a:lstStyle/>
+          <a:p>
+            <a:pPr algn="l" indent="0" marL="0">
+              <a:lnSpc>
+                <a:spcPct val="150000"/>
+              </a:lnSpc>
+              <a:buNone/>
+            </a:pPr>
+            <a:r>
+              <a:rPr lang="en-US" sz="2175" b="1" dirty="0">
+                <a:solidFill>
+                  <a:srgbClr val="1F2328"/>
+                </a:solidFill>
+                <a:latin typeface="Segoe UI" pitchFamily="34" charset="0"/>
+                <a:ea typeface="Segoe UI" pitchFamily="34" charset="-122"/>
+                <a:cs typeface="Segoe UI" pitchFamily="34" charset="-120"/>
+              </a:rPr>
+              <a:t>Bold text</a:t>
+            </a:r>
+            <a:pPr algn="l" indent="0" marL="0">
+              <a:lnSpc>
+                <a:spcPct val="150000"/>
+              </a:lnSpc>
+              <a:buNone/>
+            </a:pPr>
+            <a:r>
+              <a:rPr lang="en-US" sz="2175" dirty="0">
+                <a:solidFill>
+                  <a:srgbClr val="1F2328"/>
+                </a:solidFill>
+                <a:latin typeface="Segoe UI" pitchFamily="34" charset="0"/>
+                <a:ea typeface="Segoe UI" pitchFamily="34" charset="-122"/>
+                <a:cs typeface="Segoe UI" pitchFamily="34" charset="-120"/>
+              </a:rPr>
+              <a:t> and </a:t>
+            </a:r>
+            <a:pPr algn="l" indent="0" marL="0">
+              <a:lnSpc>
+                <a:spcPct val="150000"/>
+              </a:lnSpc>
+              <a:buNone/>
+            </a:pPr>
+            <a:r>
+              <a:rPr lang="en-US" sz="2175" i="1" dirty="0">
+                <a:solidFill>
+                  <a:srgbClr val="1F2328"/>
+                </a:solidFill>
+                <a:latin typeface="Segoe UI" pitchFamily="34" charset="0"/>
+                <a:ea typeface="Segoe UI" pitchFamily="34" charset="-122"/>
+                <a:cs typeface="Segoe UI" pitchFamily="34" charset="-120"/>
+              </a:rPr>
+              <a:t>italic text</a:t>
+            </a:r>
+            <a:pPr algn="l" indent="0" marL="0">
+              <a:lnSpc>
+                <a:spcPct val="150000"/>
+              </a:lnSpc>
+              <a:buNone/>
+            </a:pPr>
+            <a:r>
+              <a:rPr lang="en-US" sz="2175" dirty="0">
+                <a:solidFill>
+                  <a:srgbClr val="1F2328"/>
+                </a:solidFill>
+                <a:latin typeface="Segoe UI" pitchFamily="34" charset="0"/>
+                <a:ea typeface="Segoe UI" pitchFamily="34" charset="-122"/>
+                <a:cs typeface="Segoe UI" pitchFamily="34" charset="-120"/>
+              </a:rPr>
+              <a:t> and </a:t>
+            </a:r>
+            <a:pPr algn="l" indent="0" marL="0">
+              <a:lnSpc>
+                <a:spcPct val="150000"/>
+              </a:lnSpc>
+              <a:buNone/>
+            </a:pPr>
+            <a:r>
+              <a:rPr lang="en-US" sz="1849" dirty="0">
+                <a:solidFill>
+                  <a:srgbClr val="1F2328"/>
+                </a:solidFill>
+                <a:highlight>
+                  <a:srgbClr val="F0F1F3"/>
+                </a:highlight>
+                <a:latin typeface="Consolas" pitchFamily="34" charset="0"/>
+                <a:ea typeface="Consolas" pitchFamily="34" charset="-122"/>
+                <a:cs typeface="Consolas" pitchFamily="34" charset="-120"/>
+              </a:rPr>
+              <a:t>inline code</a:t>
+            </a:r>
+            <a:pPr algn="l" indent="0" marL="0">
+              <a:lnSpc>
+                <a:spcPct val="150000"/>
+              </a:lnSpc>
+              <a:buNone/>
+            </a:pPr>
+            <a:r>
+              <a:rPr lang="en-US" sz="2175" dirty="0">
+                <a:solidFill>
+                  <a:srgbClr val="1F2328"/>
+                </a:solidFill>
+                <a:latin typeface="Segoe UI" pitchFamily="34" charset="0"/>
+                <a:ea typeface="Segoe UI" pitchFamily="34" charset="-122"/>
+                <a:cs typeface="Segoe UI" pitchFamily="34" charset="-120"/>
+              </a:rPr>
+              <a:t> and </a:t>
+            </a:r>
+            <a:pPr algn="l" indent="0" marL="0">
+              <a:lnSpc>
+                <a:spcPct val="150000"/>
+              </a:lnSpc>
+              <a:buNone/>
+            </a:pPr>
+            <a:r>
+              <a:rPr lang="en-US" sz="2175" strike="sngStrike" dirty="0">
+                <a:solidFill>
+                  <a:srgbClr val="1F2328"/>
+                </a:solidFill>
+                <a:latin typeface="Segoe UI" pitchFamily="34" charset="0"/>
+                <a:ea typeface="Segoe UI" pitchFamily="34" charset="-122"/>
+                <a:cs typeface="Segoe UI" pitchFamily="34" charset="-120"/>
+              </a:rPr>
+              <a:t>strikethrough</a:t>
+            </a:r>
+            <a:pPr algn="l" indent="0" marL="0">
+              <a:lnSpc>
+                <a:spcPct val="150000"/>
+              </a:lnSpc>
+              <a:buNone/>
+            </a:pPr>
+            <a:r>
+              <a:rPr lang="en-US" sz="2175" dirty="0">
+                <a:solidFill>
+                  <a:srgbClr val="1F2328"/>
+                </a:solidFill>
+                <a:latin typeface="Segoe UI" pitchFamily="34" charset="0"/>
+                <a:ea typeface="Segoe UI" pitchFamily="34" charset="-122"/>
+                <a:cs typeface="Segoe UI" pitchFamily="34" charset="-120"/>
+              </a:rPr>
+              <a:t> test.</a:t>
+            </a:r>
+            <a:endParaRPr lang="en-US" sz="2175" dirty="0"/>
+          </a:p>
+        </p:txBody>
       </p:sp>
       <p:sp>
         <p:nvSpPr>
@@ -15430,8 +15464,8 @@
         </p:nvSpPr>
         <p:spPr>
           <a:xfrm>
-            <a:off x="4186684" y="2834134"/>
-            <a:ext cx="1607939" cy="369987"/>
+            <a:off x="747713" y="3357116"/>
+            <a:ext cx="11001375" cy="414338"/>
           </a:xfrm>
           <a:prstGeom prst="rect">
             <a:avLst/>
@@ -15440,338 +15474,152 @@
           <a:ln/>
         </p:spPr>
         <p:txBody>
-          <a:bodyPr wrap="square" lIns="0" tIns="0" rIns="0" bIns="0" rtlCol="0" anchor="ctr"/>
-          <a:lstStyle/>
-          <a:p>
-            <a:pPr algn="ctr" indent="0" marL="0">
-              <a:lnSpc>
-                <a:spcPct val="100000"/>
-              </a:lnSpc>
-              <a:buNone/>
-            </a:pPr>
-            <a:r>
-              <a:rPr lang="en-US" sz="1849" dirty="0">
-                <a:solidFill>
-                  <a:srgbClr val="1F2328"/>
-                </a:solidFill>
-                <a:latin typeface="Consolas" pitchFamily="34" charset="0"/>
-                <a:ea typeface="Consolas" pitchFamily="34" charset="-122"/>
-                <a:cs typeface="Consolas" pitchFamily="34" charset="-120"/>
-              </a:rPr>
-              <a:t>inline code</a:t>
-            </a:r>
-            <a:endParaRPr lang="en-US" sz="1849" dirty="0"/>
+          <a:bodyPr wrap="square" lIns="0" tIns="0" rIns="0" bIns="0" rtlCol="0" anchor="t"/>
+          <a:lstStyle/>
+          <a:p>
+            <a:pPr algn="l" indent="0" marL="0">
+              <a:lnSpc>
+                <a:spcPct val="150000"/>
+              </a:lnSpc>
+              <a:buNone/>
+            </a:pPr>
+            <a:r>
+              <a:rPr lang="en-US" sz="2175" b="1" dirty="0">
+                <a:solidFill>
+                  <a:srgbClr val="1F2328"/>
+                </a:solidFill>
+                <a:latin typeface="Segoe UI" pitchFamily="34" charset="0"/>
+                <a:ea typeface="Segoe UI" pitchFamily="34" charset="-122"/>
+                <a:cs typeface="Segoe UI" pitchFamily="34" charset="-120"/>
+              </a:rPr>
+              <a:t>Bold</a:t>
+            </a:r>
+            <a:pPr algn="l" indent="0" marL="0">
+              <a:lnSpc>
+                <a:spcPct val="150000"/>
+              </a:lnSpc>
+              <a:buNone/>
+            </a:pPr>
+            <a:r>
+              <a:rPr lang="en-US" sz="2175" dirty="0">
+                <a:solidFill>
+                  <a:srgbClr val="1F2328"/>
+                </a:solidFill>
+                <a:latin typeface="Segoe UI" pitchFamily="34" charset="0"/>
+                <a:ea typeface="Segoe UI" pitchFamily="34" charset="-122"/>
+                <a:cs typeface="Segoe UI" pitchFamily="34" charset="-120"/>
+              </a:rPr>
+              <a:t> followed by </a:t>
+            </a:r>
+            <a:pPr algn="l" indent="0" marL="0">
+              <a:lnSpc>
+                <a:spcPct val="150000"/>
+              </a:lnSpc>
+              <a:buNone/>
+            </a:pPr>
+            <a:r>
+              <a:rPr lang="en-US" sz="2175" i="1" dirty="0">
+                <a:solidFill>
+                  <a:srgbClr val="1F2328"/>
+                </a:solidFill>
+                <a:latin typeface="Segoe UI" pitchFamily="34" charset="0"/>
+                <a:ea typeface="Segoe UI" pitchFamily="34" charset="-122"/>
+                <a:cs typeface="Segoe UI" pitchFamily="34" charset="-120"/>
+              </a:rPr>
+              <a:t>italic</a:t>
+            </a:r>
+            <a:pPr algn="l" indent="0" marL="0">
+              <a:lnSpc>
+                <a:spcPct val="150000"/>
+              </a:lnSpc>
+              <a:buNone/>
+            </a:pPr>
+            <a:r>
+              <a:rPr lang="en-US" sz="2175" dirty="0">
+                <a:solidFill>
+                  <a:srgbClr val="1F2328"/>
+                </a:solidFill>
+                <a:latin typeface="Segoe UI" pitchFamily="34" charset="0"/>
+                <a:ea typeface="Segoe UI" pitchFamily="34" charset="-122"/>
+                <a:cs typeface="Segoe UI" pitchFamily="34" charset="-120"/>
+              </a:rPr>
+              <a:t>, and </a:t>
+            </a:r>
+            <a:pPr algn="l" indent="0" marL="0">
+              <a:lnSpc>
+                <a:spcPct val="150000"/>
+              </a:lnSpc>
+              <a:buNone/>
+            </a:pPr>
+            <a:r>
+              <a:rPr lang="en-US" sz="2175" b="1" dirty="0">
+                <a:solidFill>
+                  <a:srgbClr val="1F2328"/>
+                </a:solidFill>
+                <a:latin typeface="Segoe UI" pitchFamily="34" charset="0"/>
+                <a:ea typeface="Segoe UI" pitchFamily="34" charset="-122"/>
+                <a:cs typeface="Segoe UI" pitchFamily="34" charset="-120"/>
+              </a:rPr>
+              <a:t>bold with </a:t>
+            </a:r>
+            <a:pPr algn="l" indent="0" marL="0">
+              <a:lnSpc>
+                <a:spcPct val="150000"/>
+              </a:lnSpc>
+              <a:buNone/>
+            </a:pPr>
+            <a:r>
+              <a:rPr lang="en-US" sz="2175" b="1" i="1" dirty="0">
+                <a:solidFill>
+                  <a:srgbClr val="1F2328"/>
+                </a:solidFill>
+                <a:latin typeface="Segoe UI" pitchFamily="34" charset="0"/>
+                <a:ea typeface="Segoe UI" pitchFamily="34" charset="-122"/>
+                <a:cs typeface="Segoe UI" pitchFamily="34" charset="-120"/>
+              </a:rPr>
+              <a:t>nested italic</a:t>
+            </a:r>
+            <a:pPr algn="l" indent="0" marL="0">
+              <a:lnSpc>
+                <a:spcPct val="150000"/>
+              </a:lnSpc>
+              <a:buNone/>
+            </a:pPr>
+            <a:r>
+              <a:rPr lang="en-US" sz="2175" b="1" dirty="0">
+                <a:solidFill>
+                  <a:srgbClr val="1F2328"/>
+                </a:solidFill>
+                <a:latin typeface="Segoe UI" pitchFamily="34" charset="0"/>
+                <a:ea typeface="Segoe UI" pitchFamily="34" charset="-122"/>
+                <a:cs typeface="Segoe UI" pitchFamily="34" charset="-120"/>
+              </a:rPr>
+              <a:t> inside</a:t>
+            </a:r>
+            <a:pPr algn="l" indent="0" marL="0">
+              <a:lnSpc>
+                <a:spcPct val="150000"/>
+              </a:lnSpc>
+              <a:buNone/>
+            </a:pPr>
+            <a:r>
+              <a:rPr lang="en-US" sz="2175" dirty="0">
+                <a:solidFill>
+                  <a:srgbClr val="1F2328"/>
+                </a:solidFill>
+                <a:latin typeface="Segoe UI" pitchFamily="34" charset="0"/>
+                <a:ea typeface="Segoe UI" pitchFamily="34" charset="-122"/>
+                <a:cs typeface="Segoe UI" pitchFamily="34" charset="-120"/>
+              </a:rPr>
+              <a:t> is also tested.</a:t>
+            </a:r>
+            <a:endParaRPr lang="en-US" sz="2175" dirty="0"/>
           </a:p>
         </p:txBody>
       </p:sp>
       <p:sp>
         <p:nvSpPr>
           <p:cNvPr id="5" name="Text 3"/>
-          <p:cNvSpPr/>
-          <p:nvPr/>
-        </p:nvSpPr>
-        <p:spPr>
-          <a:xfrm>
-            <a:off x="747713" y="2785765"/>
-            <a:ext cx="11001375" cy="418951"/>
-          </a:xfrm>
-          <a:prstGeom prst="rect">
-            <a:avLst/>
-          </a:prstGeom>
-          <a:noFill/>
-          <a:ln/>
-        </p:spPr>
-        <p:txBody>
-          <a:bodyPr wrap="square" lIns="0" tIns="0" rIns="0" bIns="0" rtlCol="0" anchor="t"/>
-          <a:lstStyle/>
-          <a:p>
-            <a:pPr algn="l" indent="0" marL="0">
-              <a:lnSpc>
-                <a:spcPct val="150000"/>
-              </a:lnSpc>
-              <a:buNone/>
-            </a:pPr>
-            <a:r>
-              <a:rPr lang="en-US" sz="2175" b="1" dirty="0">
-                <a:solidFill>
-                  <a:srgbClr val="1F2328"/>
-                </a:solidFill>
-                <a:latin typeface="Segoe UI" pitchFamily="34" charset="0"/>
-                <a:ea typeface="Segoe UI" pitchFamily="34" charset="-122"/>
-                <a:cs typeface="Segoe UI" pitchFamily="34" charset="-120"/>
-              </a:rPr>
-              <a:t>Bold text</a:t>
-            </a:r>
-            <a:pPr algn="l" indent="0" marL="0">
-              <a:lnSpc>
-                <a:spcPct val="150000"/>
-              </a:lnSpc>
-              <a:buNone/>
-            </a:pPr>
-            <a:r>
-              <a:rPr lang="en-US" sz="2175" dirty="0">
-                <a:solidFill>
-                  <a:srgbClr val="1F2328"/>
-                </a:solidFill>
-                <a:latin typeface="Segoe UI" pitchFamily="34" charset="0"/>
-                <a:ea typeface="Segoe UI" pitchFamily="34" charset="-122"/>
-                <a:cs typeface="Segoe UI" pitchFamily="34" charset="-120"/>
-              </a:rPr>
-              <a:t> and </a:t>
-            </a:r>
-            <a:pPr algn="l" indent="0" marL="0">
-              <a:lnSpc>
-                <a:spcPct val="150000"/>
-              </a:lnSpc>
-              <a:buNone/>
-            </a:pPr>
-            <a:r>
-              <a:rPr lang="en-US" sz="2175" i="1" dirty="0">
-                <a:solidFill>
-                  <a:srgbClr val="1F2328"/>
-                </a:solidFill>
-                <a:latin typeface="Segoe UI" pitchFamily="34" charset="0"/>
-                <a:ea typeface="Segoe UI" pitchFamily="34" charset="-122"/>
-                <a:cs typeface="Segoe UI" pitchFamily="34" charset="-120"/>
-              </a:rPr>
-              <a:t>italic text</a:t>
-            </a:r>
-            <a:pPr algn="l" indent="0" marL="0">
-              <a:lnSpc>
-                <a:spcPct val="150000"/>
-              </a:lnSpc>
-              <a:buNone/>
-            </a:pPr>
-            <a:r>
-              <a:rPr lang="en-US" sz="2175" dirty="0">
-                <a:solidFill>
-                  <a:srgbClr val="1F2328"/>
-                </a:solidFill>
-                <a:latin typeface="Segoe UI" pitchFamily="34" charset="0"/>
-                <a:ea typeface="Segoe UI" pitchFamily="34" charset="-122"/>
-                <a:cs typeface="Segoe UI" pitchFamily="34" charset="-120"/>
-              </a:rPr>
-              <a:t> and </a:t>
-            </a:r>
-            <a:pPr algn="l" indent="0" marL="0">
-              <a:lnSpc>
-                <a:spcPct val="150000"/>
-              </a:lnSpc>
-              <a:buNone/>
-            </a:pPr>
-            <a:r>
-              <a:rPr lang="en-US" sz="2175" dirty="0">
-                <a:solidFill>
-                  <a:srgbClr val="1F2328"/>
-                </a:solidFill>
-                <a:latin typeface="Segoe UI" pitchFamily="34" charset="0"/>
-                <a:ea typeface="Segoe UI" pitchFamily="34" charset="-122"/>
-                <a:cs typeface="Segoe UI" pitchFamily="34" charset="-120"/>
-              </a:rPr>
-              <a:t> and </a:t>
-            </a:r>
-            <a:pPr algn="l" indent="0" marL="0">
-              <a:lnSpc>
-                <a:spcPct val="150000"/>
-              </a:lnSpc>
-              <a:buNone/>
-            </a:pPr>
-            <a:r>
-              <a:rPr lang="en-US" sz="2175" strike="sngStrike" dirty="0">
-                <a:solidFill>
-                  <a:srgbClr val="1F2328"/>
-                </a:solidFill>
-                <a:latin typeface="Segoe UI" pitchFamily="34" charset="0"/>
-                <a:ea typeface="Segoe UI" pitchFamily="34" charset="-122"/>
-                <a:cs typeface="Segoe UI" pitchFamily="34" charset="-120"/>
-              </a:rPr>
-              <a:t>strikethrough</a:t>
-            </a:r>
-            <a:pPr algn="l" indent="0" marL="0">
-              <a:lnSpc>
-                <a:spcPct val="150000"/>
-              </a:lnSpc>
-              <a:buNone/>
-            </a:pPr>
-            <a:r>
-              <a:rPr lang="en-US" sz="2175" dirty="0">
-                <a:solidFill>
-                  <a:srgbClr val="1F2328"/>
-                </a:solidFill>
-                <a:latin typeface="Segoe UI" pitchFamily="34" charset="0"/>
-                <a:ea typeface="Segoe UI" pitchFamily="34" charset="-122"/>
-                <a:cs typeface="Segoe UI" pitchFamily="34" charset="-120"/>
-              </a:rPr>
-              <a:t> test.</a:t>
-            </a:r>
-            <a:endParaRPr lang="en-US" sz="2175" dirty="0"/>
-          </a:p>
-        </p:txBody>
-      </p:sp>
-      <p:sp>
-        <p:nvSpPr>
-          <p:cNvPr id="6" name="Text 4"/>
-          <p:cNvSpPr/>
-          <p:nvPr/>
-        </p:nvSpPr>
-        <p:spPr>
-          <a:xfrm>
-            <a:off x="747713" y="3357116"/>
-            <a:ext cx="11001375" cy="414338"/>
-          </a:xfrm>
-          <a:prstGeom prst="rect">
-            <a:avLst/>
-          </a:prstGeom>
-          <a:noFill/>
-          <a:ln/>
-        </p:spPr>
-        <p:txBody>
-          <a:bodyPr wrap="square" lIns="0" tIns="0" rIns="0" bIns="0" rtlCol="0" anchor="t"/>
-          <a:lstStyle/>
-          <a:p>
-            <a:pPr algn="l" indent="0" marL="0">
-              <a:lnSpc>
-                <a:spcPct val="150000"/>
-              </a:lnSpc>
-              <a:buNone/>
-            </a:pPr>
-            <a:r>
-              <a:rPr lang="en-US" sz="2175" b="1" dirty="0">
-                <a:solidFill>
-                  <a:srgbClr val="1F2328"/>
-                </a:solidFill>
-                <a:latin typeface="Segoe UI" pitchFamily="34" charset="0"/>
-                <a:ea typeface="Segoe UI" pitchFamily="34" charset="-122"/>
-                <a:cs typeface="Segoe UI" pitchFamily="34" charset="-120"/>
-              </a:rPr>
-              <a:t>Bold</a:t>
-            </a:r>
-            <a:pPr algn="l" indent="0" marL="0">
-              <a:lnSpc>
-                <a:spcPct val="150000"/>
-              </a:lnSpc>
-              <a:buNone/>
-            </a:pPr>
-            <a:r>
-              <a:rPr lang="en-US" sz="2175" dirty="0">
-                <a:solidFill>
-                  <a:srgbClr val="1F2328"/>
-                </a:solidFill>
-                <a:latin typeface="Segoe UI" pitchFamily="34" charset="0"/>
-                <a:ea typeface="Segoe UI" pitchFamily="34" charset="-122"/>
-                <a:cs typeface="Segoe UI" pitchFamily="34" charset="-120"/>
-              </a:rPr>
-              <a:t> followed by </a:t>
-            </a:r>
-            <a:pPr algn="l" indent="0" marL="0">
-              <a:lnSpc>
-                <a:spcPct val="150000"/>
-              </a:lnSpc>
-              <a:buNone/>
-            </a:pPr>
-            <a:r>
-              <a:rPr lang="en-US" sz="2175" i="1" dirty="0">
-                <a:solidFill>
-                  <a:srgbClr val="1F2328"/>
-                </a:solidFill>
-                <a:latin typeface="Segoe UI" pitchFamily="34" charset="0"/>
-                <a:ea typeface="Segoe UI" pitchFamily="34" charset="-122"/>
-                <a:cs typeface="Segoe UI" pitchFamily="34" charset="-120"/>
-              </a:rPr>
-              <a:t>italic</a:t>
-            </a:r>
-            <a:pPr algn="l" indent="0" marL="0">
-              <a:lnSpc>
-                <a:spcPct val="150000"/>
-              </a:lnSpc>
-              <a:buNone/>
-            </a:pPr>
-            <a:r>
-              <a:rPr lang="en-US" sz="2175" dirty="0">
-                <a:solidFill>
-                  <a:srgbClr val="1F2328"/>
-                </a:solidFill>
-                <a:latin typeface="Segoe UI" pitchFamily="34" charset="0"/>
-                <a:ea typeface="Segoe UI" pitchFamily="34" charset="-122"/>
-                <a:cs typeface="Segoe UI" pitchFamily="34" charset="-120"/>
-              </a:rPr>
-              <a:t>, and </a:t>
-            </a:r>
-            <a:pPr algn="l" indent="0" marL="0">
-              <a:lnSpc>
-                <a:spcPct val="150000"/>
-              </a:lnSpc>
-              <a:buNone/>
-            </a:pPr>
-            <a:r>
-              <a:rPr lang="en-US" sz="2175" b="1" dirty="0">
-                <a:solidFill>
-                  <a:srgbClr val="1F2328"/>
-                </a:solidFill>
-                <a:latin typeface="Segoe UI" pitchFamily="34" charset="0"/>
-                <a:ea typeface="Segoe UI" pitchFamily="34" charset="-122"/>
-                <a:cs typeface="Segoe UI" pitchFamily="34" charset="-120"/>
-              </a:rPr>
-              <a:t>bold with </a:t>
-            </a:r>
-            <a:pPr algn="l" indent="0" marL="0">
-              <a:lnSpc>
-                <a:spcPct val="150000"/>
-              </a:lnSpc>
-              <a:buNone/>
-            </a:pPr>
-            <a:r>
-              <a:rPr lang="en-US" sz="2175" b="1" i="1" dirty="0">
-                <a:solidFill>
-                  <a:srgbClr val="1F2328"/>
-                </a:solidFill>
-                <a:latin typeface="Segoe UI" pitchFamily="34" charset="0"/>
-                <a:ea typeface="Segoe UI" pitchFamily="34" charset="-122"/>
-                <a:cs typeface="Segoe UI" pitchFamily="34" charset="-120"/>
-              </a:rPr>
-              <a:t>nested italic</a:t>
-            </a:r>
-            <a:pPr algn="l" indent="0" marL="0">
-              <a:lnSpc>
-                <a:spcPct val="150000"/>
-              </a:lnSpc>
-              <a:buNone/>
-            </a:pPr>
-            <a:r>
-              <a:rPr lang="en-US" sz="2175" b="1" dirty="0">
-                <a:solidFill>
-                  <a:srgbClr val="1F2328"/>
-                </a:solidFill>
-                <a:latin typeface="Segoe UI" pitchFamily="34" charset="0"/>
-                <a:ea typeface="Segoe UI" pitchFamily="34" charset="-122"/>
-                <a:cs typeface="Segoe UI" pitchFamily="34" charset="-120"/>
-              </a:rPr>
-              <a:t> inside</a:t>
-            </a:r>
-            <a:pPr algn="l" indent="0" marL="0">
-              <a:lnSpc>
-                <a:spcPct val="150000"/>
-              </a:lnSpc>
-              <a:buNone/>
-            </a:pPr>
-            <a:r>
-              <a:rPr lang="en-US" sz="2175" dirty="0">
-                <a:solidFill>
-                  <a:srgbClr val="1F2328"/>
-                </a:solidFill>
-                <a:latin typeface="Segoe UI" pitchFamily="34" charset="0"/>
-                <a:ea typeface="Segoe UI" pitchFamily="34" charset="-122"/>
-                <a:cs typeface="Segoe UI" pitchFamily="34" charset="-120"/>
-              </a:rPr>
-              <a:t> is also tested.</a:t>
-            </a:r>
-            <a:endParaRPr lang="en-US" sz="2175" dirty="0"/>
-          </a:p>
-        </p:txBody>
-      </p:sp>
-      <p:sp>
-        <p:nvSpPr>
-          <p:cNvPr id="7" name="Text 5"/>
           <p:cNvSpPr/>
           <p:nvPr/>
         </p:nvSpPr>
@@ -15837,36 +15685,14 @@
       </p:sp>
       <p:sp>
         <p:nvSpPr>
-          <p:cNvPr id="8" name="Shape 6"/>
+          <p:cNvPr id="6" name="Text 4"/>
           <p:cNvSpPr/>
           <p:nvPr/>
         </p:nvSpPr>
         <p:spPr>
           <a:xfrm>
-            <a:off x="1828949" y="4538960"/>
-            <a:ext cx="704255" cy="369987"/>
-          </a:xfrm>
-          <a:prstGeom prst="roundRect">
-            <a:avLst>
-              <a:gd name="adj" fmla="val 76350"/>
-            </a:avLst>
-          </a:prstGeom>
-          <a:solidFill>
-            <a:srgbClr val="818B98"/>
-          </a:solidFill>
-          <a:ln/>
-        </p:spPr>
-      </p:sp>
-      <p:sp>
-        <p:nvSpPr>
-          <p:cNvPr id="9" name="Text 7"/>
-          <p:cNvSpPr/>
-          <p:nvPr/>
-        </p:nvSpPr>
-        <p:spPr>
-          <a:xfrm>
-            <a:off x="1828949" y="4538960"/>
-            <a:ext cx="704255" cy="369987"/>
+            <a:off x="747713" y="4490591"/>
+            <a:ext cx="11001375" cy="418951"/>
           </a:xfrm>
           <a:prstGeom prst="rect">
             <a:avLst/>
@@ -15875,12 +15701,29 @@
           <a:ln/>
         </p:spPr>
         <p:txBody>
-          <a:bodyPr wrap="square" lIns="0" tIns="0" rIns="0" bIns="0" rtlCol="0" anchor="ctr"/>
-          <a:lstStyle/>
-          <a:p>
-            <a:pPr algn="ctr" indent="0" marL="0">
-              <a:lnSpc>
-                <a:spcPct val="100000"/>
+          <a:bodyPr wrap="square" lIns="0" tIns="0" rIns="0" bIns="0" rtlCol="0" anchor="t"/>
+          <a:lstStyle/>
+          <a:p>
+            <a:pPr algn="l" indent="0" marL="0">
+              <a:lnSpc>
+                <a:spcPct val="150000"/>
+              </a:lnSpc>
+              <a:buNone/>
+            </a:pPr>
+            <a:r>
+              <a:rPr lang="en-US" sz="2175" dirty="0">
+                <a:solidFill>
+                  <a:srgbClr val="1F2328"/>
+                </a:solidFill>
+                <a:latin typeface="Segoe UI" pitchFamily="34" charset="0"/>
+                <a:ea typeface="Segoe UI" pitchFamily="34" charset="-122"/>
+                <a:cs typeface="Segoe UI" pitchFamily="34" charset="-120"/>
+              </a:rPr>
+              <a:t>Multiple </a:t>
+            </a:r>
+            <a:pPr algn="l" indent="0" marL="0">
+              <a:lnSpc>
+                <a:spcPct val="150000"/>
               </a:lnSpc>
               <a:buNone/>
             </a:pPr>
@@ -15889,62 +15732,35 @@
                 <a:solidFill>
                   <a:srgbClr val="1F2328"/>
                 </a:solidFill>
+                <a:highlight>
+                  <a:srgbClr val="F0F1F3"/>
+                </a:highlight>
                 <a:latin typeface="Consolas" pitchFamily="34" charset="0"/>
                 <a:ea typeface="Consolas" pitchFamily="34" charset="-122"/>
                 <a:cs typeface="Consolas" pitchFamily="34" charset="-120"/>
               </a:rPr>
               <a:t>code</a:t>
             </a:r>
-            <a:endParaRPr lang="en-US" sz="1849" dirty="0"/>
-          </a:p>
-        </p:txBody>
-      </p:sp>
-      <p:sp>
-        <p:nvSpPr>
-          <p:cNvPr id="10" name="Shape 8"/>
-          <p:cNvSpPr/>
-          <p:nvPr/>
-        </p:nvSpPr>
-        <p:spPr>
-          <a:xfrm>
-            <a:off x="3378250" y="4538960"/>
-            <a:ext cx="1220539" cy="369987"/>
-          </a:xfrm>
-          <a:prstGeom prst="roundRect">
-            <a:avLst>
-              <a:gd name="adj" fmla="val 76350"/>
-            </a:avLst>
-          </a:prstGeom>
-          <a:solidFill>
-            <a:srgbClr val="818B98"/>
-          </a:solidFill>
-          <a:ln/>
-        </p:spPr>
-      </p:sp>
-      <p:sp>
-        <p:nvSpPr>
-          <p:cNvPr id="11" name="Text 9"/>
-          <p:cNvSpPr/>
-          <p:nvPr/>
-        </p:nvSpPr>
-        <p:spPr>
-          <a:xfrm>
-            <a:off x="3378250" y="4538960"/>
-            <a:ext cx="1220539" cy="369987"/>
-          </a:xfrm>
-          <a:prstGeom prst="rect">
-            <a:avLst/>
-          </a:prstGeom>
-          <a:noFill/>
-          <a:ln/>
-        </p:spPr>
-        <p:txBody>
-          <a:bodyPr wrap="square" lIns="0" tIns="0" rIns="0" bIns="0" rtlCol="0" anchor="ctr"/>
-          <a:lstStyle/>
-          <a:p>
-            <a:pPr algn="ctr" indent="0" marL="0">
-              <a:lnSpc>
-                <a:spcPct val="100000"/>
+            <a:pPr algn="l" indent="0" marL="0">
+              <a:lnSpc>
+                <a:spcPct val="150000"/>
+              </a:lnSpc>
+              <a:buNone/>
+            </a:pPr>
+            <a:r>
+              <a:rPr lang="en-US" sz="2175" dirty="0">
+                <a:solidFill>
+                  <a:srgbClr val="1F2328"/>
+                </a:solidFill>
+                <a:latin typeface="Segoe UI" pitchFamily="34" charset="0"/>
+                <a:ea typeface="Segoe UI" pitchFamily="34" charset="-122"/>
+                <a:cs typeface="Segoe UI" pitchFamily="34" charset="-120"/>
+              </a:rPr>
+              <a:t> spans </a:t>
+            </a:r>
+            <a:pPr algn="l" indent="0" marL="0">
+              <a:lnSpc>
+                <a:spcPct val="150000"/>
               </a:lnSpc>
               <a:buNone/>
             </a:pPr>
@@ -15953,70 +15769,14 @@
                 <a:solidFill>
                   <a:srgbClr val="1F2328"/>
                 </a:solidFill>
+                <a:highlight>
+                  <a:srgbClr val="F0F1F3"/>
+                </a:highlight>
                 <a:latin typeface="Consolas" pitchFamily="34" charset="0"/>
                 <a:ea typeface="Consolas" pitchFamily="34" charset="-122"/>
                 <a:cs typeface="Consolas" pitchFamily="34" charset="-120"/>
               </a:rPr>
               <a:t>included</a:t>
-            </a:r>
-            <a:endParaRPr lang="en-US" sz="1849" dirty="0"/>
-          </a:p>
-        </p:txBody>
-      </p:sp>
-      <p:sp>
-        <p:nvSpPr>
-          <p:cNvPr id="12" name="Text 10"/>
-          <p:cNvSpPr/>
-          <p:nvPr/>
-        </p:nvSpPr>
-        <p:spPr>
-          <a:xfrm>
-            <a:off x="747713" y="4490591"/>
-            <a:ext cx="11001375" cy="418951"/>
-          </a:xfrm>
-          <a:prstGeom prst="rect">
-            <a:avLst/>
-          </a:prstGeom>
-          <a:noFill/>
-          <a:ln/>
-        </p:spPr>
-        <p:txBody>
-          <a:bodyPr wrap="square" lIns="0" tIns="0" rIns="0" bIns="0" rtlCol="0" anchor="t"/>
-          <a:lstStyle/>
-          <a:p>
-            <a:pPr algn="l" indent="0" marL="0">
-              <a:lnSpc>
-                <a:spcPct val="150000"/>
-              </a:lnSpc>
-              <a:buNone/>
-            </a:pPr>
-            <a:r>
-              <a:rPr lang="en-US" sz="2175" dirty="0">
-                <a:solidFill>
-                  <a:srgbClr val="1F2328"/>
-                </a:solidFill>
-                <a:latin typeface="Segoe UI" pitchFamily="34" charset="0"/>
-                <a:ea typeface="Segoe UI" pitchFamily="34" charset="-122"/>
-                <a:cs typeface="Segoe UI" pitchFamily="34" charset="-120"/>
-              </a:rPr>
-              <a:t>Multiple </a:t>
-            </a:r>
-            <a:pPr algn="l" indent="0" marL="0">
-              <a:lnSpc>
-                <a:spcPct val="150000"/>
-              </a:lnSpc>
-              <a:buNone/>
-            </a:pPr>
-            <a:r>
-              <a:rPr lang="en-US" sz="2175" dirty="0">
-                <a:solidFill>
-                  <a:srgbClr val="1F2328"/>
-                </a:solidFill>
-                <a:latin typeface="Segoe UI" pitchFamily="34" charset="0"/>
-                <a:ea typeface="Segoe UI" pitchFamily="34" charset="-122"/>
-                <a:cs typeface="Segoe UI" pitchFamily="34" charset="-120"/>
-              </a:rPr>
-              <a:t> spans </a:t>
             </a:r>
             <a:pPr algn="l" indent="0" marL="0">
               <a:lnSpc>
@@ -16976,36 +16736,14 @@
       </p:sp>
       <p:sp>
         <p:nvSpPr>
-          <p:cNvPr id="4" name="Shape 2"/>
+          <p:cNvPr id="4" name="Text 2"/>
           <p:cNvSpPr/>
           <p:nvPr/>
         </p:nvSpPr>
         <p:spPr>
           <a:xfrm>
-            <a:off x="2044303" y="2970907"/>
-            <a:ext cx="704255" cy="369987"/>
-          </a:xfrm>
-          <a:prstGeom prst="roundRect">
-            <a:avLst>
-              <a:gd name="adj" fmla="val 76350"/>
-            </a:avLst>
-          </a:prstGeom>
-          <a:solidFill>
-            <a:srgbClr val="818B98"/>
-          </a:solidFill>
-          <a:ln/>
-        </p:spPr>
-      </p:sp>
-      <p:sp>
-        <p:nvSpPr>
-          <p:cNvPr id="5" name="Text 3"/>
-          <p:cNvSpPr/>
-          <p:nvPr/>
-        </p:nvSpPr>
-        <p:spPr>
-          <a:xfrm>
-            <a:off x="2044303" y="2970907"/>
-            <a:ext cx="704255" cy="369987"/>
+            <a:off x="747713" y="2922538"/>
+            <a:ext cx="11001375" cy="418951"/>
           </a:xfrm>
           <a:prstGeom prst="rect">
             <a:avLst/>
@@ -17014,12 +16752,46 @@
           <a:ln/>
         </p:spPr>
         <p:txBody>
-          <a:bodyPr wrap="square" lIns="0" tIns="0" rIns="0" bIns="0" rtlCol="0" anchor="ctr"/>
-          <a:lstStyle/>
-          <a:p>
-            <a:pPr algn="ctr" indent="0" marL="0">
-              <a:lnSpc>
-                <a:spcPct val="100000"/>
+          <a:bodyPr wrap="square" lIns="0" tIns="0" rIns="0" bIns="0" rtlCol="0" anchor="t"/>
+          <a:lstStyle/>
+          <a:p>
+            <a:pPr algn="l" indent="0" marL="0">
+              <a:lnSpc>
+                <a:spcPct val="150000"/>
+              </a:lnSpc>
+              <a:buNone/>
+            </a:pPr>
+            <a:r>
+              <a:rPr lang="en-US" sz="2175" b="1" dirty="0">
+                <a:solidFill>
+                  <a:srgbClr val="1F2328"/>
+                </a:solidFill>
+                <a:latin typeface="Segoe UI" pitchFamily="34" charset="0"/>
+                <a:ea typeface="Segoe UI" pitchFamily="34" charset="-122"/>
+                <a:cs typeface="Segoe UI" pitchFamily="34" charset="-120"/>
+              </a:rPr>
+              <a:t>Bold</a:t>
+            </a:r>
+            <a:pPr algn="l" indent="0" marL="0">
+              <a:lnSpc>
+                <a:spcPct val="150000"/>
+              </a:lnSpc>
+              <a:buNone/>
+            </a:pPr>
+            <a:r>
+              <a:rPr lang="en-US" sz="2175" i="1" dirty="0">
+                <a:solidFill>
+                  <a:srgbClr val="1F2328"/>
+                </a:solidFill>
+                <a:latin typeface="Segoe UI" pitchFamily="34" charset="0"/>
+                <a:ea typeface="Segoe UI" pitchFamily="34" charset="-122"/>
+                <a:cs typeface="Segoe UI" pitchFamily="34" charset="-120"/>
+              </a:rPr>
+              <a:t>Italic</a:t>
+            </a:r>
+            <a:pPr algn="l" indent="0" marL="0">
+              <a:lnSpc>
+                <a:spcPct val="150000"/>
               </a:lnSpc>
               <a:buNone/>
             </a:pPr>
@@ -17028,70 +16800,14 @@
                 <a:solidFill>
                   <a:srgbClr val="1F2328"/>
                 </a:solidFill>
+                <a:highlight>
+                  <a:srgbClr val="F0F1F3"/>
+                </a:highlight>
                 <a:latin typeface="Consolas" pitchFamily="34" charset="0"/>
                 <a:ea typeface="Consolas" pitchFamily="34" charset="-122"/>
                 <a:cs typeface="Consolas" pitchFamily="34" charset="-120"/>
               </a:rPr>
               <a:t>code</a:t>
-            </a:r>
-            <a:endParaRPr lang="en-US" sz="1849" dirty="0"/>
-          </a:p>
-        </p:txBody>
-      </p:sp>
-      <p:sp>
-        <p:nvSpPr>
-          <p:cNvPr id="6" name="Text 4"/>
-          <p:cNvSpPr/>
-          <p:nvPr/>
-        </p:nvSpPr>
-        <p:spPr>
-          <a:xfrm>
-            <a:off x="747713" y="2922538"/>
-            <a:ext cx="11001375" cy="418951"/>
-          </a:xfrm>
-          <a:prstGeom prst="rect">
-            <a:avLst/>
-          </a:prstGeom>
-          <a:noFill/>
-          <a:ln/>
-        </p:spPr>
-        <p:txBody>
-          <a:bodyPr wrap="square" lIns="0" tIns="0" rIns="0" bIns="0" rtlCol="0" anchor="t"/>
-          <a:lstStyle/>
-          <a:p>
-            <a:pPr algn="l" indent="0" marL="0">
-              <a:lnSpc>
-                <a:spcPct val="150000"/>
-              </a:lnSpc>
-              <a:buNone/>
-            </a:pPr>
-            <a:r>
-              <a:rPr lang="en-US" sz="2175" b="1" dirty="0">
-                <a:solidFill>
-                  <a:srgbClr val="1F2328"/>
-                </a:solidFill>
-                <a:latin typeface="Segoe UI" pitchFamily="34" charset="0"/>
-                <a:ea typeface="Segoe UI" pitchFamily="34" charset="-122"/>
-                <a:cs typeface="Segoe UI" pitchFamily="34" charset="-120"/>
-              </a:rPr>
-              <a:t>Bold</a:t>
-            </a:r>
-            <a:pPr algn="l" indent="0" marL="0">
-              <a:lnSpc>
-                <a:spcPct val="150000"/>
-              </a:lnSpc>
-              <a:buNone/>
-            </a:pPr>
-            <a:r>
-              <a:rPr lang="en-US" sz="2175" i="1" dirty="0">
-                <a:solidFill>
-                  <a:srgbClr val="1F2328"/>
-                </a:solidFill>
-                <a:latin typeface="Segoe UI" pitchFamily="34" charset="0"/>
-                <a:ea typeface="Segoe UI" pitchFamily="34" charset="-122"/>
-                <a:cs typeface="Segoe UI" pitchFamily="34" charset="-120"/>
-              </a:rPr>
-              <a:t>Italic</a:t>
             </a:r>
             <a:pPr algn="l" indent="0" marL="0">
               <a:lnSpc>
@@ -17174,7 +16890,7 @@
       </p:sp>
       <p:sp>
         <p:nvSpPr>
-          <p:cNvPr id="7" name="Shape 5"/>
+          <p:cNvPr id="5" name="Shape 3"/>
           <p:cNvSpPr/>
           <p:nvPr/>
         </p:nvSpPr>
@@ -17198,7 +16914,7 @@
       </p:sp>
       <p:sp>
         <p:nvSpPr>
-          <p:cNvPr id="8" name="Text 6"/>
+          <p:cNvPr id="6" name="Text 4"/>
           <p:cNvSpPr/>
           <p:nvPr/>
         </p:nvSpPr>
@@ -17257,7 +16973,7 @@
       </p:sp>
       <p:sp>
         <p:nvSpPr>
-          <p:cNvPr id="9" name="Text 7"/>
+          <p:cNvPr id="7" name="Text 5"/>
           <p:cNvSpPr/>
           <p:nvPr/>
         </p:nvSpPr>
@@ -17393,7 +17109,7 @@
       </p:sp>
       <p:sp>
         <p:nvSpPr>
-          <p:cNvPr id="10" name="Shape 8"/>
+          <p:cNvPr id="8" name="Shape 6"/>
           <p:cNvSpPr/>
           <p:nvPr/>
         </p:nvSpPr>
@@ -17420,7 +17136,7 @@
       </p:sp>
       <p:sp>
         <p:nvSpPr>
-          <p:cNvPr id="11" name="Text 9"/>
+          <p:cNvPr id="9" name="Text 7"/>
           <p:cNvSpPr/>
           <p:nvPr/>
         </p:nvSpPr>
@@ -17916,7 +17632,7 @@
       </p:graphicFrame>
       <p:sp>
         <p:nvSpPr>
-          <p:cNvPr id="13" name="Shape 10"/>
+          <p:cNvPr id="11" name="Shape 8"/>
           <p:cNvSpPr/>
           <p:nvPr/>
         </p:nvSpPr>
@@ -17936,7 +17652,7 @@
       </p:sp>
       <p:sp>
         <p:nvSpPr>
-          <p:cNvPr id="14" name="Text 11"/>
+          <p:cNvPr id="12" name="Text 9"/>
           <p:cNvSpPr/>
           <p:nvPr/>
         </p:nvSpPr>
@@ -22156,25 +21872,113 @@
       </p:sp>
       <p:sp>
         <p:nvSpPr>
-          <p:cNvPr id="6" name="Shape 4"/>
+          <p:cNvPr id="6" name="Text 4"/>
           <p:cNvSpPr/>
           <p:nvPr/>
         </p:nvSpPr>
         <p:spPr>
           <a:xfrm>
-            <a:off x="2553295" y="3753296"/>
-            <a:ext cx="1736973" cy="369987"/>
-          </a:xfrm>
-          <a:prstGeom prst="roundRect">
-            <a:avLst>
-              <a:gd name="adj" fmla="val 76350"/>
-            </a:avLst>
-          </a:prstGeom>
-          <a:solidFill>
-            <a:srgbClr val="818B98"/>
-          </a:solidFill>
+            <a:off x="747713" y="3704927"/>
+            <a:ext cx="11001375" cy="833289"/>
+          </a:xfrm>
+          <a:prstGeom prst="rect">
+            <a:avLst/>
+          </a:prstGeom>
+          <a:noFill/>
           <a:ln/>
         </p:spPr>
+        <p:txBody>
+          <a:bodyPr wrap="square" lIns="0" tIns="0" rIns="0" bIns="0" rtlCol="0" anchor="t"/>
+          <a:lstStyle/>
+          <a:p>
+            <a:pPr algn="l" indent="0" marL="0">
+              <a:lnSpc>
+                <a:spcPct val="150000"/>
+              </a:lnSpc>
+              <a:buNone/>
+            </a:pPr>
+            <a:r>
+              <a:rPr lang="en-US" sz="2175" dirty="0">
+                <a:solidFill>
+                  <a:srgbClr val="1F2328"/>
+                </a:solidFill>
+                <a:latin typeface="Segoe UI" pitchFamily="34" charset="0"/>
+                <a:ea typeface="Segoe UI" pitchFamily="34" charset="-122"/>
+                <a:cs typeface="Segoe UI" pitchFamily="34" charset="-120"/>
+              </a:rPr>
+              <a:t>This slide uses </a:t>
+            </a:r>
+            <a:pPr algn="l" indent="0" marL="0">
+              <a:lnSpc>
+                <a:spcPct val="150000"/>
+              </a:lnSpc>
+              <a:buNone/>
+            </a:pPr>
+            <a:r>
+              <a:rPr lang="en-US" sz="1849" dirty="0">
+                <a:solidFill>
+                  <a:srgbClr val="1F2328"/>
+                </a:solidFill>
+                <a:latin typeface="Consolas" pitchFamily="34" charset="0"/>
+                <a:ea typeface="Consolas" pitchFamily="34" charset="-122"/>
+                <a:cs typeface="Consolas" pitchFamily="34" charset="-120"/>
+              </a:rPr>
+              <a:t>var(--brand)</a:t>
+            </a:r>
+            <a:pPr algn="l" indent="0" marL="0">
+              <a:lnSpc>
+                <a:spcPct val="150000"/>
+              </a:lnSpc>
+              <a:buNone/>
+            </a:pPr>
+            <a:r>
+              <a:rPr lang="en-US" sz="2175" dirty="0">
+                <a:solidFill>
+                  <a:srgbClr val="1F2328"/>
+                </a:solidFill>
+                <a:latin typeface="Segoe UI" pitchFamily="34" charset="0"/>
+                <a:ea typeface="Segoe UI" pitchFamily="34" charset="-122"/>
+                <a:cs typeface="Segoe UI" pitchFamily="34" charset="-120"/>
+              </a:rPr>
+              <a:t> and </a:t>
+            </a:r>
+            <a:pPr algn="l" indent="0" marL="0">
+              <a:lnSpc>
+                <a:spcPct val="150000"/>
+              </a:lnSpc>
+              <a:buNone/>
+            </a:pPr>
+            <a:r>
+              <a:rPr lang="en-US" sz="1849" dirty="0">
+                <a:solidFill>
+                  <a:srgbClr val="1F2328"/>
+                </a:solidFill>
+                <a:latin typeface="Consolas" pitchFamily="34" charset="0"/>
+                <a:ea typeface="Consolas" pitchFamily="34" charset="-122"/>
+                <a:cs typeface="Consolas" pitchFamily="34" charset="-120"/>
+              </a:rPr>
+              <a:t>var(--accent)</a:t>
+            </a:r>
+            <a:pPr algn="l" indent="0" marL="0">
+              <a:lnSpc>
+                <a:spcPct val="150000"/>
+              </a:lnSpc>
+              <a:buNone/>
+            </a:pPr>
+            <a:r>
+              <a:rPr lang="en-US" sz="2175" dirty="0">
+                <a:solidFill>
+                  <a:srgbClr val="1F2328"/>
+                </a:solidFill>
+                <a:latin typeface="Segoe UI" pitchFamily="34" charset="0"/>
+                <a:ea typeface="Segoe UI" pitchFamily="34" charset="-122"/>
+                <a:cs typeface="Segoe UI" pitchFamily="34" charset="-120"/>
+              </a:rPr>
+              <a:t>. Test whether pseudo-elements are captured in screenshots or ignored.</a:t>
+            </a:r>
+            <a:endParaRPr lang="en-US" sz="2175" dirty="0"/>
+          </a:p>
+        </p:txBody>
       </p:sp>
       <p:sp>
         <p:nvSpPr>
@@ -22184,8 +21988,8 @@
         </p:nvSpPr>
         <p:spPr>
           <a:xfrm>
-            <a:off x="2553295" y="3753296"/>
-            <a:ext cx="1736973" cy="369987"/>
+            <a:off x="747713" y="4690616"/>
+            <a:ext cx="11001375" cy="418951"/>
           </a:xfrm>
           <a:prstGeom prst="rect">
             <a:avLst/>
@@ -22194,12 +21998,29 @@
           <a:ln/>
         </p:spPr>
         <p:txBody>
-          <a:bodyPr wrap="square" lIns="0" tIns="0" rIns="0" bIns="0" rtlCol="0" anchor="ctr"/>
-          <a:lstStyle/>
-          <a:p>
-            <a:pPr algn="ctr" indent="0" marL="0">
-              <a:lnSpc>
-                <a:spcPct val="100000"/>
+          <a:bodyPr wrap="square" lIns="0" tIns="0" rIns="0" bIns="0" rtlCol="0" anchor="t"/>
+          <a:lstStyle/>
+          <a:p>
+            <a:pPr algn="l" indent="0" marL="0">
+              <a:lnSpc>
+                <a:spcPct val="150000"/>
+              </a:lnSpc>
+              <a:buNone/>
+            </a:pPr>
+            <a:r>
+              <a:rPr lang="en-US" sz="2175" dirty="0">
+                <a:solidFill>
+                  <a:srgbClr val="1F2328"/>
+                </a:solidFill>
+                <a:latin typeface="Segoe UI" pitchFamily="34" charset="0"/>
+                <a:ea typeface="Segoe UI" pitchFamily="34" charset="-122"/>
+                <a:cs typeface="Segoe UI" pitchFamily="34" charset="-120"/>
+              </a:rPr>
+              <a:t>Text color specified with </a:t>
+            </a:r>
+            <a:pPr algn="l" indent="0" marL="0">
+              <a:lnSpc>
+                <a:spcPct val="150000"/>
               </a:lnSpc>
               <a:buNone/>
             </a:pPr>
@@ -22212,253 +22033,7 @@
                 <a:ea typeface="Consolas" pitchFamily="34" charset="-122"/>
                 <a:cs typeface="Consolas" pitchFamily="34" charset="-120"/>
               </a:rPr>
-              <a:t>var(--brand)</a:t>
-            </a:r>
-            <a:endParaRPr lang="en-US" sz="1849" dirty="0"/>
-          </a:p>
-        </p:txBody>
-      </p:sp>
-      <p:sp>
-        <p:nvSpPr>
-          <p:cNvPr id="8" name="Shape 6"/>
-          <p:cNvSpPr/>
-          <p:nvPr/>
-        </p:nvSpPr>
-        <p:spPr>
-          <a:xfrm>
-            <a:off x="4901208" y="3753296"/>
-            <a:ext cx="1866007" cy="369987"/>
-          </a:xfrm>
-          <a:prstGeom prst="roundRect">
-            <a:avLst>
-              <a:gd name="adj" fmla="val 76350"/>
-            </a:avLst>
-          </a:prstGeom>
-          <a:solidFill>
-            <a:srgbClr val="818B98"/>
-          </a:solidFill>
-          <a:ln/>
-        </p:spPr>
-      </p:sp>
-      <p:sp>
-        <p:nvSpPr>
-          <p:cNvPr id="9" name="Text 7"/>
-          <p:cNvSpPr/>
-          <p:nvPr/>
-        </p:nvSpPr>
-        <p:spPr>
-          <a:xfrm>
-            <a:off x="4901208" y="3753296"/>
-            <a:ext cx="1866007" cy="369987"/>
-          </a:xfrm>
-          <a:prstGeom prst="rect">
-            <a:avLst/>
-          </a:prstGeom>
-          <a:noFill/>
-          <a:ln/>
-        </p:spPr>
-        <p:txBody>
-          <a:bodyPr wrap="square" lIns="0" tIns="0" rIns="0" bIns="0" rtlCol="0" anchor="ctr"/>
-          <a:lstStyle/>
-          <a:p>
-            <a:pPr algn="ctr" indent="0" marL="0">
-              <a:lnSpc>
-                <a:spcPct val="100000"/>
-              </a:lnSpc>
-              <a:buNone/>
-            </a:pPr>
-            <a:r>
-              <a:rPr lang="en-US" sz="1849" dirty="0">
-                <a:solidFill>
-                  <a:srgbClr val="1F2328"/>
-                </a:solidFill>
-                <a:latin typeface="Consolas" pitchFamily="34" charset="0"/>
-                <a:ea typeface="Consolas" pitchFamily="34" charset="-122"/>
-                <a:cs typeface="Consolas" pitchFamily="34" charset="-120"/>
-              </a:rPr>
-              <a:t>var(--accent)</a:t>
-            </a:r>
-            <a:endParaRPr lang="en-US" sz="1849" dirty="0"/>
-          </a:p>
-        </p:txBody>
-      </p:sp>
-      <p:sp>
-        <p:nvSpPr>
-          <p:cNvPr id="10" name="Text 8"/>
-          <p:cNvSpPr/>
-          <p:nvPr/>
-        </p:nvSpPr>
-        <p:spPr>
-          <a:xfrm>
-            <a:off x="747713" y="3704927"/>
-            <a:ext cx="11001375" cy="833289"/>
-          </a:xfrm>
-          <a:prstGeom prst="rect">
-            <a:avLst/>
-          </a:prstGeom>
-          <a:noFill/>
-          <a:ln/>
-        </p:spPr>
-        <p:txBody>
-          <a:bodyPr wrap="square" lIns="0" tIns="0" rIns="0" bIns="0" rtlCol="0" anchor="t"/>
-          <a:lstStyle/>
-          <a:p>
-            <a:pPr algn="l" indent="0" marL="0">
-              <a:lnSpc>
-                <a:spcPct val="150000"/>
-              </a:lnSpc>
-              <a:buNone/>
-            </a:pPr>
-            <a:r>
-              <a:rPr lang="en-US" sz="2175" dirty="0">
-                <a:solidFill>
-                  <a:srgbClr val="1F2328"/>
-                </a:solidFill>
-                <a:latin typeface="Segoe UI" pitchFamily="34" charset="0"/>
-                <a:ea typeface="Segoe UI" pitchFamily="34" charset="-122"/>
-                <a:cs typeface="Segoe UI" pitchFamily="34" charset="-120"/>
-              </a:rPr>
-              <a:t>This slide uses </a:t>
-            </a:r>
-            <a:pPr algn="l" indent="0" marL="0">
-              <a:lnSpc>
-                <a:spcPct val="150000"/>
-              </a:lnSpc>
-              <a:buNone/>
-            </a:pPr>
-            <a:r>
-              <a:rPr lang="en-US" sz="2175" dirty="0">
-                <a:solidFill>
-                  <a:srgbClr val="1F2328"/>
-                </a:solidFill>
-                <a:latin typeface="Segoe UI" pitchFamily="34" charset="0"/>
-                <a:ea typeface="Segoe UI" pitchFamily="34" charset="-122"/>
-                <a:cs typeface="Segoe UI" pitchFamily="34" charset="-120"/>
-              </a:rPr>
-              <a:t> and </a:t>
-            </a:r>
-            <a:pPr algn="l" indent="0" marL="0">
-              <a:lnSpc>
-                <a:spcPct val="150000"/>
-              </a:lnSpc>
-              <a:buNone/>
-            </a:pPr>
-            <a:r>
-              <a:rPr lang="en-US" sz="2175" dirty="0">
-                <a:solidFill>
-                  <a:srgbClr val="1F2328"/>
-                </a:solidFill>
-                <a:latin typeface="Segoe UI" pitchFamily="34" charset="0"/>
-                <a:ea typeface="Segoe UI" pitchFamily="34" charset="-122"/>
-                <a:cs typeface="Segoe UI" pitchFamily="34" charset="-120"/>
-              </a:rPr>
-              <a:t>. Test whether pseudo-elements are captured in screenshots or ignored.</a:t>
-            </a:r>
-            <a:endParaRPr lang="en-US" sz="2175" dirty="0"/>
-          </a:p>
-        </p:txBody>
-      </p:sp>
-      <p:sp>
-        <p:nvSpPr>
-          <p:cNvPr id="11" name="Shape 9"/>
-          <p:cNvSpPr/>
-          <p:nvPr/>
-        </p:nvSpPr>
-        <p:spPr>
-          <a:xfrm>
-            <a:off x="3742730" y="4738985"/>
-            <a:ext cx="1478756" cy="369987"/>
-          </a:xfrm>
-          <a:prstGeom prst="roundRect">
-            <a:avLst>
-              <a:gd name="adj" fmla="val 76350"/>
-            </a:avLst>
-          </a:prstGeom>
-          <a:solidFill>
-            <a:srgbClr val="818B98"/>
-          </a:solidFill>
-          <a:ln/>
-        </p:spPr>
-      </p:sp>
-      <p:sp>
-        <p:nvSpPr>
-          <p:cNvPr id="12" name="Text 10"/>
-          <p:cNvSpPr/>
-          <p:nvPr/>
-        </p:nvSpPr>
-        <p:spPr>
-          <a:xfrm>
-            <a:off x="3742730" y="4738985"/>
-            <a:ext cx="1478756" cy="369987"/>
-          </a:xfrm>
-          <a:prstGeom prst="rect">
-            <a:avLst/>
-          </a:prstGeom>
-          <a:noFill/>
-          <a:ln/>
-        </p:spPr>
-        <p:txBody>
-          <a:bodyPr wrap="square" lIns="0" tIns="0" rIns="0" bIns="0" rtlCol="0" anchor="ctr"/>
-          <a:lstStyle/>
-          <a:p>
-            <a:pPr algn="ctr" indent="0" marL="0">
-              <a:lnSpc>
-                <a:spcPct val="100000"/>
-              </a:lnSpc>
-              <a:buNone/>
-            </a:pPr>
-            <a:r>
-              <a:rPr lang="en-US" sz="1849" dirty="0">
-                <a:solidFill>
-                  <a:srgbClr val="1F2328"/>
-                </a:solidFill>
-                <a:latin typeface="Consolas" pitchFamily="34" charset="0"/>
-                <a:ea typeface="Consolas" pitchFamily="34" charset="-122"/>
-                <a:cs typeface="Consolas" pitchFamily="34" charset="-120"/>
-              </a:rPr>
               <a:t>var(--ink)</a:t>
-            </a:r>
-            <a:endParaRPr lang="en-US" sz="1849" dirty="0"/>
-          </a:p>
-        </p:txBody>
-      </p:sp>
-      <p:sp>
-        <p:nvSpPr>
-          <p:cNvPr id="13" name="Text 11"/>
-          <p:cNvSpPr/>
-          <p:nvPr/>
-        </p:nvSpPr>
-        <p:spPr>
-          <a:xfrm>
-            <a:off x="747713" y="4690616"/>
-            <a:ext cx="11001375" cy="418951"/>
-          </a:xfrm>
-          <a:prstGeom prst="rect">
-            <a:avLst/>
-          </a:prstGeom>
-          <a:noFill/>
-          <a:ln/>
-        </p:spPr>
-        <p:txBody>
-          <a:bodyPr wrap="square" lIns="0" tIns="0" rIns="0" bIns="0" rtlCol="0" anchor="t"/>
-          <a:lstStyle/>
-          <a:p>
-            <a:pPr algn="l" indent="0" marL="0">
-              <a:lnSpc>
-                <a:spcPct val="150000"/>
-              </a:lnSpc>
-              <a:buNone/>
-            </a:pPr>
-            <a:r>
-              <a:rPr lang="en-US" sz="2175" dirty="0">
-                <a:solidFill>
-                  <a:srgbClr val="1F2328"/>
-                </a:solidFill>
-                <a:latin typeface="Segoe UI" pitchFamily="34" charset="0"/>
-                <a:ea typeface="Segoe UI" pitchFamily="34" charset="-122"/>
-                <a:cs typeface="Segoe UI" pitchFamily="34" charset="-120"/>
-              </a:rPr>
-              <a:t>Text color specified with </a:t>
             </a:r>
             <a:pPr algn="l" indent="0" marL="0">
               <a:lnSpc>
@@ -22648,36 +22223,14 @@
       </p:sp>
       <p:sp>
         <p:nvSpPr>
-          <p:cNvPr id="5" name="Shape 3"/>
+          <p:cNvPr id="5" name="Text 3"/>
           <p:cNvSpPr/>
           <p:nvPr/>
         </p:nvSpPr>
         <p:spPr>
           <a:xfrm>
-            <a:off x="2542877" y="3102769"/>
-            <a:ext cx="6513314" cy="369987"/>
-          </a:xfrm>
-          <a:prstGeom prst="roundRect">
-            <a:avLst>
-              <a:gd name="adj" fmla="val 76350"/>
-            </a:avLst>
-          </a:prstGeom>
-          <a:solidFill>
-            <a:srgbClr val="818B98"/>
-          </a:solidFill>
-          <a:ln/>
-        </p:spPr>
-      </p:sp>
-      <p:sp>
-        <p:nvSpPr>
-          <p:cNvPr id="6" name="Text 4"/>
-          <p:cNvSpPr/>
-          <p:nvPr/>
-        </p:nvSpPr>
-        <p:spPr>
-          <a:xfrm>
-            <a:off x="2542877" y="3102769"/>
-            <a:ext cx="6513314" cy="369987"/>
+            <a:off x="747713" y="3054400"/>
+            <a:ext cx="11001375" cy="837902"/>
           </a:xfrm>
           <a:prstGeom prst="rect">
             <a:avLst/>
@@ -22686,12 +22239,29 @@
           <a:ln/>
         </p:spPr>
         <p:txBody>
-          <a:bodyPr wrap="square" lIns="0" tIns="0" rIns="0" bIns="0" rtlCol="0" anchor="ctr"/>
-          <a:lstStyle/>
-          <a:p>
-            <a:pPr algn="ctr" indent="0" marL="0">
-              <a:lnSpc>
-                <a:spcPct val="100000"/>
+          <a:bodyPr wrap="square" lIns="0" tIns="0" rIns="0" bIns="0" rtlCol="0" anchor="t"/>
+          <a:lstStyle/>
+          <a:p>
+            <a:pPr algn="l" indent="0" marL="0">
+              <a:lnSpc>
+                <a:spcPct val="150000"/>
+              </a:lnSpc>
+              <a:buNone/>
+            </a:pPr>
+            <a:r>
+              <a:rPr lang="en-US" sz="2175" dirty="0">
+                <a:solidFill>
+                  <a:srgbClr val="1F2328"/>
+                </a:solidFill>
+                <a:latin typeface="Segoe UI" pitchFamily="34" charset="0"/>
+                <a:ea typeface="Segoe UI" pitchFamily="34" charset="-122"/>
+                <a:cs typeface="Segoe UI" pitchFamily="34" charset="-120"/>
+              </a:rPr>
+              <a:t>Background is </a:t>
+            </a:r>
+            <a:pPr algn="l" indent="0" marL="0">
+              <a:lnSpc>
+                <a:spcPct val="150000"/>
               </a:lnSpc>
               <a:buNone/>
             </a:pPr>
@@ -22700,62 +22270,35 @@
                 <a:solidFill>
                   <a:srgbClr val="1F2328"/>
                 </a:solidFill>
+                <a:highlight>
+                  <a:srgbClr val="D5E6F2"/>
+                </a:highlight>
                 <a:latin typeface="Consolas" pitchFamily="34" charset="0"/>
                 <a:ea typeface="Consolas" pitchFamily="34" charset="-122"/>
                 <a:cs typeface="Consolas" pitchFamily="34" charset="-120"/>
               </a:rPr>
               <a:t>linear-gradient(135deg, #f0f9ff 0%, #e0f2fe 100%)</a:t>
             </a:r>
-            <a:endParaRPr lang="en-US" sz="1849" dirty="0"/>
-          </a:p>
-        </p:txBody>
-      </p:sp>
-      <p:sp>
-        <p:nvSpPr>
-          <p:cNvPr id="7" name="Shape 5"/>
-          <p:cNvSpPr/>
-          <p:nvPr/>
-        </p:nvSpPr>
-        <p:spPr>
-          <a:xfrm>
-            <a:off x="747713" y="3521720"/>
-            <a:ext cx="4705945" cy="369987"/>
-          </a:xfrm>
-          <a:prstGeom prst="roundRect">
-            <a:avLst>
-              <a:gd name="adj" fmla="val 76350"/>
-            </a:avLst>
-          </a:prstGeom>
-          <a:solidFill>
-            <a:srgbClr val="818B98"/>
-          </a:solidFill>
-          <a:ln/>
-        </p:spPr>
-      </p:sp>
-      <p:sp>
-        <p:nvSpPr>
-          <p:cNvPr id="8" name="Text 6"/>
-          <p:cNvSpPr/>
-          <p:nvPr/>
-        </p:nvSpPr>
-        <p:spPr>
-          <a:xfrm>
-            <a:off x="747713" y="3521720"/>
-            <a:ext cx="4705945" cy="369987"/>
-          </a:xfrm>
-          <a:prstGeom prst="rect">
-            <a:avLst/>
-          </a:prstGeom>
-          <a:noFill/>
-          <a:ln/>
-        </p:spPr>
-        <p:txBody>
-          <a:bodyPr wrap="square" lIns="0" tIns="0" rIns="0" bIns="0" rtlCol="0" anchor="ctr"/>
-          <a:lstStyle/>
-          <a:p>
-            <a:pPr algn="ctr" indent="0" marL="0">
-              <a:lnSpc>
-                <a:spcPct val="100000"/>
+            <a:pPr algn="l" indent="0" marL="0">
+              <a:lnSpc>
+                <a:spcPct val="150000"/>
+              </a:lnSpc>
+              <a:buNone/>
+            </a:pPr>
+            <a:r>
+              <a:rPr lang="en-US" sz="2175" dirty="0">
+                <a:solidFill>
+                  <a:srgbClr val="1F2328"/>
+                </a:solidFill>
+                <a:latin typeface="Segoe UI" pitchFamily="34" charset="0"/>
+                <a:ea typeface="Segoe UI" pitchFamily="34" charset="-122"/>
+                <a:cs typeface="Segoe UI" pitchFamily="34" charset="-120"/>
+              </a:rPr>
+              <a:t>. Heading h2 has </a:t>
+            </a:r>
+            <a:pPr algn="l" indent="0" marL="0">
+              <a:lnSpc>
+                <a:spcPct val="150000"/>
               </a:lnSpc>
               <a:buNone/>
             </a:pPr>
@@ -22764,37 +22307,15 @@
                 <a:solidFill>
                   <a:srgbClr val="1F2328"/>
                 </a:solidFill>
+                <a:highlight>
+                  <a:srgbClr val="D5E6F2"/>
+                </a:highlight>
                 <a:latin typeface="Consolas" pitchFamily="34" charset="0"/>
                 <a:ea typeface="Consolas" pitchFamily="34" charset="-122"/>
                 <a:cs typeface="Consolas" pitchFamily="34" charset="-120"/>
               </a:rPr>
               <a:t>border-left: 5px solid var(--brand)</a:t>
             </a:r>
-            <a:endParaRPr lang="en-US" sz="1849" dirty="0"/>
-          </a:p>
-        </p:txBody>
-      </p:sp>
-      <p:sp>
-        <p:nvSpPr>
-          <p:cNvPr id="9" name="Text 7"/>
-          <p:cNvSpPr/>
-          <p:nvPr/>
-        </p:nvSpPr>
-        <p:spPr>
-          <a:xfrm>
-            <a:off x="5453658" y="3054400"/>
-            <a:ext cx="6295430" cy="837902"/>
-          </a:xfrm>
-          <a:prstGeom prst="rect">
-            <a:avLst/>
-          </a:prstGeom>
-          <a:noFill/>
-          <a:ln/>
-        </p:spPr>
-        <p:txBody>
-          <a:bodyPr wrap="square" lIns="0" tIns="0" rIns="0" bIns="0" rtlCol="0" anchor="t"/>
-          <a:lstStyle/>
-          <a:p>
             <a:pPr algn="l" indent="0" marL="0">
               <a:lnSpc>
                 <a:spcPct val="150000"/>
@@ -22810,40 +22331,6 @@
                 <a:ea typeface="Segoe UI" pitchFamily="34" charset="-122"/>
                 <a:cs typeface="Segoe UI" pitchFamily="34" charset="-120"/>
               </a:rPr>
-              <a:t>Background is </a:t>
-            </a:r>
-            <a:pPr algn="l" indent="0" marL="0">
-              <a:lnSpc>
-                <a:spcPct val="150000"/>
-              </a:lnSpc>
-              <a:buNone/>
-            </a:pPr>
-            <a:r>
-              <a:rPr lang="en-US" sz="2175" dirty="0">
-                <a:solidFill>
-                  <a:srgbClr val="1F2328"/>
-                </a:solidFill>
-                <a:latin typeface="Segoe UI" pitchFamily="34" charset="0"/>
-                <a:ea typeface="Segoe UI" pitchFamily="34" charset="-122"/>
-                <a:cs typeface="Segoe UI" pitchFamily="34" charset="-120"/>
-              </a:rPr>
-              <a:t>. Heading h2 has </a:t>
-            </a:r>
-            <a:pPr algn="l" indent="0" marL="0">
-              <a:lnSpc>
-                <a:spcPct val="150000"/>
-              </a:lnSpc>
-              <a:buNone/>
-            </a:pPr>
-            <a:r>
-              <a:rPr lang="en-US" sz="2175" dirty="0">
-                <a:solidFill>
-                  <a:srgbClr val="1F2328"/>
-                </a:solidFill>
-                <a:latin typeface="Segoe UI" pitchFamily="34" charset="0"/>
-                <a:ea typeface="Segoe UI" pitchFamily="34" charset="-122"/>
-                <a:cs typeface="Segoe UI" pitchFamily="34" charset="-120"/>
-              </a:rPr>
               <a:t> applied.</a:t>
             </a:r>
             <a:endParaRPr lang="en-US" sz="2175" dirty="0"/>
@@ -22852,7 +22339,7 @@
       </p:sp>
       <p:sp>
         <p:nvSpPr>
-          <p:cNvPr id="10" name="Text 8"/>
+          <p:cNvPr id="6" name="Text 4"/>
           <p:cNvSpPr/>
           <p:nvPr/>
         </p:nvSpPr>
@@ -23011,36 +22498,14 @@
       </p:sp>
       <p:sp>
         <p:nvSpPr>
-          <p:cNvPr id="3" name="Shape 1"/>
+          <p:cNvPr id="3" name="Text 1"/>
           <p:cNvSpPr/>
           <p:nvPr/>
         </p:nvSpPr>
         <p:spPr>
           <a:xfrm>
-            <a:off x="747713" y="2910334"/>
-            <a:ext cx="10540752" cy="788938"/>
-          </a:xfrm>
-          <a:prstGeom prst="roundRect">
-            <a:avLst>
-              <a:gd name="adj" fmla="val 16792"/>
-            </a:avLst>
-          </a:prstGeom>
-          <a:solidFill>
-            <a:srgbClr val="818B98"/>
-          </a:solidFill>
-          <a:ln/>
-        </p:spPr>
-      </p:sp>
-      <p:sp>
-        <p:nvSpPr>
-          <p:cNvPr id="4" name="Text 2"/>
-          <p:cNvSpPr/>
-          <p:nvPr/>
-        </p:nvSpPr>
-        <p:spPr>
-          <a:xfrm>
-            <a:off x="747713" y="2910334"/>
-            <a:ext cx="10540752" cy="788938"/>
+            <a:off x="747713" y="2861965"/>
+            <a:ext cx="11001375" cy="837902"/>
           </a:xfrm>
           <a:prstGeom prst="rect">
             <a:avLst/>
@@ -23049,12 +22514,66 @@
           <a:ln/>
         </p:spPr>
         <p:txBody>
-          <a:bodyPr wrap="square" lIns="0" tIns="0" rIns="0" bIns="0" rtlCol="0" anchor="ctr"/>
-          <a:lstStyle/>
-          <a:p>
-            <a:pPr algn="ctr" indent="0" marL="0">
-              <a:lnSpc>
-                <a:spcPct val="100000"/>
+          <a:bodyPr wrap="square" lIns="0" tIns="0" rIns="0" bIns="0" rtlCol="0" anchor="t"/>
+          <a:lstStyle/>
+          <a:p>
+            <a:pPr algn="l" indent="0" marL="0">
+              <a:lnSpc>
+                <a:spcPct val="150000"/>
+              </a:lnSpc>
+              <a:buNone/>
+            </a:pPr>
+            <a:r>
+              <a:rPr lang="en-US" sz="2175" dirty="0">
+                <a:solidFill>
+                  <a:srgbClr val="1F2328"/>
+                </a:solidFill>
+                <a:latin typeface="Segoe UI" pitchFamily="34" charset="0"/>
+                <a:ea typeface="Segoe UI" pitchFamily="34" charset="-122"/>
+                <a:cs typeface="Segoe UI" pitchFamily="34" charset="-120"/>
+              </a:rPr>
+              <a:t>This text has a </a:t>
+            </a:r>
+            <a:pPr algn="l" indent="0" marL="0">
+              <a:lnSpc>
+                <a:spcPct val="150000"/>
+              </a:lnSpc>
+              <a:buNone/>
+            </a:pPr>
+            <a:r>
+              <a:rPr lang="en-US" sz="2175" b="1" dirty="0">
+                <a:solidFill>
+                  <a:srgbClr val="1F2328"/>
+                </a:solidFill>
+                <a:highlight>
+                  <a:srgbClr val="FFF2A8"/>
+                </a:highlight>
+                <a:latin typeface="Segoe UI" pitchFamily="34" charset="0"/>
+                <a:ea typeface="Segoe UI" pitchFamily="34" charset="-122"/>
+                <a:cs typeface="Segoe UI" pitchFamily="34" charset="-120"/>
+              </a:rPr>
+              <a:t>marker-style highlight</a:t>
+            </a:r>
+            <a:pPr algn="l" indent="0" marL="0">
+              <a:lnSpc>
+                <a:spcPct val="150000"/>
+              </a:lnSpc>
+              <a:buNone/>
+            </a:pPr>
+            <a:r>
+              <a:rPr lang="en-US" sz="2175" dirty="0">
+                <a:solidFill>
+                  <a:srgbClr val="1F2328"/>
+                </a:solidFill>
+                <a:latin typeface="Segoe UI" pitchFamily="34" charset="0"/>
+                <a:ea typeface="Segoe UI" pitchFamily="34" charset="-122"/>
+                <a:cs typeface="Segoe UI" pitchFamily="34" charset="-120"/>
+              </a:rPr>
+              <a:t> applied. The style </a:t>
+            </a:r>
+            <a:pPr algn="l" indent="0" marL="0">
+              <a:lnSpc>
+                <a:spcPct val="150000"/>
               </a:lnSpc>
               <a:buNone/>
             </a:pPr>
@@ -23063,37 +22582,15 @@
                 <a:solidFill>
                   <a:srgbClr val="1F2328"/>
                 </a:solidFill>
+                <a:highlight>
+                  <a:srgbClr val="F0F1F3"/>
+                </a:highlight>
                 <a:latin typeface="Consolas" pitchFamily="34" charset="0"/>
                 <a:ea typeface="Consolas" pitchFamily="34" charset="-122"/>
                 <a:cs typeface="Consolas" pitchFamily="34" charset="-120"/>
               </a:rPr>
               <a:t>linear-gradient(transparent 62%, #fff2a8 62%)</a:t>
             </a:r>
-            <a:endParaRPr lang="en-US" sz="1849" dirty="0"/>
-          </a:p>
-        </p:txBody>
-      </p:sp>
-      <p:sp>
-        <p:nvSpPr>
-          <p:cNvPr id="5" name="Text 3"/>
-          <p:cNvSpPr/>
-          <p:nvPr/>
-        </p:nvSpPr>
-        <p:spPr>
-          <a:xfrm>
-            <a:off x="11288464" y="2861965"/>
-            <a:ext cx="155823" cy="837902"/>
-          </a:xfrm>
-          <a:prstGeom prst="rect">
-            <a:avLst/>
-          </a:prstGeom>
-          <a:noFill/>
-          <a:ln/>
-        </p:spPr>
-        <p:txBody>
-          <a:bodyPr wrap="square" lIns="0" tIns="0" rIns="0" bIns="0" rtlCol="0" anchor="t"/>
-          <a:lstStyle/>
-          <a:p>
             <a:pPr algn="l" indent="0" marL="0">
               <a:lnSpc>
                 <a:spcPct val="150000"/>
@@ -23109,60 +22606,6 @@
                 <a:ea typeface="Segoe UI" pitchFamily="34" charset="-122"/>
                 <a:cs typeface="Segoe UI" pitchFamily="34" charset="-120"/>
               </a:rPr>
-              <a:t>This text has a </a:t>
-            </a:r>
-            <a:pPr algn="l" indent="0" marL="0">
-              <a:lnSpc>
-                <a:spcPct val="150000"/>
-              </a:lnSpc>
-              <a:buNone/>
-            </a:pPr>
-            <a:r>
-              <a:rPr lang="en-US" sz="2175" b="1" dirty="0">
-                <a:solidFill>
-                  <a:srgbClr val="1F2328"/>
-                </a:solidFill>
-                <a:highlight>
-                  <a:srgbClr val="FFF2A8"/>
-                </a:highlight>
-                <a:latin typeface="Segoe UI" pitchFamily="34" charset="0"/>
-                <a:ea typeface="Segoe UI" pitchFamily="34" charset="-122"/>
-                <a:cs typeface="Segoe UI" pitchFamily="34" charset="-120"/>
-              </a:rPr>
-              <a:t>marker-style highlight</a:t>
-            </a:r>
-            <a:pPr algn="l" indent="0" marL="0">
-              <a:lnSpc>
-                <a:spcPct val="150000"/>
-              </a:lnSpc>
-              <a:buNone/>
-            </a:pPr>
-            <a:r>
-              <a:rPr lang="en-US" sz="2175" dirty="0">
-                <a:solidFill>
-                  <a:srgbClr val="1F2328"/>
-                </a:solidFill>
-                <a:latin typeface="Segoe UI" pitchFamily="34" charset="0"/>
-                <a:ea typeface="Segoe UI" pitchFamily="34" charset="-122"/>
-                <a:cs typeface="Segoe UI" pitchFamily="34" charset="-120"/>
-              </a:rPr>
-              <a:t> applied. The style </a:t>
-            </a:r>
-            <a:pPr algn="l" indent="0" marL="0">
-              <a:lnSpc>
-                <a:spcPct val="150000"/>
-              </a:lnSpc>
-              <a:buNone/>
-            </a:pPr>
-            <a:r>
-              <a:rPr lang="en-US" sz="2175" dirty="0">
-                <a:solidFill>
-                  <a:srgbClr val="1F2328"/>
-                </a:solidFill>
-                <a:latin typeface="Segoe UI" pitchFamily="34" charset="0"/>
-                <a:ea typeface="Segoe UI" pitchFamily="34" charset="-122"/>
-                <a:cs typeface="Segoe UI" pitchFamily="34" charset="-120"/>
-              </a:rPr>
               <a:t> colours only the bottom 38% yellow.</a:t>
             </a:r>
             <a:endParaRPr lang="en-US" sz="2175" dirty="0"/>
@@ -23171,7 +22614,7 @@
       </p:sp>
       <p:sp>
         <p:nvSpPr>
-          <p:cNvPr id="6" name="Text 4"/>
+          <p:cNvPr id="4" name="Text 2"/>
           <p:cNvSpPr/>
           <p:nvPr/>
         </p:nvSpPr>
@@ -28851,36 +28294,14 @@
       </p:sp>
       <p:sp>
         <p:nvSpPr>
-          <p:cNvPr id="3" name="Shape 1"/>
+          <p:cNvPr id="3" name="Text 1"/>
           <p:cNvSpPr/>
           <p:nvPr/>
         </p:nvSpPr>
         <p:spPr>
           <a:xfrm>
-            <a:off x="747713" y="3195935"/>
-            <a:ext cx="5996880" cy="369987"/>
-          </a:xfrm>
-          <a:prstGeom prst="roundRect">
-            <a:avLst>
-              <a:gd name="adj" fmla="val 76350"/>
-            </a:avLst>
-          </a:prstGeom>
-          <a:solidFill>
-            <a:srgbClr val="818B98"/>
-          </a:solidFill>
-          <a:ln/>
-        </p:spPr>
-      </p:sp>
-      <p:sp>
-        <p:nvSpPr>
-          <p:cNvPr id="4" name="Text 2"/>
-          <p:cNvSpPr/>
-          <p:nvPr/>
-        </p:nvSpPr>
-        <p:spPr>
-          <a:xfrm>
-            <a:off x="747713" y="3195935"/>
-            <a:ext cx="5996880" cy="369987"/>
+            <a:off x="747713" y="3147566"/>
+            <a:ext cx="11001375" cy="833289"/>
           </a:xfrm>
           <a:prstGeom prst="rect">
             <a:avLst/>
@@ -28889,12 +28310,12 @@
           <a:ln/>
         </p:spPr>
         <p:txBody>
-          <a:bodyPr wrap="square" lIns="0" tIns="0" rIns="0" bIns="0" rtlCol="0" anchor="ctr"/>
-          <a:lstStyle/>
-          <a:p>
-            <a:pPr algn="ctr" indent="0" marL="0">
-              <a:lnSpc>
-                <a:spcPct val="100000"/>
+          <a:bodyPr wrap="square" lIns="0" tIns="0" rIns="0" bIns="0" rtlCol="0" anchor="t"/>
+          <a:lstStyle/>
+          <a:p>
+            <a:pPr algn="l" indent="0" marL="0">
+              <a:lnSpc>
+                <a:spcPct val="150000"/>
               </a:lnSpc>
               <a:buNone/>
             </a:pPr>
@@ -28909,55 +28330,30 @@
               </a:rPr>
               <a:t>![bg cover blur:5px brightness:0.3 grayscale]</a:t>
             </a:r>
+            <a:pPr algn="l" indent="0" marL="0">
+              <a:lnSpc>
+                <a:spcPct val="150000"/>
+              </a:lnSpc>
+              <a:buNone/>
+            </a:pPr>
+            <a:r>
+              <a:rPr lang="en-US" sz="2175" b="1" dirty="0">
+                <a:solidFill>
+                  <a:srgbClr val="FFFFFF"/>
+                </a:solidFill>
+                <a:latin typeface="Segoe UI" pitchFamily="34" charset="0"/>
+                <a:ea typeface="Segoe UI" pitchFamily="34" charset="-122"/>
+                <a:cs typeface="Segoe UI" pitchFamily="34" charset="-120"/>
+              </a:rPr>
+              <a:t> — Multiple filters applied simultaneously.</a:t>
+            </a:r>
             <a:endParaRPr lang="en-US" sz="1849" dirty="0"/>
           </a:p>
         </p:txBody>
       </p:sp>
       <p:sp>
         <p:nvSpPr>
-          <p:cNvPr id="5" name="Text 3"/>
-          <p:cNvSpPr/>
-          <p:nvPr/>
-        </p:nvSpPr>
-        <p:spPr>
-          <a:xfrm>
-            <a:off x="6744593" y="3147566"/>
-            <a:ext cx="5004495" cy="833289"/>
-          </a:xfrm>
-          <a:prstGeom prst="rect">
-            <a:avLst/>
-          </a:prstGeom>
-          <a:noFill/>
-          <a:ln/>
-        </p:spPr>
-        <p:txBody>
-          <a:bodyPr wrap="square" lIns="0" tIns="0" rIns="0" bIns="0" rtlCol="0" anchor="t"/>
-          <a:lstStyle/>
-          <a:p>
-            <a:pPr algn="l" indent="0" marL="0">
-              <a:lnSpc>
-                <a:spcPct val="150000"/>
-              </a:lnSpc>
-              <a:buNone/>
-            </a:pPr>
-            <a:r>
-              <a:rPr lang="en-US" sz="2175" b="1" dirty="0">
-                <a:solidFill>
-                  <a:srgbClr val="FFFFFF"/>
-                </a:solidFill>
-                <a:latin typeface="Segoe UI" pitchFamily="34" charset="0"/>
-                <a:ea typeface="Segoe UI" pitchFamily="34" charset="-122"/>
-                <a:cs typeface="Segoe UI" pitchFamily="34" charset="-120"/>
-              </a:rPr>
-              <a:t> — Multiple filters applied simultaneously.</a:t>
-            </a:r>
-            <a:endParaRPr lang="en-US" sz="2175" dirty="0"/>
-          </a:p>
-        </p:txBody>
-      </p:sp>
-      <p:sp>
-        <p:nvSpPr>
-          <p:cNvPr id="6" name="Text 4"/>
+          <p:cNvPr id="4" name="Text 2"/>
           <p:cNvSpPr/>
           <p:nvPr/>
         </p:nvSpPr>
@@ -29097,36 +28493,14 @@
       </p:sp>
       <p:sp>
         <p:nvSpPr>
-          <p:cNvPr id="4" name="Shape 1"/>
+          <p:cNvPr id="4" name="Text 1"/>
           <p:cNvSpPr/>
           <p:nvPr/>
         </p:nvSpPr>
         <p:spPr>
           <a:xfrm>
-            <a:off x="747713" y="2712541"/>
-            <a:ext cx="2124224" cy="369987"/>
-          </a:xfrm>
-          <a:prstGeom prst="roundRect">
-            <a:avLst>
-              <a:gd name="adj" fmla="val 76350"/>
-            </a:avLst>
-          </a:prstGeom>
-          <a:solidFill>
-            <a:srgbClr val="818B98"/>
-          </a:solidFill>
-          <a:ln/>
-        </p:spPr>
-      </p:sp>
-      <p:sp>
-        <p:nvSpPr>
-          <p:cNvPr id="5" name="Text 2"/>
-          <p:cNvSpPr/>
-          <p:nvPr/>
-        </p:nvSpPr>
-        <p:spPr>
-          <a:xfrm>
-            <a:off x="747713" y="2712541"/>
-            <a:ext cx="2124224" cy="369987"/>
+            <a:off x="747713" y="2664172"/>
+            <a:ext cx="7343775" cy="833289"/>
           </a:xfrm>
           <a:prstGeom prst="rect">
             <a:avLst/>
@@ -29135,12 +28509,12 @@
           <a:ln/>
         </p:spPr>
         <p:txBody>
-          <a:bodyPr wrap="square" lIns="0" tIns="0" rIns="0" bIns="0" rtlCol="0" anchor="ctr"/>
-          <a:lstStyle/>
-          <a:p>
-            <a:pPr algn="ctr" indent="0" marL="0">
-              <a:lnSpc>
-                <a:spcPct val="100000"/>
+          <a:bodyPr wrap="square" lIns="0" tIns="0" rIns="0" bIns="0" rtlCol="0" anchor="t"/>
+          <a:lstStyle/>
+          <a:p>
+            <a:pPr algn="l" indent="0" marL="0">
+              <a:lnSpc>
+                <a:spcPct val="150000"/>
               </a:lnSpc>
               <a:buNone/>
             </a:pPr>
@@ -29155,55 +28529,30 @@
               </a:rPr>
               <a:t>![bg right:30%]</a:t>
             </a:r>
+            <a:pPr algn="l" indent="0" marL="0">
+              <a:lnSpc>
+                <a:spcPct val="150000"/>
+              </a:lnSpc>
+              <a:buNone/>
+            </a:pPr>
+            <a:r>
+              <a:rPr lang="en-US" sz="2175" b="1" dirty="0">
+                <a:solidFill>
+                  <a:srgbClr val="1F2328"/>
+                </a:solidFill>
+                <a:latin typeface="Segoe UI" pitchFamily="34" charset="0"/>
+                <a:ea typeface="Segoe UI" pitchFamily="34" charset="-122"/>
+                <a:cs typeface="Segoe UI" pitchFamily="34" charset="-120"/>
+              </a:rPr>
+              <a:t> — Image occupies right 30%, content uses left 70%.</a:t>
+            </a:r>
             <a:endParaRPr lang="en-US" sz="1849" dirty="0"/>
           </a:p>
         </p:txBody>
       </p:sp>
       <p:sp>
         <p:nvSpPr>
-          <p:cNvPr id="6" name="Text 3"/>
-          <p:cNvSpPr/>
-          <p:nvPr/>
-        </p:nvSpPr>
-        <p:spPr>
-          <a:xfrm>
-            <a:off x="2871936" y="2664172"/>
-            <a:ext cx="5219551" cy="833289"/>
-          </a:xfrm>
-          <a:prstGeom prst="rect">
-            <a:avLst/>
-          </a:prstGeom>
-          <a:noFill/>
-          <a:ln/>
-        </p:spPr>
-        <p:txBody>
-          <a:bodyPr wrap="square" lIns="0" tIns="0" rIns="0" bIns="0" rtlCol="0" anchor="t"/>
-          <a:lstStyle/>
-          <a:p>
-            <a:pPr algn="l" indent="0" marL="0">
-              <a:lnSpc>
-                <a:spcPct val="150000"/>
-              </a:lnSpc>
-              <a:buNone/>
-            </a:pPr>
-            <a:r>
-              <a:rPr lang="en-US" sz="2175" b="1" dirty="0">
-                <a:solidFill>
-                  <a:srgbClr val="1F2328"/>
-                </a:solidFill>
-                <a:latin typeface="Segoe UI" pitchFamily="34" charset="0"/>
-                <a:ea typeface="Segoe UI" pitchFamily="34" charset="-122"/>
-                <a:cs typeface="Segoe UI" pitchFamily="34" charset="-120"/>
-              </a:rPr>
-              <a:t> — Image occupies right 30%, content uses left 70%.</a:t>
-            </a:r>
-            <a:endParaRPr lang="en-US" sz="2175" dirty="0"/>
-          </a:p>
-        </p:txBody>
-      </p:sp>
-      <p:sp>
-        <p:nvSpPr>
-          <p:cNvPr id="7" name="Text 4"/>
+          <p:cNvPr id="5" name="Text 2"/>
           <p:cNvSpPr/>
           <p:nvPr/>
         </p:nvSpPr>
@@ -30576,36 +29925,14 @@
       </p:sp>
       <p:sp>
         <p:nvSpPr>
-          <p:cNvPr id="5" name="Shape 3"/>
+          <p:cNvPr id="5" name="Text 3"/>
           <p:cNvSpPr/>
           <p:nvPr/>
         </p:nvSpPr>
         <p:spPr>
           <a:xfrm>
-            <a:off x="3620839" y="3369766"/>
-            <a:ext cx="677614" cy="400050"/>
-          </a:xfrm>
-          <a:prstGeom prst="roundRect">
-            <a:avLst>
-              <a:gd name="adj" fmla="val 43537"/>
-            </a:avLst>
-          </a:prstGeom>
-          <a:solidFill>
-            <a:srgbClr val="F1C40F"/>
-          </a:solidFill>
-          <a:ln/>
-        </p:spPr>
-      </p:sp>
-      <p:sp>
-        <p:nvSpPr>
-          <p:cNvPr id="6" name="Text 4"/>
-          <p:cNvSpPr/>
-          <p:nvPr/>
-        </p:nvSpPr>
-        <p:spPr>
-          <a:xfrm>
-            <a:off x="3620839" y="3369766"/>
-            <a:ext cx="677614" cy="400050"/>
+            <a:off x="747713" y="3369766"/>
+            <a:ext cx="11001375" cy="1243013"/>
           </a:xfrm>
           <a:prstGeom prst="rect">
             <a:avLst/>
@@ -30614,12 +29941,29 @@
           <a:ln/>
         </p:spPr>
         <p:txBody>
-          <a:bodyPr wrap="square" lIns="0" tIns="0" rIns="0" bIns="0" rtlCol="0" anchor="ctr"/>
-          <a:lstStyle/>
-          <a:p>
-            <a:pPr algn="ctr" indent="0" marL="0">
-              <a:lnSpc>
-                <a:spcPct val="100000"/>
+          <a:bodyPr wrap="square" lIns="0" tIns="0" rIns="0" bIns="0" rtlCol="0" anchor="t"/>
+          <a:lstStyle/>
+          <a:p>
+            <a:pPr algn="l" indent="0" marL="0">
+              <a:lnSpc>
+                <a:spcPct val="150000"/>
+              </a:lnSpc>
+              <a:buNone/>
+            </a:pPr>
+            <a:r>
+              <a:rPr lang="en-US" sz="2175" dirty="0">
+                <a:solidFill>
+                  <a:srgbClr val="1F2328"/>
+                </a:solidFill>
+                <a:latin typeface="Segoe UI" pitchFamily="34" charset="0"/>
+                <a:ea typeface="Segoe UI" pitchFamily="34" charset="-122"/>
+                <a:cs typeface="Segoe UI" pitchFamily="34" charset="-120"/>
+              </a:rPr>
+              <a:t>Text should start to the </a:t>
+            </a:r>
+            <a:pPr algn="l" indent="0" marL="0">
+              <a:lnSpc>
+                <a:spcPct val="150000"/>
               </a:lnSpc>
               <a:buNone/>
             </a:pPr>
@@ -30628,36 +29972,40 @@
                 <a:solidFill>
                   <a:srgbClr val="1F2328"/>
                 </a:solidFill>
+                <a:highlight>
+                  <a:srgbClr val="F1C40F"/>
+                </a:highlight>
                 <a:latin typeface="Segoe UI" pitchFamily="34" charset="0"/>
                 <a:ea typeface="Segoe UI" pitchFamily="34" charset="-122"/>
                 <a:cs typeface="Segoe UI" pitchFamily="34" charset="-120"/>
               </a:rPr>
               <a:t>right</a:t>
             </a:r>
+            <a:pPr algn="l" indent="0" marL="0">
+              <a:lnSpc>
+                <a:spcPct val="150000"/>
+              </a:lnSpc>
+              <a:buNone/>
+            </a:pPr>
+            <a:r>
+              <a:rPr lang="en-US" sz="2175" dirty="0">
+                <a:solidFill>
+                  <a:srgbClr val="1F2328"/>
+                </a:solidFill>
+                <a:latin typeface="Segoe UI" pitchFamily="34" charset="0"/>
+                <a:ea typeface="Segoe UI" pitchFamily="34" charset="-122"/>
+                <a:cs typeface="Segoe UI" pitchFamily="34" charset="-120"/>
+              </a:rPr>
+              <a:t> of the border-left bar.</a:t>
+            </a:r>
+            <a:pPr algn="l" indent="0" marL="0">
+              <a:lnSpc>
+                <a:spcPct val="150000"/>
+              </a:lnSpc>
+              <a:buNone/>
+            </a:pPr>
             <a:endParaRPr lang="en-US" sz="2175" dirty="0"/>
           </a:p>
-        </p:txBody>
-      </p:sp>
-      <p:sp>
-        <p:nvSpPr>
-          <p:cNvPr id="7" name="Text 5"/>
-          <p:cNvSpPr/>
-          <p:nvPr/>
-        </p:nvSpPr>
-        <p:spPr>
-          <a:xfrm>
-            <a:off x="747713" y="3369766"/>
-            <a:ext cx="11001375" cy="1243013"/>
-          </a:xfrm>
-          <a:prstGeom prst="rect">
-            <a:avLst/>
-          </a:prstGeom>
-          <a:noFill/>
-          <a:ln/>
-        </p:spPr>
-        <p:txBody>
-          <a:bodyPr wrap="square" lIns="0" tIns="0" rIns="0" bIns="0" rtlCol="0" anchor="t"/>
-          <a:lstStyle/>
           <a:p>
             <a:pPr algn="l" indent="0" marL="0">
               <a:lnSpc>
@@ -30674,7 +30022,7 @@
                 <a:ea typeface="Segoe UI" pitchFamily="34" charset="-122"/>
                 <a:cs typeface="Segoe UI" pitchFamily="34" charset="-120"/>
               </a:rPr>
-              <a:t>Text should start to the </a:t>
+              <a:t>Developer: </a:t>
             </a:r>
             <a:pPr algn="l" indent="0" marL="0">
               <a:lnSpc>
@@ -30691,7 +30039,24 @@
                 <a:ea typeface="Segoe UI" pitchFamily="34" charset="-122"/>
                 <a:cs typeface="Segoe UI" pitchFamily="34" charset="-120"/>
               </a:rPr>
-              <a:t> of the border-left bar.</a:t>
+              <a:t>🧑‍💻</a:t>
+            </a:r>
+            <a:pPr algn="l" indent="0" marL="0">
+              <a:lnSpc>
+                <a:spcPct val="150000"/>
+              </a:lnSpc>
+              <a:buNone/>
+            </a:pPr>
+            <a:r>
+              <a:rPr lang="en-US" sz="2175" dirty="0">
+                <a:solidFill>
+                  <a:srgbClr val="1F2328"/>
+                </a:solidFill>
+                <a:latin typeface="Segoe UI" pitchFamily="34" charset="0"/>
+                <a:ea typeface="Segoe UI" pitchFamily="34" charset="-122"/>
+                <a:cs typeface="Segoe UI" pitchFamily="34" charset="-120"/>
+              </a:rPr>
+              <a:t> (ZWJ composed emoji)</a:t>
             </a:r>
             <a:pPr algn="l" indent="0" marL="0">
               <a:lnSpc>
@@ -30717,7 +30082,7 @@
                 <a:ea typeface="Segoe UI" pitchFamily="34" charset="-122"/>
                 <a:cs typeface="Segoe UI" pitchFamily="34" charset="-120"/>
               </a:rPr>
-              <a:t>Developer: </a:t>
+              <a:t>Family: </a:t>
             </a:r>
             <a:pPr algn="l" indent="0" marL="0">
               <a:lnSpc>
@@ -30734,7 +30099,7 @@
                 <a:ea typeface="Segoe UI" pitchFamily="34" charset="-122"/>
                 <a:cs typeface="Segoe UI" pitchFamily="34" charset="-120"/>
               </a:rPr>
-              <a:t>🧑‍💻</a:t>
+              <a:t>👨‍👩‍👧‍👦</a:t>
             </a:r>
             <a:pPr algn="l" indent="0" marL="0">
               <a:lnSpc>
@@ -30751,75 +30116,15 @@
                 <a:ea typeface="Segoe UI" pitchFamily="34" charset="-122"/>
                 <a:cs typeface="Segoe UI" pitchFamily="34" charset="-120"/>
               </a:rPr>
-              <a:t> (ZWJ composed emoji)</a:t>
-            </a:r>
-            <a:pPr algn="l" indent="0" marL="0">
-              <a:lnSpc>
-                <a:spcPct val="150000"/>
-              </a:lnSpc>
-              <a:buNone/>
-            </a:pPr>
+              <a:t> (family ZWJ sequence)</a:t>
+            </a:r>
             <a:endParaRPr lang="en-US" sz="2175" dirty="0"/>
           </a:p>
-          <a:p>
-            <a:pPr algn="l" indent="0" marL="0">
-              <a:lnSpc>
-                <a:spcPct val="150000"/>
-              </a:lnSpc>
-              <a:buNone/>
-            </a:pPr>
-            <a:r>
-              <a:rPr lang="en-US" sz="2175" dirty="0">
-                <a:solidFill>
-                  <a:srgbClr val="1F2328"/>
-                </a:solidFill>
-                <a:latin typeface="Segoe UI" pitchFamily="34" charset="0"/>
-                <a:ea typeface="Segoe UI" pitchFamily="34" charset="-122"/>
-                <a:cs typeface="Segoe UI" pitchFamily="34" charset="-120"/>
-              </a:rPr>
-              <a:t>Family: </a:t>
-            </a:r>
-            <a:pPr algn="l" indent="0" marL="0">
-              <a:lnSpc>
-                <a:spcPct val="150000"/>
-              </a:lnSpc>
-              <a:buNone/>
-            </a:pPr>
-            <a:r>
-              <a:rPr lang="en-US" sz="2175" dirty="0">
-                <a:solidFill>
-                  <a:srgbClr val="1F2328"/>
-                </a:solidFill>
-                <a:latin typeface="Segoe UI" pitchFamily="34" charset="0"/>
-                <a:ea typeface="Segoe UI" pitchFamily="34" charset="-122"/>
-                <a:cs typeface="Segoe UI" pitchFamily="34" charset="-120"/>
-              </a:rPr>
-              <a:t>👨‍👩‍👧‍👦</a:t>
-            </a:r>
-            <a:pPr algn="l" indent="0" marL="0">
-              <a:lnSpc>
-                <a:spcPct val="150000"/>
-              </a:lnSpc>
-              <a:buNone/>
-            </a:pPr>
-            <a:r>
-              <a:rPr lang="en-US" sz="2175" dirty="0">
-                <a:solidFill>
-                  <a:srgbClr val="1F2328"/>
-                </a:solidFill>
-                <a:latin typeface="Segoe UI" pitchFamily="34" charset="0"/>
-                <a:ea typeface="Segoe UI" pitchFamily="34" charset="-122"/>
-                <a:cs typeface="Segoe UI" pitchFamily="34" charset="-120"/>
-              </a:rPr>
-              <a:t> (family ZWJ sequence)</a:t>
-            </a:r>
-            <a:endParaRPr lang="en-US" sz="2175" dirty="0"/>
-          </a:p>
-        </p:txBody>
-      </p:sp>
-      <p:sp>
-        <p:nvSpPr>
-          <p:cNvPr id="8" name="Text 6"/>
+        </p:txBody>
+      </p:sp>
+      <p:sp>
+        <p:nvSpPr>
+          <p:cNvPr id="6" name="Text 4"/>
           <p:cNvSpPr/>
           <p:nvPr/>
         </p:nvSpPr>
@@ -31984,36 +31289,14 @@
       </p:sp>
       <p:sp>
         <p:nvSpPr>
-          <p:cNvPr id="4" name="Shape 2"/>
+          <p:cNvPr id="4" name="Text 2"/>
           <p:cNvSpPr/>
           <p:nvPr/>
         </p:nvSpPr>
         <p:spPr>
           <a:xfrm>
-            <a:off x="3361879" y="3300710"/>
-            <a:ext cx="2601069" cy="400050"/>
-          </a:xfrm>
-          <a:prstGeom prst="roundRect">
-            <a:avLst>
-              <a:gd name="adj" fmla="val 43537"/>
-            </a:avLst>
-          </a:prstGeom>
-          <a:solidFill>
-            <a:srgbClr val="F1C40F"/>
-          </a:solidFill>
-          <a:ln/>
-        </p:spPr>
-      </p:sp>
-      <p:sp>
-        <p:nvSpPr>
-          <p:cNvPr id="5" name="Text 3"/>
-          <p:cNvSpPr/>
-          <p:nvPr/>
-        </p:nvSpPr>
-        <p:spPr>
-          <a:xfrm>
-            <a:off x="3361879" y="3300710"/>
-            <a:ext cx="2601069" cy="400050"/>
+            <a:off x="747713" y="3300710"/>
+            <a:ext cx="11001375" cy="828675"/>
           </a:xfrm>
           <a:prstGeom prst="rect">
             <a:avLst/>
@@ -32022,12 +31305,29 @@
           <a:ln/>
         </p:spPr>
         <p:txBody>
-          <a:bodyPr wrap="square" lIns="0" tIns="0" rIns="0" bIns="0" rtlCol="0" anchor="ctr"/>
-          <a:lstStyle/>
-          <a:p>
-            <a:pPr algn="ctr" indent="0" marL="0">
-              <a:lnSpc>
-                <a:spcPct val="100000"/>
+          <a:bodyPr wrap="square" lIns="0" tIns="0" rIns="0" bIns="0" rtlCol="0" anchor="t"/>
+          <a:lstStyle/>
+          <a:p>
+            <a:pPr algn="l" indent="0" marL="0">
+              <a:lnSpc>
+                <a:spcPct val="150000"/>
+              </a:lnSpc>
+              <a:buNone/>
+            </a:pPr>
+            <a:r>
+              <a:rPr lang="en-US" sz="2175" dirty="0">
+                <a:solidFill>
+                  <a:srgbClr val="1F2328"/>
+                </a:solidFill>
+                <a:latin typeface="Segoe UI" pitchFamily="34" charset="0"/>
+                <a:ea typeface="Segoe UI" pitchFamily="34" charset="-122"/>
+                <a:cs typeface="Segoe UI" pitchFamily="34" charset="-120"/>
+              </a:rPr>
+              <a:t>Inline highlighting of </a:t>
+            </a:r>
+            <a:pPr algn="l" indent="0" marL="0">
+              <a:lnSpc>
+                <a:spcPct val="150000"/>
               </a:lnSpc>
               <a:buNone/>
             </a:pPr>
@@ -32036,75 +31336,94 @@
                 <a:solidFill>
                   <a:srgbClr val="1F2328"/>
                 </a:solidFill>
+                <a:highlight>
+                  <a:srgbClr val="F1C40F"/>
+                </a:highlight>
                 <a:latin typeface="Segoe UI" pitchFamily="34" charset="0"/>
                 <a:ea typeface="Segoe UI" pitchFamily="34" charset="-122"/>
                 <a:cs typeface="Segoe UI" pitchFamily="34" charset="-120"/>
               </a:rPr>
               <a:t>important keywords</a:t>
             </a:r>
+            <a:pPr algn="l" indent="0" marL="0">
+              <a:lnSpc>
+                <a:spcPct val="150000"/>
+              </a:lnSpc>
+              <a:buNone/>
+            </a:pPr>
+            <a:r>
+              <a:rPr lang="en-US" sz="2175" dirty="0">
+                <a:solidFill>
+                  <a:srgbClr val="1F2328"/>
+                </a:solidFill>
+                <a:latin typeface="Segoe UI" pitchFamily="34" charset="0"/>
+                <a:ea typeface="Segoe UI" pitchFamily="34" charset="-122"/>
+                <a:cs typeface="Segoe UI" pitchFamily="34" charset="-120"/>
+              </a:rPr>
+              <a:t> and </a:t>
+            </a:r>
+            <a:pPr algn="l" indent="0" marL="0">
+              <a:lnSpc>
+                <a:spcPct val="150000"/>
+              </a:lnSpc>
+              <a:buNone/>
+            </a:pPr>
+            <a:r>
+              <a:rPr lang="en-US" sz="2175" b="1" dirty="0">
+                <a:solidFill>
+                  <a:srgbClr val="1F2328"/>
+                </a:solidFill>
+                <a:highlight>
+                  <a:srgbClr val="F1C40F"/>
+                </a:highlight>
+                <a:latin typeface="Segoe UI" pitchFamily="34" charset="0"/>
+                <a:ea typeface="Segoe UI" pitchFamily="34" charset="-122"/>
+                <a:cs typeface="Segoe UI" pitchFamily="34" charset="-120"/>
+              </a:rPr>
+              <a:t>percentages (42%)</a:t>
+            </a:r>
+            <a:pPr algn="l" indent="0" marL="0">
+              <a:lnSpc>
+                <a:spcPct val="150000"/>
+              </a:lnSpc>
+              <a:buNone/>
+            </a:pPr>
+            <a:r>
+              <a:rPr lang="en-US" sz="2175" dirty="0">
+                <a:solidFill>
+                  <a:srgbClr val="1F2328"/>
+                </a:solidFill>
+                <a:latin typeface="Segoe UI" pitchFamily="34" charset="0"/>
+                <a:ea typeface="Segoe UI" pitchFamily="34" charset="-122"/>
+                <a:cs typeface="Segoe UI" pitchFamily="34" charset="-120"/>
+              </a:rPr>
+              <a:t> in paragraphs.</a:t>
+            </a:r>
+            <a:pPr algn="l" indent="0" marL="0">
+              <a:lnSpc>
+                <a:spcPct val="150000"/>
+              </a:lnSpc>
+              <a:buNone/>
+            </a:pPr>
             <a:endParaRPr lang="en-US" sz="2175" dirty="0"/>
           </a:p>
-        </p:txBody>
-      </p:sp>
-      <p:sp>
-        <p:nvSpPr>
-          <p:cNvPr id="6" name="Shape 4"/>
-          <p:cNvSpPr/>
-          <p:nvPr/>
-        </p:nvSpPr>
-        <p:spPr>
-          <a:xfrm>
-            <a:off x="6573887" y="3300710"/>
-            <a:ext cx="2407295" cy="400050"/>
-          </a:xfrm>
-          <a:prstGeom prst="roundRect">
-            <a:avLst>
-              <a:gd name="adj" fmla="val 43537"/>
-            </a:avLst>
-          </a:prstGeom>
-          <a:solidFill>
-            <a:srgbClr val="F1C40F"/>
-          </a:solidFill>
-          <a:ln/>
-        </p:spPr>
-      </p:sp>
-      <p:sp>
-        <p:nvSpPr>
-          <p:cNvPr id="7" name="Text 5"/>
-          <p:cNvSpPr/>
-          <p:nvPr/>
-        </p:nvSpPr>
-        <p:spPr>
-          <a:xfrm>
-            <a:off x="6573887" y="3300710"/>
-            <a:ext cx="2407295" cy="400050"/>
-          </a:xfrm>
-          <a:prstGeom prst="rect">
-            <a:avLst/>
-          </a:prstGeom>
-          <a:noFill/>
-          <a:ln/>
-        </p:spPr>
-        <p:txBody>
-          <a:bodyPr wrap="square" lIns="0" tIns="0" rIns="0" bIns="0" rtlCol="0" anchor="ctr"/>
-          <a:lstStyle/>
-          <a:p>
-            <a:pPr algn="ctr" indent="0" marL="0">
-              <a:lnSpc>
-                <a:spcPct val="100000"/>
-              </a:lnSpc>
-              <a:buNone/>
-            </a:pPr>
-            <a:r>
-              <a:rPr lang="en-US" sz="2175" b="1" dirty="0">
-                <a:solidFill>
-                  <a:srgbClr val="1F2328"/>
-                </a:solidFill>
-                <a:latin typeface="Segoe UI" pitchFamily="34" charset="0"/>
-                <a:ea typeface="Segoe UI" pitchFamily="34" charset="-122"/>
-                <a:cs typeface="Segoe UI" pitchFamily="34" charset="-120"/>
-              </a:rPr>
-              <a:t>percentages (42%)</a:t>
+          <a:p>
+            <a:pPr algn="l" indent="0" marL="0">
+              <a:lnSpc>
+                <a:spcPct val="150000"/>
+              </a:lnSpc>
+              <a:buNone/>
+            </a:pPr>
+            <a:r>
+              <a:rPr lang="en-US" sz="2175" dirty="0">
+                <a:solidFill>
+                  <a:srgbClr val="1F2328"/>
+                </a:solidFill>
+                <a:latin typeface="Segoe UI" pitchFamily="34" charset="0"/>
+                <a:ea typeface="Segoe UI" pitchFamily="34" charset="-122"/>
+                <a:cs typeface="Segoe UI" pitchFamily="34" charset="-120"/>
+              </a:rPr>
+              <a:t>Solid colour (#f1c40f) background — not a gradient — should render correctly.</a:t>
             </a:r>
             <a:endParaRPr lang="en-US" sz="2175" dirty="0"/>
           </a:p>
@@ -32112,109 +31431,7 @@
       </p:sp>
       <p:sp>
         <p:nvSpPr>
-          <p:cNvPr id="8" name="Text 6"/>
-          <p:cNvSpPr/>
-          <p:nvPr/>
-        </p:nvSpPr>
-        <p:spPr>
-          <a:xfrm>
-            <a:off x="747713" y="3300710"/>
-            <a:ext cx="11001375" cy="828675"/>
-          </a:xfrm>
-          <a:prstGeom prst="rect">
-            <a:avLst/>
-          </a:prstGeom>
-          <a:noFill/>
-          <a:ln/>
-        </p:spPr>
-        <p:txBody>
-          <a:bodyPr wrap="square" lIns="0" tIns="0" rIns="0" bIns="0" rtlCol="0" anchor="t"/>
-          <a:lstStyle/>
-          <a:p>
-            <a:pPr algn="l" indent="0" marL="0">
-              <a:lnSpc>
-                <a:spcPct val="150000"/>
-              </a:lnSpc>
-              <a:buNone/>
-            </a:pPr>
-            <a:r>
-              <a:rPr lang="en-US" sz="2175" dirty="0">
-                <a:solidFill>
-                  <a:srgbClr val="1F2328"/>
-                </a:solidFill>
-                <a:latin typeface="Segoe UI" pitchFamily="34" charset="0"/>
-                <a:ea typeface="Segoe UI" pitchFamily="34" charset="-122"/>
-                <a:cs typeface="Segoe UI" pitchFamily="34" charset="-120"/>
-              </a:rPr>
-              <a:t>Inline highlighting of </a:t>
-            </a:r>
-            <a:pPr algn="l" indent="0" marL="0">
-              <a:lnSpc>
-                <a:spcPct val="150000"/>
-              </a:lnSpc>
-              <a:buNone/>
-            </a:pPr>
-            <a:r>
-              <a:rPr lang="en-US" sz="2175" dirty="0">
-                <a:solidFill>
-                  <a:srgbClr val="1F2328"/>
-                </a:solidFill>
-                <a:latin typeface="Segoe UI" pitchFamily="34" charset="0"/>
-                <a:ea typeface="Segoe UI" pitchFamily="34" charset="-122"/>
-                <a:cs typeface="Segoe UI" pitchFamily="34" charset="-120"/>
-              </a:rPr>
-              <a:t> and </a:t>
-            </a:r>
-            <a:pPr algn="l" indent="0" marL="0">
-              <a:lnSpc>
-                <a:spcPct val="150000"/>
-              </a:lnSpc>
-              <a:buNone/>
-            </a:pPr>
-            <a:r>
-              <a:rPr lang="en-US" sz="2175" dirty="0">
-                <a:solidFill>
-                  <a:srgbClr val="1F2328"/>
-                </a:solidFill>
-                <a:latin typeface="Segoe UI" pitchFamily="34" charset="0"/>
-                <a:ea typeface="Segoe UI" pitchFamily="34" charset="-122"/>
-                <a:cs typeface="Segoe UI" pitchFamily="34" charset="-120"/>
-              </a:rPr>
-              <a:t> in paragraphs.</a:t>
-            </a:r>
-            <a:pPr algn="l" indent="0" marL="0">
-              <a:lnSpc>
-                <a:spcPct val="150000"/>
-              </a:lnSpc>
-              <a:buNone/>
-            </a:pPr>
-            <a:endParaRPr lang="en-US" sz="2175" dirty="0"/>
-          </a:p>
-          <a:p>
-            <a:pPr algn="l" indent="0" marL="0">
-              <a:lnSpc>
-                <a:spcPct val="150000"/>
-              </a:lnSpc>
-              <a:buNone/>
-            </a:pPr>
-            <a:r>
-              <a:rPr lang="en-US" sz="2175" dirty="0">
-                <a:solidFill>
-                  <a:srgbClr val="1F2328"/>
-                </a:solidFill>
-                <a:latin typeface="Segoe UI" pitchFamily="34" charset="0"/>
-                <a:ea typeface="Segoe UI" pitchFamily="34" charset="-122"/>
-                <a:cs typeface="Segoe UI" pitchFamily="34" charset="-120"/>
-              </a:rPr>
-              <a:t>Solid colour (#f1c40f) background — not a gradient — should render correctly.</a:t>
-            </a:r>
-            <a:endParaRPr lang="en-US" sz="2175" dirty="0"/>
-          </a:p>
-        </p:txBody>
-      </p:sp>
-      <p:sp>
-        <p:nvSpPr>
-          <p:cNvPr id="9" name="Text 7"/>
+          <p:cNvPr id="5" name="Text 3"/>
           <p:cNvSpPr/>
           <p:nvPr/>
         </p:nvSpPr>
@@ -33152,25 +32369,153 @@
       </p:sp>
       <p:sp>
         <p:nvSpPr>
-          <p:cNvPr id="5" name="Shape 3"/>
+          <p:cNvPr id="5" name="Text 3"/>
           <p:cNvSpPr/>
           <p:nvPr/>
         </p:nvSpPr>
         <p:spPr>
           <a:xfrm>
-            <a:off x="6843117" y="2291060"/>
-            <a:ext cx="2124224" cy="369987"/>
-          </a:xfrm>
-          <a:prstGeom prst="roundRect">
-            <a:avLst>
-              <a:gd name="adj" fmla="val 76350"/>
-            </a:avLst>
-          </a:prstGeom>
-          <a:solidFill>
-            <a:srgbClr val="818B98"/>
-          </a:solidFill>
+            <a:off x="747713" y="2242691"/>
+            <a:ext cx="11001375" cy="833289"/>
+          </a:xfrm>
+          <a:prstGeom prst="rect">
+            <a:avLst/>
+          </a:prstGeom>
+          <a:noFill/>
           <a:ln/>
         </p:spPr>
+        <p:txBody>
+          <a:bodyPr wrap="square" lIns="0" tIns="0" rIns="0" bIns="0" rtlCol="0" anchor="t"/>
+          <a:lstStyle/>
+          <a:p>
+            <a:pPr algn="l" indent="0" marL="0">
+              <a:lnSpc>
+                <a:spcPct val="150000"/>
+              </a:lnSpc>
+              <a:buNone/>
+            </a:pPr>
+            <a:r>
+              <a:rPr lang="en-US" sz="2175" dirty="0">
+                <a:solidFill>
+                  <a:srgbClr val="1F2328"/>
+                </a:solidFill>
+                <a:latin typeface="Segoe UI" pitchFamily="34" charset="0"/>
+                <a:ea typeface="Segoe UI" pitchFamily="34" charset="-122"/>
+                <a:cs typeface="Segoe UI" pitchFamily="34" charset="-120"/>
+              </a:rPr>
+              <a:t>This slide has </a:t>
+            </a:r>
+            <a:pPr algn="l" indent="0" marL="0">
+              <a:lnSpc>
+                <a:spcPct val="150000"/>
+              </a:lnSpc>
+              <a:buNone/>
+            </a:pPr>
+            <a:r>
+              <a:rPr lang="en-US" sz="2175" b="1" dirty="0">
+                <a:solidFill>
+                  <a:srgbClr val="1F2328"/>
+                </a:solidFill>
+                <a:latin typeface="Segoe UI" pitchFamily="34" charset="0"/>
+                <a:ea typeface="Segoe UI" pitchFamily="34" charset="-122"/>
+                <a:cs typeface="Segoe UI" pitchFamily="34" charset="-120"/>
+              </a:rPr>
+              <a:t>class="decorated"</a:t>
+            </a:r>
+            <a:pPr algn="l" indent="0" marL="0">
+              <a:lnSpc>
+                <a:spcPct val="150000"/>
+              </a:lnSpc>
+              <a:buNone/>
+            </a:pPr>
+            <a:r>
+              <a:rPr lang="en-US" sz="2175" dirty="0">
+                <a:solidFill>
+                  <a:srgbClr val="1F2328"/>
+                </a:solidFill>
+                <a:latin typeface="Segoe UI" pitchFamily="34" charset="0"/>
+                <a:ea typeface="Segoe UI" pitchFamily="34" charset="-122"/>
+                <a:cs typeface="Segoe UI" pitchFamily="34" charset="-120"/>
+              </a:rPr>
+              <a:t> and also defines </a:t>
+            </a:r>
+            <a:pPr algn="l" indent="0" marL="0">
+              <a:lnSpc>
+                <a:spcPct val="150000"/>
+              </a:lnSpc>
+              <a:buNone/>
+            </a:pPr>
+            <a:r>
+              <a:rPr lang="en-US" sz="1849" dirty="0">
+                <a:solidFill>
+                  <a:srgbClr val="1F2328"/>
+                </a:solidFill>
+                <a:highlight>
+                  <a:srgbClr val="F0F1F3"/>
+                </a:highlight>
+                <a:latin typeface="Consolas" pitchFamily="34" charset="0"/>
+                <a:ea typeface="Consolas" pitchFamily="34" charset="-122"/>
+                <a:cs typeface="Consolas" pitchFamily="34" charset="-120"/>
+              </a:rPr>
+              <a:t>section::before</a:t>
+            </a:r>
+            <a:pPr algn="l" indent="0" marL="0">
+              <a:lnSpc>
+                <a:spcPct val="150000"/>
+              </a:lnSpc>
+              <a:buNone/>
+            </a:pPr>
+            <a:r>
+              <a:rPr lang="en-US" sz="2175" dirty="0">
+                <a:solidFill>
+                  <a:srgbClr val="1F2328"/>
+                </a:solidFill>
+                <a:latin typeface="Segoe UI" pitchFamily="34" charset="0"/>
+                <a:ea typeface="Segoe UI" pitchFamily="34" charset="-122"/>
+                <a:cs typeface="Segoe UI" pitchFamily="34" charset="-120"/>
+              </a:rPr>
+              <a:t> / </a:t>
+            </a:r>
+            <a:pPr algn="l" indent="0" marL="0">
+              <a:lnSpc>
+                <a:spcPct val="150000"/>
+              </a:lnSpc>
+              <a:buNone/>
+            </a:pPr>
+            <a:r>
+              <a:rPr lang="en-US" sz="1849" dirty="0">
+                <a:solidFill>
+                  <a:srgbClr val="1F2328"/>
+                </a:solidFill>
+                <a:highlight>
+                  <a:srgbClr val="F0F1F3"/>
+                </a:highlight>
+                <a:latin typeface="Consolas" pitchFamily="34" charset="0"/>
+                <a:ea typeface="Consolas" pitchFamily="34" charset="-122"/>
+                <a:cs typeface="Consolas" pitchFamily="34" charset="-120"/>
+              </a:rPr>
+              <a:t>section::after</a:t>
+            </a:r>
+            <a:pPr algn="l" indent="0" marL="0">
+              <a:lnSpc>
+                <a:spcPct val="150000"/>
+              </a:lnSpc>
+              <a:buNone/>
+            </a:pPr>
+            <a:r>
+              <a:rPr lang="en-US" sz="2175" dirty="0">
+                <a:solidFill>
+                  <a:srgbClr val="1F2328"/>
+                </a:solidFill>
+                <a:latin typeface="Segoe UI" pitchFamily="34" charset="0"/>
+                <a:ea typeface="Segoe UI" pitchFamily="34" charset="-122"/>
+                <a:cs typeface="Segoe UI" pitchFamily="34" charset="-120"/>
+              </a:rPr>
+              <a:t> as scoped styles.</a:t>
+            </a:r>
+            <a:endParaRPr lang="en-US" sz="2175" dirty="0"/>
+          </a:p>
+        </p:txBody>
       </p:sp>
       <p:sp>
         <p:nvSpPr>
@@ -33180,8 +32525,8 @@
         </p:nvSpPr>
         <p:spPr>
           <a:xfrm>
-            <a:off x="6843117" y="2291060"/>
-            <a:ext cx="2124224" cy="369987"/>
+            <a:off x="747713" y="3228380"/>
+            <a:ext cx="11001375" cy="1243013"/>
           </a:xfrm>
           <a:prstGeom prst="rect">
             <a:avLst/>
@@ -33190,112 +32535,6 @@
           <a:ln/>
         </p:spPr>
         <p:txBody>
-          <a:bodyPr wrap="square" lIns="0" tIns="0" rIns="0" bIns="0" rtlCol="0" anchor="ctr"/>
-          <a:lstStyle/>
-          <a:p>
-            <a:pPr algn="ctr" indent="0" marL="0">
-              <a:lnSpc>
-                <a:spcPct val="100000"/>
-              </a:lnSpc>
-              <a:buNone/>
-            </a:pPr>
-            <a:r>
-              <a:rPr lang="en-US" sz="1849" dirty="0">
-                <a:solidFill>
-                  <a:srgbClr val="1F2328"/>
-                </a:solidFill>
-                <a:latin typeface="Consolas" pitchFamily="34" charset="0"/>
-                <a:ea typeface="Consolas" pitchFamily="34" charset="-122"/>
-                <a:cs typeface="Consolas" pitchFamily="34" charset="-120"/>
-              </a:rPr>
-              <a:t>section::before</a:t>
-            </a:r>
-            <a:endParaRPr lang="en-US" sz="1849" dirty="0"/>
-          </a:p>
-        </p:txBody>
-      </p:sp>
-      <p:sp>
-        <p:nvSpPr>
-          <p:cNvPr id="7" name="Shape 5"/>
-          <p:cNvSpPr/>
-          <p:nvPr/>
-        </p:nvSpPr>
-        <p:spPr>
-          <a:xfrm>
-            <a:off x="9226302" y="2291060"/>
-            <a:ext cx="1995190" cy="369987"/>
-          </a:xfrm>
-          <a:prstGeom prst="roundRect">
-            <a:avLst>
-              <a:gd name="adj" fmla="val 76350"/>
-            </a:avLst>
-          </a:prstGeom>
-          <a:solidFill>
-            <a:srgbClr val="818B98"/>
-          </a:solidFill>
-          <a:ln/>
-        </p:spPr>
-      </p:sp>
-      <p:sp>
-        <p:nvSpPr>
-          <p:cNvPr id="8" name="Text 6"/>
-          <p:cNvSpPr/>
-          <p:nvPr/>
-        </p:nvSpPr>
-        <p:spPr>
-          <a:xfrm>
-            <a:off x="9226302" y="2291060"/>
-            <a:ext cx="1995190" cy="369987"/>
-          </a:xfrm>
-          <a:prstGeom prst="rect">
-            <a:avLst/>
-          </a:prstGeom>
-          <a:noFill/>
-          <a:ln/>
-        </p:spPr>
-        <p:txBody>
-          <a:bodyPr wrap="square" lIns="0" tIns="0" rIns="0" bIns="0" rtlCol="0" anchor="ctr"/>
-          <a:lstStyle/>
-          <a:p>
-            <a:pPr algn="ctr" indent="0" marL="0">
-              <a:lnSpc>
-                <a:spcPct val="100000"/>
-              </a:lnSpc>
-              <a:buNone/>
-            </a:pPr>
-            <a:r>
-              <a:rPr lang="en-US" sz="1849" dirty="0">
-                <a:solidFill>
-                  <a:srgbClr val="1F2328"/>
-                </a:solidFill>
-                <a:latin typeface="Consolas" pitchFamily="34" charset="0"/>
-                <a:ea typeface="Consolas" pitchFamily="34" charset="-122"/>
-                <a:cs typeface="Consolas" pitchFamily="34" charset="-120"/>
-              </a:rPr>
-              <a:t>section::after</a:t>
-            </a:r>
-            <a:endParaRPr lang="en-US" sz="1849" dirty="0"/>
-          </a:p>
-        </p:txBody>
-      </p:sp>
-      <p:sp>
-        <p:nvSpPr>
-          <p:cNvPr id="9" name="Text 7"/>
-          <p:cNvSpPr/>
-          <p:nvPr/>
-        </p:nvSpPr>
-        <p:spPr>
-          <a:xfrm>
-            <a:off x="747713" y="2242691"/>
-            <a:ext cx="11001375" cy="833289"/>
-          </a:xfrm>
-          <a:prstGeom prst="rect">
-            <a:avLst/>
-          </a:prstGeom>
-          <a:noFill/>
-          <a:ln/>
-        </p:spPr>
-        <p:txBody>
           <a:bodyPr wrap="square" lIns="0" tIns="0" rIns="0" bIns="0" rtlCol="0" anchor="t"/>
           <a:lstStyle/>
           <a:p>
@@ -33314,7 +32553,7 @@
                 <a:ea typeface="Segoe UI" pitchFamily="34" charset="-122"/>
                 <a:cs typeface="Segoe UI" pitchFamily="34" charset="-120"/>
               </a:rPr>
-              <a:t>This slide has </a:t>
+              <a:t>Because the same pseudo-element also applies to a classless slide (slide 55), the rule is treated as a </a:t>
             </a:r>
             <a:pPr algn="l" indent="0" marL="0">
               <a:lnSpc>
@@ -33331,7 +32570,7 @@
                 <a:ea typeface="Segoe UI" pitchFamily="34" charset="-122"/>
                 <a:cs typeface="Segoe UI" pitchFamily="34" charset="-120"/>
               </a:rPr>
-              <a:t>class="decorated"</a:t>
+              <a:t>global theme decoration</a:t>
             </a:r>
             <a:pPr algn="l" indent="0" marL="0">
               <a:lnSpc>
@@ -33348,7 +32587,24 @@
                 <a:ea typeface="Segoe UI" pitchFamily="34" charset="-122"/>
                 <a:cs typeface="Segoe UI" pitchFamily="34" charset="-120"/>
               </a:rPr>
-              <a:t> and also defines </a:t>
+              <a:t> and </a:t>
+            </a:r>
+            <a:pPr algn="l" indent="0" marL="0">
+              <a:lnSpc>
+                <a:spcPct val="150000"/>
+              </a:lnSpc>
+              <a:buNone/>
+            </a:pPr>
+            <a:r>
+              <a:rPr lang="en-US" sz="2175" b="1" dirty="0">
+                <a:solidFill>
+                  <a:srgbClr val="1F2328"/>
+                </a:solidFill>
+                <a:latin typeface="Segoe UI" pitchFamily="34" charset="0"/>
+                <a:ea typeface="Segoe UI" pitchFamily="34" charset="-122"/>
+                <a:cs typeface="Segoe UI" pitchFamily="34" charset="-120"/>
+              </a:rPr>
+              <a:t>no banner should appear</a:t>
             </a:r>
             <a:pPr algn="l" indent="0" marL="0">
               <a:lnSpc>
@@ -33365,24 +32621,7 @@
                 <a:ea typeface="Segoe UI" pitchFamily="34" charset="-122"/>
                 <a:cs typeface="Segoe UI" pitchFamily="34" charset="-120"/>
               </a:rPr>
-              <a:t> / </a:t>
-            </a:r>
-            <a:pPr algn="l" indent="0" marL="0">
-              <a:lnSpc>
-                <a:spcPct val="150000"/>
-              </a:lnSpc>
-              <a:buNone/>
-            </a:pPr>
-            <a:r>
-              <a:rPr lang="en-US" sz="2175" dirty="0">
-                <a:solidFill>
-                  <a:srgbClr val="1F2328"/>
-                </a:solidFill>
-                <a:latin typeface="Segoe UI" pitchFamily="34" charset="0"/>
-                <a:ea typeface="Segoe UI" pitchFamily="34" charset="-122"/>
-                <a:cs typeface="Segoe UI" pitchFamily="34" charset="-120"/>
-              </a:rPr>
-              <a:t> as scoped styles.</a:t>
+              <a:t> at the top or bottom.</a:t>
             </a:r>
             <a:endParaRPr lang="en-US" sz="2175" dirty="0"/>
           </a:p>
@@ -33390,117 +32629,7 @@
       </p:sp>
       <p:sp>
         <p:nvSpPr>
-          <p:cNvPr id="10" name="Text 8"/>
-          <p:cNvSpPr/>
-          <p:nvPr/>
-        </p:nvSpPr>
-        <p:spPr>
-          <a:xfrm>
-            <a:off x="747713" y="3228380"/>
-            <a:ext cx="11001375" cy="1243013"/>
-          </a:xfrm>
-          <a:prstGeom prst="rect">
-            <a:avLst/>
-          </a:prstGeom>
-          <a:noFill/>
-          <a:ln/>
-        </p:spPr>
-        <p:txBody>
-          <a:bodyPr wrap="square" lIns="0" tIns="0" rIns="0" bIns="0" rtlCol="0" anchor="t"/>
-          <a:lstStyle/>
-          <a:p>
-            <a:pPr algn="l" indent="0" marL="0">
-              <a:lnSpc>
-                <a:spcPct val="150000"/>
-              </a:lnSpc>
-              <a:buNone/>
-            </a:pPr>
-            <a:r>
-              <a:rPr lang="en-US" sz="2175" dirty="0">
-                <a:solidFill>
-                  <a:srgbClr val="1F2328"/>
-                </a:solidFill>
-                <a:latin typeface="Segoe UI" pitchFamily="34" charset="0"/>
-                <a:ea typeface="Segoe UI" pitchFamily="34" charset="-122"/>
-                <a:cs typeface="Segoe UI" pitchFamily="34" charset="-120"/>
-              </a:rPr>
-              <a:t>Because the same pseudo-element also applies to a classless slide (slide 55), the rule is treated as a </a:t>
-            </a:r>
-            <a:pPr algn="l" indent="0" marL="0">
-              <a:lnSpc>
-                <a:spcPct val="150000"/>
-              </a:lnSpc>
-              <a:buNone/>
-            </a:pPr>
-            <a:r>
-              <a:rPr lang="en-US" sz="2175" b="1" dirty="0">
-                <a:solidFill>
-                  <a:srgbClr val="1F2328"/>
-                </a:solidFill>
-                <a:latin typeface="Segoe UI" pitchFamily="34" charset="0"/>
-                <a:ea typeface="Segoe UI" pitchFamily="34" charset="-122"/>
-                <a:cs typeface="Segoe UI" pitchFamily="34" charset="-120"/>
-              </a:rPr>
-              <a:t>global theme decoration</a:t>
-            </a:r>
-            <a:pPr algn="l" indent="0" marL="0">
-              <a:lnSpc>
-                <a:spcPct val="150000"/>
-              </a:lnSpc>
-              <a:buNone/>
-            </a:pPr>
-            <a:r>
-              <a:rPr lang="en-US" sz="2175" dirty="0">
-                <a:solidFill>
-                  <a:srgbClr val="1F2328"/>
-                </a:solidFill>
-                <a:latin typeface="Segoe UI" pitchFamily="34" charset="0"/>
-                <a:ea typeface="Segoe UI" pitchFamily="34" charset="-122"/>
-                <a:cs typeface="Segoe UI" pitchFamily="34" charset="-120"/>
-              </a:rPr>
-              <a:t> and </a:t>
-            </a:r>
-            <a:pPr algn="l" indent="0" marL="0">
-              <a:lnSpc>
-                <a:spcPct val="150000"/>
-              </a:lnSpc>
-              <a:buNone/>
-            </a:pPr>
-            <a:r>
-              <a:rPr lang="en-US" sz="2175" b="1" dirty="0">
-                <a:solidFill>
-                  <a:srgbClr val="1F2328"/>
-                </a:solidFill>
-                <a:latin typeface="Segoe UI" pitchFamily="34" charset="0"/>
-                <a:ea typeface="Segoe UI" pitchFamily="34" charset="-122"/>
-                <a:cs typeface="Segoe UI" pitchFamily="34" charset="-120"/>
-              </a:rPr>
-              <a:t>no banner should appear</a:t>
-            </a:r>
-            <a:pPr algn="l" indent="0" marL="0">
-              <a:lnSpc>
-                <a:spcPct val="150000"/>
-              </a:lnSpc>
-              <a:buNone/>
-            </a:pPr>
-            <a:r>
-              <a:rPr lang="en-US" sz="2175" dirty="0">
-                <a:solidFill>
-                  <a:srgbClr val="1F2328"/>
-                </a:solidFill>
-                <a:latin typeface="Segoe UI" pitchFamily="34" charset="0"/>
-                <a:ea typeface="Segoe UI" pitchFamily="34" charset="-122"/>
-                <a:cs typeface="Segoe UI" pitchFamily="34" charset="-120"/>
-              </a:rPr>
-              <a:t> at the top or bottom.</a:t>
-            </a:r>
-            <a:endParaRPr lang="en-US" sz="2175" dirty="0"/>
-          </a:p>
-        </p:txBody>
-      </p:sp>
-      <p:sp>
-        <p:nvSpPr>
-          <p:cNvPr id="11" name="Text 9"/>
+          <p:cNvPr id="7" name="Text 5"/>
           <p:cNvSpPr/>
           <p:nvPr/>
         </p:nvSpPr>

--- a/output-pptx/test-output.pptx
+++ b/output-pptx/test-output.pptx
@@ -8467,7 +8467,7 @@
         <p:spPr>
           <a:xfrm>
             <a:off x="909638" y="3702993"/>
-            <a:ext cx="4948238" cy="833289"/>
+            <a:ext cx="4948238" cy="842814"/>
           </a:xfrm>
           <a:prstGeom prst="rect">
             <a:avLst/>
@@ -9583,7 +9583,7 @@
         </p:nvSpPr>
         <p:spPr>
           <a:xfrm>
-            <a:off x="747713" y="2272159"/>
+            <a:off x="747713" y="2267396"/>
             <a:ext cx="11291888" cy="684907"/>
           </a:xfrm>
           <a:prstGeom prst="rect">
@@ -9625,7 +9625,7 @@
         </p:nvSpPr>
         <p:spPr>
           <a:xfrm>
-            <a:off x="747713" y="3164235"/>
+            <a:off x="747713" y="3159472"/>
             <a:ext cx="304800" cy="304800"/>
           </a:xfrm>
           <a:prstGeom prst="roundRect">
@@ -9647,7 +9647,7 @@
         </p:nvSpPr>
         <p:spPr>
           <a:xfrm>
-            <a:off x="747713" y="3164235"/>
+            <a:off x="747713" y="3159472"/>
             <a:ext cx="381000" cy="304800"/>
           </a:xfrm>
           <a:prstGeom prst="rect">
@@ -9689,8 +9689,8 @@
         </p:nvSpPr>
         <p:spPr>
           <a:xfrm>
-            <a:off x="1147763" y="3109466"/>
-            <a:ext cx="3507879" cy="414338"/>
+            <a:off x="1147763" y="3104704"/>
+            <a:ext cx="3705523" cy="414338"/>
           </a:xfrm>
           <a:prstGeom prst="rect">
             <a:avLst/>
@@ -9795,8 +9795,8 @@
         </p:nvSpPr>
         <p:spPr>
           <a:xfrm>
-            <a:off x="1147763" y="3638104"/>
-            <a:ext cx="5512743" cy="418951"/>
+            <a:off x="1147763" y="3633341"/>
+            <a:ext cx="5888831" cy="428476"/>
           </a:xfrm>
           <a:prstGeom prst="rect">
             <a:avLst/>
@@ -9891,7 +9891,7 @@
         </p:nvSpPr>
         <p:spPr>
           <a:xfrm>
-            <a:off x="747713" y="4226123"/>
+            <a:off x="747713" y="4230886"/>
             <a:ext cx="304800" cy="304800"/>
           </a:xfrm>
           <a:prstGeom prst="roundRect">
@@ -9913,7 +9913,7 @@
         </p:nvSpPr>
         <p:spPr>
           <a:xfrm>
-            <a:off x="747713" y="4226123"/>
+            <a:off x="747713" y="4230886"/>
             <a:ext cx="381000" cy="304800"/>
           </a:xfrm>
           <a:prstGeom prst="rect">
@@ -9955,7 +9955,7 @@
         </p:nvSpPr>
         <p:spPr>
           <a:xfrm>
-            <a:off x="1147763" y="4171355"/>
+            <a:off x="1147763" y="4176117"/>
             <a:ext cx="10601325" cy="414338"/>
           </a:xfrm>
           <a:prstGeom prst="rect">
@@ -11079,7 +11079,7 @@
         </p:nvSpPr>
         <p:spPr>
           <a:xfrm>
-            <a:off x="747713" y="1101775"/>
+            <a:off x="747713" y="1097012"/>
             <a:ext cx="11291888" cy="684907"/>
           </a:xfrm>
           <a:prstGeom prst="rect">
@@ -11121,7 +11121,7 @@
         </p:nvSpPr>
         <p:spPr>
           <a:xfrm>
-            <a:off x="747713" y="1939082"/>
+            <a:off x="747713" y="1934319"/>
             <a:ext cx="11001375" cy="414338"/>
           </a:xfrm>
           <a:prstGeom prst="rect">
@@ -11163,8 +11163,8 @@
         </p:nvSpPr>
         <p:spPr>
           <a:xfrm>
-            <a:off x="747713" y="2505819"/>
-            <a:ext cx="10696575" cy="3250257"/>
+            <a:off x="747713" y="2501057"/>
+            <a:ext cx="10696575" cy="3259782"/>
           </a:xfrm>
           <a:prstGeom prst="rect">
             <a:avLst/>
@@ -11810,7 +11810,7 @@
         </p:nvSpPr>
         <p:spPr>
           <a:xfrm>
-            <a:off x="747713" y="1638746"/>
+            <a:off x="747713" y="1632198"/>
             <a:ext cx="11291888" cy="472380"/>
           </a:xfrm>
           <a:prstGeom prst="rect">
@@ -11852,7 +11852,7 @@
         </p:nvSpPr>
         <p:spPr>
           <a:xfrm>
-            <a:off x="747713" y="2339727"/>
+            <a:off x="747713" y="2333179"/>
             <a:ext cx="11291888" cy="383828"/>
           </a:xfrm>
           <a:prstGeom prst="rect">
@@ -11894,7 +11894,7 @@
         </p:nvSpPr>
         <p:spPr>
           <a:xfrm>
-            <a:off x="747713" y="2875955"/>
+            <a:off x="747713" y="2869406"/>
             <a:ext cx="11001375" cy="285750"/>
           </a:xfrm>
           <a:prstGeom prst="rect">
@@ -11936,7 +11936,7 @@
         </p:nvSpPr>
         <p:spPr>
           <a:xfrm>
-            <a:off x="747713" y="3314105"/>
+            <a:off x="747713" y="3307556"/>
             <a:ext cx="5291138" cy="1390650"/>
           </a:xfrm>
           <a:prstGeom prst="roundRect">
@@ -11963,7 +11963,7 @@
         </p:nvSpPr>
         <p:spPr>
           <a:xfrm>
-            <a:off x="747713" y="3314105"/>
+            <a:off x="747713" y="3307556"/>
             <a:ext cx="5367338" cy="1390650"/>
           </a:xfrm>
           <a:prstGeom prst="rect">
@@ -12083,7 +12083,7 @@
         </p:nvSpPr>
         <p:spPr>
           <a:xfrm>
-            <a:off x="6153150" y="3314105"/>
+            <a:off x="6153150" y="3307556"/>
             <a:ext cx="5291138" cy="1390650"/>
           </a:xfrm>
           <a:prstGeom prst="roundRect">
@@ -12110,7 +12110,7 @@
         </p:nvSpPr>
         <p:spPr>
           <a:xfrm>
-            <a:off x="6153150" y="3314105"/>
+            <a:off x="6153150" y="3307556"/>
             <a:ext cx="5672138" cy="1390650"/>
           </a:xfrm>
           <a:prstGeom prst="rect">
@@ -12230,12 +12230,12 @@
         </p:nvSpPr>
         <p:spPr>
           <a:xfrm>
-            <a:off x="747713" y="4780955"/>
-            <a:ext cx="10696575" cy="438150"/>
+            <a:off x="747713" y="4774406"/>
+            <a:ext cx="10696575" cy="451396"/>
           </a:xfrm>
           <a:prstGeom prst="roundRect">
             <a:avLst>
-              <a:gd name="adj" fmla="val 54442"/>
+              <a:gd name="adj" fmla="val 51294"/>
             </a:avLst>
           </a:prstGeom>
           <a:solidFill>
@@ -12257,8 +12257,8 @@
         </p:nvSpPr>
         <p:spPr>
           <a:xfrm>
-            <a:off x="747713" y="4780955"/>
-            <a:ext cx="11077575" cy="438150"/>
+            <a:off x="747713" y="4774406"/>
+            <a:ext cx="11077575" cy="451396"/>
           </a:xfrm>
           <a:prstGeom prst="rect">
             <a:avLst/>
@@ -12413,7 +12413,7 @@
         </p:nvSpPr>
         <p:spPr>
           <a:xfrm>
-            <a:off x="747713" y="1819721"/>
+            <a:off x="747713" y="1814959"/>
             <a:ext cx="11291888" cy="684907"/>
           </a:xfrm>
           <a:prstGeom prst="rect">
@@ -12455,7 +12455,7 @@
         </p:nvSpPr>
         <p:spPr>
           <a:xfrm>
-            <a:off x="747713" y="2657029"/>
+            <a:off x="747713" y="2652266"/>
             <a:ext cx="66675" cy="414338"/>
           </a:xfrm>
           <a:prstGeom prst="rect">
@@ -12475,7 +12475,7 @@
         </p:nvSpPr>
         <p:spPr>
           <a:xfrm>
-            <a:off x="814388" y="2657029"/>
+            <a:off x="814388" y="2652266"/>
             <a:ext cx="10629900" cy="414338"/>
           </a:xfrm>
           <a:prstGeom prst="rect">
@@ -12517,7 +12517,7 @@
         </p:nvSpPr>
         <p:spPr>
           <a:xfrm>
-            <a:off x="747713" y="3223766"/>
+            <a:off x="747713" y="3219004"/>
             <a:ext cx="66675" cy="1243013"/>
           </a:xfrm>
           <a:prstGeom prst="rect">
@@ -12537,7 +12537,7 @@
         </p:nvSpPr>
         <p:spPr>
           <a:xfrm>
-            <a:off x="814388" y="3223766"/>
+            <a:off x="814388" y="3219004"/>
             <a:ext cx="10629900" cy="1243013"/>
           </a:xfrm>
           <a:prstGeom prst="rect">
@@ -12631,8 +12631,8 @@
         </p:nvSpPr>
         <p:spPr>
           <a:xfrm>
-            <a:off x="747713" y="4619179"/>
-            <a:ext cx="66675" cy="418951"/>
+            <a:off x="747713" y="4614416"/>
+            <a:ext cx="66675" cy="428476"/>
           </a:xfrm>
           <a:prstGeom prst="rect">
             <a:avLst/>
@@ -12651,8 +12651,8 @@
         </p:nvSpPr>
         <p:spPr>
           <a:xfrm>
-            <a:off x="814388" y="4619179"/>
-            <a:ext cx="10629900" cy="418951"/>
+            <a:off x="814388" y="4614416"/>
+            <a:ext cx="10629900" cy="428476"/>
           </a:xfrm>
           <a:prstGeom prst="rect">
             <a:avLst/>
@@ -12858,7 +12858,7 @@
         </p:nvSpPr>
         <p:spPr>
           <a:xfrm>
-            <a:off x="747713" y="1388715"/>
+            <a:off x="747713" y="1383953"/>
             <a:ext cx="11291888" cy="684907"/>
           </a:xfrm>
           <a:prstGeom prst="rect">
@@ -12907,18 +12907,18 @@
           </p:nvPr>
         </p:nvGraphicFramePr>
         <p:xfrm>
-          <a:off x="747713" y="2226022"/>
-          <a:ext cx="6366421" cy="914400"/>
+          <a:off x="747713" y="2221260"/>
+          <a:ext cx="6542633" cy="914400"/>
         </p:xfrm>
         <a:graphic>
           <a:graphicData uri="http://schemas.openxmlformats.org/drawingml/2006/table">
             <a:tbl>
               <a:tblPr/>
               <a:tblGrid>
-                <a:gridCol w="850106"/>
-                <a:gridCol w="1500188"/>
-                <a:gridCol w="2820353"/>
-                <a:gridCol w="1500188"/>
+                <a:gridCol w="900113"/>
+                <a:gridCol w="1530191"/>
+                <a:gridCol w="2890361"/>
+                <a:gridCol w="1550194"/>
               </a:tblGrid>
               <a:tr h="0">
                 <a:tc>
@@ -14574,8 +14574,8 @@
         </p:nvSpPr>
         <p:spPr>
           <a:xfrm>
-            <a:off x="747713" y="957709"/>
-            <a:ext cx="11291888" cy="684907"/>
+            <a:off x="747713" y="747713"/>
+            <a:ext cx="11291888" cy="1237357"/>
           </a:xfrm>
           <a:prstGeom prst="rect">
             <a:avLst/>
@@ -14616,7 +14616,7 @@
         </p:nvSpPr>
         <p:spPr>
           <a:xfrm>
-            <a:off x="747713" y="1795016"/>
+            <a:off x="747713" y="2137470"/>
             <a:ext cx="10696575" cy="4105275"/>
           </a:xfrm>
           <a:prstGeom prst="roundRect">
@@ -14643,7 +14643,7 @@
         </p:nvSpPr>
         <p:spPr>
           <a:xfrm>
-            <a:off x="747713" y="1795016"/>
+            <a:off x="747713" y="2137470"/>
             <a:ext cx="11077575" cy="4105275"/>
           </a:xfrm>
           <a:prstGeom prst="rect">
@@ -15669,8 +15669,8 @@
         </p:nvSpPr>
         <p:spPr>
           <a:xfrm>
-            <a:off x="747713" y="1335732"/>
-            <a:ext cx="11291888" cy="684907"/>
+            <a:off x="747713" y="1054745"/>
+            <a:ext cx="11291888" cy="1237357"/>
           </a:xfrm>
           <a:prstGeom prst="rect">
             <a:avLst/>
@@ -15711,7 +15711,7 @@
         </p:nvSpPr>
         <p:spPr>
           <a:xfrm>
-            <a:off x="747713" y="2401639"/>
+            <a:off x="747713" y="2673102"/>
             <a:ext cx="6326386" cy="379809"/>
           </a:xfrm>
           <a:prstGeom prst="rect">
@@ -15753,8 +15753,8 @@
         </p:nvSpPr>
         <p:spPr>
           <a:xfrm>
-            <a:off x="747713" y="2933849"/>
-            <a:ext cx="6326386" cy="1869132"/>
+            <a:off x="747713" y="3205311"/>
+            <a:ext cx="6326386" cy="1878657"/>
           </a:xfrm>
           <a:prstGeom prst="rect">
             <a:avLst/>
@@ -15880,7 +15880,7 @@
         </p:nvSpPr>
         <p:spPr>
           <a:xfrm>
-            <a:off x="747713" y="4955381"/>
+            <a:off x="747713" y="5236369"/>
             <a:ext cx="6326386" cy="414338"/>
           </a:xfrm>
           <a:prstGeom prst="rect">
@@ -15922,7 +15922,7 @@
         </p:nvSpPr>
         <p:spPr>
           <a:xfrm>
-            <a:off x="7226498" y="2173039"/>
+            <a:off x="7226498" y="2444502"/>
             <a:ext cx="4217789" cy="661988"/>
           </a:xfrm>
           <a:prstGeom prst="roundRect">
@@ -16716,7 +16716,7 @@
         </p:nvSpPr>
         <p:spPr>
           <a:xfrm>
-            <a:off x="747713" y="1948458"/>
+            <a:off x="747713" y="1938933"/>
             <a:ext cx="11291888" cy="684907"/>
           </a:xfrm>
           <a:prstGeom prst="rect">
@@ -16758,8 +16758,8 @@
         </p:nvSpPr>
         <p:spPr>
           <a:xfrm>
-            <a:off x="747713" y="2785765"/>
-            <a:ext cx="11001375" cy="418951"/>
+            <a:off x="747713" y="2776240"/>
+            <a:ext cx="11001375" cy="428476"/>
           </a:xfrm>
           <a:prstGeom prst="rect">
             <a:avLst/>
@@ -17150,7 +17150,7 @@
         <p:spPr>
           <a:xfrm>
             <a:off x="747713" y="4490591"/>
-            <a:ext cx="11001375" cy="418951"/>
+            <a:ext cx="11001375" cy="428476"/>
           </a:xfrm>
           <a:prstGeom prst="rect">
             <a:avLst/>
@@ -18336,7 +18336,7 @@
         <p:spPr>
           <a:xfrm>
             <a:off x="747713" y="2922538"/>
-            <a:ext cx="11001375" cy="418951"/>
+            <a:ext cx="11001375" cy="428476"/>
           </a:xfrm>
           <a:prstGeom prst="rect">
             <a:avLst/>
@@ -18489,7 +18489,7 @@
         </p:nvSpPr>
         <p:spPr>
           <a:xfrm>
-            <a:off x="747713" y="3493889"/>
+            <a:off x="747713" y="3503414"/>
             <a:ext cx="5291138" cy="3294459"/>
           </a:xfrm>
           <a:prstGeom prst="roundRect">
@@ -18513,7 +18513,7 @@
         </p:nvSpPr>
         <p:spPr>
           <a:xfrm>
-            <a:off x="871538" y="3846314"/>
+            <a:off x="871538" y="3855839"/>
             <a:ext cx="5043488" cy="379809"/>
           </a:xfrm>
           <a:prstGeom prst="rect">
@@ -18572,7 +18572,7 @@
         </p:nvSpPr>
         <p:spPr>
           <a:xfrm>
-            <a:off x="871538" y="4378523"/>
+            <a:off x="871538" y="4388048"/>
             <a:ext cx="5043488" cy="1381125"/>
           </a:xfrm>
           <a:prstGeom prst="rect">
@@ -18711,7 +18711,7 @@
         </p:nvSpPr>
         <p:spPr>
           <a:xfrm>
-            <a:off x="871538" y="5912048"/>
+            <a:off x="871538" y="5921573"/>
             <a:ext cx="5043488" cy="600075"/>
           </a:xfrm>
           <a:prstGeom prst="roundRect">
@@ -18738,7 +18738,7 @@
         </p:nvSpPr>
         <p:spPr>
           <a:xfrm>
-            <a:off x="871538" y="5912048"/>
+            <a:off x="871538" y="5921573"/>
             <a:ext cx="5119688" cy="600075"/>
           </a:xfrm>
           <a:prstGeom prst="rect">
@@ -18821,16 +18821,16 @@
           </p:nvPr>
         </p:nvGraphicFramePr>
         <p:xfrm>
-          <a:off x="6153150" y="3493889"/>
-          <a:ext cx="1845618" cy="914400"/>
+          <a:off x="6153150" y="3503414"/>
+          <a:ext cx="1884908" cy="914400"/>
         </p:xfrm>
         <a:graphic>
           <a:graphicData uri="http://schemas.openxmlformats.org/drawingml/2006/table">
             <a:tbl>
               <a:tblPr/>
               <a:tblGrid>
-                <a:gridCol w="970121"/>
-                <a:gridCol w="950119"/>
+                <a:gridCol w="990124"/>
+                <a:gridCol w="980123"/>
               </a:tblGrid>
               <a:tr h="0">
                 <a:tc>
@@ -19234,7 +19234,7 @@
         </p:nvSpPr>
         <p:spPr>
           <a:xfrm>
-            <a:off x="6153150" y="5270302"/>
+            <a:off x="6153150" y="5279827"/>
             <a:ext cx="66675" cy="414338"/>
           </a:xfrm>
           <a:prstGeom prst="rect">
@@ -19254,7 +19254,7 @@
         </p:nvSpPr>
         <p:spPr>
           <a:xfrm>
-            <a:off x="6219825" y="5270302"/>
+            <a:off x="6219825" y="5279827"/>
             <a:ext cx="5224462" cy="414338"/>
           </a:xfrm>
           <a:prstGeom prst="rect">
@@ -20712,8 +20712,8 @@
         </p:nvSpPr>
         <p:spPr>
           <a:xfrm>
-            <a:off x="2591246" y="2742307"/>
-            <a:ext cx="1064121" cy="352425"/>
+            <a:off x="2749302" y="2751832"/>
+            <a:ext cx="1103561" cy="352425"/>
           </a:xfrm>
           <a:prstGeom prst="roundRect">
             <a:avLst>
@@ -20734,8 +20734,8 @@
         </p:nvSpPr>
         <p:spPr>
           <a:xfrm>
-            <a:off x="2591246" y="2742307"/>
-            <a:ext cx="1064121" cy="352425"/>
+            <a:off x="2749302" y="2751832"/>
+            <a:ext cx="1103561" cy="352425"/>
           </a:xfrm>
           <a:prstGeom prst="rect">
             <a:avLst/>
@@ -20776,8 +20776,8 @@
         </p:nvSpPr>
         <p:spPr>
           <a:xfrm>
-            <a:off x="2048173" y="3156645"/>
-            <a:ext cx="1047304" cy="352425"/>
+            <a:off x="2129135" y="3166170"/>
+            <a:ext cx="1106091" cy="352425"/>
           </a:xfrm>
           <a:prstGeom prst="roundRect">
             <a:avLst>
@@ -20798,8 +20798,8 @@
         </p:nvSpPr>
         <p:spPr>
           <a:xfrm>
-            <a:off x="2048173" y="3156645"/>
-            <a:ext cx="1047304" cy="352425"/>
+            <a:off x="2129135" y="3166170"/>
+            <a:ext cx="1106091" cy="352425"/>
           </a:xfrm>
           <a:prstGeom prst="rect">
             <a:avLst/>
@@ -20840,8 +20840,8 @@
         </p:nvSpPr>
         <p:spPr>
           <a:xfrm>
-            <a:off x="2065883" y="3570982"/>
-            <a:ext cx="1392138" cy="352425"/>
+            <a:off x="2146102" y="3580507"/>
+            <a:ext cx="1432620" cy="352425"/>
           </a:xfrm>
           <a:prstGeom prst="roundRect">
             <a:avLst>
@@ -20862,8 +20862,8 @@
         </p:nvSpPr>
         <p:spPr>
           <a:xfrm>
-            <a:off x="2065883" y="3570982"/>
-            <a:ext cx="1392138" cy="352425"/>
+            <a:off x="2146102" y="3580507"/>
+            <a:ext cx="1432620" cy="352425"/>
           </a:xfrm>
           <a:prstGeom prst="rect">
             <a:avLst/>
@@ -21058,7 +21058,7 @@
         <p:spPr>
           <a:xfrm>
             <a:off x="747713" y="4666357"/>
-            <a:ext cx="1002804" cy="490538"/>
+            <a:ext cx="1015157" cy="490538"/>
           </a:xfrm>
           <a:prstGeom prst="roundRect">
             <a:avLst>
@@ -21080,7 +21080,7 @@
         <p:spPr>
           <a:xfrm>
             <a:off x="747713" y="4666357"/>
-            <a:ext cx="1002804" cy="490538"/>
+            <a:ext cx="1015157" cy="490538"/>
           </a:xfrm>
           <a:prstGeom prst="rect">
             <a:avLst/>
@@ -21121,8 +21121,8 @@
         </p:nvSpPr>
         <p:spPr>
           <a:xfrm>
-            <a:off x="1788616" y="4666357"/>
-            <a:ext cx="1055638" cy="490538"/>
+            <a:off x="1800969" y="4666357"/>
+            <a:ext cx="1064270" cy="490538"/>
           </a:xfrm>
           <a:prstGeom prst="roundRect">
             <a:avLst>
@@ -21143,8 +21143,8 @@
         </p:nvSpPr>
         <p:spPr>
           <a:xfrm>
-            <a:off x="1788616" y="4666357"/>
-            <a:ext cx="1055638" cy="490538"/>
+            <a:off x="1800969" y="4666357"/>
+            <a:ext cx="1064270" cy="490538"/>
           </a:xfrm>
           <a:prstGeom prst="rect">
             <a:avLst/>
@@ -21185,8 +21185,8 @@
         </p:nvSpPr>
         <p:spPr>
           <a:xfrm>
-            <a:off x="2882354" y="4666357"/>
-            <a:ext cx="932408" cy="490538"/>
+            <a:off x="2903339" y="4666357"/>
+            <a:ext cx="959793" cy="490538"/>
           </a:xfrm>
           <a:prstGeom prst="roundRect">
             <a:avLst>
@@ -21207,8 +21207,8 @@
         </p:nvSpPr>
         <p:spPr>
           <a:xfrm>
-            <a:off x="2882354" y="4666357"/>
-            <a:ext cx="932408" cy="490538"/>
+            <a:off x="2903339" y="4666357"/>
+            <a:ext cx="959793" cy="490538"/>
           </a:xfrm>
           <a:prstGeom prst="rect">
             <a:avLst/>
@@ -21355,7 +21355,7 @@
         </p:nvSpPr>
         <p:spPr>
           <a:xfrm>
-            <a:off x="2020639" y="5949851"/>
+            <a:off x="2039243" y="5949851"/>
             <a:ext cx="266700" cy="266700"/>
           </a:xfrm>
           <a:prstGeom prst="roundRect">
@@ -21377,7 +21377,7 @@
         </p:nvSpPr>
         <p:spPr>
           <a:xfrm>
-            <a:off x="4363938" y="5918895"/>
+            <a:off x="4511576" y="5918895"/>
             <a:ext cx="266700" cy="266700"/>
           </a:xfrm>
           <a:prstGeom prst="roundRect">
@@ -22041,12 +22041,12 @@
         </p:nvSpPr>
         <p:spPr>
           <a:xfrm>
-            <a:off x="2112615" y="4602659"/>
-            <a:ext cx="962471" cy="314325"/>
+            <a:off x="2153245" y="4602659"/>
+            <a:ext cx="999976" cy="323850"/>
           </a:xfrm>
           <a:prstGeom prst="roundRect">
             <a:avLst>
-              <a:gd name="adj" fmla="val 141047"/>
+              <a:gd name="adj" fmla="val 132872"/>
             </a:avLst>
           </a:prstGeom>
           <a:solidFill>
@@ -22063,8 +22063,8 @@
         </p:nvSpPr>
         <p:spPr>
           <a:xfrm>
-            <a:off x="2112615" y="4602659"/>
-            <a:ext cx="962471" cy="314325"/>
+            <a:off x="2153245" y="4602659"/>
+            <a:ext cx="999976" cy="323850"/>
           </a:xfrm>
           <a:prstGeom prst="rect">
             <a:avLst/>
@@ -22375,7 +22375,7 @@
         <p:spPr>
           <a:xfrm>
             <a:off x="747713" y="3369022"/>
-            <a:ext cx="4986635" cy="857250"/>
+            <a:ext cx="4922490" cy="857250"/>
           </a:xfrm>
           <a:prstGeom prst="rect">
             <a:avLst/>
@@ -22467,7 +22467,7 @@
         </p:nvSpPr>
         <p:spPr>
           <a:xfrm>
-            <a:off x="747713" y="1593503"/>
+            <a:off x="747713" y="1707803"/>
             <a:ext cx="11291888" cy="684907"/>
           </a:xfrm>
           <a:prstGeom prst="rect">
@@ -22523,8 +22523,8 @@
         </p:blipFill>
         <p:spPr>
           <a:xfrm>
-            <a:off x="747713" y="2430810"/>
-            <a:ext cx="4286250" cy="2733675"/>
+            <a:off x="747713" y="2545110"/>
+            <a:ext cx="4286250" cy="2505075"/>
           </a:xfrm>
           <a:prstGeom prst="rect">
             <a:avLst/>
@@ -22616,7 +22616,7 @@
         </p:nvSpPr>
         <p:spPr>
           <a:xfrm>
-            <a:off x="747713" y="1033909"/>
+            <a:off x="747713" y="1148209"/>
             <a:ext cx="11291888" cy="1237357"/>
           </a:xfrm>
           <a:prstGeom prst="rect">
@@ -22658,7 +22658,7 @@
         </p:nvSpPr>
         <p:spPr>
           <a:xfrm>
-            <a:off x="747713" y="2423666"/>
+            <a:off x="747713" y="2537966"/>
             <a:ext cx="5272088" cy="414338"/>
           </a:xfrm>
           <a:prstGeom prst="rect">
@@ -22708,8 +22708,8 @@
         </p:blipFill>
         <p:spPr>
           <a:xfrm>
-            <a:off x="747713" y="2990404"/>
-            <a:ext cx="2874020" cy="523875"/>
+            <a:off x="747713" y="3104704"/>
+            <a:ext cx="2939802" cy="523875"/>
           </a:xfrm>
           <a:prstGeom prst="rect">
             <a:avLst/>
@@ -22724,7 +22724,7 @@
         </p:nvSpPr>
         <p:spPr>
           <a:xfrm>
-            <a:off x="6172200" y="2423666"/>
+            <a:off x="6172200" y="2537966"/>
             <a:ext cx="5576888" cy="414338"/>
           </a:xfrm>
           <a:prstGeom prst="rect">
@@ -22780,8 +22780,8 @@
         </p:blipFill>
         <p:spPr>
           <a:xfrm>
-            <a:off x="6172200" y="2990404"/>
-            <a:ext cx="4286250" cy="2733675"/>
+            <a:off x="6172200" y="3104704"/>
+            <a:ext cx="4286250" cy="2505075"/>
           </a:xfrm>
           <a:prstGeom prst="rect">
             <a:avLst/>
@@ -23837,7 +23837,7 @@
         </p:nvSpPr>
         <p:spPr>
           <a:xfrm>
-            <a:off x="747713" y="1748433"/>
+            <a:off x="747713" y="1738908"/>
             <a:ext cx="11291888" cy="1237357"/>
           </a:xfrm>
           <a:prstGeom prst="rect">
@@ -23879,7 +23879,7 @@
         </p:nvSpPr>
         <p:spPr>
           <a:xfrm>
-            <a:off x="747713" y="3138190"/>
+            <a:off x="747713" y="3128665"/>
             <a:ext cx="11001375" cy="414338"/>
           </a:xfrm>
           <a:prstGeom prst="rect">
@@ -23921,8 +23921,8 @@
         </p:nvSpPr>
         <p:spPr>
           <a:xfrm>
-            <a:off x="747713" y="3704927"/>
-            <a:ext cx="11001375" cy="833289"/>
+            <a:off x="747713" y="3695402"/>
+            <a:ext cx="11001375" cy="842814"/>
           </a:xfrm>
           <a:prstGeom prst="rect">
             <a:avLst/>
@@ -24038,7 +24038,7 @@
         <p:spPr>
           <a:xfrm>
             <a:off x="747713" y="4690616"/>
-            <a:ext cx="11001375" cy="418951"/>
+            <a:ext cx="11001375" cy="428476"/>
           </a:xfrm>
           <a:prstGeom prst="rect">
             <a:avLst/>
@@ -24217,8 +24217,8 @@
         </p:nvSpPr>
         <p:spPr>
           <a:xfrm>
-            <a:off x="747713" y="1432024"/>
-            <a:ext cx="11291888" cy="684907"/>
+            <a:off x="747713" y="1146274"/>
+            <a:ext cx="11291888" cy="1237357"/>
           </a:xfrm>
           <a:prstGeom prst="rect">
             <a:avLst/>
@@ -24259,7 +24259,7 @@
         </p:nvSpPr>
         <p:spPr>
           <a:xfrm>
-            <a:off x="747713" y="2345531"/>
+            <a:off x="747713" y="2612231"/>
             <a:ext cx="47625" cy="556468"/>
           </a:xfrm>
           <a:prstGeom prst="rect">
@@ -24284,7 +24284,7 @@
         </p:nvSpPr>
         <p:spPr>
           <a:xfrm>
-            <a:off x="795338" y="2345531"/>
+            <a:off x="795338" y="2612231"/>
             <a:ext cx="11244263" cy="556468"/>
           </a:xfrm>
           <a:prstGeom prst="rect">
@@ -24326,8 +24326,8 @@
         </p:nvSpPr>
         <p:spPr>
           <a:xfrm>
-            <a:off x="747713" y="3054400"/>
-            <a:ext cx="11001375" cy="837902"/>
+            <a:off x="747713" y="3321100"/>
+            <a:ext cx="11001375" cy="856952"/>
           </a:xfrm>
           <a:prstGeom prst="rect">
             <a:avLst/>
@@ -24442,7 +24442,7 @@
         </p:nvSpPr>
         <p:spPr>
           <a:xfrm>
-            <a:off x="747713" y="4044702"/>
+            <a:off x="747713" y="4330452"/>
             <a:ext cx="10696575" cy="1381125"/>
           </a:xfrm>
           <a:prstGeom prst="rect">
@@ -24604,7 +24604,7 @@
         </p:nvSpPr>
         <p:spPr>
           <a:xfrm>
-            <a:off x="747713" y="2231827"/>
+            <a:off x="747713" y="2222302"/>
             <a:ext cx="11291888" cy="684907"/>
           </a:xfrm>
           <a:prstGeom prst="rect">
@@ -24646,8 +24646,8 @@
         </p:nvSpPr>
         <p:spPr>
           <a:xfrm>
-            <a:off x="747713" y="3069134"/>
-            <a:ext cx="11001375" cy="837902"/>
+            <a:off x="747713" y="3059609"/>
+            <a:ext cx="11001375" cy="856952"/>
           </a:xfrm>
           <a:prstGeom prst="rect">
             <a:avLst/>
@@ -24762,7 +24762,7 @@
         </p:nvSpPr>
         <p:spPr>
           <a:xfrm>
-            <a:off x="747713" y="4059436"/>
+            <a:off x="747713" y="4068961"/>
             <a:ext cx="11001375" cy="414338"/>
           </a:xfrm>
           <a:prstGeom prst="rect">
@@ -25447,18 +25447,18 @@
         </p:nvGraphicFramePr>
         <p:xfrm>
           <a:off x="747713" y="2493615"/>
-          <a:ext cx="4758779" cy="914400"/>
+          <a:ext cx="5009257" cy="914400"/>
         </p:xfrm>
         <a:graphic>
           <a:graphicData uri="http://schemas.openxmlformats.org/drawingml/2006/table">
             <a:tbl>
               <a:tblPr/>
               <a:tblGrid>
-                <a:gridCol w="890111"/>
-                <a:gridCol w="1100138"/>
-                <a:gridCol w="1090136"/>
-                <a:gridCol w="1090136"/>
-                <a:gridCol w="820103"/>
+                <a:gridCol w="920115"/>
+                <a:gridCol w="1160145"/>
+                <a:gridCol w="1150144"/>
+                <a:gridCol w="1150144"/>
+                <a:gridCol w="880110"/>
               </a:tblGrid>
               <a:tr h="0">
                 <a:tc>
@@ -27201,7 +27201,7 @@
         </p:nvSpPr>
         <p:spPr>
           <a:xfrm>
-            <a:off x="747713" y="1824484"/>
+            <a:off x="747713" y="1821507"/>
             <a:ext cx="11291888" cy="684907"/>
           </a:xfrm>
           <a:prstGeom prst="rect">
@@ -27243,8 +27243,8 @@
         </p:nvSpPr>
         <p:spPr>
           <a:xfrm>
-            <a:off x="9069437" y="2661791"/>
-            <a:ext cx="2374850" cy="404813"/>
+            <a:off x="8944570" y="2658814"/>
+            <a:ext cx="2499717" cy="404813"/>
           </a:xfrm>
           <a:prstGeom prst="roundRect">
             <a:avLst>
@@ -27270,8 +27270,8 @@
         </p:nvSpPr>
         <p:spPr>
           <a:xfrm>
-            <a:off x="9069437" y="2661791"/>
-            <a:ext cx="2451050" cy="404813"/>
+            <a:off x="8944570" y="2658814"/>
+            <a:ext cx="2575917" cy="404813"/>
           </a:xfrm>
           <a:prstGeom prst="rect">
             <a:avLst/>
@@ -27312,8 +27312,8 @@
         </p:nvSpPr>
         <p:spPr>
           <a:xfrm>
-            <a:off x="747713" y="3161854"/>
-            <a:ext cx="2181820" cy="852488"/>
+            <a:off x="747713" y="3158877"/>
+            <a:ext cx="2298353" cy="852488"/>
           </a:xfrm>
           <a:prstGeom prst="roundRect">
             <a:avLst>
@@ -27339,8 +27339,8 @@
         </p:nvSpPr>
         <p:spPr>
           <a:xfrm>
-            <a:off x="747713" y="3161854"/>
-            <a:ext cx="2258020" cy="852488"/>
+            <a:off x="747713" y="3158877"/>
+            <a:ext cx="2374553" cy="852488"/>
           </a:xfrm>
           <a:prstGeom prst="rect">
             <a:avLst/>
@@ -27467,8 +27467,8 @@
         </p:nvSpPr>
         <p:spPr>
           <a:xfrm>
-            <a:off x="9367391" y="4109591"/>
-            <a:ext cx="2076896" cy="404813"/>
+            <a:off x="9267379" y="4106614"/>
+            <a:ext cx="2176909" cy="404813"/>
           </a:xfrm>
           <a:prstGeom prst="roundRect">
             <a:avLst>
@@ -27494,8 +27494,8 @@
         </p:nvSpPr>
         <p:spPr>
           <a:xfrm>
-            <a:off x="9367391" y="4109591"/>
-            <a:ext cx="2153096" cy="404813"/>
+            <a:off x="9267379" y="4106614"/>
+            <a:ext cx="2253109" cy="404813"/>
           </a:xfrm>
           <a:prstGeom prst="rect">
             <a:avLst/>
@@ -27536,12 +27536,12 @@
         </p:nvSpPr>
         <p:spPr>
           <a:xfrm>
-            <a:off x="747713" y="4609654"/>
-            <a:ext cx="5280868" cy="423863"/>
+            <a:off x="747713" y="4606677"/>
+            <a:ext cx="5599509" cy="429816"/>
           </a:xfrm>
           <a:prstGeom prst="roundRect">
             <a:avLst>
-              <a:gd name="adj" fmla="val 107865"/>
+              <a:gd name="adj" fmla="val 106371"/>
             </a:avLst>
           </a:prstGeom>
           <a:solidFill>
@@ -27563,8 +27563,8 @@
         </p:nvSpPr>
         <p:spPr>
           <a:xfrm>
-            <a:off x="747713" y="4609654"/>
-            <a:ext cx="5357068" cy="423863"/>
+            <a:off x="747713" y="4606677"/>
+            <a:ext cx="5675709" cy="429816"/>
           </a:xfrm>
           <a:prstGeom prst="rect">
             <a:avLst/>
@@ -28258,7 +28258,7 @@
         </p:nvSpPr>
         <p:spPr>
           <a:xfrm>
-            <a:off x="747713" y="2245965"/>
+            <a:off x="747713" y="2242989"/>
             <a:ext cx="11291888" cy="684907"/>
           </a:xfrm>
           <a:prstGeom prst="rect">
@@ -28300,8 +28300,8 @@
         </p:nvSpPr>
         <p:spPr>
           <a:xfrm>
-            <a:off x="747713" y="3083272"/>
-            <a:ext cx="10696575" cy="404813"/>
+            <a:off x="747713" y="3080296"/>
+            <a:ext cx="10696575" cy="410766"/>
           </a:xfrm>
           <a:prstGeom prst="rect">
             <a:avLst/>
@@ -28320,8 +28320,8 @@
         </p:nvSpPr>
         <p:spPr>
           <a:xfrm>
-            <a:off x="747713" y="3083272"/>
-            <a:ext cx="57150" cy="404813"/>
+            <a:off x="747713" y="3080296"/>
+            <a:ext cx="57150" cy="410766"/>
           </a:xfrm>
           <a:prstGeom prst="rect">
             <a:avLst/>
@@ -28345,8 +28345,8 @@
         </p:nvSpPr>
         <p:spPr>
           <a:xfrm>
-            <a:off x="747713" y="3083272"/>
-            <a:ext cx="11077575" cy="404813"/>
+            <a:off x="747713" y="3080296"/>
+            <a:ext cx="11077575" cy="410766"/>
           </a:xfrm>
           <a:prstGeom prst="rect">
             <a:avLst/>
@@ -28475,7 +28475,7 @@
         </p:nvSpPr>
         <p:spPr>
           <a:xfrm>
-            <a:off x="747713" y="3640485"/>
+            <a:off x="747713" y="3643461"/>
             <a:ext cx="11001375" cy="414338"/>
           </a:xfrm>
           <a:prstGeom prst="rect">
@@ -28517,7 +28517,7 @@
         </p:nvSpPr>
         <p:spPr>
           <a:xfrm>
-            <a:off x="747713" y="4207222"/>
+            <a:off x="747713" y="4210199"/>
             <a:ext cx="10696575" cy="404813"/>
           </a:xfrm>
           <a:prstGeom prst="rect">
@@ -28537,7 +28537,7 @@
         </p:nvSpPr>
         <p:spPr>
           <a:xfrm>
-            <a:off x="747713" y="4207222"/>
+            <a:off x="747713" y="4210199"/>
             <a:ext cx="57150" cy="404813"/>
           </a:xfrm>
           <a:prstGeom prst="rect">
@@ -28562,7 +28562,7 @@
         </p:nvSpPr>
         <p:spPr>
           <a:xfrm>
-            <a:off x="747713" y="4207222"/>
+            <a:off x="747713" y="4210199"/>
             <a:ext cx="11077575" cy="404813"/>
           </a:xfrm>
           <a:prstGeom prst="rect">
@@ -28774,8 +28774,8 @@
         </p:nvSpPr>
         <p:spPr>
           <a:xfrm>
-            <a:off x="5185321" y="3026122"/>
-            <a:ext cx="1821359" cy="604838"/>
+            <a:off x="5129510" y="3026122"/>
+            <a:ext cx="1932831" cy="604838"/>
           </a:xfrm>
           <a:prstGeom prst="roundRect">
             <a:avLst>
@@ -28796,8 +28796,8 @@
         </p:nvSpPr>
         <p:spPr>
           <a:xfrm>
-            <a:off x="5185321" y="3026122"/>
-            <a:ext cx="1897559" cy="604838"/>
+            <a:off x="5129510" y="3026122"/>
+            <a:ext cx="2009031" cy="604838"/>
           </a:xfrm>
           <a:prstGeom prst="rect">
             <a:avLst/>
@@ -29376,16 +29376,16 @@
         </p:nvGraphicFramePr>
         <p:xfrm>
           <a:off x="747713" y="3649563"/>
-          <a:ext cx="3720257" cy="914400"/>
+          <a:ext cx="3917603" cy="914400"/>
         </p:xfrm>
         <a:graphic>
           <a:graphicData uri="http://schemas.openxmlformats.org/drawingml/2006/table">
             <a:tbl>
               <a:tblPr/>
               <a:tblGrid>
-                <a:gridCol w="590074"/>
-                <a:gridCol w="1210151"/>
-                <a:gridCol w="2090261"/>
+                <a:gridCol w="620078"/>
+                <a:gridCol w="1280160"/>
+                <a:gridCol w="2200275"/>
               </a:tblGrid>
               <a:tr h="0">
                 <a:tc>
@@ -30811,7 +30811,7 @@
         </p:nvSpPr>
         <p:spPr>
           <a:xfrm>
-            <a:off x="747713" y="2310259"/>
+            <a:off x="747713" y="2305496"/>
             <a:ext cx="11291888" cy="684907"/>
           </a:xfrm>
           <a:prstGeom prst="rect">
@@ -30853,8 +30853,8 @@
         </p:nvSpPr>
         <p:spPr>
           <a:xfrm>
-            <a:off x="747713" y="3147566"/>
-            <a:ext cx="11001375" cy="833289"/>
+            <a:off x="747713" y="3142804"/>
+            <a:ext cx="11001375" cy="842814"/>
           </a:xfrm>
           <a:prstGeom prst="rect">
             <a:avLst/>
@@ -30912,7 +30912,7 @@
         </p:nvSpPr>
         <p:spPr>
           <a:xfrm>
-            <a:off x="747713" y="4133255"/>
+            <a:off x="747713" y="4138017"/>
             <a:ext cx="11001375" cy="414338"/>
           </a:xfrm>
           <a:prstGeom prst="rect">
@@ -31055,7 +31055,7 @@
         </p:nvSpPr>
         <p:spPr>
           <a:xfrm>
-            <a:off x="747713" y="1826865"/>
+            <a:off x="747713" y="1822103"/>
             <a:ext cx="7634288" cy="684907"/>
           </a:xfrm>
           <a:prstGeom prst="rect">
@@ -31097,8 +31097,8 @@
         </p:nvSpPr>
         <p:spPr>
           <a:xfrm>
-            <a:off x="747713" y="2664172"/>
-            <a:ext cx="7343775" cy="833289"/>
+            <a:off x="747713" y="2659410"/>
+            <a:ext cx="7343775" cy="842814"/>
           </a:xfrm>
           <a:prstGeom prst="rect">
             <a:avLst/>
@@ -31159,7 +31159,7 @@
         </p:nvSpPr>
         <p:spPr>
           <a:xfrm>
-            <a:off x="747713" y="3649861"/>
+            <a:off x="747713" y="3654623"/>
             <a:ext cx="7038975" cy="1381125"/>
           </a:xfrm>
           <a:prstGeom prst="rect">
@@ -31760,8 +31760,8 @@
         </p:nvSpPr>
         <p:spPr>
           <a:xfrm>
-            <a:off x="5997327" y="3538091"/>
-            <a:ext cx="349746" cy="342900"/>
+            <a:off x="5981700" y="3538091"/>
+            <a:ext cx="381000" cy="342900"/>
           </a:xfrm>
           <a:prstGeom prst="rect">
             <a:avLst/>
@@ -32359,7 +32359,7 @@
         <p:spPr>
           <a:xfrm>
             <a:off x="0" y="6515100"/>
-            <a:ext cx="246459" cy="342900"/>
+            <a:ext cx="261640" cy="342900"/>
           </a:xfrm>
           <a:prstGeom prst="rect">
             <a:avLst/>
@@ -32378,7 +32378,7 @@
         </p:nvSpPr>
         <p:spPr>
           <a:xfrm>
-            <a:off x="747713" y="2243584"/>
+            <a:off x="747713" y="2036415"/>
             <a:ext cx="11291888" cy="1237357"/>
           </a:xfrm>
           <a:prstGeom prst="rect">
@@ -32420,7 +32420,7 @@
         </p:nvSpPr>
         <p:spPr>
           <a:xfrm>
-            <a:off x="747713" y="3633341"/>
+            <a:off x="747713" y="3426172"/>
             <a:ext cx="11001375" cy="414338"/>
           </a:xfrm>
           <a:prstGeom prst="rect">
@@ -32496,8 +32496,8 @@
         </p:nvSpPr>
         <p:spPr>
           <a:xfrm>
-            <a:off x="747713" y="4200079"/>
-            <a:ext cx="11001375" cy="414338"/>
+            <a:off x="747713" y="3992910"/>
+            <a:ext cx="11001375" cy="828675"/>
           </a:xfrm>
           <a:prstGeom prst="rect">
             <a:avLst/>
@@ -33261,9 +33261,9 @@
             <a:tbl>
               <a:tblPr/>
               <a:tblGrid>
-                <a:gridCol w="830104"/>
-                <a:gridCol w="920115"/>
-                <a:gridCol w="920115"/>
+                <a:gridCol w="870109"/>
+                <a:gridCol w="930116"/>
+                <a:gridCol w="930116"/>
               </a:tblGrid>
               <a:tr h="0">
                 <a:tc>
@@ -35372,7 +35372,7 @@
         </p:nvSpPr>
         <p:spPr>
           <a:xfrm>
-            <a:off x="747713" y="852934"/>
+            <a:off x="747713" y="841177"/>
             <a:ext cx="11291888" cy="1237357"/>
           </a:xfrm>
           <a:prstGeom prst="rect">
@@ -35414,8 +35414,8 @@
         </p:nvSpPr>
         <p:spPr>
           <a:xfrm>
-            <a:off x="747713" y="2242691"/>
-            <a:ext cx="11001375" cy="833289"/>
+            <a:off x="747713" y="2230934"/>
+            <a:ext cx="11001375" cy="856952"/>
           </a:xfrm>
           <a:prstGeom prst="rect">
             <a:avLst/>
@@ -35564,7 +35564,7 @@
         </p:nvSpPr>
         <p:spPr>
           <a:xfrm>
-            <a:off x="747713" y="3228380"/>
+            <a:off x="747713" y="3240286"/>
             <a:ext cx="11001375" cy="1243013"/>
           </a:xfrm>
           <a:prstGeom prst="rect">
@@ -35674,7 +35674,7 @@
         </p:nvSpPr>
         <p:spPr>
           <a:xfrm>
-            <a:off x="747713" y="4623792"/>
+            <a:off x="747713" y="4635698"/>
             <a:ext cx="10696575" cy="1381125"/>
           </a:xfrm>
           <a:prstGeom prst="rect">
@@ -36837,8 +36837,8 @@
         </p:nvSpPr>
         <p:spPr>
           <a:xfrm>
-            <a:off x="747713" y="1558975"/>
-            <a:ext cx="11291888" cy="684907"/>
+            <a:off x="747713" y="1282750"/>
+            <a:ext cx="11291888" cy="1237357"/>
           </a:xfrm>
           <a:prstGeom prst="rect">
             <a:avLst/>
@@ -36879,7 +36879,7 @@
         </p:nvSpPr>
         <p:spPr>
           <a:xfrm>
-            <a:off x="747713" y="2396282"/>
+            <a:off x="747713" y="2672507"/>
             <a:ext cx="10696575" cy="2419350"/>
           </a:xfrm>
           <a:prstGeom prst="rect">
@@ -36930,7 +36930,7 @@
         </p:blipFill>
         <p:spPr>
           <a:xfrm>
-            <a:off x="1300163" y="2810619"/>
+            <a:off x="1300163" y="3086844"/>
             <a:ext cx="1905000" cy="1905000"/>
           </a:xfrm>
           <a:prstGeom prst="rect">
@@ -36946,7 +36946,7 @@
         </p:nvSpPr>
         <p:spPr>
           <a:xfrm>
-            <a:off x="747713" y="4884688"/>
+            <a:off x="747713" y="5160913"/>
             <a:ext cx="10696575" cy="414338"/>
           </a:xfrm>
           <a:prstGeom prst="rect">
@@ -37066,7 +37066,7 @@
         </p:nvSpPr>
         <p:spPr>
           <a:xfrm>
-            <a:off x="747713" y="1824484"/>
+            <a:off x="747713" y="1819721"/>
             <a:ext cx="11291888" cy="1237357"/>
           </a:xfrm>
           <a:prstGeom prst="rect">
@@ -37131,7 +37131,7 @@
         </p:nvSpPr>
         <p:spPr>
           <a:xfrm>
-            <a:off x="747713" y="3261866"/>
+            <a:off x="747713" y="3257104"/>
             <a:ext cx="666750" cy="171450"/>
           </a:xfrm>
           <a:prstGeom prst="rect">
@@ -37173,8 +37173,8 @@
         </p:nvSpPr>
         <p:spPr>
           <a:xfrm>
-            <a:off x="4266009" y="3280916"/>
-            <a:ext cx="456754" cy="204788"/>
+            <a:off x="4460081" y="3285679"/>
+            <a:ext cx="454670" cy="204788"/>
           </a:xfrm>
           <a:prstGeom prst="roundRect">
             <a:avLst>
@@ -37195,8 +37195,8 @@
         </p:nvSpPr>
         <p:spPr>
           <a:xfrm>
-            <a:off x="4266009" y="3280916"/>
-            <a:ext cx="532954" cy="204788"/>
+            <a:off x="4460081" y="3285679"/>
+            <a:ext cx="530870" cy="204788"/>
           </a:xfrm>
           <a:prstGeom prst="rect">
             <a:avLst/>
@@ -37237,8 +37237,8 @@
         </p:nvSpPr>
         <p:spPr>
           <a:xfrm>
-            <a:off x="1338263" y="3261866"/>
-            <a:ext cx="3384500" cy="228600"/>
+            <a:off x="1338263" y="3257104"/>
+            <a:ext cx="3576489" cy="233362"/>
           </a:xfrm>
           <a:prstGeom prst="rect">
             <a:avLst/>
@@ -37313,7 +37313,7 @@
         </p:nvSpPr>
         <p:spPr>
           <a:xfrm>
-            <a:off x="747713" y="3880991"/>
+            <a:off x="747713" y="3885754"/>
             <a:ext cx="10696575" cy="9525"/>
           </a:xfrm>
           <a:prstGeom prst="rect">
@@ -37378,8 +37378,8 @@
         </p:nvSpPr>
         <p:spPr>
           <a:xfrm>
-            <a:off x="3330476" y="3614291"/>
-            <a:ext cx="449163" cy="204788"/>
+            <a:off x="3472309" y="3623816"/>
+            <a:ext cx="452438" cy="204788"/>
           </a:xfrm>
           <a:prstGeom prst="roundRect">
             <a:avLst>
@@ -37400,8 +37400,8 @@
         </p:nvSpPr>
         <p:spPr>
           <a:xfrm>
-            <a:off x="3330476" y="3614291"/>
-            <a:ext cx="525363" cy="204788"/>
+            <a:off x="3472309" y="3623816"/>
+            <a:ext cx="528638" cy="204788"/>
           </a:xfrm>
           <a:prstGeom prst="rect">
             <a:avLst/>
@@ -37443,7 +37443,7 @@
         <p:spPr>
           <a:xfrm>
             <a:off x="1338263" y="3595241"/>
-            <a:ext cx="2441377" cy="228600"/>
+            <a:ext cx="2586484" cy="233362"/>
           </a:xfrm>
           <a:prstGeom prst="rect">
             <a:avLst/>
@@ -37518,7 +37518,7 @@
         </p:nvSpPr>
         <p:spPr>
           <a:xfrm>
-            <a:off x="747713" y="3928616"/>
+            <a:off x="747713" y="3933379"/>
             <a:ext cx="666750" cy="171450"/>
           </a:xfrm>
           <a:prstGeom prst="rect">
@@ -37560,8 +37560,8 @@
         </p:nvSpPr>
         <p:spPr>
           <a:xfrm>
-            <a:off x="1338263" y="3928616"/>
-            <a:ext cx="2761506" cy="228600"/>
+            <a:off x="1338263" y="3933379"/>
+            <a:ext cx="2933551" cy="228600"/>
           </a:xfrm>
           <a:prstGeom prst="rect">
             <a:avLst/>
@@ -37636,7 +37636,7 @@
         </p:nvSpPr>
         <p:spPr>
           <a:xfrm>
-            <a:off x="747713" y="4204841"/>
+            <a:off x="747713" y="4209604"/>
             <a:ext cx="11001375" cy="828675"/>
           </a:xfrm>
           <a:prstGeom prst="rect">
@@ -37863,10 +37863,10 @@
               <a:tblPr/>
               <a:tblGrid>
                 <a:gridCol w="420053"/>
+                <a:gridCol w="490061"/>
+                <a:gridCol w="410051"/>
                 <a:gridCol w="470059"/>
-                <a:gridCol w="420053"/>
-                <a:gridCol w="460058"/>
-                <a:gridCol w="460058"/>
+                <a:gridCol w="490061"/>
               </a:tblGrid>
               <a:tr h="0">
                 <a:tc>
@@ -39852,10 +39852,10 @@
               <a:tblPr/>
               <a:tblGrid>
                 <a:gridCol w="420053"/>
-                <a:gridCol w="540068"/>
-                <a:gridCol w="420053"/>
-                <a:gridCol w="460058"/>
-                <a:gridCol w="460058"/>
+                <a:gridCol w="570071"/>
+                <a:gridCol w="410051"/>
+                <a:gridCol w="470059"/>
+                <a:gridCol w="490061"/>
               </a:tblGrid>
               <a:tr h="0">
                 <a:tc>
@@ -42117,8 +42117,8 @@
         </p:nvSpPr>
         <p:spPr>
           <a:xfrm>
-            <a:off x="2519660" y="3294311"/>
-            <a:ext cx="437704" cy="179487"/>
+            <a:off x="2603450" y="3294311"/>
+            <a:ext cx="435620" cy="179487"/>
           </a:xfrm>
           <a:prstGeom prst="roundRect">
             <a:avLst>
@@ -42139,8 +42139,8 @@
         </p:nvSpPr>
         <p:spPr>
           <a:xfrm>
-            <a:off x="2519660" y="3294311"/>
-            <a:ext cx="513904" cy="179487"/>
+            <a:off x="2603450" y="3294311"/>
+            <a:ext cx="511820" cy="179487"/>
           </a:xfrm>
           <a:prstGeom prst="rect">
             <a:avLst/>
@@ -42182,7 +42182,7 @@
         <p:spPr>
           <a:xfrm>
             <a:off x="1157288" y="3294311"/>
-            <a:ext cx="1800076" cy="179487"/>
+            <a:ext cx="1881783" cy="179487"/>
           </a:xfrm>
           <a:prstGeom prst="rect">
             <a:avLst/>
@@ -42287,8 +42287,8 @@
         </p:nvSpPr>
         <p:spPr>
           <a:xfrm>
-            <a:off x="2591991" y="3541961"/>
-            <a:ext cx="430113" cy="179487"/>
+            <a:off x="2689622" y="3541961"/>
+            <a:ext cx="433388" cy="179487"/>
           </a:xfrm>
           <a:prstGeom prst="roundRect">
             <a:avLst>
@@ -42309,8 +42309,8 @@
         </p:nvSpPr>
         <p:spPr>
           <a:xfrm>
-            <a:off x="2591991" y="3541961"/>
-            <a:ext cx="506313" cy="179487"/>
+            <a:off x="2689622" y="3541961"/>
+            <a:ext cx="509587" cy="179487"/>
           </a:xfrm>
           <a:prstGeom prst="rect">
             <a:avLst/>
@@ -42352,7 +42352,7 @@
         <p:spPr>
           <a:xfrm>
             <a:off x="1157288" y="3541961"/>
-            <a:ext cx="1864816" cy="179487"/>
+            <a:ext cx="1965722" cy="179487"/>
           </a:xfrm>
           <a:prstGeom prst="rect">
             <a:avLst/>
@@ -42457,8 +42457,8 @@
         </p:nvSpPr>
         <p:spPr>
           <a:xfrm>
-            <a:off x="2194322" y="3789611"/>
-            <a:ext cx="428030" cy="179487"/>
+            <a:off x="2260253" y="3789611"/>
+            <a:ext cx="429071" cy="179487"/>
           </a:xfrm>
           <a:prstGeom prst="roundRect">
             <a:avLst>
@@ -42479,8 +42479,8 @@
         </p:nvSpPr>
         <p:spPr>
           <a:xfrm>
-            <a:off x="2194322" y="3789611"/>
-            <a:ext cx="504230" cy="179487"/>
+            <a:off x="2260253" y="3789611"/>
+            <a:ext cx="505271" cy="179487"/>
           </a:xfrm>
           <a:prstGeom prst="rect">
             <a:avLst/>
@@ -42522,7 +42522,7 @@
         <p:spPr>
           <a:xfrm>
             <a:off x="1157288" y="3789611"/>
-            <a:ext cx="1465064" cy="179487"/>
+            <a:ext cx="1532037" cy="179487"/>
           </a:xfrm>
           <a:prstGeom prst="rect">
             <a:avLst/>
@@ -42719,7 +42719,7 @@
         <p:spPr>
           <a:xfrm>
             <a:off x="6581775" y="3294311"/>
-            <a:ext cx="1172319" cy="179487"/>
+            <a:ext cx="1244203" cy="179487"/>
           </a:xfrm>
           <a:prstGeom prst="rect">
             <a:avLst/>
@@ -42824,8 +42824,8 @@
         </p:nvSpPr>
         <p:spPr>
           <a:xfrm>
-            <a:off x="7543949" y="3541961"/>
-            <a:ext cx="442020" cy="179487"/>
+            <a:off x="7599908" y="3541961"/>
+            <a:ext cx="441722" cy="179487"/>
           </a:xfrm>
           <a:prstGeom prst="roundRect">
             <a:avLst>
@@ -42846,8 +42846,8 @@
         </p:nvSpPr>
         <p:spPr>
           <a:xfrm>
-            <a:off x="7543949" y="3541961"/>
-            <a:ext cx="518220" cy="179487"/>
+            <a:off x="7599908" y="3541961"/>
+            <a:ext cx="517922" cy="179487"/>
           </a:xfrm>
           <a:prstGeom prst="rect">
             <a:avLst/>
@@ -42889,7 +42889,7 @@
         <p:spPr>
           <a:xfrm>
             <a:off x="6581775" y="3541961"/>
-            <a:ext cx="1404193" cy="179487"/>
+            <a:ext cx="1459855" cy="179487"/>
           </a:xfrm>
           <a:prstGeom prst="rect">
             <a:avLst/>
@@ -42994,8 +42994,8 @@
         </p:nvSpPr>
         <p:spPr>
           <a:xfrm>
-            <a:off x="7468791" y="3789611"/>
-            <a:ext cx="416570" cy="179487"/>
+            <a:off x="7531150" y="3789611"/>
+            <a:ext cx="419546" cy="179487"/>
           </a:xfrm>
           <a:prstGeom prst="roundRect">
             <a:avLst>
@@ -43016,8 +43016,8 @@
         </p:nvSpPr>
         <p:spPr>
           <a:xfrm>
-            <a:off x="7468791" y="3789611"/>
-            <a:ext cx="492770" cy="179487"/>
+            <a:off x="7531150" y="3789611"/>
+            <a:ext cx="495746" cy="179487"/>
           </a:xfrm>
           <a:prstGeom prst="rect">
             <a:avLst/>
@@ -43059,7 +43059,7 @@
         <p:spPr>
           <a:xfrm>
             <a:off x="6581775" y="3789611"/>
-            <a:ext cx="1303586" cy="179487"/>
+            <a:ext cx="1368921" cy="179487"/>
           </a:xfrm>
           <a:prstGeom prst="rect">
             <a:avLst/>
@@ -43337,7 +43337,7 @@
         <p:spPr>
           <a:xfrm>
             <a:off x="1138238" y="3121372"/>
-            <a:ext cx="9389864" cy="400050"/>
+            <a:ext cx="9371558" cy="400050"/>
           </a:xfrm>
           <a:prstGeom prst="rect">
             <a:avLst/>
@@ -43404,8 +43404,8 @@
         </p:nvSpPr>
         <p:spPr>
           <a:xfrm>
-            <a:off x="10166152" y="3164235"/>
-            <a:ext cx="1248787" cy="314325"/>
+            <a:off x="10147846" y="3164235"/>
+            <a:ext cx="1268923" cy="314325"/>
           </a:xfrm>
           <a:prstGeom prst="rect">
             <a:avLst/>
@@ -43489,7 +43489,7 @@
         <p:spPr>
           <a:xfrm>
             <a:off x="890588" y="3702397"/>
-            <a:ext cx="347811" cy="414338"/>
+            <a:ext cx="310455" cy="414338"/>
           </a:xfrm>
           <a:prstGeom prst="rect">
             <a:avLst/>
@@ -43530,8 +43530,8 @@
         </p:nvSpPr>
         <p:spPr>
           <a:xfrm>
-            <a:off x="1181249" y="3809554"/>
-            <a:ext cx="8875216" cy="200025"/>
+            <a:off x="1143893" y="3809554"/>
+            <a:ext cx="8900666" cy="200025"/>
           </a:xfrm>
           <a:prstGeom prst="rect">
             <a:avLst/>
@@ -43572,8 +43572,8 @@
         </p:nvSpPr>
         <p:spPr>
           <a:xfrm>
-            <a:off x="9694515" y="3752404"/>
-            <a:ext cx="1740247" cy="314325"/>
+            <a:off x="9682609" y="3752404"/>
+            <a:ext cx="1752154" cy="314325"/>
           </a:xfrm>
           <a:prstGeom prst="rect">
             <a:avLst/>
@@ -43652,7 +43652,7 @@
         <p:spPr>
           <a:xfrm>
             <a:off x="890588" y="4297710"/>
-            <a:ext cx="347811" cy="414338"/>
+            <a:ext cx="310455" cy="414338"/>
           </a:xfrm>
           <a:prstGeom prst="rect">
             <a:avLst/>
@@ -43693,8 +43693,8 @@
         </p:nvSpPr>
         <p:spPr>
           <a:xfrm>
-            <a:off x="1181249" y="4404866"/>
-            <a:ext cx="8392120" cy="200025"/>
+            <a:off x="1143893" y="4404866"/>
+            <a:ext cx="8404622" cy="200025"/>
           </a:xfrm>
           <a:prstGeom prst="rect">
             <a:avLst/>
@@ -43735,8 +43735,8 @@
         </p:nvSpPr>
         <p:spPr>
           <a:xfrm>
-            <a:off x="9211419" y="4347716"/>
-            <a:ext cx="2223343" cy="314325"/>
+            <a:off x="9186565" y="4347716"/>
+            <a:ext cx="2248198" cy="314325"/>
           </a:xfrm>
           <a:prstGeom prst="rect">
             <a:avLst/>
@@ -43913,7 +43913,7 @@
         </p:nvSpPr>
         <p:spPr>
           <a:xfrm>
-            <a:off x="747713" y="1657796"/>
+            <a:off x="747713" y="1238696"/>
             <a:ext cx="11291888" cy="684907"/>
           </a:xfrm>
           <a:prstGeom prst="rect">
@@ -43962,17 +43962,17 @@
           </p:nvPr>
         </p:nvGraphicFramePr>
         <p:xfrm>
-          <a:off x="747713" y="2495104"/>
-          <a:ext cx="10355312" cy="914400"/>
+          <a:off x="747713" y="2076004"/>
+          <a:ext cx="10696575" cy="914400"/>
         </p:xfrm>
         <a:graphic>
           <a:graphicData uri="http://schemas.openxmlformats.org/drawingml/2006/table">
             <a:tbl>
               <a:tblPr/>
               <a:tblGrid>
-                <a:gridCol w="3640455"/>
-                <a:gridCol w="3710464"/>
-                <a:gridCol w="3520440"/>
+                <a:gridCol w="3740468"/>
+                <a:gridCol w="3840480"/>
+                <a:gridCol w="3630454"/>
               </a:tblGrid>
               <a:tr h="0">
                 <a:tc>

--- a/output-pptx/test-output.pptx
+++ b/output-pptx/test-output.pptx
@@ -72,9 +72,10 @@
     <p:sldId id="320" r:id="rId66"/>
     <p:sldId id="321" r:id="rId67"/>
     <p:sldId id="322" r:id="rId68"/>
+    <p:sldId id="323" r:id="rId69"/>
   </p:sldIdLst>
   <p:notesMasterIdLst>
-    <p:notesMasterId r:id="rId69"/>
+    <p:notesMasterId r:id="rId70"/>
   </p:notesMasterIdLst>
   <p:sldSz cx="12192000" cy="6858000"/>
   <p:notesSz cx="6858000" cy="12192000"/>
@@ -6159,6 +6160,97 @@
             <a:fld id="{F7021451-1387-4CA6-816F-3879F97B5CBC}" type="slidenum">
               <a:rPr lang="en-US"/>
               <a:t>67</a:t>
+            </a:fld>
+            <a:endParaRPr lang="en-US"/>
+          </a:p>
+        </p:txBody>
+      </p:sp>
+    </p:spTree>
+    <p:extLst>
+      <p:ext uri="{BB962C8B-B14F-4D97-AF65-F5344CB8AC3E}">
+        <p14:creationId xmlns:p14="http://schemas.microsoft.com/office/powerpoint/2010/main" val="1024086991"/>
+      </p:ext>
+    </p:extLst>
+  </p:cSld>
+  <p:clrMapOvr>
+    <a:masterClrMapping/>
+  </p:clrMapOvr>
+</p:notes>
+</file>
+
+<file path=ppt/notesSlides/notesSlide68.xml><?xml version="1.0" encoding="utf-8"?>
+<p:notes xmlns:a="http://schemas.openxmlformats.org/drawingml/2006/main" xmlns:r="http://schemas.openxmlformats.org/officeDocument/2006/relationships" xmlns:p="http://schemas.openxmlformats.org/presentationml/2006/main">
+  <p:cSld>
+    <p:spTree>
+      <p:nvGrpSpPr>
+        <p:cNvPr id="1" name=""/>
+        <p:cNvGrpSpPr/>
+        <p:nvPr/>
+      </p:nvGrpSpPr>
+      <p:grpSpPr>
+        <a:xfrm>
+          <a:off x="0" y="0"/>
+          <a:ext cx="0" cy="0"/>
+          <a:chOff x="0" y="0"/>
+          <a:chExt cx="0" cy="0"/>
+        </a:xfrm>
+      </p:grpSpPr>
+      <p:sp>
+        <p:nvSpPr>
+          <p:cNvPr id="2" name="Slide Image Placeholder 1"/>
+          <p:cNvSpPr>
+            <a:spLocks noGrp="1" noRot="1" noChangeAspect="1"/>
+          </p:cNvSpPr>
+          <p:nvPr>
+            <p:ph type="sldImg"/>
+          </p:nvPr>
+        </p:nvSpPr>
+        <p:spPr/>
+      </p:sp>
+      <p:sp>
+        <p:nvSpPr>
+          <p:cNvPr id="3" name="Notes Placeholder 2"/>
+          <p:cNvSpPr>
+            <a:spLocks noGrp="1"/>
+          </p:cNvSpPr>
+          <p:nvPr>
+            <p:ph type="body" idx="1"/>
+          </p:nvPr>
+        </p:nvSpPr>
+        <p:spPr/>
+        <p:txBody>
+          <a:bodyPr/>
+          <a:lstStyle/>
+          <a:p>
+            <a:r>
+              <a:rPr lang="en-US" dirty="0"/>
+              <a:t>ADR-30 regression: a flex-row child containing only emoji (min-width: 18px,
+     text-align: center) had emojiWidthOverride extend its text box to the
+     parent's right edge.  The centred emoji then overlapped the adjacent text
+     div.  Fix: skip emojiWidthOverride when a visible sibling follows.</a:t>
+            </a:r>
+            <a:endParaRPr lang="en-US" dirty="0"/>
+          </a:p>
+        </p:txBody>
+      </p:sp>
+      <p:sp>
+        <p:nvSpPr>
+          <p:cNvPr id="4" name="Slide Number Placeholder 3"/>
+          <p:cNvSpPr>
+            <a:spLocks noGrp="1"/>
+          </p:cNvSpPr>
+          <p:nvPr>
+            <p:ph type="sldNum" sz="quarter" idx="10"/>
+          </p:nvPr>
+        </p:nvSpPr>
+        <p:spPr/>
+        <p:txBody>
+          <a:bodyPr/>
+          <a:lstStyle/>
+          <a:p>
+            <a:fld id="{F7021451-1387-4CA6-816F-3879F97B5CBC}" type="slidenum">
+              <a:rPr lang="en-US"/>
+              <a:t>68</a:t>
             </a:fld>
             <a:endParaRPr lang="en-US"/>
           </a:p>
@@ -43868,6 +43960,419 @@
             <a:fld id="{F7021451-1387-4CA6-816F-3879F97B5CBC}" type="slidenum">
               <a:rPr b="0" lang="en-US"/>
               <a:t>67</a:t>
+            </a:fld>
+            <a:endParaRPr lang="en-US"/>
+          </a:p>
+        </p:txBody>
+      </p:sp>
+    </p:spTree>
+  </p:cSld>
+  <p:clrMapOvr>
+    <a:masterClrMapping/>
+  </p:clrMapOvr>
+</p:sld>
+</file>
+
+<file path=ppt/slides/slide68.xml><?xml version="1.0" encoding="utf-8"?>
+<p:sld xmlns:a="http://schemas.openxmlformats.org/drawingml/2006/main" xmlns:r="http://schemas.openxmlformats.org/officeDocument/2006/relationships" xmlns:p="http://schemas.openxmlformats.org/presentationml/2006/main">
+  <p:cSld name="Slide 68">
+    <p:bg>
+      <p:bgPr>
+        <a:solidFill>
+          <a:srgbClr val="FFFFFF"/>
+        </a:solidFill>
+      </p:bgPr>
+    </p:bg>
+    <p:spTree>
+      <p:nvGrpSpPr>
+        <p:cNvPr id="1" name=""/>
+        <p:cNvGrpSpPr/>
+        <p:nvPr/>
+      </p:nvGrpSpPr>
+      <p:grpSpPr>
+        <a:xfrm>
+          <a:off x="0" y="0"/>
+          <a:ext cx="0" cy="0"/>
+          <a:chOff x="0" y="0"/>
+          <a:chExt cx="0" cy="0"/>
+        </a:xfrm>
+      </p:grpSpPr>
+      <p:sp>
+        <p:nvSpPr>
+          <p:cNvPr id="2" name="Text 0"/>
+          <p:cNvSpPr/>
+          <p:nvPr/>
+        </p:nvSpPr>
+        <p:spPr>
+          <a:xfrm>
+            <a:off x="747713" y="1650653"/>
+            <a:ext cx="11291888" cy="1237357"/>
+          </a:xfrm>
+          <a:prstGeom prst="rect">
+            <a:avLst/>
+          </a:prstGeom>
+          <a:noFill/>
+          <a:ln/>
+        </p:spPr>
+        <p:txBody>
+          <a:bodyPr wrap="square" lIns="0" tIns="0" rIns="0" bIns="132588" rtlCol="0" anchor="t"/>
+          <a:lstStyle/>
+          <a:p>
+            <a:pPr algn="l" indent="0" marL="0">
+              <a:lnSpc>
+                <a:spcPct val="125000"/>
+              </a:lnSpc>
+              <a:buNone/>
+            </a:pPr>
+            <a:r>
+              <a:rPr lang="en-US" sz="3480" b="1" dirty="0">
+                <a:solidFill>
+                  <a:srgbClr val="224466"/>
+                </a:solidFill>
+                <a:latin typeface="Segoe UI" pitchFamily="34" charset="0"/>
+                <a:ea typeface="Segoe UI" pitchFamily="34" charset="-122"/>
+                <a:cs typeface="Segoe UI" pitchFamily="34" charset="-120"/>
+              </a:rPr>
+              <a:t>Slide 68: Narrow emoji-icon div in flex row with adjacent text (ADR-30 regression)</a:t>
+            </a:r>
+            <a:endParaRPr lang="en-US" sz="3480" dirty="0"/>
+          </a:p>
+        </p:txBody>
+      </p:sp>
+      <p:sp>
+        <p:nvSpPr>
+          <p:cNvPr id="3" name="Text 1"/>
+          <p:cNvSpPr/>
+          <p:nvPr/>
+        </p:nvSpPr>
+        <p:spPr>
+          <a:xfrm>
+            <a:off x="747713" y="3040410"/>
+            <a:ext cx="497086" cy="414338"/>
+          </a:xfrm>
+          <a:prstGeom prst="rect">
+            <a:avLst/>
+          </a:prstGeom>
+          <a:noFill/>
+          <a:ln/>
+        </p:spPr>
+        <p:txBody>
+          <a:bodyPr wrap="square" lIns="0" tIns="0" rIns="0" bIns="0" rtlCol="0" anchor="t"/>
+          <a:lstStyle/>
+          <a:p>
+            <a:pPr algn="ctr" indent="0" marL="0">
+              <a:lnSpc>
+                <a:spcPct val="150000"/>
+              </a:lnSpc>
+              <a:buNone/>
+            </a:pPr>
+            <a:r>
+              <a:rPr lang="en-US" sz="2175" dirty="0">
+                <a:solidFill>
+                  <a:srgbClr val="1F2328"/>
+                </a:solidFill>
+                <a:latin typeface="Segoe UI" pitchFamily="34" charset="0"/>
+                <a:ea typeface="Segoe UI" pitchFamily="34" charset="-122"/>
+                <a:cs typeface="Segoe UI" pitchFamily="34" charset="-120"/>
+              </a:rPr>
+              <a:t>🔒</a:t>
+            </a:r>
+            <a:endParaRPr lang="en-US" sz="2175" dirty="0"/>
+          </a:p>
+        </p:txBody>
+      </p:sp>
+      <p:sp>
+        <p:nvSpPr>
+          <p:cNvPr id="4" name="Text 2"/>
+          <p:cNvSpPr/>
+          <p:nvPr/>
+        </p:nvSpPr>
+        <p:spPr>
+          <a:xfrm>
+            <a:off x="1159073" y="3040410"/>
+            <a:ext cx="3339554" cy="414338"/>
+          </a:xfrm>
+          <a:prstGeom prst="rect">
+            <a:avLst/>
+          </a:prstGeom>
+          <a:noFill/>
+          <a:ln/>
+        </p:spPr>
+        <p:txBody>
+          <a:bodyPr wrap="square" lIns="0" tIns="0" rIns="0" bIns="0" rtlCol="0" anchor="t"/>
+          <a:lstStyle/>
+          <a:p>
+            <a:pPr algn="l" indent="0" marL="0">
+              <a:lnSpc>
+                <a:spcPct val="150000"/>
+              </a:lnSpc>
+              <a:buNone/>
+            </a:pPr>
+            <a:r>
+              <a:rPr lang="en-US" sz="2175" dirty="0">
+                <a:solidFill>
+                  <a:srgbClr val="1F2328"/>
+                </a:solidFill>
+                <a:latin typeface="Segoe UI" pitchFamily="34" charset="0"/>
+                <a:ea typeface="Segoe UI" pitchFamily="34" charset="-122"/>
+                <a:cs typeface="Segoe UI" pitchFamily="34" charset="-120"/>
+              </a:rPr>
+              <a:t>Alpha beta gamma delta</a:t>
+            </a:r>
+            <a:endParaRPr lang="en-US" sz="2175" dirty="0"/>
+          </a:p>
+        </p:txBody>
+      </p:sp>
+      <p:sp>
+        <p:nvSpPr>
+          <p:cNvPr id="5" name="Text 3"/>
+          <p:cNvSpPr/>
+          <p:nvPr/>
+        </p:nvSpPr>
+        <p:spPr>
+          <a:xfrm>
+            <a:off x="747713" y="3502372"/>
+            <a:ext cx="497086" cy="414338"/>
+          </a:xfrm>
+          <a:prstGeom prst="rect">
+            <a:avLst/>
+          </a:prstGeom>
+          <a:noFill/>
+          <a:ln/>
+        </p:spPr>
+        <p:txBody>
+          <a:bodyPr wrap="square" lIns="0" tIns="0" rIns="0" bIns="0" rtlCol="0" anchor="t"/>
+          <a:lstStyle/>
+          <a:p>
+            <a:pPr algn="ctr" indent="0" marL="0">
+              <a:lnSpc>
+                <a:spcPct val="150000"/>
+              </a:lnSpc>
+              <a:buNone/>
+            </a:pPr>
+            <a:r>
+              <a:rPr lang="en-US" sz="2175" dirty="0">
+                <a:solidFill>
+                  <a:srgbClr val="1F2328"/>
+                </a:solidFill>
+                <a:latin typeface="Segoe UI" pitchFamily="34" charset="0"/>
+                <a:ea typeface="Segoe UI" pitchFamily="34" charset="-122"/>
+                <a:cs typeface="Segoe UI" pitchFamily="34" charset="-120"/>
+              </a:rPr>
+              <a:t>📝</a:t>
+            </a:r>
+            <a:endParaRPr lang="en-US" sz="2175" dirty="0"/>
+          </a:p>
+        </p:txBody>
+      </p:sp>
+      <p:sp>
+        <p:nvSpPr>
+          <p:cNvPr id="6" name="Text 4"/>
+          <p:cNvSpPr/>
+          <p:nvPr/>
+        </p:nvSpPr>
+        <p:spPr>
+          <a:xfrm>
+            <a:off x="1159073" y="3502372"/>
+            <a:ext cx="2940397" cy="414338"/>
+          </a:xfrm>
+          <a:prstGeom prst="rect">
+            <a:avLst/>
+          </a:prstGeom>
+          <a:noFill/>
+          <a:ln/>
+        </p:spPr>
+        <p:txBody>
+          <a:bodyPr wrap="square" lIns="0" tIns="0" rIns="0" bIns="0" rtlCol="0" anchor="t"/>
+          <a:lstStyle/>
+          <a:p>
+            <a:pPr algn="l" indent="0" marL="0">
+              <a:lnSpc>
+                <a:spcPct val="150000"/>
+              </a:lnSpc>
+              <a:buNone/>
+            </a:pPr>
+            <a:r>
+              <a:rPr lang="en-US" sz="2175" dirty="0">
+                <a:solidFill>
+                  <a:srgbClr val="1F2328"/>
+                </a:solidFill>
+                <a:latin typeface="Segoe UI" pitchFamily="34" charset="0"/>
+                <a:ea typeface="Segoe UI" pitchFamily="34" charset="-122"/>
+                <a:cs typeface="Segoe UI" pitchFamily="34" charset="-120"/>
+              </a:rPr>
+              <a:t>Delta epsilon zeta eta</a:t>
+            </a:r>
+            <a:endParaRPr lang="en-US" sz="2175" dirty="0"/>
+          </a:p>
+        </p:txBody>
+      </p:sp>
+      <p:sp>
+        <p:nvSpPr>
+          <p:cNvPr id="7" name="Text 5"/>
+          <p:cNvSpPr/>
+          <p:nvPr/>
+        </p:nvSpPr>
+        <p:spPr>
+          <a:xfrm>
+            <a:off x="747713" y="3964335"/>
+            <a:ext cx="497086" cy="414338"/>
+          </a:xfrm>
+          <a:prstGeom prst="rect">
+            <a:avLst/>
+          </a:prstGeom>
+          <a:noFill/>
+          <a:ln/>
+        </p:spPr>
+        <p:txBody>
+          <a:bodyPr wrap="square" lIns="0" tIns="0" rIns="0" bIns="0" rtlCol="0" anchor="t"/>
+          <a:lstStyle/>
+          <a:p>
+            <a:pPr algn="ctr" indent="0" marL="0">
+              <a:lnSpc>
+                <a:spcPct val="150000"/>
+              </a:lnSpc>
+              <a:buNone/>
+            </a:pPr>
+            <a:r>
+              <a:rPr lang="en-US" sz="2175" dirty="0">
+                <a:solidFill>
+                  <a:srgbClr val="1F2328"/>
+                </a:solidFill>
+                <a:latin typeface="Segoe UI" pitchFamily="34" charset="0"/>
+                <a:ea typeface="Segoe UI" pitchFamily="34" charset="-122"/>
+                <a:cs typeface="Segoe UI" pitchFamily="34" charset="-120"/>
+              </a:rPr>
+              <a:t>🔗</a:t>
+            </a:r>
+            <a:endParaRPr lang="en-US" sz="2175" dirty="0"/>
+          </a:p>
+        </p:txBody>
+      </p:sp>
+      <p:sp>
+        <p:nvSpPr>
+          <p:cNvPr id="8" name="Text 6"/>
+          <p:cNvSpPr/>
+          <p:nvPr/>
+        </p:nvSpPr>
+        <p:spPr>
+          <a:xfrm>
+            <a:off x="1159073" y="3964335"/>
+            <a:ext cx="3372148" cy="414338"/>
+          </a:xfrm>
+          <a:prstGeom prst="rect">
+            <a:avLst/>
+          </a:prstGeom>
+          <a:noFill/>
+          <a:ln/>
+        </p:spPr>
+        <p:txBody>
+          <a:bodyPr wrap="square" lIns="0" tIns="0" rIns="0" bIns="0" rtlCol="0" anchor="t"/>
+          <a:lstStyle/>
+          <a:p>
+            <a:pPr algn="l" indent="0" marL="0">
+              <a:lnSpc>
+                <a:spcPct val="150000"/>
+              </a:lnSpc>
+              <a:buNone/>
+            </a:pPr>
+            <a:r>
+              <a:rPr lang="en-US" sz="2175" dirty="0">
+                <a:solidFill>
+                  <a:srgbClr val="1F2328"/>
+                </a:solidFill>
+                <a:latin typeface="Segoe UI" pitchFamily="34" charset="0"/>
+                <a:ea typeface="Segoe UI" pitchFamily="34" charset="-122"/>
+                <a:cs typeface="Segoe UI" pitchFamily="34" charset="-120"/>
+              </a:rPr>
+              <a:t>Theta iota kappa lambda</a:t>
+            </a:r>
+            <a:endParaRPr lang="en-US" sz="2175" dirty="0"/>
+          </a:p>
+        </p:txBody>
+      </p:sp>
+      <p:sp>
+        <p:nvSpPr>
+          <p:cNvPr id="9" name="Text 7"/>
+          <p:cNvSpPr/>
+          <p:nvPr/>
+        </p:nvSpPr>
+        <p:spPr>
+          <a:xfrm>
+            <a:off x="747713" y="4378672"/>
+            <a:ext cx="11001375" cy="828675"/>
+          </a:xfrm>
+          <a:prstGeom prst="rect">
+            <a:avLst/>
+          </a:prstGeom>
+          <a:noFill/>
+          <a:ln/>
+        </p:spPr>
+        <p:txBody>
+          <a:bodyPr wrap="square" lIns="0" tIns="0" rIns="0" bIns="0" rtlCol="0" anchor="t"/>
+          <a:lstStyle/>
+          <a:p>
+            <a:pPr algn="l" indent="0" marL="0">
+              <a:lnSpc>
+                <a:spcPct val="150000"/>
+              </a:lnSpc>
+              <a:buNone/>
+            </a:pPr>
+            <a:r>
+              <a:rPr lang="en-US" sz="2175" dirty="0">
+                <a:solidFill>
+                  <a:srgbClr val="1F2328"/>
+                </a:solidFill>
+                <a:latin typeface="Segoe UI" pitchFamily="34" charset="0"/>
+                <a:ea typeface="Segoe UI" pitchFamily="34" charset="-122"/>
+                <a:cs typeface="Segoe UI" pitchFamily="34" charset="-120"/>
+              </a:rPr>
+              <a:t>Expected: each emoji icon stays left-aligned in its 18 px cell; text div starts immediately to the right without overlap.</a:t>
+            </a:r>
+            <a:endParaRPr lang="en-US" sz="2175" dirty="0"/>
+          </a:p>
+        </p:txBody>
+      </p:sp>
+      <p:sp>
+        <p:nvSpPr>
+          <p:cNvPr id="25" name="Slide Number Placeholder 0"/>
+          <p:cNvSpPr>
+            <a:spLocks noGrp="1"/>
+          </p:cNvSpPr>
+          <p:nvPr>
+            <p:ph type="sldNum" sz="quarter" idx="4294967295"/>
+          </p:nvPr>
+        </p:nvSpPr>
+        <p:spPr>
+          <a:xfrm>
+            <a:off x="0" y="6343650"/>
+            <a:ext cx="11811000" cy="228600"/>
+          </a:xfrm>
+          <a:prstGeom prst="rect">
+            <a:avLst/>
+          </a:prstGeom>
+          <a:extLst>
+            <a:ext uri="{C572A759-6A51-4108-AA02-DFA0A04FC94B}">
+              <ma14:wrappingTextBoxFlag xmlns:ma14="http://schemas.microsoft.com/office/mac/drawingml/2011/main" val="0"/>
+            </a:ext>
+          </a:extLst>
+        </p:spPr>
+        <p:txBody>
+          <a:bodyPr lIns="0" tIns="0" rIns="0" bIns="0"/>
+          <a:lstStyle>
+            <a:lvl1pPr>
+              <a:defRPr sz="1350">
+                <a:solidFill>
+                  <a:srgbClr val="777777"/>
+                </a:solidFill>
+              </a:defRPr>
+            </a:lvl1pPr>
+          </a:lstStyle>
+          <a:p>
+            <a:pPr algn="r"/>
+            <a:fld id="{F7021451-1387-4CA6-816F-3879F97B5CBC}" type="slidenum">
+              <a:rPr b="0" lang="en-US"/>
+              <a:t>68</a:t>
             </a:fld>
             <a:endParaRPr lang="en-US"/>
           </a:p>

--- a/output-pptx/test-output.pptx
+++ b/output-pptx/test-output.pptx
@@ -84,9 +84,14 @@
     <p:sldId id="332" r:id="rId78"/>
     <p:sldId id="333" r:id="rId79"/>
     <p:sldId id="334" r:id="rId80"/>
+    <p:sldId id="335" r:id="rId81"/>
+    <p:sldId id="336" r:id="rId82"/>
+    <p:sldId id="337" r:id="rId83"/>
+    <p:sldId id="338" r:id="rId84"/>
+    <p:sldId id="339" r:id="rId85"/>
   </p:sldIdLst>
   <p:notesMasterIdLst>
-    <p:notesMasterId r:id="rId81"/>
+    <p:notesMasterId r:id="rId86"/>
   </p:notesMasterIdLst>
   <p:sldSz cx="12192000" cy="6858000"/>
   <p:notesSz cx="6858000" cy="12192000"/>
@@ -580,13 +585,7 @@
           <a:p>
             <a:r>
               <a:rPr lang="en-US" dirty="0"/>
-              <a:t>PPTX Export Comprehensive Test Slides
-  ===========================================
-  This file is a test MD that covers all known edge cases and expected issues.
-  Generation steps:
-    marp --html src/native-pptx/test-fixtures/pptx-export.md -o out/test-pptx-export.html
-    node scripts/gen-pptx.js out/test-pptx-export.html out/test-pptx-export.pptx
-    node scripts/compare-visuals.js out/test-pptx-export.html out/test-pptx-export.pptx</a:t>
+              <a:t/>
             </a:r>
             <a:endParaRPr lang="en-US" dirty="0"/>
           </a:p>
@@ -1554,7 +1553,7 @@
           <a:p>
             <a:r>
               <a:rPr lang="en-US" dirty="0"/>
-              <a:t>Japanese text intentionally kept for CJK rendering test: mixed Japanese/English</a:t>
+              <a:t/>
             </a:r>
             <a:endParaRPr lang="en-US" dirty="0"/>
           </a:p>
@@ -1730,7 +1729,7 @@
           <a:p>
             <a:r>
               <a:rPr lang="en-US" dirty="0"/>
-              <a:t>Japanese text intentionally kept for CJK rendering test: special characters and fullwidth symbols</a:t>
+              <a:t/>
             </a:r>
             <a:endParaRPr lang="en-US" dirty="0"/>
           </a:p>
@@ -1818,7 +1817,7 @@
           <a:p>
             <a:r>
               <a:rPr lang="en-US" dirty="0"/>
-              <a:t>Japanese text intentionally kept for CJK rendering test: long paragraph wrapping</a:t>
+              <a:t/>
             </a:r>
             <a:endParaRPr lang="en-US" dirty="0"/>
           </a:p>
@@ -3578,9 +3577,7 @@
           <a:p>
             <a:r>
               <a:rPr lang="en-US" dirty="0"/>
-              <a:t>============================================================
-     Slides 40+: Additional test cases (generalized patterns from production materials)
-     ============================================================</a:t>
+              <a:t/>
             </a:r>
             <a:endParaRPr lang="en-US" dirty="0"/>
           </a:p>
@@ -4988,7 +4985,7 @@
           <a:p>
             <a:r>
               <a:rPr lang="en-US" dirty="0"/>
-              <a:t>Expected: sub/sup text should be vertically shifted, not just smaller</a:t>
+              <a:t/>
             </a:r>
             <a:endParaRPr lang="en-US" dirty="0"/>
           </a:p>
@@ -5692,9 +5689,7 @@
           <a:p>
             <a:r>
               <a:rPr lang="en-US" dirty="0"/>
-              <a:t>Regression for ADR-15: each agenda item is display:flex and contains
-     an inline-flex badge plus a direct child TEXT_NODE. The PPTX export must
-     render the description text to the right of the badge with no overlap.</a:t>
+              <a:t/>
             </a:r>
             <a:endParaRPr lang="en-US" dirty="0"/>
           </a:p>
@@ -5782,9 +5777,7 @@
           <a:p>
             <a:r>
               <a:rPr lang="en-US" dirty="0"/>
-              <a:t>Regression for &lt;br&gt; handling in extractListItemEl:
-     Two trailing spaces before newline produce &lt;br&gt; inside &lt;li&gt;.
-     The PPTX must render two visible lines within the same bullet.</a:t>
+              <a:t/>
             </a:r>
             <a:endParaRPr lang="en-US" dirty="0"/>
           </a:p>
@@ -5872,10 +5865,7 @@
           <a:p>
             <a:r>
               <a:rPr lang="en-US" dirty="0"/>
-              <a:t>Regression for image-in-list split logic in walkElements:
-     When a Markdown image appears between list items with no blank lines,
-     markdown-it parses it as a lazy continuation of the first &lt;li&gt;.
-     The PPTX must show items in order: First item → image → Second item.</a:t>
+              <a:t/>
             </a:r>
             <a:endParaRPr lang="en-US" dirty="0"/>
           </a:p>
@@ -5963,10 +5953,7 @@
           <a:p>
             <a:r>
               <a:rPr lang="en-US" dirty="0"/>
-              <a:t>ADR-22 regression: when a display:block div contains both direct text
-     nodes and inline-block elements (badges), the shallow recovery pass
-     must recover the text nodes. Before fix, only &lt;strong&gt; text was kept;
-     surrounding text nodes were dropped.</a:t>
+              <a:t/>
             </a:r>
             <a:endParaRPr lang="en-US" dirty="0"/>
           </a:p>
@@ -6054,8 +6041,7 @@
           <a:p>
             <a:r>
               <a:rPr lang="en-US" dirty="0"/>
-              <a:t>ADR-22 regression: table CSS padding should be used as PPTX cell margin
-     instead of a fixed value, reducing font-metric wrapping in dense tables.</a:t>
+              <a:t/>
             </a:r>
             <a:endParaRPr lang="en-US" dirty="0"/>
           </a:p>
@@ -6143,9 +6129,7 @@
           <a:p>
             <a:r>
               <a:rPr lang="en-US" dirty="0"/>
-              <a:t>ADR-22 regression: step-body divs contain text nodes + inline-block
-     span tags. Same root cause as Slide 64: text nodes dropped in shallow
-     recovery when display:block container has inline-block children.</a:t>
+              <a:t/>
             </a:r>
             <a:endParaRPr lang="en-US" dirty="0"/>
           </a:p>
@@ -6233,9 +6217,7 @@
           <a:p>
             <a:r>
               <a:rPr lang="en-US" dirty="0"/>
-              <a:t>ADR-22 regression: flex-child divs with white-space:nowrap have tight
-     bounding boxes. PPTX font metrics may be slightly wider, causing text
-     to wrap. The width is extended by 10% to absorb font-metric variance.</a:t>
+              <a:t/>
             </a:r>
             <a:endParaRPr lang="en-US" dirty="0"/>
           </a:p>
@@ -6323,10 +6305,7 @@
           <a:p>
             <a:r>
               <a:rPr lang="en-US" dirty="0"/>
-              <a:t>ADR-30 regression: a flex-row child containing only emoji (min-width: 18px,
-     text-align: center) had emojiWidthOverride extend its text box to the
-     parent's right edge.  The centred emoji then overlapped the adjacent text
-     div.  Fix: skip emojiWidthOverride when a visible sibling follows.</a:t>
+              <a:t/>
             </a:r>
             <a:endParaRPr lang="en-US" dirty="0"/>
           </a:p>
@@ -6502,7 +6481,7 @@
           <a:p>
             <a:r>
               <a:rPr lang="en-US" dirty="0"/>
-              <a:t>Expected: math formulas render as readable text without duplicationKaTeX uses .katex-mathml (hidden MathML) + .katex-html (visual); only visual part should appear</a:t>
+              <a:t/>
             </a:r>
             <a:endParaRPr lang="en-US" dirty="0"/>
           </a:p>
@@ -6590,7 +6569,7 @@
           <a:p>
             <a:r>
               <a:rPr lang="en-US" dirty="0"/>
-              <a:t>Expected: block equations render as centred rasterized images</a:t>
+              <a:t/>
             </a:r>
             <a:endParaRPr lang="en-US" dirty="0"/>
           </a:p>
@@ -6678,7 +6657,7 @@
           <a:p>
             <a:r>
               <a:rPr lang="en-US" dirty="0"/>
-              <a:t>Expected: slide has no page number; background image renderedTests ADR-33 SVG grouping for paginate:false + ![bg]</a:t>
+              <a:t/>
             </a:r>
             <a:endParaRPr lang="en-US" dirty="0"/>
           </a:p>
@@ -6766,7 +6745,7 @@
           <a:p>
             <a:r>
               <a:rPr lang="en-US" dirty="0"/>
-              <a:t>fitExpected: heading auto-scales to fill width; PPTX uses theme font size</a:t>
+              <a:t/>
             </a:r>
             <a:endParaRPr lang="en-US" dirty="0"/>
           </a:p>
@@ -6854,7 +6833,7 @@
           <a:p>
             <a:r>
               <a:rPr lang="en-US" dirty="0"/>
-              <a:t>Expected: background on left 40%, content on right 60%</a:t>
+              <a:t/>
             </a:r>
             <a:endParaRPr lang="en-US" dirty="0"/>
           </a:p>
@@ -6942,7 +6921,7 @@
           <a:p>
             <a:r>
               <a:rPr lang="en-US" dirty="0"/>
-              <a:t>Expected: two backgrounds layered (or split) in one slide</a:t>
+              <a:t/>
             </a:r>
             <a:endParaRPr lang="en-US" dirty="0"/>
           </a:p>
@@ -7030,7 +7009,7 @@
           <a:p>
             <a:r>
               <a:rPr lang="en-US" dirty="0"/>
-              <a:t>Expected: background image is contained (fit) rather than covering</a:t>
+              <a:t/>
             </a:r>
             <a:endParaRPr lang="en-US" dirty="0"/>
           </a:p>
@@ -7118,7 +7097,7 @@
           <a:p>
             <a:r>
               <a:rPr lang="en-US" dirty="0"/>
-              <a:t>Expected: checkbox items render with visible check/uncheck markers</a:t>
+              <a:t/>
             </a:r>
             <a:endParaRPr lang="en-US" dirty="0"/>
           </a:p>
@@ -7206,7 +7185,7 @@
           <a:p>
             <a:r>
               <a:rPr lang="en-US" dirty="0"/>
-              <a:t>Expected: h5/h6 render at smaller sizes; &lt;hr&gt; renders as horizontal rule</a:t>
+              <a:t/>
             </a:r>
             <a:endParaRPr lang="en-US" dirty="0"/>
           </a:p>
@@ -7294,7 +7273,7 @@
           <a:p>
             <a:r>
               <a:rPr lang="en-US" dirty="0"/>
-              <a:t>Expected: images respect height constraints; emoji shortcodes render</a:t>
+              <a:t/>
             </a:r>
             <a:endParaRPr lang="en-US" dirty="0"/>
           </a:p>
@@ -7406,6 +7385,446 @@
             <a:fld id="{F7021451-1387-4CA6-816F-3879F97B5CBC}" type="slidenum">
               <a:rPr lang="en-US"/>
               <a:t>8</a:t>
+            </a:fld>
+            <a:endParaRPr lang="en-US"/>
+          </a:p>
+        </p:txBody>
+      </p:sp>
+    </p:spTree>
+    <p:extLst>
+      <p:ext uri="{BB962C8B-B14F-4D97-AF65-F5344CB8AC3E}">
+        <p14:creationId xmlns:p14="http://schemas.microsoft.com/office/powerpoint/2010/main" val="1024086991"/>
+      </p:ext>
+    </p:extLst>
+  </p:cSld>
+  <p:clrMapOvr>
+    <a:masterClrMapping/>
+  </p:clrMapOvr>
+</p:notes>
+</file>
+
+<file path=ppt/notesSlides/notesSlide80.xml><?xml version="1.0" encoding="utf-8"?>
+<p:notes xmlns:a="http://schemas.openxmlformats.org/drawingml/2006/main" xmlns:r="http://schemas.openxmlformats.org/officeDocument/2006/relationships" xmlns:p="http://schemas.openxmlformats.org/presentationml/2006/main">
+  <p:cSld>
+    <p:spTree>
+      <p:nvGrpSpPr>
+        <p:cNvPr id="1" name=""/>
+        <p:cNvGrpSpPr/>
+        <p:nvPr/>
+      </p:nvGrpSpPr>
+      <p:grpSpPr>
+        <a:xfrm>
+          <a:off x="0" y="0"/>
+          <a:ext cx="0" cy="0"/>
+          <a:chOff x="0" y="0"/>
+          <a:chExt cx="0" cy="0"/>
+        </a:xfrm>
+      </p:grpSpPr>
+      <p:sp>
+        <p:nvSpPr>
+          <p:cNvPr id="2" name="Slide Image Placeholder 1"/>
+          <p:cNvSpPr>
+            <a:spLocks noGrp="1" noRot="1" noChangeAspect="1"/>
+          </p:cNvSpPr>
+          <p:nvPr>
+            <p:ph type="sldImg"/>
+          </p:nvPr>
+        </p:nvSpPr>
+        <p:spPr/>
+      </p:sp>
+      <p:sp>
+        <p:nvSpPr>
+          <p:cNvPr id="3" name="Notes Placeholder 2"/>
+          <p:cNvSpPr>
+            <a:spLocks noGrp="1"/>
+          </p:cNvSpPr>
+          <p:nvPr>
+            <p:ph type="body" idx="1"/>
+          </p:nvPr>
+        </p:nvSpPr>
+        <p:spPr/>
+        <p:txBody>
+          <a:bodyPr/>
+          <a:lstStyle/>
+          <a:p>
+            <a:r>
+              <a:rPr lang="en-US" dirty="0"/>
+              <a:t/>
+            </a:r>
+            <a:endParaRPr lang="en-US" dirty="0"/>
+          </a:p>
+        </p:txBody>
+      </p:sp>
+      <p:sp>
+        <p:nvSpPr>
+          <p:cNvPr id="4" name="Slide Number Placeholder 3"/>
+          <p:cNvSpPr>
+            <a:spLocks noGrp="1"/>
+          </p:cNvSpPr>
+          <p:nvPr>
+            <p:ph type="sldNum" sz="quarter" idx="10"/>
+          </p:nvPr>
+        </p:nvSpPr>
+        <p:spPr/>
+        <p:txBody>
+          <a:bodyPr/>
+          <a:lstStyle/>
+          <a:p>
+            <a:fld id="{F7021451-1387-4CA6-816F-3879F97B5CBC}" type="slidenum">
+              <a:rPr lang="en-US"/>
+              <a:t>80</a:t>
+            </a:fld>
+            <a:endParaRPr lang="en-US"/>
+          </a:p>
+        </p:txBody>
+      </p:sp>
+    </p:spTree>
+    <p:extLst>
+      <p:ext uri="{BB962C8B-B14F-4D97-AF65-F5344CB8AC3E}">
+        <p14:creationId xmlns:p14="http://schemas.microsoft.com/office/powerpoint/2010/main" val="1024086991"/>
+      </p:ext>
+    </p:extLst>
+  </p:cSld>
+  <p:clrMapOvr>
+    <a:masterClrMapping/>
+  </p:clrMapOvr>
+</p:notes>
+</file>
+
+<file path=ppt/notesSlides/notesSlide81.xml><?xml version="1.0" encoding="utf-8"?>
+<p:notes xmlns:a="http://schemas.openxmlformats.org/drawingml/2006/main" xmlns:r="http://schemas.openxmlformats.org/officeDocument/2006/relationships" xmlns:p="http://schemas.openxmlformats.org/presentationml/2006/main">
+  <p:cSld>
+    <p:spTree>
+      <p:nvGrpSpPr>
+        <p:cNvPr id="1" name=""/>
+        <p:cNvGrpSpPr/>
+        <p:nvPr/>
+      </p:nvGrpSpPr>
+      <p:grpSpPr>
+        <a:xfrm>
+          <a:off x="0" y="0"/>
+          <a:ext cx="0" cy="0"/>
+          <a:chOff x="0" y="0"/>
+          <a:chExt cx="0" cy="0"/>
+        </a:xfrm>
+      </p:grpSpPr>
+      <p:sp>
+        <p:nvSpPr>
+          <p:cNvPr id="2" name="Slide Image Placeholder 1"/>
+          <p:cNvSpPr>
+            <a:spLocks noGrp="1" noRot="1" noChangeAspect="1"/>
+          </p:cNvSpPr>
+          <p:nvPr>
+            <p:ph type="sldImg"/>
+          </p:nvPr>
+        </p:nvSpPr>
+        <p:spPr/>
+      </p:sp>
+      <p:sp>
+        <p:nvSpPr>
+          <p:cNvPr id="3" name="Notes Placeholder 2"/>
+          <p:cNvSpPr>
+            <a:spLocks noGrp="1"/>
+          </p:cNvSpPr>
+          <p:nvPr>
+            <p:ph type="body" idx="1"/>
+          </p:nvPr>
+        </p:nvSpPr>
+        <p:spPr/>
+        <p:txBody>
+          <a:bodyPr/>
+          <a:lstStyle/>
+          <a:p>
+            <a:r>
+              <a:rPr lang="en-US" dirty="0"/>
+              <a:t/>
+            </a:r>
+            <a:endParaRPr lang="en-US" dirty="0"/>
+          </a:p>
+        </p:txBody>
+      </p:sp>
+      <p:sp>
+        <p:nvSpPr>
+          <p:cNvPr id="4" name="Slide Number Placeholder 3"/>
+          <p:cNvSpPr>
+            <a:spLocks noGrp="1"/>
+          </p:cNvSpPr>
+          <p:nvPr>
+            <p:ph type="sldNum" sz="quarter" idx="10"/>
+          </p:nvPr>
+        </p:nvSpPr>
+        <p:spPr/>
+        <p:txBody>
+          <a:bodyPr/>
+          <a:lstStyle/>
+          <a:p>
+            <a:fld id="{F7021451-1387-4CA6-816F-3879F97B5CBC}" type="slidenum">
+              <a:rPr lang="en-US"/>
+              <a:t>81</a:t>
+            </a:fld>
+            <a:endParaRPr lang="en-US"/>
+          </a:p>
+        </p:txBody>
+      </p:sp>
+    </p:spTree>
+    <p:extLst>
+      <p:ext uri="{BB962C8B-B14F-4D97-AF65-F5344CB8AC3E}">
+        <p14:creationId xmlns:p14="http://schemas.microsoft.com/office/powerpoint/2010/main" val="1024086991"/>
+      </p:ext>
+    </p:extLst>
+  </p:cSld>
+  <p:clrMapOvr>
+    <a:masterClrMapping/>
+  </p:clrMapOvr>
+</p:notes>
+</file>
+
+<file path=ppt/notesSlides/notesSlide82.xml><?xml version="1.0" encoding="utf-8"?>
+<p:notes xmlns:a="http://schemas.openxmlformats.org/drawingml/2006/main" xmlns:r="http://schemas.openxmlformats.org/officeDocument/2006/relationships" xmlns:p="http://schemas.openxmlformats.org/presentationml/2006/main">
+  <p:cSld>
+    <p:spTree>
+      <p:nvGrpSpPr>
+        <p:cNvPr id="1" name=""/>
+        <p:cNvGrpSpPr/>
+        <p:nvPr/>
+      </p:nvGrpSpPr>
+      <p:grpSpPr>
+        <a:xfrm>
+          <a:off x="0" y="0"/>
+          <a:ext cx="0" cy="0"/>
+          <a:chOff x="0" y="0"/>
+          <a:chExt cx="0" cy="0"/>
+        </a:xfrm>
+      </p:grpSpPr>
+      <p:sp>
+        <p:nvSpPr>
+          <p:cNvPr id="2" name="Slide Image Placeholder 1"/>
+          <p:cNvSpPr>
+            <a:spLocks noGrp="1" noRot="1" noChangeAspect="1"/>
+          </p:cNvSpPr>
+          <p:nvPr>
+            <p:ph type="sldImg"/>
+          </p:nvPr>
+        </p:nvSpPr>
+        <p:spPr/>
+      </p:sp>
+      <p:sp>
+        <p:nvSpPr>
+          <p:cNvPr id="3" name="Notes Placeholder 2"/>
+          <p:cNvSpPr>
+            <a:spLocks noGrp="1"/>
+          </p:cNvSpPr>
+          <p:nvPr>
+            <p:ph type="body" idx="1"/>
+          </p:nvPr>
+        </p:nvSpPr>
+        <p:spPr/>
+        <p:txBody>
+          <a:bodyPr/>
+          <a:lstStyle/>
+          <a:p>
+            <a:r>
+              <a:rPr lang="en-US" dirty="0"/>
+              <a:t/>
+            </a:r>
+            <a:endParaRPr lang="en-US" dirty="0"/>
+          </a:p>
+        </p:txBody>
+      </p:sp>
+      <p:sp>
+        <p:nvSpPr>
+          <p:cNvPr id="4" name="Slide Number Placeholder 3"/>
+          <p:cNvSpPr>
+            <a:spLocks noGrp="1"/>
+          </p:cNvSpPr>
+          <p:nvPr>
+            <p:ph type="sldNum" sz="quarter" idx="10"/>
+          </p:nvPr>
+        </p:nvSpPr>
+        <p:spPr/>
+        <p:txBody>
+          <a:bodyPr/>
+          <a:lstStyle/>
+          <a:p>
+            <a:fld id="{F7021451-1387-4CA6-816F-3879F97B5CBC}" type="slidenum">
+              <a:rPr lang="en-US"/>
+              <a:t>82</a:t>
+            </a:fld>
+            <a:endParaRPr lang="en-US"/>
+          </a:p>
+        </p:txBody>
+      </p:sp>
+    </p:spTree>
+    <p:extLst>
+      <p:ext uri="{BB962C8B-B14F-4D97-AF65-F5344CB8AC3E}">
+        <p14:creationId xmlns:p14="http://schemas.microsoft.com/office/powerpoint/2010/main" val="1024086991"/>
+      </p:ext>
+    </p:extLst>
+  </p:cSld>
+  <p:clrMapOvr>
+    <a:masterClrMapping/>
+  </p:clrMapOvr>
+</p:notes>
+</file>
+
+<file path=ppt/notesSlides/notesSlide83.xml><?xml version="1.0" encoding="utf-8"?>
+<p:notes xmlns:a="http://schemas.openxmlformats.org/drawingml/2006/main" xmlns:r="http://schemas.openxmlformats.org/officeDocument/2006/relationships" xmlns:p="http://schemas.openxmlformats.org/presentationml/2006/main">
+  <p:cSld>
+    <p:spTree>
+      <p:nvGrpSpPr>
+        <p:cNvPr id="1" name=""/>
+        <p:cNvGrpSpPr/>
+        <p:nvPr/>
+      </p:nvGrpSpPr>
+      <p:grpSpPr>
+        <a:xfrm>
+          <a:off x="0" y="0"/>
+          <a:ext cx="0" cy="0"/>
+          <a:chOff x="0" y="0"/>
+          <a:chExt cx="0" cy="0"/>
+        </a:xfrm>
+      </p:grpSpPr>
+      <p:sp>
+        <p:nvSpPr>
+          <p:cNvPr id="2" name="Slide Image Placeholder 1"/>
+          <p:cNvSpPr>
+            <a:spLocks noGrp="1" noRot="1" noChangeAspect="1"/>
+          </p:cNvSpPr>
+          <p:nvPr>
+            <p:ph type="sldImg"/>
+          </p:nvPr>
+        </p:nvSpPr>
+        <p:spPr/>
+      </p:sp>
+      <p:sp>
+        <p:nvSpPr>
+          <p:cNvPr id="3" name="Notes Placeholder 2"/>
+          <p:cNvSpPr>
+            <a:spLocks noGrp="1"/>
+          </p:cNvSpPr>
+          <p:nvPr>
+            <p:ph type="body" idx="1"/>
+          </p:nvPr>
+        </p:nvSpPr>
+        <p:spPr/>
+        <p:txBody>
+          <a:bodyPr/>
+          <a:lstStyle/>
+          <a:p>
+            <a:r>
+              <a:rPr lang="en-US" dirty="0"/>
+              <a:t/>
+            </a:r>
+            <a:endParaRPr lang="en-US" dirty="0"/>
+          </a:p>
+        </p:txBody>
+      </p:sp>
+      <p:sp>
+        <p:nvSpPr>
+          <p:cNvPr id="4" name="Slide Number Placeholder 3"/>
+          <p:cNvSpPr>
+            <a:spLocks noGrp="1"/>
+          </p:cNvSpPr>
+          <p:nvPr>
+            <p:ph type="sldNum" sz="quarter" idx="10"/>
+          </p:nvPr>
+        </p:nvSpPr>
+        <p:spPr/>
+        <p:txBody>
+          <a:bodyPr/>
+          <a:lstStyle/>
+          <a:p>
+            <a:fld id="{F7021451-1387-4CA6-816F-3879F97B5CBC}" type="slidenum">
+              <a:rPr lang="en-US"/>
+              <a:t>83</a:t>
+            </a:fld>
+            <a:endParaRPr lang="en-US"/>
+          </a:p>
+        </p:txBody>
+      </p:sp>
+    </p:spTree>
+    <p:extLst>
+      <p:ext uri="{BB962C8B-B14F-4D97-AF65-F5344CB8AC3E}">
+        <p14:creationId xmlns:p14="http://schemas.microsoft.com/office/powerpoint/2010/main" val="1024086991"/>
+      </p:ext>
+    </p:extLst>
+  </p:cSld>
+  <p:clrMapOvr>
+    <a:masterClrMapping/>
+  </p:clrMapOvr>
+</p:notes>
+</file>
+
+<file path=ppt/notesSlides/notesSlide84.xml><?xml version="1.0" encoding="utf-8"?>
+<p:notes xmlns:a="http://schemas.openxmlformats.org/drawingml/2006/main" xmlns:r="http://schemas.openxmlformats.org/officeDocument/2006/relationships" xmlns:p="http://schemas.openxmlformats.org/presentationml/2006/main">
+  <p:cSld>
+    <p:spTree>
+      <p:nvGrpSpPr>
+        <p:cNvPr id="1" name=""/>
+        <p:cNvGrpSpPr/>
+        <p:nvPr/>
+      </p:nvGrpSpPr>
+      <p:grpSpPr>
+        <a:xfrm>
+          <a:off x="0" y="0"/>
+          <a:ext cx="0" cy="0"/>
+          <a:chOff x="0" y="0"/>
+          <a:chExt cx="0" cy="0"/>
+        </a:xfrm>
+      </p:grpSpPr>
+      <p:sp>
+        <p:nvSpPr>
+          <p:cNvPr id="2" name="Slide Image Placeholder 1"/>
+          <p:cNvSpPr>
+            <a:spLocks noGrp="1" noRot="1" noChangeAspect="1"/>
+          </p:cNvSpPr>
+          <p:nvPr>
+            <p:ph type="sldImg"/>
+          </p:nvPr>
+        </p:nvSpPr>
+        <p:spPr/>
+      </p:sp>
+      <p:sp>
+        <p:nvSpPr>
+          <p:cNvPr id="3" name="Notes Placeholder 2"/>
+          <p:cNvSpPr>
+            <a:spLocks noGrp="1"/>
+          </p:cNvSpPr>
+          <p:nvPr>
+            <p:ph type="body" idx="1"/>
+          </p:nvPr>
+        </p:nvSpPr>
+        <p:spPr/>
+        <p:txBody>
+          <a:bodyPr/>
+          <a:lstStyle/>
+          <a:p>
+            <a:r>
+              <a:rPr lang="en-US" dirty="0"/>
+              <a:t/>
+            </a:r>
+            <a:endParaRPr lang="en-US" dirty="0"/>
+          </a:p>
+        </p:txBody>
+      </p:sp>
+      <p:sp>
+        <p:nvSpPr>
+          <p:cNvPr id="4" name="Slide Number Placeholder 3"/>
+          <p:cNvSpPr>
+            <a:spLocks noGrp="1"/>
+          </p:cNvSpPr>
+          <p:nvPr>
+            <p:ph type="sldNum" sz="quarter" idx="10"/>
+          </p:nvPr>
+        </p:nvSpPr>
+        <p:spPr/>
+        <p:txBody>
+          <a:bodyPr/>
+          <a:lstStyle/>
+          <a:p>
+            <a:fld id="{F7021451-1387-4CA6-816F-3879F97B5CBC}" type="slidenum">
+              <a:rPr lang="en-US"/>
+              <a:t>84</a:t>
             </a:fld>
             <a:endParaRPr lang="en-US"/>
           </a:p>
@@ -8722,7 +9141,7 @@
         <p:spPr>
           <a:xfrm>
             <a:off x="747713" y="3357116"/>
-            <a:ext cx="11001375" cy="414338"/>
+            <a:ext cx="10696575" cy="981075"/>
           </a:xfrm>
           <a:prstGeom prst="rect">
             <a:avLst/>
@@ -8751,30 +9170,14 @@
               </a:rPr>
               <a:t>This background image has no filter. Verify that text is not duplicated.</a:t>
             </a:r>
+            <a:pPr algn="l" indent="0" marL="0">
+              <a:lnSpc>
+                <a:spcPct val="150000"/>
+              </a:lnSpc>
+              <a:buNone/>
+            </a:pPr>
             <a:endParaRPr lang="en-US" sz="2175" dirty="0"/>
           </a:p>
-        </p:txBody>
-      </p:sp>
-      <p:sp>
-        <p:nvSpPr>
-          <p:cNvPr id="4" name="Text 2"/>
-          <p:cNvSpPr/>
-          <p:nvPr/>
-        </p:nvSpPr>
-        <p:spPr>
-          <a:xfrm>
-            <a:off x="747713" y="3923854"/>
-            <a:ext cx="11001375" cy="414338"/>
-          </a:xfrm>
-          <a:prstGeom prst="rect">
-            <a:avLst/>
-          </a:prstGeom>
-          <a:noFill/>
-          <a:ln/>
-        </p:spPr>
-        <p:txBody>
-          <a:bodyPr wrap="square" lIns="0" tIns="0" rIns="0" bIns="0" rtlCol="0" anchor="t"/>
-          <a:lstStyle/>
           <a:p>
             <a:pPr algn="l" indent="0" marL="0">
               <a:lnSpc>
@@ -9445,7 +9848,7 @@
       </p:sp>
       <p:sp>
         <p:nvSpPr>
-          <p:cNvPr id="3" name="Shape 1"/>
+          <p:cNvPr id="3" name="Text 1"/>
           <p:cNvSpPr/>
           <p:nvPr/>
         </p:nvSpPr>
@@ -9466,29 +9869,10 @@
             <a:solidFill>
               <a:srgbClr val="CCCCCC"/>
             </a:solidFill>
-            <a:prstDash val="solid"/>
           </a:ln>
         </p:spPr>
-      </p:sp>
-      <p:sp>
-        <p:nvSpPr>
-          <p:cNvPr id="4" name="Text 2"/>
-          <p:cNvSpPr/>
-          <p:nvPr/>
-        </p:nvSpPr>
-        <p:spPr>
-          <a:xfrm>
-            <a:off x="909638" y="3170783"/>
-            <a:ext cx="4948238" cy="379809"/>
-          </a:xfrm>
-          <a:prstGeom prst="rect">
-            <a:avLst/>
-          </a:prstGeom>
-          <a:noFill/>
-          <a:ln/>
-        </p:spPr>
-        <p:txBody>
-          <a:bodyPr wrap="square" lIns="0" tIns="0" rIns="0" bIns="0" rtlCol="0" anchor="t"/>
+        <p:txBody>
+          <a:bodyPr wrap="square" lIns="161925" tIns="390525" rIns="161925" bIns="378768" rtlCol="0" anchor="t"/>
           <a:lstStyle/>
           <a:p>
             <a:pPr algn="l" indent="0" marL="0">
@@ -9525,34 +9909,18 @@
               </a:rPr>
               <a:t> Card A</a:t>
             </a:r>
+            <a:pPr algn="l" indent="0" marL="0">
+              <a:lnSpc>
+                <a:spcPct val="125000"/>
+              </a:lnSpc>
+              <a:buNone/>
+            </a:pPr>
             <a:endParaRPr lang="en-US" sz="2392" dirty="0"/>
           </a:p>
-        </p:txBody>
-      </p:sp>
-      <p:sp>
-        <p:nvSpPr>
-          <p:cNvPr id="5" name="Text 3"/>
-          <p:cNvSpPr/>
-          <p:nvPr/>
-        </p:nvSpPr>
-        <p:spPr>
-          <a:xfrm>
-            <a:off x="909638" y="3702993"/>
-            <a:ext cx="4948238" cy="842814"/>
-          </a:xfrm>
-          <a:prstGeom prst="rect">
-            <a:avLst/>
-          </a:prstGeom>
-          <a:noFill/>
-          <a:ln/>
-        </p:spPr>
-        <p:txBody>
-          <a:bodyPr wrap="square" lIns="0" tIns="0" rIns="0" bIns="0" rtlCol="0" anchor="t"/>
-          <a:lstStyle/>
-          <a:p>
-            <a:pPr algn="l" indent="0" marL="0">
-              <a:lnSpc>
-                <a:spcPct val="150000"/>
+          <a:p>
+            <a:pPr algn="l" indent="0" marL="0">
+              <a:lnSpc>
+                <a:spcPct val="125000"/>
               </a:lnSpc>
               <a:buNone/>
             </a:pPr>
@@ -9569,7 +9937,7 @@
             </a:r>
             <a:pPr algn="l" indent="0" marL="0">
               <a:lnSpc>
-                <a:spcPct val="150000"/>
+                <a:spcPct val="125000"/>
               </a:lnSpc>
               <a:buNone/>
             </a:pPr>
@@ -9586,7 +9954,7 @@
             </a:r>
             <a:pPr algn="l" indent="0" marL="0">
               <a:lnSpc>
-                <a:spcPct val="150000"/>
+                <a:spcPct val="125000"/>
               </a:lnSpc>
               <a:buNone/>
             </a:pPr>
@@ -9603,7 +9971,7 @@
             </a:r>
             <a:pPr algn="l" indent="0" marL="0">
               <a:lnSpc>
-                <a:spcPct val="150000"/>
+                <a:spcPct val="125000"/>
               </a:lnSpc>
               <a:buNone/>
             </a:pPr>
@@ -9623,7 +9991,7 @@
             </a:r>
             <a:pPr algn="l" indent="0" marL="0">
               <a:lnSpc>
-                <a:spcPct val="150000"/>
+                <a:spcPct val="125000"/>
               </a:lnSpc>
               <a:buNone/>
             </a:pPr>
@@ -9640,16 +10008,16 @@
             </a:r>
             <a:pPr algn="l" indent="0" marL="0">
               <a:lnSpc>
-                <a:spcPct val="150000"/>
-              </a:lnSpc>
-              <a:buNone/>
-            </a:pPr>
-            <a:endParaRPr lang="en-US" sz="2175" dirty="0"/>
-          </a:p>
-          <a:p>
-            <a:pPr algn="l" indent="0" marL="0">
-              <a:lnSpc>
-                <a:spcPct val="150000"/>
+                <a:spcPct val="125000"/>
+              </a:lnSpc>
+              <a:buNone/>
+            </a:pPr>
+            <a:endParaRPr lang="en-US" sz="2392" dirty="0"/>
+          </a:p>
+          <a:p>
+            <a:pPr algn="l" indent="0" marL="0">
+              <a:lnSpc>
+                <a:spcPct val="125000"/>
               </a:lnSpc>
               <a:buNone/>
             </a:pPr>
@@ -9664,13 +10032,13 @@
               </a:rPr>
               <a:t>Emoji are also included.</a:t>
             </a:r>
-            <a:endParaRPr lang="en-US" sz="2175" dirty="0"/>
-          </a:p>
-        </p:txBody>
-      </p:sp>
-      <p:sp>
-        <p:nvSpPr>
-          <p:cNvPr id="6" name="Shape 4"/>
+            <a:endParaRPr lang="en-US" sz="2392" dirty="0"/>
+          </a:p>
+        </p:txBody>
+      </p:sp>
+      <p:sp>
+        <p:nvSpPr>
+          <p:cNvPr id="4" name="Text 2"/>
           <p:cNvSpPr/>
           <p:nvPr/>
         </p:nvSpPr>
@@ -9691,29 +10059,10 @@
             <a:solidFill>
               <a:srgbClr val="CCCCCC"/>
             </a:solidFill>
-            <a:prstDash val="solid"/>
           </a:ln>
         </p:spPr>
-      </p:sp>
-      <p:sp>
-        <p:nvSpPr>
-          <p:cNvPr id="7" name="Text 5"/>
-          <p:cNvSpPr/>
-          <p:nvPr/>
-        </p:nvSpPr>
-        <p:spPr>
-          <a:xfrm>
-            <a:off x="6334125" y="3170783"/>
-            <a:ext cx="4948238" cy="379809"/>
-          </a:xfrm>
-          <a:prstGeom prst="rect">
-            <a:avLst/>
-          </a:prstGeom>
-          <a:noFill/>
-          <a:ln/>
-        </p:spPr>
-        <p:txBody>
-          <a:bodyPr wrap="square" lIns="0" tIns="0" rIns="0" bIns="0" rtlCol="0" anchor="t"/>
+        <p:txBody>
+          <a:bodyPr wrap="square" lIns="161925" tIns="390525" rIns="161925" bIns="314325" rtlCol="0" anchor="t"/>
           <a:lstStyle/>
           <a:p>
             <a:pPr algn="l" indent="0" marL="0">
@@ -9750,34 +10099,18 @@
               </a:rPr>
               <a:t> Card B</a:t>
             </a:r>
+            <a:pPr algn="l" indent="0" marL="0">
+              <a:lnSpc>
+                <a:spcPct val="125000"/>
+              </a:lnSpc>
+              <a:buNone/>
+            </a:pPr>
             <a:endParaRPr lang="en-US" sz="2392" dirty="0"/>
           </a:p>
-        </p:txBody>
-      </p:sp>
-      <p:sp>
-        <p:nvSpPr>
-          <p:cNvPr id="8" name="Text 6"/>
-          <p:cNvSpPr/>
-          <p:nvPr/>
-        </p:nvSpPr>
-        <p:spPr>
-          <a:xfrm>
-            <a:off x="6334125" y="3702993"/>
-            <a:ext cx="4948238" cy="897731"/>
-          </a:xfrm>
-          <a:prstGeom prst="rect">
-            <a:avLst/>
-          </a:prstGeom>
-          <a:noFill/>
-          <a:ln/>
-        </p:spPr>
-        <p:txBody>
-          <a:bodyPr wrap="square" lIns="0" tIns="0" rIns="0" bIns="0" rtlCol="0" anchor="t"/>
-          <a:lstStyle/>
           <a:p>
             <a:pPr algn="l" marL="342900" indent="-342900">
               <a:lnSpc>
-                <a:spcPct val="150000"/>
+                <a:spcPct val="125000"/>
               </a:lnSpc>
               <a:buSzPct val="100000"/>
               <a:buChar char="•"/>
@@ -9793,12 +10126,12 @@
               </a:rPr>
               <a:t>List item 1</a:t>
             </a:r>
-            <a:endParaRPr lang="en-US" sz="2175" dirty="0"/>
+            <a:endParaRPr lang="en-US" sz="2392" dirty="0"/>
           </a:p>
           <a:p>
             <a:pPr algn="l" marL="342900" indent="-342900">
               <a:lnSpc>
-                <a:spcPct val="150000"/>
+                <a:spcPct val="125000"/>
               </a:lnSpc>
               <a:buSzPct val="100000"/>
               <a:buChar char="•"/>
@@ -9816,7 +10149,7 @@
             </a:r>
             <a:pPr algn="l" marL="342900" indent="-342900">
               <a:lnSpc>
-                <a:spcPct val="150000"/>
+                <a:spcPct val="125000"/>
               </a:lnSpc>
               <a:buSzPct val="100000"/>
               <a:buChar char="•"/>
@@ -9832,7 +10165,7 @@
               </a:rPr>
               <a:t>✅</a:t>
             </a:r>
-            <a:endParaRPr lang="en-US" sz="2175" dirty="0"/>
+            <a:endParaRPr lang="en-US" sz="2392" dirty="0"/>
           </a:p>
         </p:txBody>
       </p:sp>
@@ -9957,7 +10290,7 @@
       </p:sp>
       <p:sp>
         <p:nvSpPr>
-          <p:cNvPr id="3" name="Shape 1"/>
+          <p:cNvPr id="3" name="Text 1"/>
           <p:cNvSpPr/>
           <p:nvPr/>
         </p:nvSpPr>
@@ -9975,81 +10308,62 @@
             <a:solidFill>
               <a:srgbClr val="0066CC"/>
             </a:solidFill>
-            <a:prstDash val="solid"/>
           </a:ln>
         </p:spPr>
+        <p:txBody>
+          <a:bodyPr wrap="square" lIns="133350" tIns="133350" rIns="133350" bIns="285750" rtlCol="0" anchor="t"/>
+          <a:lstStyle/>
+          <a:p>
+            <a:pPr algn="l" indent="0" marL="0">
+              <a:lnSpc>
+                <a:spcPct val="150000"/>
+              </a:lnSpc>
+              <a:buNone/>
+            </a:pPr>
+            <a:r>
+              <a:rPr lang="en-US" sz="2175" b="1" dirty="0">
+                <a:solidFill>
+                  <a:srgbClr val="1F2328"/>
+                </a:solidFill>
+                <a:latin typeface="Segoe UI" pitchFamily="34" charset="0"/>
+                <a:ea typeface="Segoe UI" pitchFamily="34" charset="-122"/>
+                <a:cs typeface="Segoe UI" pitchFamily="34" charset="-120"/>
+              </a:rPr>
+              <a:t>Blue border card</a:t>
+            </a:r>
+            <a:pPr algn="l" indent="0" marL="0">
+              <a:lnSpc>
+                <a:spcPct val="150000"/>
+              </a:lnSpc>
+              <a:buNone/>
+            </a:pPr>
+            <a:endParaRPr lang="en-US" sz="2175" dirty="0"/>
+          </a:p>
+          <a:p>
+            <a:pPr algn="l" indent="0" marL="0">
+              <a:lnSpc>
+                <a:spcPct val="150000"/>
+              </a:lnSpc>
+              <a:buNone/>
+            </a:pPr>
+            <a:r>
+              <a:rPr lang="en-US" sz="2175" dirty="0">
+                <a:solidFill>
+                  <a:srgbClr val="1F2328"/>
+                </a:solidFill>
+                <a:latin typeface="Segoe UI" pitchFamily="34" charset="0"/>
+                <a:ea typeface="Segoe UI" pitchFamily="34" charset="-122"/>
+                <a:cs typeface="Segoe UI" pitchFamily="34" charset="-120"/>
+              </a:rPr>
+              <a:t>No background</a:t>
+            </a:r>
+            <a:endParaRPr lang="en-US" sz="2175" dirty="0"/>
+          </a:p>
+        </p:txBody>
       </p:sp>
       <p:sp>
         <p:nvSpPr>
           <p:cNvPr id="4" name="Text 2"/>
-          <p:cNvSpPr/>
-          <p:nvPr/>
-        </p:nvSpPr>
-        <p:spPr>
-          <a:xfrm>
-            <a:off x="881063" y="3633341"/>
-            <a:ext cx="3222575" cy="828675"/>
-          </a:xfrm>
-          <a:prstGeom prst="rect">
-            <a:avLst/>
-          </a:prstGeom>
-          <a:noFill/>
-          <a:ln/>
-        </p:spPr>
-        <p:txBody>
-          <a:bodyPr wrap="square" lIns="0" tIns="0" rIns="0" bIns="0" rtlCol="0" anchor="t"/>
-          <a:lstStyle/>
-          <a:p>
-            <a:pPr algn="l" indent="0" marL="0">
-              <a:lnSpc>
-                <a:spcPct val="150000"/>
-              </a:lnSpc>
-              <a:buNone/>
-            </a:pPr>
-            <a:r>
-              <a:rPr lang="en-US" sz="2175" b="1" dirty="0">
-                <a:solidFill>
-                  <a:srgbClr val="1F2328"/>
-                </a:solidFill>
-                <a:latin typeface="Segoe UI" pitchFamily="34" charset="0"/>
-                <a:ea typeface="Segoe UI" pitchFamily="34" charset="-122"/>
-                <a:cs typeface="Segoe UI" pitchFamily="34" charset="-120"/>
-              </a:rPr>
-              <a:t>Blue border card</a:t>
-            </a:r>
-            <a:pPr algn="l" indent="0" marL="0">
-              <a:lnSpc>
-                <a:spcPct val="150000"/>
-              </a:lnSpc>
-              <a:buNone/>
-            </a:pPr>
-            <a:endParaRPr lang="en-US" sz="2175" dirty="0"/>
-          </a:p>
-          <a:p>
-            <a:pPr algn="l" indent="0" marL="0">
-              <a:lnSpc>
-                <a:spcPct val="150000"/>
-              </a:lnSpc>
-              <a:buNone/>
-            </a:pPr>
-            <a:r>
-              <a:rPr lang="en-US" sz="2175" dirty="0">
-                <a:solidFill>
-                  <a:srgbClr val="1F2328"/>
-                </a:solidFill>
-                <a:latin typeface="Segoe UI" pitchFamily="34" charset="0"/>
-                <a:ea typeface="Segoe UI" pitchFamily="34" charset="-122"/>
-                <a:cs typeface="Segoe UI" pitchFamily="34" charset="-120"/>
-              </a:rPr>
-              <a:t>No background</a:t>
-            </a:r>
-            <a:endParaRPr lang="en-US" sz="2175" dirty="0"/>
-          </a:p>
-        </p:txBody>
-      </p:sp>
-      <p:sp>
-        <p:nvSpPr>
-          <p:cNvPr id="5" name="Shape 3"/>
           <p:cNvSpPr/>
           <p:nvPr/>
         </p:nvSpPr>
@@ -10067,29 +10381,10 @@
             <a:solidFill>
               <a:srgbClr val="CC6600"/>
             </a:solidFill>
-            <a:prstDash val="solid"/>
           </a:ln>
         </p:spPr>
-      </p:sp>
-      <p:sp>
-        <p:nvSpPr>
-          <p:cNvPr id="6" name="Text 4"/>
-          <p:cNvSpPr/>
-          <p:nvPr/>
-        </p:nvSpPr>
-        <p:spPr>
-          <a:xfrm>
-            <a:off x="4484638" y="3633341"/>
-            <a:ext cx="3222575" cy="828675"/>
-          </a:xfrm>
-          <a:prstGeom prst="rect">
-            <a:avLst/>
-          </a:prstGeom>
-          <a:noFill/>
-          <a:ln/>
-        </p:spPr>
-        <p:txBody>
-          <a:bodyPr wrap="square" lIns="0" tIns="0" rIns="0" bIns="0" rtlCol="0" anchor="t"/>
+        <p:txBody>
+          <a:bodyPr wrap="square" lIns="133350" tIns="133350" rIns="133350" bIns="285750" rtlCol="0" anchor="t"/>
           <a:lstStyle/>
           <a:p>
             <a:pPr algn="l" indent="0" marL="0">
@@ -10141,7 +10436,7 @@
       </p:sp>
       <p:sp>
         <p:nvSpPr>
-          <p:cNvPr id="7" name="Shape 5"/>
+          <p:cNvPr id="5" name="Text 3"/>
           <p:cNvSpPr/>
           <p:nvPr/>
         </p:nvSpPr>
@@ -10159,29 +10454,10 @@
             <a:solidFill>
               <a:srgbClr val="006600"/>
             </a:solidFill>
-            <a:prstDash val="solid"/>
           </a:ln>
         </p:spPr>
-      </p:sp>
-      <p:sp>
-        <p:nvSpPr>
-          <p:cNvPr id="8" name="Text 6"/>
-          <p:cNvSpPr/>
-          <p:nvPr/>
-        </p:nvSpPr>
-        <p:spPr>
-          <a:xfrm>
-            <a:off x="8088213" y="3633341"/>
-            <a:ext cx="3527524" cy="828675"/>
-          </a:xfrm>
-          <a:prstGeom prst="rect">
-            <a:avLst/>
-          </a:prstGeom>
-          <a:noFill/>
-          <a:ln/>
-        </p:spPr>
-        <p:txBody>
-          <a:bodyPr wrap="square" lIns="0" tIns="0" rIns="0" bIns="0" rtlCol="0" anchor="t"/>
+        <p:txBody>
+          <a:bodyPr wrap="square" lIns="133350" tIns="133350" rIns="133350" bIns="285750" rtlCol="0" anchor="t"/>
           <a:lstStyle/>
           <a:p>
             <a:pPr algn="l" indent="0" marL="0">
@@ -10654,7 +10930,7 @@
         </p:nvSpPr>
         <p:spPr>
           <a:xfrm>
-            <a:off x="747713" y="2267396"/>
+            <a:off x="747713" y="2272159"/>
             <a:ext cx="11291888" cy="684907"/>
           </a:xfrm>
           <a:prstGeom prst="rect">
@@ -10696,7 +10972,7 @@
         </p:nvSpPr>
         <p:spPr>
           <a:xfrm>
-            <a:off x="747713" y="3159472"/>
+            <a:off x="747713" y="3164235"/>
             <a:ext cx="304800" cy="304800"/>
           </a:xfrm>
           <a:prstGeom prst="roundRect">
@@ -10718,7 +10994,7 @@
         </p:nvSpPr>
         <p:spPr>
           <a:xfrm>
-            <a:off x="747713" y="3159472"/>
+            <a:off x="747713" y="3164235"/>
             <a:ext cx="381000" cy="304800"/>
           </a:xfrm>
           <a:prstGeom prst="rect">
@@ -10760,8 +11036,8 @@
         </p:nvSpPr>
         <p:spPr>
           <a:xfrm>
-            <a:off x="1147763" y="3104704"/>
-            <a:ext cx="3705523" cy="414338"/>
+            <a:off x="1147763" y="3109466"/>
+            <a:ext cx="3507879" cy="414338"/>
           </a:xfrm>
           <a:prstGeom prst="rect">
             <a:avLst/>
@@ -10866,8 +11142,8 @@
         </p:nvSpPr>
         <p:spPr>
           <a:xfrm>
-            <a:off x="1147763" y="3633341"/>
-            <a:ext cx="5888831" cy="428476"/>
+            <a:off x="1147763" y="3638104"/>
+            <a:ext cx="5512743" cy="418951"/>
           </a:xfrm>
           <a:prstGeom prst="rect">
             <a:avLst/>
@@ -10962,7 +11238,7 @@
         </p:nvSpPr>
         <p:spPr>
           <a:xfrm>
-            <a:off x="747713" y="4230886"/>
+            <a:off x="747713" y="4226123"/>
             <a:ext cx="304800" cy="304800"/>
           </a:xfrm>
           <a:prstGeom prst="roundRect">
@@ -10984,7 +11260,7 @@
         </p:nvSpPr>
         <p:spPr>
           <a:xfrm>
-            <a:off x="747713" y="4230886"/>
+            <a:off x="747713" y="4226123"/>
             <a:ext cx="381000" cy="304800"/>
           </a:xfrm>
           <a:prstGeom prst="rect">
@@ -11026,7 +11302,7 @@
         </p:nvSpPr>
         <p:spPr>
           <a:xfrm>
-            <a:off x="1147763" y="4176117"/>
+            <a:off x="1147763" y="4171355"/>
             <a:ext cx="10601325" cy="414338"/>
           </a:xfrm>
           <a:prstGeom prst="rect">
@@ -11703,7 +11979,7 @@
         <p:spPr>
           <a:xfrm>
             <a:off x="747713" y="4142184"/>
-            <a:ext cx="11001375" cy="828675"/>
+            <a:ext cx="10696575" cy="1395413"/>
           </a:xfrm>
           <a:prstGeom prst="rect">
             <a:avLst/>
@@ -11732,30 +12008,14 @@
               </a:rPr>
               <a:t>This is a normal paragraph text. Verify that writing a long line without breaks does not cause errors.</a:t>
             </a:r>
+            <a:pPr algn="l" indent="0" marL="0">
+              <a:lnSpc>
+                <a:spcPct val="150000"/>
+              </a:lnSpc>
+              <a:buNone/>
+            </a:pPr>
             <a:endParaRPr lang="en-US" sz="2175" dirty="0"/>
           </a:p>
-        </p:txBody>
-      </p:sp>
-      <p:sp>
-        <p:nvSpPr>
-          <p:cNvPr id="7" name="Text 5"/>
-          <p:cNvSpPr/>
-          <p:nvPr/>
-        </p:nvSpPr>
-        <p:spPr>
-          <a:xfrm>
-            <a:off x="747713" y="5123259"/>
-            <a:ext cx="11001375" cy="414338"/>
-          </a:xfrm>
-          <a:prstGeom prst="rect">
-            <a:avLst/>
-          </a:prstGeom>
-          <a:noFill/>
-          <a:ln/>
-        </p:spPr>
-        <p:txBody>
-          <a:bodyPr wrap="square" lIns="0" tIns="0" rIns="0" bIns="0" rtlCol="0" anchor="t"/>
-          <a:lstStyle/>
           <a:p>
             <a:pPr algn="l" indent="0" marL="0">
               <a:lnSpc>
@@ -11948,7 +12208,7 @@
         <p:spPr>
           <a:xfrm>
             <a:off x="747713" y="3357116"/>
-            <a:ext cx="11001375" cy="414338"/>
+            <a:ext cx="10696575" cy="981075"/>
           </a:xfrm>
           <a:prstGeom prst="rect">
             <a:avLst/>
@@ -11977,55 +12237,39 @@
               </a:rPr>
               <a:t>This slide verifies that the header and footer are positioned correctly.</a:t>
             </a:r>
+            <a:pPr algn="l" indent="0" marL="0">
+              <a:lnSpc>
+                <a:spcPct val="150000"/>
+              </a:lnSpc>
+              <a:buNone/>
+            </a:pPr>
             <a:endParaRPr lang="en-US" sz="2175" dirty="0"/>
           </a:p>
+          <a:p>
+            <a:pPr algn="l" indent="0" marL="0">
+              <a:lnSpc>
+                <a:spcPct val="150000"/>
+              </a:lnSpc>
+              <a:buNone/>
+            </a:pPr>
+            <a:r>
+              <a:rPr lang="en-US" sz="2175" dirty="0">
+                <a:solidFill>
+                  <a:srgbClr val="1F2328"/>
+                </a:solidFill>
+                <a:latin typeface="Segoe UI" pitchFamily="34" charset="0"/>
+                <a:ea typeface="Segoe UI" pitchFamily="34" charset="-122"/>
+                <a:cs typeface="Segoe UI" pitchFamily="34" charset="-120"/>
+              </a:rPr>
+              <a:t>Body text.</a:t>
+            </a:r>
+            <a:endParaRPr lang="en-US" sz="2175" dirty="0"/>
+          </a:p>
         </p:txBody>
       </p:sp>
       <p:sp>
         <p:nvSpPr>
           <p:cNvPr id="5" name="Text 3"/>
-          <p:cNvSpPr/>
-          <p:nvPr/>
-        </p:nvSpPr>
-        <p:spPr>
-          <a:xfrm>
-            <a:off x="747713" y="3923854"/>
-            <a:ext cx="11001375" cy="414338"/>
-          </a:xfrm>
-          <a:prstGeom prst="rect">
-            <a:avLst/>
-          </a:prstGeom>
-          <a:noFill/>
-          <a:ln/>
-        </p:spPr>
-        <p:txBody>
-          <a:bodyPr wrap="square" lIns="0" tIns="0" rIns="0" bIns="0" rtlCol="0" anchor="t"/>
-          <a:lstStyle/>
-          <a:p>
-            <a:pPr algn="l" indent="0" marL="0">
-              <a:lnSpc>
-                <a:spcPct val="150000"/>
-              </a:lnSpc>
-              <a:buNone/>
-            </a:pPr>
-            <a:r>
-              <a:rPr lang="en-US" sz="2175" dirty="0">
-                <a:solidFill>
-                  <a:srgbClr val="1F2328"/>
-                </a:solidFill>
-                <a:latin typeface="Segoe UI" pitchFamily="34" charset="0"/>
-                <a:ea typeface="Segoe UI" pitchFamily="34" charset="-122"/>
-                <a:cs typeface="Segoe UI" pitchFamily="34" charset="-120"/>
-              </a:rPr>
-              <a:t>Body text.</a:t>
-            </a:r>
-            <a:endParaRPr lang="en-US" sz="2175" dirty="0"/>
-          </a:p>
-        </p:txBody>
-      </p:sp>
-      <p:sp>
-        <p:nvSpPr>
-          <p:cNvPr id="6" name="Text 4"/>
           <p:cNvSpPr/>
           <p:nvPr/>
         </p:nvSpPr>
@@ -12150,7 +12394,7 @@
         </p:nvSpPr>
         <p:spPr>
           <a:xfrm>
-            <a:off x="747713" y="1097012"/>
+            <a:off x="747713" y="1101775"/>
             <a:ext cx="11291888" cy="684907"/>
           </a:xfrm>
           <a:prstGeom prst="rect">
@@ -12192,8 +12436,8 @@
         </p:nvSpPr>
         <p:spPr>
           <a:xfrm>
-            <a:off x="747713" y="1934319"/>
-            <a:ext cx="11001375" cy="414338"/>
+            <a:off x="747713" y="1939082"/>
+            <a:ext cx="10696575" cy="3816995"/>
           </a:xfrm>
           <a:prstGeom prst="rect">
             <a:avLst/>
@@ -12222,30 +12466,14 @@
               </a:rPr>
               <a:t>Verify the following special characters display correctly:</a:t>
             </a:r>
+            <a:pPr algn="l" indent="0" marL="0">
+              <a:lnSpc>
+                <a:spcPct val="150000"/>
+              </a:lnSpc>
+              <a:buNone/>
+            </a:pPr>
             <a:endParaRPr lang="en-US" sz="2175" dirty="0"/>
           </a:p>
-        </p:txBody>
-      </p:sp>
-      <p:sp>
-        <p:nvSpPr>
-          <p:cNvPr id="4" name="Text 2"/>
-          <p:cNvSpPr/>
-          <p:nvPr/>
-        </p:nvSpPr>
-        <p:spPr>
-          <a:xfrm>
-            <a:off x="747713" y="2501057"/>
-            <a:ext cx="10696575" cy="3259782"/>
-          </a:xfrm>
-          <a:prstGeom prst="rect">
-            <a:avLst/>
-          </a:prstGeom>
-          <a:noFill/>
-          <a:ln/>
-        </p:spPr>
-        <p:txBody>
-          <a:bodyPr wrap="square" lIns="0" tIns="0" rIns="0" bIns="0" rtlCol="0" anchor="t"/>
-          <a:lstStyle/>
           <a:p>
             <a:pPr algn="l" marL="342900" indent="-342900">
               <a:lnSpc>
@@ -12442,7 +12670,7 @@
               </a:rPr>
               <a:t> (HTML entities)</a:t>
             </a:r>
-            <a:endParaRPr lang="en-US" sz="1849" dirty="0"/>
+            <a:endParaRPr lang="en-US" sz="2175" dirty="0"/>
           </a:p>
           <a:p>
             <a:pPr algn="l" marL="342900" indent="-342900">
@@ -12463,7 +12691,7 @@
               </a:rPr>
               <a:t>Fullwidth symbols: 「括弧」『二重括弧』【太括弧】〔亀甲括弧〕</a:t>
             </a:r>
-            <a:endParaRPr lang="en-US" sz="1849" dirty="0"/>
+            <a:endParaRPr lang="en-US" sz="2175" dirty="0"/>
           </a:p>
           <a:p>
             <a:pPr algn="l" marL="342900" indent="-342900">
@@ -12484,7 +12712,7 @@
               </a:rPr>
               <a:t>Math-like: x² + y² = z², α・β・γ</a:t>
             </a:r>
-            <a:endParaRPr lang="en-US" sz="1849" dirty="0"/>
+            <a:endParaRPr lang="en-US" sz="2175" dirty="0"/>
           </a:p>
           <a:p>
             <a:pPr algn="l" marL="342900" indent="-342900">
@@ -12505,7 +12733,7 @@
               </a:rPr>
               <a:t>Long vowel mark: ー (katakana) included in words</a:t>
             </a:r>
-            <a:endParaRPr lang="en-US" sz="1849" dirty="0"/>
+            <a:endParaRPr lang="en-US" sz="2175" dirty="0"/>
           </a:p>
           <a:p>
             <a:pPr algn="l" marL="342900" indent="-342900">
@@ -12526,7 +12754,7 @@
               </a:rPr>
               <a:t>Repetition mark: 〜がテ゛スト〜</a:t>
             </a:r>
-            <a:endParaRPr lang="en-US" sz="1849" dirty="0"/>
+            <a:endParaRPr lang="en-US" sz="2175" dirty="0"/>
           </a:p>
           <a:p>
             <a:pPr algn="l" marL="342900" indent="-342900">
@@ -12547,7 +12775,7 @@
               </a:rPr>
               <a:t>Zero-width character check: 通常テキスト (verify no invisible characters are mixed in)</a:t>
             </a:r>
-            <a:endParaRPr lang="en-US" sz="1849" dirty="0"/>
+            <a:endParaRPr lang="en-US" sz="2175" dirty="0"/>
           </a:p>
         </p:txBody>
       </p:sp>
@@ -12679,7 +12907,7 @@
         <p:spPr>
           <a:xfrm>
             <a:off x="747713" y="2037904"/>
-            <a:ext cx="11001375" cy="2486025"/>
+            <a:ext cx="10696575" cy="3619500"/>
           </a:xfrm>
           <a:prstGeom prst="rect">
             <a:avLst/>
@@ -12708,30 +12936,14 @@
               </a:rPr>
               <a:t>これは非常に長い段落テキストのテストです。日本語のテキストが長くなった場合に正しく折り返し表示されるか確認します。英語テキストも混在させます：The quick brown fox jumps over the lazy dog. この文章には特に意味がありません。段落が長くなっても途中でクリップされないことを確認します。改行なしでどこまで続くか試してみます。そしてまだ続きます。長い長いテキストがどこかの時点で折り返されることを期待します。</a:t>
             </a:r>
+            <a:pPr algn="l" indent="0" marL="0">
+              <a:lnSpc>
+                <a:spcPct val="150000"/>
+              </a:lnSpc>
+              <a:buNone/>
+            </a:pPr>
             <a:endParaRPr lang="en-US" sz="2175" dirty="0"/>
           </a:p>
-        </p:txBody>
-      </p:sp>
-      <p:sp>
-        <p:nvSpPr>
-          <p:cNvPr id="4" name="Text 2"/>
-          <p:cNvSpPr/>
-          <p:nvPr/>
-        </p:nvSpPr>
-        <p:spPr>
-          <a:xfrm>
-            <a:off x="747713" y="4676329"/>
-            <a:ext cx="11001375" cy="414338"/>
-          </a:xfrm>
-          <a:prstGeom prst="rect">
-            <a:avLst/>
-          </a:prstGeom>
-          <a:noFill/>
-          <a:ln/>
-        </p:spPr>
-        <p:txBody>
-          <a:bodyPr wrap="square" lIns="0" tIns="0" rIns="0" bIns="0" rtlCol="0" anchor="t"/>
-          <a:lstStyle/>
           <a:p>
             <a:pPr algn="l" indent="0" marL="0">
               <a:lnSpc>
@@ -12750,30 +12962,14 @@
               </a:rPr>
               <a:t>Next paragraph. Also checking the spacing between paragraphs.</a:t>
             </a:r>
+            <a:pPr algn="l" indent="0" marL="0">
+              <a:lnSpc>
+                <a:spcPct val="150000"/>
+              </a:lnSpc>
+              <a:buNone/>
+            </a:pPr>
             <a:endParaRPr lang="en-US" sz="2175" dirty="0"/>
           </a:p>
-        </p:txBody>
-      </p:sp>
-      <p:sp>
-        <p:nvSpPr>
-          <p:cNvPr id="5" name="Text 3"/>
-          <p:cNvSpPr/>
-          <p:nvPr/>
-        </p:nvSpPr>
-        <p:spPr>
-          <a:xfrm>
-            <a:off x="747713" y="5243066"/>
-            <a:ext cx="11001375" cy="414338"/>
-          </a:xfrm>
-          <a:prstGeom prst="rect">
-            <a:avLst/>
-          </a:prstGeom>
-          <a:noFill/>
-          <a:ln/>
-        </p:spPr>
-        <p:txBody>
-          <a:bodyPr wrap="square" lIns="0" tIns="0" rIns="0" bIns="0" rtlCol="0" anchor="t"/>
-          <a:lstStyle/>
           <a:p>
             <a:pPr algn="l" indent="0" marL="0">
               <a:lnSpc>
@@ -12881,7 +13077,7 @@
         </p:nvSpPr>
         <p:spPr>
           <a:xfrm>
-            <a:off x="747713" y="1632198"/>
+            <a:off x="747713" y="1638746"/>
             <a:ext cx="11291888" cy="472380"/>
           </a:xfrm>
           <a:prstGeom prst="rect">
@@ -12923,7 +13119,7 @@
         </p:nvSpPr>
         <p:spPr>
           <a:xfrm>
-            <a:off x="747713" y="2333179"/>
+            <a:off x="747713" y="2339727"/>
             <a:ext cx="11291888" cy="383828"/>
           </a:xfrm>
           <a:prstGeom prst="rect">
@@ -12965,7 +13161,7 @@
         </p:nvSpPr>
         <p:spPr>
           <a:xfrm>
-            <a:off x="747713" y="2869406"/>
+            <a:off x="747713" y="2875955"/>
             <a:ext cx="11001375" cy="285750"/>
           </a:xfrm>
           <a:prstGeom prst="rect">
@@ -13007,7 +13203,7 @@
         </p:nvSpPr>
         <p:spPr>
           <a:xfrm>
-            <a:off x="747713" y="3307556"/>
+            <a:off x="747713" y="3314105"/>
             <a:ext cx="5291138" cy="1390650"/>
           </a:xfrm>
           <a:prstGeom prst="roundRect">
@@ -13034,7 +13230,7 @@
         </p:nvSpPr>
         <p:spPr>
           <a:xfrm>
-            <a:off x="747713" y="3307556"/>
+            <a:off x="747713" y="3314105"/>
             <a:ext cx="5367338" cy="1390650"/>
           </a:xfrm>
           <a:prstGeom prst="rect">
@@ -13154,7 +13350,7 @@
         </p:nvSpPr>
         <p:spPr>
           <a:xfrm>
-            <a:off x="6153150" y="3307556"/>
+            <a:off x="6153150" y="3314105"/>
             <a:ext cx="5291138" cy="1390650"/>
           </a:xfrm>
           <a:prstGeom prst="roundRect">
@@ -13181,7 +13377,7 @@
         </p:nvSpPr>
         <p:spPr>
           <a:xfrm>
-            <a:off x="6153150" y="3307556"/>
+            <a:off x="6153150" y="3314105"/>
             <a:ext cx="5672138" cy="1390650"/>
           </a:xfrm>
           <a:prstGeom prst="rect">
@@ -13301,12 +13497,12 @@
         </p:nvSpPr>
         <p:spPr>
           <a:xfrm>
-            <a:off x="747713" y="4774406"/>
-            <a:ext cx="10696575" cy="451396"/>
+            <a:off x="747713" y="4780955"/>
+            <a:ext cx="10696575" cy="438150"/>
           </a:xfrm>
           <a:prstGeom prst="roundRect">
             <a:avLst>
-              <a:gd name="adj" fmla="val 51294"/>
+              <a:gd name="adj" fmla="val 54442"/>
             </a:avLst>
           </a:prstGeom>
           <a:solidFill>
@@ -13328,8 +13524,8 @@
         </p:nvSpPr>
         <p:spPr>
           <a:xfrm>
-            <a:off x="747713" y="4774406"/>
-            <a:ext cx="11077575" cy="451396"/>
+            <a:off x="747713" y="4780955"/>
+            <a:ext cx="11077575" cy="438150"/>
           </a:xfrm>
           <a:prstGeom prst="rect">
             <a:avLst/>
@@ -13484,7 +13680,7 @@
         </p:nvSpPr>
         <p:spPr>
           <a:xfrm>
-            <a:off x="747713" y="1814959"/>
+            <a:off x="747713" y="1819721"/>
             <a:ext cx="11291888" cy="684907"/>
           </a:xfrm>
           <a:prstGeom prst="rect">
@@ -13526,7 +13722,7 @@
         </p:nvSpPr>
         <p:spPr>
           <a:xfrm>
-            <a:off x="747713" y="2652266"/>
+            <a:off x="747713" y="2657029"/>
             <a:ext cx="66675" cy="414338"/>
           </a:xfrm>
           <a:prstGeom prst="rect">
@@ -13546,7 +13742,7 @@
         </p:nvSpPr>
         <p:spPr>
           <a:xfrm>
-            <a:off x="814388" y="2652266"/>
+            <a:off x="814388" y="2657029"/>
             <a:ext cx="10629900" cy="414338"/>
           </a:xfrm>
           <a:prstGeom prst="rect">
@@ -13588,7 +13784,7 @@
         </p:nvSpPr>
         <p:spPr>
           <a:xfrm>
-            <a:off x="747713" y="3219004"/>
+            <a:off x="747713" y="3223766"/>
             <a:ext cx="66675" cy="1243013"/>
           </a:xfrm>
           <a:prstGeom prst="rect">
@@ -13608,7 +13804,7 @@
         </p:nvSpPr>
         <p:spPr>
           <a:xfrm>
-            <a:off x="814388" y="3219004"/>
+            <a:off x="814388" y="3223766"/>
             <a:ext cx="10629900" cy="1243013"/>
           </a:xfrm>
           <a:prstGeom prst="rect">
@@ -13702,8 +13898,8 @@
         </p:nvSpPr>
         <p:spPr>
           <a:xfrm>
-            <a:off x="747713" y="4614416"/>
-            <a:ext cx="66675" cy="428476"/>
+            <a:off x="747713" y="4619179"/>
+            <a:ext cx="66675" cy="418951"/>
           </a:xfrm>
           <a:prstGeom prst="rect">
             <a:avLst/>
@@ -13722,8 +13918,8 @@
         </p:nvSpPr>
         <p:spPr>
           <a:xfrm>
-            <a:off x="814388" y="4614416"/>
-            <a:ext cx="10629900" cy="428476"/>
+            <a:off x="814388" y="4619179"/>
+            <a:ext cx="10629900" cy="418951"/>
           </a:xfrm>
           <a:prstGeom prst="rect">
             <a:avLst/>
@@ -13929,7 +14125,7 @@
         </p:nvSpPr>
         <p:spPr>
           <a:xfrm>
-            <a:off x="747713" y="1383953"/>
+            <a:off x="747713" y="1388715"/>
             <a:ext cx="11291888" cy="684907"/>
           </a:xfrm>
           <a:prstGeom prst="rect">
@@ -13978,18 +14174,18 @@
           </p:nvPr>
         </p:nvGraphicFramePr>
         <p:xfrm>
-          <a:off x="747713" y="2221260"/>
-          <a:ext cx="6542633" cy="914400"/>
+          <a:off x="747713" y="2226022"/>
+          <a:ext cx="6366421" cy="914400"/>
         </p:xfrm>
         <a:graphic>
           <a:graphicData uri="http://schemas.openxmlformats.org/drawingml/2006/table">
             <a:tbl>
               <a:tblPr/>
               <a:tblGrid>
-                <a:gridCol w="900113"/>
-                <a:gridCol w="1530191"/>
-                <a:gridCol w="2890361"/>
-                <a:gridCol w="1550194"/>
+                <a:gridCol w="850106"/>
+                <a:gridCol w="1500188"/>
+                <a:gridCol w="2820353"/>
+                <a:gridCol w="1500188"/>
               </a:tblGrid>
               <a:tr h="0">
                 <a:tc>
@@ -15645,8 +15841,8 @@
         </p:nvSpPr>
         <p:spPr>
           <a:xfrm>
-            <a:off x="747713" y="747713"/>
-            <a:ext cx="11291888" cy="1237357"/>
+            <a:off x="747713" y="957709"/>
+            <a:ext cx="11291888" cy="684907"/>
           </a:xfrm>
           <a:prstGeom prst="rect">
             <a:avLst/>
@@ -15687,7 +15883,7 @@
         </p:nvSpPr>
         <p:spPr>
           <a:xfrm>
-            <a:off x="747713" y="2137470"/>
+            <a:off x="747713" y="1795016"/>
             <a:ext cx="10696575" cy="4105275"/>
           </a:xfrm>
           <a:prstGeom prst="roundRect">
@@ -15714,7 +15910,7 @@
         </p:nvSpPr>
         <p:spPr>
           <a:xfrm>
-            <a:off x="747713" y="2137470"/>
+            <a:off x="747713" y="1795016"/>
             <a:ext cx="11077575" cy="4105275"/>
           </a:xfrm>
           <a:prstGeom prst="rect">
@@ -16740,8 +16936,8 @@
         </p:nvSpPr>
         <p:spPr>
           <a:xfrm>
-            <a:off x="747713" y="1054745"/>
-            <a:ext cx="11291888" cy="1237357"/>
+            <a:off x="747713" y="1335732"/>
+            <a:ext cx="11291888" cy="684907"/>
           </a:xfrm>
           <a:prstGeom prst="rect">
             <a:avLst/>
@@ -16782,7 +16978,7 @@
         </p:nvSpPr>
         <p:spPr>
           <a:xfrm>
-            <a:off x="747713" y="2673102"/>
+            <a:off x="747713" y="2401639"/>
             <a:ext cx="6326386" cy="379809"/>
           </a:xfrm>
           <a:prstGeom prst="rect">
@@ -16824,8 +17020,8 @@
         </p:nvSpPr>
         <p:spPr>
           <a:xfrm>
-            <a:off x="747713" y="3205311"/>
-            <a:ext cx="6326386" cy="1878657"/>
+            <a:off x="747713" y="2933849"/>
+            <a:ext cx="6326386" cy="1869132"/>
           </a:xfrm>
           <a:prstGeom prst="rect">
             <a:avLst/>
@@ -16951,7 +17147,7 @@
         </p:nvSpPr>
         <p:spPr>
           <a:xfrm>
-            <a:off x="747713" y="5236369"/>
+            <a:off x="747713" y="4955381"/>
             <a:ext cx="6326386" cy="414338"/>
           </a:xfrm>
           <a:prstGeom prst="rect">
@@ -16993,7 +17189,7 @@
         </p:nvSpPr>
         <p:spPr>
           <a:xfrm>
-            <a:off x="7226498" y="2444502"/>
+            <a:off x="7226498" y="2173039"/>
             <a:ext cx="4217789" cy="661988"/>
           </a:xfrm>
           <a:prstGeom prst="roundRect">
@@ -17501,7 +17697,7 @@
         <p:spPr>
           <a:xfrm>
             <a:off x="747713" y="3183285"/>
-            <a:ext cx="11001375" cy="400050"/>
+            <a:ext cx="10696575" cy="1328738"/>
           </a:xfrm>
           <a:prstGeom prst="rect">
             <a:avLst/>
@@ -17530,30 +17726,14 @@
               </a:rPr>
               <a:t>Large text (28px)</a:t>
             </a:r>
+            <a:pPr algn="l" indent="0" marL="0">
+              <a:lnSpc>
+                <a:spcPct val="150000"/>
+              </a:lnSpc>
+              <a:buNone/>
+            </a:pPr>
             <a:endParaRPr lang="en-US" sz="2100" dirty="0"/>
           </a:p>
-        </p:txBody>
-      </p:sp>
-      <p:sp>
-        <p:nvSpPr>
-          <p:cNvPr id="4" name="Text 2"/>
-          <p:cNvSpPr/>
-          <p:nvPr/>
-        </p:nvSpPr>
-        <p:spPr>
-          <a:xfrm>
-            <a:off x="747713" y="3583335"/>
-            <a:ext cx="11001375" cy="314325"/>
-          </a:xfrm>
-          <a:prstGeom prst="rect">
-            <a:avLst/>
-          </a:prstGeom>
-          <a:noFill/>
-          <a:ln/>
-        </p:spPr>
-        <p:txBody>
-          <a:bodyPr wrap="square" lIns="0" tIns="0" rIns="0" bIns="0" rtlCol="0" anchor="t"/>
-          <a:lstStyle/>
           <a:p>
             <a:pPr algn="l" indent="0" marL="0">
               <a:lnSpc>
@@ -17572,30 +17752,14 @@
               </a:rPr>
               <a:t>Normal text (22px)</a:t>
             </a:r>
-            <a:endParaRPr lang="en-US" sz="1650" dirty="0"/>
-          </a:p>
-        </p:txBody>
-      </p:sp>
-      <p:sp>
-        <p:nvSpPr>
-          <p:cNvPr id="5" name="Text 3"/>
-          <p:cNvSpPr/>
-          <p:nvPr/>
-        </p:nvSpPr>
-        <p:spPr>
-          <a:xfrm>
-            <a:off x="747713" y="3897660"/>
-            <a:ext cx="11001375" cy="257175"/>
-          </a:xfrm>
-          <a:prstGeom prst="rect">
-            <a:avLst/>
-          </a:prstGeom>
-          <a:noFill/>
-          <a:ln/>
-        </p:spPr>
-        <p:txBody>
-          <a:bodyPr wrap="square" lIns="0" tIns="0" rIns="0" bIns="0" rtlCol="0" anchor="t"/>
-          <a:lstStyle/>
+            <a:pPr algn="l" indent="0" marL="0">
+              <a:lnSpc>
+                <a:spcPct val="150000"/>
+              </a:lnSpc>
+              <a:buNone/>
+            </a:pPr>
+            <a:endParaRPr lang="en-US" sz="2100" dirty="0"/>
+          </a:p>
           <a:p>
             <a:pPr algn="l" indent="0" marL="0">
               <a:lnSpc>
@@ -17614,30 +17778,14 @@
               </a:rPr>
               <a:t>Slightly smaller text (18px)</a:t>
             </a:r>
-            <a:endParaRPr lang="en-US" sz="1350" dirty="0"/>
-          </a:p>
-        </p:txBody>
-      </p:sp>
-      <p:sp>
-        <p:nvSpPr>
-          <p:cNvPr id="6" name="Text 4"/>
-          <p:cNvSpPr/>
-          <p:nvPr/>
-        </p:nvSpPr>
-        <p:spPr>
-          <a:xfrm>
-            <a:off x="747713" y="4154835"/>
-            <a:ext cx="11001375" cy="200025"/>
-          </a:xfrm>
-          <a:prstGeom prst="rect">
-            <a:avLst/>
-          </a:prstGeom>
-          <a:noFill/>
-          <a:ln/>
-        </p:spPr>
-        <p:txBody>
-          <a:bodyPr wrap="square" lIns="0" tIns="0" rIns="0" bIns="0" rtlCol="0" anchor="t"/>
-          <a:lstStyle/>
+            <a:pPr algn="l" indent="0" marL="0">
+              <a:lnSpc>
+                <a:spcPct val="150000"/>
+              </a:lnSpc>
+              <a:buNone/>
+            </a:pPr>
+            <a:endParaRPr lang="en-US" sz="2100" dirty="0"/>
+          </a:p>
           <a:p>
             <a:pPr algn="l" indent="0" marL="0">
               <a:lnSpc>
@@ -17656,30 +17804,14 @@
               </a:rPr>
               <a:t>Small text (14px)</a:t>
             </a:r>
-            <a:endParaRPr lang="en-US" sz="1050" dirty="0"/>
-          </a:p>
-        </p:txBody>
-      </p:sp>
-      <p:sp>
-        <p:nvSpPr>
-          <p:cNvPr id="7" name="Text 5"/>
-          <p:cNvSpPr/>
-          <p:nvPr/>
-        </p:nvSpPr>
-        <p:spPr>
-          <a:xfrm>
-            <a:off x="747713" y="4354860"/>
-            <a:ext cx="11001375" cy="157163"/>
-          </a:xfrm>
-          <a:prstGeom prst="rect">
-            <a:avLst/>
-          </a:prstGeom>
-          <a:noFill/>
-          <a:ln/>
-        </p:spPr>
-        <p:txBody>
-          <a:bodyPr wrap="square" lIns="0" tIns="0" rIns="0" bIns="0" rtlCol="0" anchor="t"/>
-          <a:lstStyle/>
+            <a:pPr algn="l" indent="0" marL="0">
+              <a:lnSpc>
+                <a:spcPct val="150000"/>
+              </a:lnSpc>
+              <a:buNone/>
+            </a:pPr>
+            <a:endParaRPr lang="en-US" sz="2100" dirty="0"/>
+          </a:p>
           <a:p>
             <a:pPr algn="l" indent="0" marL="0">
               <a:lnSpc>
@@ -17698,7 +17830,7 @@
               </a:rPr>
               <a:t>Very small text (11px) — Check the minimum pt size in PPTX</a:t>
             </a:r>
-            <a:endParaRPr lang="en-US" sz="825" dirty="0"/>
+            <a:endParaRPr lang="en-US" sz="2100" dirty="0"/>
           </a:p>
         </p:txBody>
       </p:sp>
@@ -17787,7 +17919,7 @@
         </p:nvSpPr>
         <p:spPr>
           <a:xfrm>
-            <a:off x="747713" y="1938933"/>
+            <a:off x="747713" y="1948458"/>
             <a:ext cx="11291888" cy="684907"/>
           </a:xfrm>
           <a:prstGeom prst="rect">
@@ -17829,8 +17961,8 @@
         </p:nvSpPr>
         <p:spPr>
           <a:xfrm>
-            <a:off x="747713" y="2776240"/>
-            <a:ext cx="11001375" cy="428476"/>
+            <a:off x="747713" y="2785765"/>
+            <a:ext cx="10696575" cy="2123777"/>
           </a:xfrm>
           <a:prstGeom prst="rect">
             <a:avLst/>
@@ -17981,30 +18113,14 @@
               </a:rPr>
               <a:t> test.</a:t>
             </a:r>
+            <a:pPr algn="l" indent="0" marL="0">
+              <a:lnSpc>
+                <a:spcPct val="150000"/>
+              </a:lnSpc>
+              <a:buNone/>
+            </a:pPr>
             <a:endParaRPr lang="en-US" sz="2175" dirty="0"/>
           </a:p>
-        </p:txBody>
-      </p:sp>
-      <p:sp>
-        <p:nvSpPr>
-          <p:cNvPr id="4" name="Text 2"/>
-          <p:cNvSpPr/>
-          <p:nvPr/>
-        </p:nvSpPr>
-        <p:spPr>
-          <a:xfrm>
-            <a:off x="747713" y="3357116"/>
-            <a:ext cx="11001375" cy="414338"/>
-          </a:xfrm>
-          <a:prstGeom prst="rect">
-            <a:avLst/>
-          </a:prstGeom>
-          <a:noFill/>
-          <a:ln/>
-        </p:spPr>
-        <p:txBody>
-          <a:bodyPr wrap="square" lIns="0" tIns="0" rIns="0" bIns="0" rtlCol="0" anchor="t"/>
-          <a:lstStyle/>
           <a:p>
             <a:pPr algn="l" indent="0" marL="0">
               <a:lnSpc>
@@ -18142,30 +18258,14 @@
               </a:rPr>
               <a:t> is also tested.</a:t>
             </a:r>
+            <a:pPr algn="l" indent="0" marL="0">
+              <a:lnSpc>
+                <a:spcPct val="150000"/>
+              </a:lnSpc>
+              <a:buNone/>
+            </a:pPr>
             <a:endParaRPr lang="en-US" sz="2175" dirty="0"/>
           </a:p>
-        </p:txBody>
-      </p:sp>
-      <p:sp>
-        <p:nvSpPr>
-          <p:cNvPr id="5" name="Text 3"/>
-          <p:cNvSpPr/>
-          <p:nvPr/>
-        </p:nvSpPr>
-        <p:spPr>
-          <a:xfrm>
-            <a:off x="747713" y="3923854"/>
-            <a:ext cx="11001375" cy="414338"/>
-          </a:xfrm>
-          <a:prstGeom prst="rect">
-            <a:avLst/>
-          </a:prstGeom>
-          <a:noFill/>
-          <a:ln/>
-        </p:spPr>
-        <p:txBody>
-          <a:bodyPr wrap="square" lIns="0" tIns="0" rIns="0" bIns="0" rtlCol="0" anchor="t"/>
-          <a:lstStyle/>
           <a:p>
             <a:pPr algn="l" indent="0" marL="0">
               <a:lnSpc>
@@ -18208,30 +18308,14 @@
               </a:rPr>
               <a:t> placed on the same line as text.</a:t>
             </a:r>
+            <a:pPr algn="l" indent="0" marL="0">
+              <a:lnSpc>
+                <a:spcPct val="150000"/>
+              </a:lnSpc>
+              <a:buNone/>
+            </a:pPr>
             <a:endParaRPr lang="en-US" sz="2175" dirty="0"/>
           </a:p>
-        </p:txBody>
-      </p:sp>
-      <p:sp>
-        <p:nvSpPr>
-          <p:cNvPr id="6" name="Text 4"/>
-          <p:cNvSpPr/>
-          <p:nvPr/>
-        </p:nvSpPr>
-        <p:spPr>
-          <a:xfrm>
-            <a:off x="747713" y="4490591"/>
-            <a:ext cx="11001375" cy="428476"/>
-          </a:xfrm>
-          <a:prstGeom prst="rect">
-            <a:avLst/>
-          </a:prstGeom>
-          <a:noFill/>
-          <a:ln/>
-        </p:spPr>
-        <p:txBody>
-          <a:bodyPr wrap="square" lIns="0" tIns="0" rIns="0" bIns="0" rtlCol="0" anchor="t"/>
-          <a:lstStyle/>
           <a:p>
             <a:pPr algn="l" indent="0" marL="0">
               <a:lnSpc>
@@ -19407,7 +19491,7 @@
         <p:spPr>
           <a:xfrm>
             <a:off x="747713" y="2922538"/>
-            <a:ext cx="11001375" cy="428476"/>
+            <a:ext cx="11001375" cy="418951"/>
           </a:xfrm>
           <a:prstGeom prst="rect">
             <a:avLst/>
@@ -19443,6 +19527,23 @@
               <a:buNone/>
             </a:pPr>
             <a:r>
+              <a:rPr lang="en-US" sz="2175" dirty="0">
+                <a:solidFill>
+                  <a:srgbClr val="1F2328"/>
+                </a:solidFill>
+                <a:latin typeface="Segoe UI" pitchFamily="34" charset="0"/>
+                <a:ea typeface="Segoe UI" pitchFamily="34" charset="-122"/>
+                <a:cs typeface="Segoe UI" pitchFamily="34" charset="-120"/>
+              </a:rPr>
+              <a:t> </a:t>
+            </a:r>
+            <a:pPr algn="l" indent="0" marL="0">
+              <a:lnSpc>
+                <a:spcPct val="150000"/>
+              </a:lnSpc>
+              <a:buNone/>
+            </a:pPr>
+            <a:r>
               <a:rPr lang="en-US" sz="2175" i="1" dirty="0">
                 <a:solidFill>
                   <a:srgbClr val="1F2328"/>
@@ -19452,6 +19553,23 @@
                 <a:cs typeface="Segoe UI" pitchFamily="34" charset="-120"/>
               </a:rPr>
               <a:t>Italic</a:t>
+            </a:r>
+            <a:pPr algn="l" indent="0" marL="0">
+              <a:lnSpc>
+                <a:spcPct val="150000"/>
+              </a:lnSpc>
+              <a:buNone/>
+            </a:pPr>
+            <a:r>
+              <a:rPr lang="en-US" sz="2175" dirty="0">
+                <a:solidFill>
+                  <a:srgbClr val="1F2328"/>
+                </a:solidFill>
+                <a:latin typeface="Segoe UI" pitchFamily="34" charset="0"/>
+                <a:ea typeface="Segoe UI" pitchFamily="34" charset="-122"/>
+                <a:cs typeface="Segoe UI" pitchFamily="34" charset="-120"/>
+              </a:rPr>
+              <a:t> </a:t>
             </a:r>
             <a:pPr algn="l" indent="0" marL="0">
               <a:lnSpc>
@@ -19480,6 +19598,23 @@
               <a:buNone/>
             </a:pPr>
             <a:r>
+              <a:rPr lang="en-US" sz="2175" dirty="0">
+                <a:solidFill>
+                  <a:srgbClr val="1F2328"/>
+                </a:solidFill>
+                <a:latin typeface="Segoe UI" pitchFamily="34" charset="0"/>
+                <a:ea typeface="Segoe UI" pitchFamily="34" charset="-122"/>
+                <a:cs typeface="Segoe UI" pitchFamily="34" charset="-120"/>
+              </a:rPr>
+              <a:t> </a:t>
+            </a:r>
+            <a:pPr algn="l" indent="0" marL="0">
+              <a:lnSpc>
+                <a:spcPct val="150000"/>
+              </a:lnSpc>
+              <a:buNone/>
+            </a:pPr>
+            <a:r>
               <a:rPr lang="en-US" sz="2175" strike="sngStrike" dirty="0">
                 <a:solidFill>
                   <a:srgbClr val="1F2328"/>
@@ -19489,6 +19624,23 @@
                 <a:cs typeface="Segoe UI" pitchFamily="34" charset="-120"/>
               </a:rPr>
               <a:t>strikethrough</a:t>
+            </a:r>
+            <a:pPr algn="l" indent="0" marL="0">
+              <a:lnSpc>
+                <a:spcPct val="150000"/>
+              </a:lnSpc>
+              <a:buNone/>
+            </a:pPr>
+            <a:r>
+              <a:rPr lang="en-US" sz="2175" dirty="0">
+                <a:solidFill>
+                  <a:srgbClr val="1F2328"/>
+                </a:solidFill>
+                <a:latin typeface="Segoe UI" pitchFamily="34" charset="0"/>
+                <a:ea typeface="Segoe UI" pitchFamily="34" charset="-122"/>
+                <a:cs typeface="Segoe UI" pitchFamily="34" charset="-120"/>
+              </a:rPr>
+              <a:t> </a:t>
             </a:r>
             <a:pPr algn="l" indent="0" marL="0">
               <a:lnSpc>
@@ -19560,7 +19712,7 @@
         </p:nvSpPr>
         <p:spPr>
           <a:xfrm>
-            <a:off x="747713" y="3503414"/>
+            <a:off x="747713" y="3493889"/>
             <a:ext cx="5291138" cy="3294459"/>
           </a:xfrm>
           <a:prstGeom prst="roundRect">
@@ -19584,7 +19736,7 @@
         </p:nvSpPr>
         <p:spPr>
           <a:xfrm>
-            <a:off x="871538" y="3855839"/>
+            <a:off x="871538" y="3846314"/>
             <a:ext cx="5043488" cy="379809"/>
           </a:xfrm>
           <a:prstGeom prst="rect">
@@ -19643,7 +19795,7 @@
         </p:nvSpPr>
         <p:spPr>
           <a:xfrm>
-            <a:off x="871538" y="4388048"/>
+            <a:off x="871538" y="4378523"/>
             <a:ext cx="5043488" cy="1381125"/>
           </a:xfrm>
           <a:prstGeom prst="rect">
@@ -19782,7 +19934,7 @@
         </p:nvSpPr>
         <p:spPr>
           <a:xfrm>
-            <a:off x="871538" y="5921573"/>
+            <a:off x="871538" y="5912048"/>
             <a:ext cx="5043488" cy="600075"/>
           </a:xfrm>
           <a:prstGeom prst="roundRect">
@@ -19809,7 +19961,7 @@
         </p:nvSpPr>
         <p:spPr>
           <a:xfrm>
-            <a:off x="871538" y="5921573"/>
+            <a:off x="871538" y="5912048"/>
             <a:ext cx="5119688" cy="600075"/>
           </a:xfrm>
           <a:prstGeom prst="rect">
@@ -19892,16 +20044,16 @@
           </p:nvPr>
         </p:nvGraphicFramePr>
         <p:xfrm>
-          <a:off x="6153150" y="3503414"/>
-          <a:ext cx="1884908" cy="914400"/>
+          <a:off x="6153150" y="3493889"/>
+          <a:ext cx="1845618" cy="914400"/>
         </p:xfrm>
         <a:graphic>
           <a:graphicData uri="http://schemas.openxmlformats.org/drawingml/2006/table">
             <a:tbl>
               <a:tblPr/>
               <a:tblGrid>
-                <a:gridCol w="990124"/>
-                <a:gridCol w="980123"/>
+                <a:gridCol w="970121"/>
+                <a:gridCol w="950119"/>
               </a:tblGrid>
               <a:tr h="0">
                 <a:tc>
@@ -20305,7 +20457,7 @@
         </p:nvSpPr>
         <p:spPr>
           <a:xfrm>
-            <a:off x="6153150" y="5279827"/>
+            <a:off x="6153150" y="5270302"/>
             <a:ext cx="66675" cy="414338"/>
           </a:xfrm>
           <a:prstGeom prst="rect">
@@ -20325,7 +20477,7 @@
         </p:nvSpPr>
         <p:spPr>
           <a:xfrm>
-            <a:off x="6219825" y="5279827"/>
+            <a:off x="6219825" y="5270302"/>
             <a:ext cx="5224462" cy="414338"/>
           </a:xfrm>
           <a:prstGeom prst="rect">
@@ -20521,7 +20673,7 @@
         <p:spPr>
           <a:xfrm>
             <a:off x="747713" y="2137470"/>
-            <a:ext cx="11001375" cy="414338"/>
+            <a:ext cx="10696575" cy="4720530"/>
           </a:xfrm>
           <a:prstGeom prst="rect">
             <a:avLst/>
@@ -20550,30 +20702,14 @@
               </a:rPr>
               <a:t>Alpha beta gamma delta</a:t>
             </a:r>
+            <a:pPr algn="l" indent="0" marL="0">
+              <a:lnSpc>
+                <a:spcPct val="150000"/>
+              </a:lnSpc>
+              <a:buNone/>
+            </a:pPr>
             <a:endParaRPr lang="en-US" sz="2175" dirty="0"/>
           </a:p>
-        </p:txBody>
-      </p:sp>
-      <p:sp>
-        <p:nvSpPr>
-          <p:cNvPr id="4" name="Text 2"/>
-          <p:cNvSpPr/>
-          <p:nvPr/>
-        </p:nvSpPr>
-        <p:spPr>
-          <a:xfrm>
-            <a:off x="747713" y="2704207"/>
-            <a:ext cx="10696575" cy="2278856"/>
-          </a:xfrm>
-          <a:prstGeom prst="rect">
-            <a:avLst/>
-          </a:prstGeom>
-          <a:noFill/>
-          <a:ln/>
-        </p:spPr>
-        <p:txBody>
-          <a:bodyPr wrap="square" lIns="0" tIns="0" rIns="0" bIns="0" rtlCol="0" anchor="t"/>
-          <a:lstStyle/>
           <a:p>
             <a:pPr algn="l" marL="342900" indent="-342900">
               <a:lnSpc>
@@ -21160,30 +21296,14 @@
               </a:rPr>
               <a:t> Flow C</a:t>
             </a:r>
+            <a:pPr algn="l" indent="0" marL="0">
+              <a:lnSpc>
+                <a:spcPct val="150000"/>
+              </a:lnSpc>
+              <a:buNone/>
+            </a:pPr>
             <a:endParaRPr lang="en-US" sz="2175" dirty="0"/>
           </a:p>
-        </p:txBody>
-      </p:sp>
-      <p:sp>
-        <p:nvSpPr>
-          <p:cNvPr id="5" name="Text 3"/>
-          <p:cNvSpPr/>
-          <p:nvPr/>
-        </p:nvSpPr>
-        <p:spPr>
-          <a:xfrm>
-            <a:off x="747713" y="5135463"/>
-            <a:ext cx="11001375" cy="414338"/>
-          </a:xfrm>
-          <a:prstGeom prst="rect">
-            <a:avLst/>
-          </a:prstGeom>
-          <a:noFill/>
-          <a:ln/>
-        </p:spPr>
-        <p:txBody>
-          <a:bodyPr wrap="square" lIns="0" tIns="0" rIns="0" bIns="0" rtlCol="0" anchor="t"/>
-          <a:lstStyle/>
           <a:p>
             <a:pPr algn="l" indent="0" marL="0">
               <a:lnSpc>
@@ -21202,30 +21322,14 @@
               </a:rPr>
               <a:t>Also verify outside bullet lists:</a:t>
             </a:r>
+            <a:pPr algn="l" indent="0" marL="0">
+              <a:lnSpc>
+                <a:spcPct val="150000"/>
+              </a:lnSpc>
+              <a:buNone/>
+            </a:pPr>
             <a:endParaRPr lang="en-US" sz="2175" dirty="0"/>
           </a:p>
-        </p:txBody>
-      </p:sp>
-      <p:sp>
-        <p:nvSpPr>
-          <p:cNvPr id="6" name="Text 4"/>
-          <p:cNvSpPr/>
-          <p:nvPr/>
-        </p:nvSpPr>
-        <p:spPr>
-          <a:xfrm>
-            <a:off x="747713" y="5702201"/>
-            <a:ext cx="11001375" cy="414338"/>
-          </a:xfrm>
-          <a:prstGeom prst="rect">
-            <a:avLst/>
-          </a:prstGeom>
-          <a:noFill/>
-          <a:ln/>
-        </p:spPr>
-        <p:txBody>
-          <a:bodyPr wrap="square" lIns="0" tIns="0" rIns="0" bIns="0" rtlCol="0" anchor="t"/>
-          <a:lstStyle/>
           <a:p>
             <a:pPr algn="l" indent="0" marL="0">
               <a:lnSpc>
@@ -21312,30 +21416,14 @@
               </a:rPr>
               <a:t>Text (no spaces before/after)</a:t>
             </a:r>
+            <a:pPr algn="l" indent="0" marL="0">
+              <a:lnSpc>
+                <a:spcPct val="150000"/>
+              </a:lnSpc>
+              <a:buNone/>
+            </a:pPr>
             <a:endParaRPr lang="en-US" sz="2175" dirty="0"/>
           </a:p>
-        </p:txBody>
-      </p:sp>
-      <p:sp>
-        <p:nvSpPr>
-          <p:cNvPr id="7" name="Text 5"/>
-          <p:cNvSpPr/>
-          <p:nvPr/>
-        </p:nvSpPr>
-        <p:spPr>
-          <a:xfrm>
-            <a:off x="747713" y="6268938"/>
-            <a:ext cx="11001375" cy="414338"/>
-          </a:xfrm>
-          <a:prstGeom prst="rect">
-            <a:avLst/>
-          </a:prstGeom>
-          <a:noFill/>
-          <a:ln/>
-        </p:spPr>
-        <p:txBody>
-          <a:bodyPr wrap="square" lIns="0" tIns="0" rIns="0" bIns="0" rtlCol="0" anchor="t"/>
-          <a:lstStyle/>
           <a:p>
             <a:pPr algn="l" indent="0" marL="0">
               <a:lnSpc>
@@ -21388,30 +21476,14 @@
               </a:rPr>
               <a:t> Next text (with spaces)</a:t>
             </a:r>
+            <a:pPr algn="l" indent="0" marL="0">
+              <a:lnSpc>
+                <a:spcPct val="150000"/>
+              </a:lnSpc>
+              <a:buNone/>
+            </a:pPr>
             <a:endParaRPr lang="en-US" sz="2175" dirty="0"/>
           </a:p>
-        </p:txBody>
-      </p:sp>
-      <p:sp>
-        <p:nvSpPr>
-          <p:cNvPr id="8" name="Text 6"/>
-          <p:cNvSpPr/>
-          <p:nvPr/>
-        </p:nvSpPr>
-        <p:spPr>
-          <a:xfrm>
-            <a:off x="747713" y="6835676"/>
-            <a:ext cx="11001375" cy="22324"/>
-          </a:xfrm>
-          <a:prstGeom prst="rect">
-            <a:avLst/>
-          </a:prstGeom>
-          <a:noFill/>
-          <a:ln/>
-        </p:spPr>
-        <p:txBody>
-          <a:bodyPr wrap="square" lIns="0" tIns="0" rIns="0" bIns="0" rtlCol="0" anchor="t"/>
-          <a:lstStyle/>
           <a:p>
             <a:pPr algn="l" indent="0" marL="0">
               <a:lnSpc>
@@ -21430,30 +21502,14 @@
               </a:rPr>
               <a:t>Verification in lists:</a:t>
             </a:r>
+            <a:pPr algn="l" indent="0" marL="0">
+              <a:lnSpc>
+                <a:spcPct val="150000"/>
+              </a:lnSpc>
+              <a:buNone/>
+            </a:pPr>
             <a:endParaRPr lang="en-US" sz="2175" dirty="0"/>
           </a:p>
-        </p:txBody>
-      </p:sp>
-      <p:sp>
-        <p:nvSpPr>
-          <p:cNvPr id="9" name="Text 7"/>
-          <p:cNvSpPr/>
-          <p:nvPr/>
-        </p:nvSpPr>
-        <p:spPr>
-          <a:xfrm>
-            <a:off x="747713" y="7402413"/>
-            <a:ext cx="10696575" cy="9144"/>
-          </a:xfrm>
-          <a:prstGeom prst="rect">
-            <a:avLst/>
-          </a:prstGeom>
-          <a:noFill/>
-          <a:ln/>
-        </p:spPr>
-        <p:txBody>
-          <a:bodyPr wrap="square" lIns="0" tIns="0" rIns="0" bIns="0" rtlCol="0" anchor="t"/>
-          <a:lstStyle/>
           <a:p>
             <a:pPr algn="l" marL="342900" indent="-342900">
               <a:lnSpc>
@@ -21783,8 +21839,8 @@
         </p:nvSpPr>
         <p:spPr>
           <a:xfrm>
-            <a:off x="2749302" y="2751832"/>
-            <a:ext cx="1103561" cy="352425"/>
+            <a:off x="2591246" y="2742307"/>
+            <a:ext cx="1064121" cy="352425"/>
           </a:xfrm>
           <a:prstGeom prst="roundRect">
             <a:avLst>
@@ -21805,8 +21861,8 @@
         </p:nvSpPr>
         <p:spPr>
           <a:xfrm>
-            <a:off x="2749302" y="2751832"/>
-            <a:ext cx="1103561" cy="352425"/>
+            <a:off x="2591246" y="2742307"/>
+            <a:ext cx="1064121" cy="352425"/>
           </a:xfrm>
           <a:prstGeom prst="rect">
             <a:avLst/>
@@ -21847,8 +21903,8 @@
         </p:nvSpPr>
         <p:spPr>
           <a:xfrm>
-            <a:off x="2129135" y="3166170"/>
-            <a:ext cx="1106091" cy="352425"/>
+            <a:off x="2048173" y="3156645"/>
+            <a:ext cx="1047304" cy="352425"/>
           </a:xfrm>
           <a:prstGeom prst="roundRect">
             <a:avLst>
@@ -21869,8 +21925,8 @@
         </p:nvSpPr>
         <p:spPr>
           <a:xfrm>
-            <a:off x="2129135" y="3166170"/>
-            <a:ext cx="1106091" cy="352425"/>
+            <a:off x="2048173" y="3156645"/>
+            <a:ext cx="1047304" cy="352425"/>
           </a:xfrm>
           <a:prstGeom prst="rect">
             <a:avLst/>
@@ -21911,8 +21967,8 @@
         </p:nvSpPr>
         <p:spPr>
           <a:xfrm>
-            <a:off x="2146102" y="3580507"/>
-            <a:ext cx="1432620" cy="352425"/>
+            <a:off x="2065883" y="3570982"/>
+            <a:ext cx="1392138" cy="352425"/>
           </a:xfrm>
           <a:prstGeom prst="roundRect">
             <a:avLst>
@@ -21933,8 +21989,8 @@
         </p:nvSpPr>
         <p:spPr>
           <a:xfrm>
-            <a:off x="2146102" y="3580507"/>
-            <a:ext cx="1432620" cy="352425"/>
+            <a:off x="2065883" y="3570982"/>
+            <a:ext cx="1392138" cy="352425"/>
           </a:xfrm>
           <a:prstGeom prst="rect">
             <a:avLst/>
@@ -21993,7 +22049,7 @@
         <p:spPr>
           <a:xfrm>
             <a:off x="747713" y="2704207"/>
-            <a:ext cx="11001375" cy="1243013"/>
+            <a:ext cx="10696575" cy="1809750"/>
           </a:xfrm>
           <a:prstGeom prst="rect">
             <a:avLst/>
@@ -22074,30 +22130,14 @@
               </a:rPr>
               <a:t>Complete: </a:t>
             </a:r>
+            <a:pPr algn="l" indent="0" marL="0">
+              <a:lnSpc>
+                <a:spcPct val="150000"/>
+              </a:lnSpc>
+              <a:buNone/>
+            </a:pPr>
             <a:endParaRPr lang="en-US" sz="2175" dirty="0"/>
           </a:p>
-        </p:txBody>
-      </p:sp>
-      <p:sp>
-        <p:nvSpPr>
-          <p:cNvPr id="11" name="Text 9"/>
-          <p:cNvSpPr/>
-          <p:nvPr/>
-        </p:nvSpPr>
-        <p:spPr>
-          <a:xfrm>
-            <a:off x="747713" y="4099620"/>
-            <a:ext cx="11001375" cy="414338"/>
-          </a:xfrm>
-          <a:prstGeom prst="rect">
-            <a:avLst/>
-          </a:prstGeom>
-          <a:noFill/>
-          <a:ln/>
-        </p:spPr>
-        <p:txBody>
-          <a:bodyPr wrap="square" lIns="0" tIns="0" rIns="0" bIns="0" rtlCol="0" anchor="t"/>
-          <a:lstStyle/>
           <a:p>
             <a:pPr algn="l" indent="0" marL="0">
               <a:lnSpc>
@@ -22122,14 +22162,14 @@
       </p:sp>
       <p:sp>
         <p:nvSpPr>
-          <p:cNvPr id="12" name="Shape 10"/>
+          <p:cNvPr id="11" name="Shape 9"/>
           <p:cNvSpPr/>
           <p:nvPr/>
         </p:nvSpPr>
         <p:spPr>
           <a:xfrm>
             <a:off x="747713" y="4666357"/>
-            <a:ext cx="1015157" cy="490538"/>
+            <a:ext cx="1002804" cy="490538"/>
           </a:xfrm>
           <a:prstGeom prst="roundRect">
             <a:avLst>
@@ -22144,14 +22184,14 @@
       </p:sp>
       <p:sp>
         <p:nvSpPr>
-          <p:cNvPr id="13" name="Text 11"/>
+          <p:cNvPr id="12" name="Text 10"/>
           <p:cNvSpPr/>
           <p:nvPr/>
         </p:nvSpPr>
         <p:spPr>
           <a:xfrm>
             <a:off x="747713" y="4666357"/>
-            <a:ext cx="1015157" cy="490538"/>
+            <a:ext cx="1002804" cy="490538"/>
           </a:xfrm>
           <a:prstGeom prst="rect">
             <a:avLst/>
@@ -22186,14 +22226,14 @@
       </p:sp>
       <p:sp>
         <p:nvSpPr>
-          <p:cNvPr id="14" name="Shape 12"/>
+          <p:cNvPr id="13" name="Shape 11"/>
           <p:cNvSpPr/>
           <p:nvPr/>
         </p:nvSpPr>
         <p:spPr>
           <a:xfrm>
-            <a:off x="1800969" y="4666357"/>
-            <a:ext cx="1064270" cy="490538"/>
+            <a:off x="1788616" y="4666357"/>
+            <a:ext cx="1055638" cy="490538"/>
           </a:xfrm>
           <a:prstGeom prst="roundRect">
             <a:avLst>
@@ -22208,14 +22248,14 @@
       </p:sp>
       <p:sp>
         <p:nvSpPr>
-          <p:cNvPr id="15" name="Text 13"/>
+          <p:cNvPr id="14" name="Text 12"/>
           <p:cNvSpPr/>
           <p:nvPr/>
         </p:nvSpPr>
         <p:spPr>
           <a:xfrm>
-            <a:off x="1800969" y="4666357"/>
-            <a:ext cx="1064270" cy="490538"/>
+            <a:off x="1788616" y="4666357"/>
+            <a:ext cx="1055638" cy="490538"/>
           </a:xfrm>
           <a:prstGeom prst="rect">
             <a:avLst/>
@@ -22250,14 +22290,14 @@
       </p:sp>
       <p:sp>
         <p:nvSpPr>
-          <p:cNvPr id="16" name="Shape 14"/>
+          <p:cNvPr id="15" name="Shape 13"/>
           <p:cNvSpPr/>
           <p:nvPr/>
         </p:nvSpPr>
         <p:spPr>
           <a:xfrm>
-            <a:off x="2903339" y="4666357"/>
-            <a:ext cx="959793" cy="490538"/>
+            <a:off x="2882354" y="4666357"/>
+            <a:ext cx="932408" cy="490538"/>
           </a:xfrm>
           <a:prstGeom prst="roundRect">
             <a:avLst>
@@ -22272,14 +22312,14 @@
       </p:sp>
       <p:sp>
         <p:nvSpPr>
-          <p:cNvPr id="17" name="Text 15"/>
+          <p:cNvPr id="16" name="Text 14"/>
           <p:cNvSpPr/>
           <p:nvPr/>
         </p:nvSpPr>
         <p:spPr>
           <a:xfrm>
-            <a:off x="2903339" y="4666357"/>
-            <a:ext cx="959793" cy="490538"/>
+            <a:off x="2882354" y="4666357"/>
+            <a:ext cx="932408" cy="490538"/>
           </a:xfrm>
           <a:prstGeom prst="rect">
             <a:avLst/>
@@ -22314,7 +22354,7 @@
       </p:sp>
       <p:sp>
         <p:nvSpPr>
-          <p:cNvPr id="18" name="Text 16"/>
+          <p:cNvPr id="17" name="Text 15"/>
           <p:cNvSpPr/>
           <p:nvPr/>
         </p:nvSpPr>
@@ -22356,7 +22396,7 @@
       </p:sp>
       <p:sp>
         <p:nvSpPr>
-          <p:cNvPr id="19" name="Shape 17"/>
+          <p:cNvPr id="18" name="Shape 16"/>
           <p:cNvSpPr/>
           <p:nvPr/>
         </p:nvSpPr>
@@ -22378,7 +22418,7 @@
       </p:sp>
       <p:sp>
         <p:nvSpPr>
-          <p:cNvPr id="20" name="Text 18"/>
+          <p:cNvPr id="19" name="Text 17"/>
           <p:cNvSpPr/>
           <p:nvPr/>
         </p:nvSpPr>
@@ -22420,13 +22460,13 @@
       </p:sp>
       <p:sp>
         <p:nvSpPr>
-          <p:cNvPr id="21" name="Shape 19"/>
+          <p:cNvPr id="20" name="Shape 18"/>
           <p:cNvSpPr/>
           <p:nvPr/>
         </p:nvSpPr>
         <p:spPr>
           <a:xfrm>
-            <a:off x="2039243" y="5949851"/>
+            <a:off x="2020639" y="5949851"/>
             <a:ext cx="266700" cy="266700"/>
           </a:xfrm>
           <a:prstGeom prst="roundRect">
@@ -22442,13 +22482,13 @@
       </p:sp>
       <p:sp>
         <p:nvSpPr>
-          <p:cNvPr id="22" name="Shape 20"/>
+          <p:cNvPr id="21" name="Shape 19"/>
           <p:cNvSpPr/>
           <p:nvPr/>
         </p:nvSpPr>
         <p:spPr>
           <a:xfrm>
-            <a:off x="4511576" y="5918895"/>
+            <a:off x="4363938" y="5918895"/>
             <a:ext cx="266700" cy="266700"/>
           </a:xfrm>
           <a:prstGeom prst="roundRect">
@@ -22464,7 +22504,7 @@
       </p:sp>
       <p:sp>
         <p:nvSpPr>
-          <p:cNvPr id="23" name="Text 21"/>
+          <p:cNvPr id="22" name="Text 20"/>
           <p:cNvSpPr/>
           <p:nvPr/>
         </p:nvSpPr>
@@ -23112,12 +23152,12 @@
         </p:nvSpPr>
         <p:spPr>
           <a:xfrm>
-            <a:off x="2153245" y="4602659"/>
-            <a:ext cx="999976" cy="323850"/>
+            <a:off x="2112615" y="4602659"/>
+            <a:ext cx="962471" cy="314325"/>
           </a:xfrm>
           <a:prstGeom prst="roundRect">
             <a:avLst>
-              <a:gd name="adj" fmla="val 132872"/>
+              <a:gd name="adj" fmla="val 141047"/>
             </a:avLst>
           </a:prstGeom>
           <a:solidFill>
@@ -23134,8 +23174,8 @@
         </p:nvSpPr>
         <p:spPr>
           <a:xfrm>
-            <a:off x="2153245" y="4602659"/>
-            <a:ext cx="999976" cy="323850"/>
+            <a:off x="2112615" y="4602659"/>
+            <a:ext cx="962471" cy="314325"/>
           </a:xfrm>
           <a:prstGeom prst="rect">
             <a:avLst/>
@@ -23446,7 +23486,7 @@
         <p:spPr>
           <a:xfrm>
             <a:off x="747713" y="3369022"/>
-            <a:ext cx="4922490" cy="857250"/>
+            <a:ext cx="4986635" cy="857250"/>
           </a:xfrm>
           <a:prstGeom prst="rect">
             <a:avLst/>
@@ -23538,7 +23578,7 @@
         </p:nvSpPr>
         <p:spPr>
           <a:xfrm>
-            <a:off x="747713" y="1707803"/>
+            <a:off x="747713" y="1593503"/>
             <a:ext cx="11291888" cy="684907"/>
           </a:xfrm>
           <a:prstGeom prst="rect">
@@ -23594,8 +23634,8 @@
         </p:blipFill>
         <p:spPr>
           <a:xfrm>
-            <a:off x="747713" y="2545110"/>
-            <a:ext cx="4286250" cy="2505075"/>
+            <a:off x="747713" y="2430810"/>
+            <a:ext cx="4286250" cy="2733675"/>
           </a:xfrm>
           <a:prstGeom prst="rect">
             <a:avLst/>
@@ -23687,7 +23727,7 @@
         </p:nvSpPr>
         <p:spPr>
           <a:xfrm>
-            <a:off x="747713" y="1148209"/>
+            <a:off x="747713" y="1033909"/>
             <a:ext cx="11291888" cy="1237357"/>
           </a:xfrm>
           <a:prstGeom prst="rect">
@@ -23729,7 +23769,7 @@
         </p:nvSpPr>
         <p:spPr>
           <a:xfrm>
-            <a:off x="747713" y="2537966"/>
+            <a:off x="747713" y="2423666"/>
             <a:ext cx="5272088" cy="414338"/>
           </a:xfrm>
           <a:prstGeom prst="rect">
@@ -23779,8 +23819,8 @@
         </p:blipFill>
         <p:spPr>
           <a:xfrm>
-            <a:off x="747713" y="3104704"/>
-            <a:ext cx="2939802" cy="523875"/>
+            <a:off x="747713" y="2990404"/>
+            <a:ext cx="2874020" cy="523875"/>
           </a:xfrm>
           <a:prstGeom prst="rect">
             <a:avLst/>
@@ -23795,7 +23835,7 @@
         </p:nvSpPr>
         <p:spPr>
           <a:xfrm>
-            <a:off x="6172200" y="2537966"/>
+            <a:off x="6172200" y="2423666"/>
             <a:ext cx="5576888" cy="414338"/>
           </a:xfrm>
           <a:prstGeom prst="rect">
@@ -23851,8 +23891,8 @@
         </p:blipFill>
         <p:spPr>
           <a:xfrm>
-            <a:off x="6172200" y="3104704"/>
-            <a:ext cx="4286250" cy="2505075"/>
+            <a:off x="6172200" y="2990404"/>
+            <a:ext cx="4286250" cy="2733675"/>
           </a:xfrm>
           <a:prstGeom prst="rect">
             <a:avLst/>
@@ -23987,7 +24027,7 @@
         <p:spPr>
           <a:xfrm>
             <a:off x="747713" y="1585020"/>
-            <a:ext cx="11001375" cy="414338"/>
+            <a:ext cx="10696575" cy="5272980"/>
           </a:xfrm>
           <a:prstGeom prst="rect">
             <a:avLst/>
@@ -24016,30 +24056,14 @@
               </a:rPr>
               <a:t>Emoji at the beginning of text:</a:t>
             </a:r>
+            <a:pPr algn="l" indent="0" marL="0">
+              <a:lnSpc>
+                <a:spcPct val="150000"/>
+              </a:lnSpc>
+              <a:buNone/>
+            </a:pPr>
             <a:endParaRPr lang="en-US" sz="2175" dirty="0"/>
           </a:p>
-        </p:txBody>
-      </p:sp>
-      <p:sp>
-        <p:nvSpPr>
-          <p:cNvPr id="4" name="Text 2"/>
-          <p:cNvSpPr/>
-          <p:nvPr/>
-        </p:nvSpPr>
-        <p:spPr>
-          <a:xfrm>
-            <a:off x="747713" y="2151757"/>
-            <a:ext cx="11001375" cy="1243013"/>
-          </a:xfrm>
-          <a:prstGeom prst="rect">
-            <a:avLst/>
-          </a:prstGeom>
-          <a:noFill/>
-          <a:ln/>
-        </p:spPr>
-        <p:txBody>
-          <a:bodyPr wrap="square" lIns="0" tIns="0" rIns="0" bIns="0" rtlCol="0" anchor="t"/>
-          <a:lstStyle/>
           <a:p>
             <a:pPr algn="l" indent="0" marL="0">
               <a:lnSpc>
@@ -24161,30 +24185,14 @@
               </a:rPr>
               <a:t> Sentence starting with a warning sign</a:t>
             </a:r>
+            <a:pPr algn="l" indent="0" marL="0">
+              <a:lnSpc>
+                <a:spcPct val="150000"/>
+              </a:lnSpc>
+              <a:buNone/>
+            </a:pPr>
             <a:endParaRPr lang="en-US" sz="2175" dirty="0"/>
           </a:p>
-        </p:txBody>
-      </p:sp>
-      <p:sp>
-        <p:nvSpPr>
-          <p:cNvPr id="5" name="Text 3"/>
-          <p:cNvSpPr/>
-          <p:nvPr/>
-        </p:nvSpPr>
-        <p:spPr>
-          <a:xfrm>
-            <a:off x="747713" y="3547170"/>
-            <a:ext cx="11001375" cy="414338"/>
-          </a:xfrm>
-          <a:prstGeom prst="rect">
-            <a:avLst/>
-          </a:prstGeom>
-          <a:noFill/>
-          <a:ln/>
-        </p:spPr>
-        <p:txBody>
-          <a:bodyPr wrap="square" lIns="0" tIns="0" rIns="0" bIns="0" rtlCol="0" anchor="t"/>
-          <a:lstStyle/>
           <a:p>
             <a:pPr algn="l" indent="0" marL="0">
               <a:lnSpc>
@@ -24203,30 +24211,14 @@
               </a:rPr>
               <a:t>Emoji in the middle of text:</a:t>
             </a:r>
+            <a:pPr algn="l" indent="0" marL="0">
+              <a:lnSpc>
+                <a:spcPct val="150000"/>
+              </a:lnSpc>
+              <a:buNone/>
+            </a:pPr>
             <a:endParaRPr lang="en-US" sz="2175" dirty="0"/>
           </a:p>
-        </p:txBody>
-      </p:sp>
-      <p:sp>
-        <p:nvSpPr>
-          <p:cNvPr id="6" name="Text 4"/>
-          <p:cNvSpPr/>
-          <p:nvPr/>
-        </p:nvSpPr>
-        <p:spPr>
-          <a:xfrm>
-            <a:off x="747713" y="4113907"/>
-            <a:ext cx="11001375" cy="1657350"/>
-          </a:xfrm>
-          <a:prstGeom prst="rect">
-            <a:avLst/>
-          </a:prstGeom>
-          <a:noFill/>
-          <a:ln/>
-        </p:spPr>
-        <p:txBody>
-          <a:bodyPr wrap="square" lIns="0" tIns="0" rIns="0" bIns="0" rtlCol="0" anchor="t"/>
-          <a:lstStyle/>
           <a:p>
             <a:pPr algn="l" indent="0" marL="0">
               <a:lnSpc>
@@ -24459,30 +24451,14 @@
               </a:rPr>
               <a:t> rho sigma tau</a:t>
             </a:r>
+            <a:pPr algn="l" indent="0" marL="0">
+              <a:lnSpc>
+                <a:spcPct val="150000"/>
+              </a:lnSpc>
+              <a:buNone/>
+            </a:pPr>
             <a:endParaRPr lang="en-US" sz="2175" dirty="0"/>
           </a:p>
-        </p:txBody>
-      </p:sp>
-      <p:sp>
-        <p:nvSpPr>
-          <p:cNvPr id="7" name="Text 5"/>
-          <p:cNvSpPr/>
-          <p:nvPr/>
-        </p:nvSpPr>
-        <p:spPr>
-          <a:xfrm>
-            <a:off x="747713" y="5923657"/>
-            <a:ext cx="11001375" cy="414338"/>
-          </a:xfrm>
-          <a:prstGeom prst="rect">
-            <a:avLst/>
-          </a:prstGeom>
-          <a:noFill/>
-          <a:ln/>
-        </p:spPr>
-        <p:txBody>
-          <a:bodyPr wrap="square" lIns="0" tIns="0" rIns="0" bIns="0" rtlCol="0" anchor="t"/>
-          <a:lstStyle/>
           <a:p>
             <a:pPr algn="l" indent="0" marL="0">
               <a:lnSpc>
@@ -24501,30 +24477,14 @@
               </a:rPr>
               <a:t>Emoji at the end of text:</a:t>
             </a:r>
+            <a:pPr algn="l" indent="0" marL="0">
+              <a:lnSpc>
+                <a:spcPct val="150000"/>
+              </a:lnSpc>
+              <a:buNone/>
+            </a:pPr>
             <a:endParaRPr lang="en-US" sz="2175" dirty="0"/>
           </a:p>
-        </p:txBody>
-      </p:sp>
-      <p:sp>
-        <p:nvSpPr>
-          <p:cNvPr id="8" name="Text 6"/>
-          <p:cNvSpPr/>
-          <p:nvPr/>
-        </p:nvSpPr>
-        <p:spPr>
-          <a:xfrm>
-            <a:off x="747713" y="6490395"/>
-            <a:ext cx="11001375" cy="367605"/>
-          </a:xfrm>
-          <a:prstGeom prst="rect">
-            <a:avLst/>
-          </a:prstGeom>
-          <a:noFill/>
-          <a:ln/>
-        </p:spPr>
-        <p:txBody>
-          <a:bodyPr wrap="square" lIns="0" tIns="0" rIns="0" bIns="0" rtlCol="0" anchor="t"/>
-          <a:lstStyle/>
           <a:p>
             <a:pPr algn="l" indent="0" marL="0">
               <a:lnSpc>
@@ -24603,30 +24563,14 @@
               </a:rPr>
               <a:t>✅</a:t>
             </a:r>
+            <a:pPr algn="l" indent="0" marL="0">
+              <a:lnSpc>
+                <a:spcPct val="150000"/>
+              </a:lnSpc>
+              <a:buNone/>
+            </a:pPr>
             <a:endParaRPr lang="en-US" sz="2175" dirty="0"/>
           </a:p>
-        </p:txBody>
-      </p:sp>
-      <p:sp>
-        <p:nvSpPr>
-          <p:cNvPr id="9" name="Text 7"/>
-          <p:cNvSpPr/>
-          <p:nvPr/>
-        </p:nvSpPr>
-        <p:spPr>
-          <a:xfrm>
-            <a:off x="747713" y="7471470"/>
-            <a:ext cx="11001375" cy="9144"/>
-          </a:xfrm>
-          <a:prstGeom prst="rect">
-            <a:avLst/>
-          </a:prstGeom>
-          <a:noFill/>
-          <a:ln/>
-        </p:spPr>
-        <p:txBody>
-          <a:bodyPr wrap="square" lIns="0" tIns="0" rIns="0" bIns="0" rtlCol="0" anchor="t"/>
-          <a:lstStyle/>
           <a:p>
             <a:pPr algn="l" indent="0" marL="0">
               <a:lnSpc>
@@ -24645,30 +24589,14 @@
               </a:rPr>
               <a:t>Consecutive emoji:</a:t>
             </a:r>
+            <a:pPr algn="l" indent="0" marL="0">
+              <a:lnSpc>
+                <a:spcPct val="150000"/>
+              </a:lnSpc>
+              <a:buNone/>
+            </a:pPr>
             <a:endParaRPr lang="en-US" sz="2175" dirty="0"/>
           </a:p>
-        </p:txBody>
-      </p:sp>
-      <p:sp>
-        <p:nvSpPr>
-          <p:cNvPr id="10" name="Text 8"/>
-          <p:cNvSpPr/>
-          <p:nvPr/>
-        </p:nvSpPr>
-        <p:spPr>
-          <a:xfrm>
-            <a:off x="747713" y="8038207"/>
-            <a:ext cx="11001375" cy="9144"/>
-          </a:xfrm>
-          <a:prstGeom prst="rect">
-            <a:avLst/>
-          </a:prstGeom>
-          <a:noFill/>
-          <a:ln/>
-        </p:spPr>
-        <p:txBody>
-          <a:bodyPr wrap="square" lIns="0" tIns="0" rIns="0" bIns="0" rtlCol="0" anchor="t"/>
-          <a:lstStyle/>
           <a:p>
             <a:pPr algn="l" indent="0" marL="0">
               <a:lnSpc>
@@ -24908,7 +24836,7 @@
         </p:nvSpPr>
         <p:spPr>
           <a:xfrm>
-            <a:off x="747713" y="1738908"/>
+            <a:off x="747713" y="1748433"/>
             <a:ext cx="11291888" cy="1237357"/>
           </a:xfrm>
           <a:prstGeom prst="rect">
@@ -24950,8 +24878,8 @@
         </p:nvSpPr>
         <p:spPr>
           <a:xfrm>
-            <a:off x="747713" y="3128665"/>
-            <a:ext cx="11001375" cy="414338"/>
+            <a:off x="747713" y="3138190"/>
+            <a:ext cx="10696575" cy="1971377"/>
           </a:xfrm>
           <a:prstGeom prst="rect">
             <a:avLst/>
@@ -24980,30 +24908,14 @@
               </a:rPr>
               <a:t>::before (top blue bar) and ::after (bottom orange bar) should be displayed.</a:t>
             </a:r>
+            <a:pPr algn="l" indent="0" marL="0">
+              <a:lnSpc>
+                <a:spcPct val="150000"/>
+              </a:lnSpc>
+              <a:buNone/>
+            </a:pPr>
             <a:endParaRPr lang="en-US" sz="2175" dirty="0"/>
           </a:p>
-        </p:txBody>
-      </p:sp>
-      <p:sp>
-        <p:nvSpPr>
-          <p:cNvPr id="6" name="Text 4"/>
-          <p:cNvSpPr/>
-          <p:nvPr/>
-        </p:nvSpPr>
-        <p:spPr>
-          <a:xfrm>
-            <a:off x="747713" y="3695402"/>
-            <a:ext cx="11001375" cy="842814"/>
-          </a:xfrm>
-          <a:prstGeom prst="rect">
-            <a:avLst/>
-          </a:prstGeom>
-          <a:noFill/>
-          <a:ln/>
-        </p:spPr>
-        <p:txBody>
-          <a:bodyPr wrap="square" lIns="0" tIns="0" rIns="0" bIns="0" rtlCol="0" anchor="t"/>
-          <a:lstStyle/>
           <a:p>
             <a:pPr algn="l" indent="0" marL="0">
               <a:lnSpc>
@@ -25096,30 +25008,14 @@
               </a:rPr>
               <a:t>. Test whether pseudo-elements are captured in screenshots or ignored.</a:t>
             </a:r>
+            <a:pPr algn="l" indent="0" marL="0">
+              <a:lnSpc>
+                <a:spcPct val="150000"/>
+              </a:lnSpc>
+              <a:buNone/>
+            </a:pPr>
             <a:endParaRPr lang="en-US" sz="2175" dirty="0"/>
           </a:p>
-        </p:txBody>
-      </p:sp>
-      <p:sp>
-        <p:nvSpPr>
-          <p:cNvPr id="7" name="Text 5"/>
-          <p:cNvSpPr/>
-          <p:nvPr/>
-        </p:nvSpPr>
-        <p:spPr>
-          <a:xfrm>
-            <a:off x="747713" y="4690616"/>
-            <a:ext cx="11001375" cy="428476"/>
-          </a:xfrm>
-          <a:prstGeom prst="rect">
-            <a:avLst/>
-          </a:prstGeom>
-          <a:noFill/>
-          <a:ln/>
-        </p:spPr>
-        <p:txBody>
-          <a:bodyPr wrap="square" lIns="0" tIns="0" rIns="0" bIns="0" rtlCol="0" anchor="t"/>
-          <a:lstStyle/>
           <a:p>
             <a:pPr algn="l" indent="0" marL="0">
               <a:lnSpc>
@@ -25288,8 +25184,8 @@
         </p:nvSpPr>
         <p:spPr>
           <a:xfrm>
-            <a:off x="747713" y="1146274"/>
-            <a:ext cx="11291888" cy="1237357"/>
+            <a:off x="747713" y="1432024"/>
+            <a:ext cx="11291888" cy="684907"/>
           </a:xfrm>
           <a:prstGeom prst="rect">
             <a:avLst/>
@@ -25330,7 +25226,7 @@
         </p:nvSpPr>
         <p:spPr>
           <a:xfrm>
-            <a:off x="747713" y="2612231"/>
+            <a:off x="747713" y="2345531"/>
             <a:ext cx="47625" cy="556468"/>
           </a:xfrm>
           <a:prstGeom prst="rect">
@@ -25355,7 +25251,7 @@
         </p:nvSpPr>
         <p:spPr>
           <a:xfrm>
-            <a:off x="795338" y="2612231"/>
+            <a:off x="795338" y="2345531"/>
             <a:ext cx="11244263" cy="556468"/>
           </a:xfrm>
           <a:prstGeom prst="rect">
@@ -25397,8 +25293,8 @@
         </p:nvSpPr>
         <p:spPr>
           <a:xfrm>
-            <a:off x="747713" y="3321100"/>
-            <a:ext cx="11001375" cy="856952"/>
+            <a:off x="747713" y="3054400"/>
+            <a:ext cx="10696575" cy="2371427"/>
           </a:xfrm>
           <a:prstGeom prst="rect">
             <a:avLst/>
@@ -25501,30 +25397,14 @@
               </a:rPr>
               <a:t> applied.</a:t>
             </a:r>
+            <a:pPr algn="l" indent="0" marL="0">
+              <a:lnSpc>
+                <a:spcPct val="150000"/>
+              </a:lnSpc>
+              <a:buNone/>
+            </a:pPr>
             <a:endParaRPr lang="en-US" sz="2175" dirty="0"/>
           </a:p>
-        </p:txBody>
-      </p:sp>
-      <p:sp>
-        <p:nvSpPr>
-          <p:cNvPr id="6" name="Text 4"/>
-          <p:cNvSpPr/>
-          <p:nvPr/>
-        </p:nvSpPr>
-        <p:spPr>
-          <a:xfrm>
-            <a:off x="747713" y="4330452"/>
-            <a:ext cx="10696575" cy="1381125"/>
-          </a:xfrm>
-          <a:prstGeom prst="rect">
-            <a:avLst/>
-          </a:prstGeom>
-          <a:noFill/>
-          <a:ln/>
-        </p:spPr>
-        <p:txBody>
-          <a:bodyPr wrap="square" lIns="0" tIns="0" rIns="0" bIns="0" rtlCol="0" anchor="t"/>
-          <a:lstStyle/>
           <a:p>
             <a:pPr algn="l" marL="342900" indent="-342900">
               <a:lnSpc>
@@ -25675,7 +25555,7 @@
         </p:nvSpPr>
         <p:spPr>
           <a:xfrm>
-            <a:off x="747713" y="2222302"/>
+            <a:off x="747713" y="2231827"/>
             <a:ext cx="11291888" cy="684907"/>
           </a:xfrm>
           <a:prstGeom prst="rect">
@@ -25717,8 +25597,8 @@
         </p:nvSpPr>
         <p:spPr>
           <a:xfrm>
-            <a:off x="747713" y="3059609"/>
-            <a:ext cx="11001375" cy="856952"/>
+            <a:off x="747713" y="3069134"/>
+            <a:ext cx="11001375" cy="837902"/>
           </a:xfrm>
           <a:prstGeom prst="rect">
             <a:avLst/>
@@ -25833,7 +25713,7 @@
         </p:nvSpPr>
         <p:spPr>
           <a:xfrm>
-            <a:off x="747713" y="4068961"/>
+            <a:off x="747713" y="4059436"/>
             <a:ext cx="11001375" cy="414338"/>
           </a:xfrm>
           <a:prstGeom prst="rect">
@@ -26518,18 +26398,18 @@
         </p:nvGraphicFramePr>
         <p:xfrm>
           <a:off x="747713" y="2493615"/>
-          <a:ext cx="5009257" cy="914400"/>
+          <a:ext cx="4758779" cy="914400"/>
         </p:xfrm>
         <a:graphic>
           <a:graphicData uri="http://schemas.openxmlformats.org/drawingml/2006/table">
             <a:tbl>
               <a:tblPr/>
               <a:tblGrid>
-                <a:gridCol w="920115"/>
-                <a:gridCol w="1160145"/>
-                <a:gridCol w="1150144"/>
-                <a:gridCol w="1150144"/>
-                <a:gridCol w="880110"/>
+                <a:gridCol w="890111"/>
+                <a:gridCol w="1100138"/>
+                <a:gridCol w="1090136"/>
+                <a:gridCol w="1090136"/>
+                <a:gridCol w="820103"/>
               </a:tblGrid>
               <a:tr h="0">
                 <a:tc>
@@ -28272,7 +28152,7 @@
         </p:nvSpPr>
         <p:spPr>
           <a:xfrm>
-            <a:off x="747713" y="1821507"/>
+            <a:off x="747713" y="1824484"/>
             <a:ext cx="11291888" cy="684907"/>
           </a:xfrm>
           <a:prstGeom prst="rect">
@@ -28314,8 +28194,8 @@
         </p:nvSpPr>
         <p:spPr>
           <a:xfrm>
-            <a:off x="8944570" y="2658814"/>
-            <a:ext cx="2499717" cy="404813"/>
+            <a:off x="9069437" y="2661791"/>
+            <a:ext cx="2374850" cy="404813"/>
           </a:xfrm>
           <a:prstGeom prst="roundRect">
             <a:avLst>
@@ -28341,8 +28221,8 @@
         </p:nvSpPr>
         <p:spPr>
           <a:xfrm>
-            <a:off x="8944570" y="2658814"/>
-            <a:ext cx="2575917" cy="404813"/>
+            <a:off x="9069437" y="2661791"/>
+            <a:ext cx="2451050" cy="404813"/>
           </a:xfrm>
           <a:prstGeom prst="rect">
             <a:avLst/>
@@ -28383,8 +28263,8 @@
         </p:nvSpPr>
         <p:spPr>
           <a:xfrm>
-            <a:off x="747713" y="3158877"/>
-            <a:ext cx="2298353" cy="852488"/>
+            <a:off x="747713" y="3161854"/>
+            <a:ext cx="2181820" cy="852488"/>
           </a:xfrm>
           <a:prstGeom prst="roundRect">
             <a:avLst>
@@ -28410,8 +28290,8 @@
         </p:nvSpPr>
         <p:spPr>
           <a:xfrm>
-            <a:off x="747713" y="3158877"/>
-            <a:ext cx="2374553" cy="852488"/>
+            <a:off x="747713" y="3161854"/>
+            <a:ext cx="2258020" cy="852488"/>
           </a:xfrm>
           <a:prstGeom prst="rect">
             <a:avLst/>
@@ -28538,8 +28418,8 @@
         </p:nvSpPr>
         <p:spPr>
           <a:xfrm>
-            <a:off x="9267379" y="4106614"/>
-            <a:ext cx="2176909" cy="404813"/>
+            <a:off x="9367391" y="4109591"/>
+            <a:ext cx="2076896" cy="404813"/>
           </a:xfrm>
           <a:prstGeom prst="roundRect">
             <a:avLst>
@@ -28565,8 +28445,8 @@
         </p:nvSpPr>
         <p:spPr>
           <a:xfrm>
-            <a:off x="9267379" y="4106614"/>
-            <a:ext cx="2253109" cy="404813"/>
+            <a:off x="9367391" y="4109591"/>
+            <a:ext cx="2153096" cy="404813"/>
           </a:xfrm>
           <a:prstGeom prst="rect">
             <a:avLst/>
@@ -28607,12 +28487,12 @@
         </p:nvSpPr>
         <p:spPr>
           <a:xfrm>
-            <a:off x="747713" y="4606677"/>
-            <a:ext cx="5599509" cy="429816"/>
+            <a:off x="747713" y="4609654"/>
+            <a:ext cx="5280868" cy="423863"/>
           </a:xfrm>
           <a:prstGeom prst="roundRect">
             <a:avLst>
-              <a:gd name="adj" fmla="val 106371"/>
+              <a:gd name="adj" fmla="val 107865"/>
             </a:avLst>
           </a:prstGeom>
           <a:solidFill>
@@ -28634,8 +28514,8 @@
         </p:nvSpPr>
         <p:spPr>
           <a:xfrm>
-            <a:off x="747713" y="4606677"/>
-            <a:ext cx="5675709" cy="429816"/>
+            <a:off x="747713" y="4609654"/>
+            <a:ext cx="5357068" cy="423863"/>
           </a:xfrm>
           <a:prstGeom prst="rect">
             <a:avLst/>
@@ -28826,7 +28706,7 @@
       </p:sp>
       <p:sp>
         <p:nvSpPr>
-          <p:cNvPr id="3" name="Shape 1"/>
+          <p:cNvPr id="3" name="Text 1"/>
           <p:cNvSpPr/>
           <p:nvPr/>
         </p:nvSpPr>
@@ -28847,29 +28727,10 @@
             <a:solidFill>
               <a:srgbClr val="CCCCCC"/>
             </a:solidFill>
-            <a:prstDash val="solid"/>
           </a:ln>
         </p:spPr>
-      </p:sp>
-      <p:sp>
-        <p:nvSpPr>
-          <p:cNvPr id="4" name="Text 2"/>
-          <p:cNvSpPr/>
-          <p:nvPr/>
-        </p:nvSpPr>
-        <p:spPr>
-          <a:xfrm>
-            <a:off x="900113" y="2929086"/>
-            <a:ext cx="4948238" cy="379809"/>
-          </a:xfrm>
-          <a:prstGeom prst="rect">
-            <a:avLst/>
-          </a:prstGeom>
-          <a:noFill/>
-          <a:ln/>
-        </p:spPr>
-        <p:txBody>
-          <a:bodyPr wrap="square" lIns="0" tIns="0" rIns="0" bIns="0" rtlCol="0" anchor="t"/>
+        <p:txBody>
+          <a:bodyPr wrap="square" lIns="152400" tIns="381000" rIns="152400" bIns="304800" rtlCol="0" anchor="t"/>
           <a:lstStyle/>
           <a:p>
             <a:pPr algn="l" indent="0" marL="0">
@@ -28906,34 +28767,18 @@
               </a:rPr>
               <a:t> Label-A</a:t>
             </a:r>
+            <a:pPr algn="l" indent="0" marL="0">
+              <a:lnSpc>
+                <a:spcPct val="125000"/>
+              </a:lnSpc>
+              <a:buNone/>
+            </a:pPr>
             <a:endParaRPr lang="en-US" sz="2392" dirty="0"/>
           </a:p>
-        </p:txBody>
-      </p:sp>
-      <p:sp>
-        <p:nvSpPr>
-          <p:cNvPr id="5" name="Text 3"/>
-          <p:cNvSpPr/>
-          <p:nvPr/>
-        </p:nvSpPr>
-        <p:spPr>
-          <a:xfrm>
-            <a:off x="900113" y="3461296"/>
-            <a:ext cx="4948238" cy="1381125"/>
-          </a:xfrm>
-          <a:prstGeom prst="rect">
-            <a:avLst/>
-          </a:prstGeom>
-          <a:noFill/>
-          <a:ln/>
-        </p:spPr>
-        <p:txBody>
-          <a:bodyPr wrap="square" lIns="0" tIns="0" rIns="0" bIns="0" rtlCol="0" anchor="t"/>
-          <a:lstStyle/>
           <a:p>
             <a:pPr algn="l" marL="342900" indent="-342900">
               <a:lnSpc>
-                <a:spcPct val="150000"/>
+                <a:spcPct val="125000"/>
               </a:lnSpc>
               <a:buSzPct val="100000"/>
               <a:buChar char="•"/>
@@ -28951,7 +28796,7 @@
             </a:r>
             <a:pPr algn="l" marL="342900" indent="-342900">
               <a:lnSpc>
-                <a:spcPct val="150000"/>
+                <a:spcPct val="125000"/>
               </a:lnSpc>
               <a:buSzPct val="100000"/>
               <a:buChar char="•"/>
@@ -28967,12 +28812,12 @@
               </a:rPr>
               <a:t>val-1234</a:t>
             </a:r>
-            <a:endParaRPr lang="en-US" sz="2175" dirty="0"/>
+            <a:endParaRPr lang="en-US" sz="2392" dirty="0"/>
           </a:p>
           <a:p>
             <a:pPr algn="l" marL="342900" indent="-342900">
               <a:lnSpc>
-                <a:spcPct val="150000"/>
+                <a:spcPct val="125000"/>
               </a:lnSpc>
               <a:buSzPct val="100000"/>
               <a:buChar char="•"/>
@@ -28990,7 +28835,7 @@
             </a:r>
             <a:pPr algn="l" marL="342900" indent="-342900">
               <a:lnSpc>
-                <a:spcPct val="150000"/>
+                <a:spcPct val="125000"/>
               </a:lnSpc>
               <a:buSzPct val="100000"/>
               <a:buChar char="•"/>
@@ -29006,12 +28851,12 @@
               </a:rPr>
               <a:t>val-98</a:t>
             </a:r>
-            <a:endParaRPr lang="en-US" sz="2175" dirty="0"/>
+            <a:endParaRPr lang="en-US" sz="2392" dirty="0"/>
           </a:p>
           <a:p>
             <a:pPr algn="l" marL="342900" indent="-342900">
               <a:lnSpc>
-                <a:spcPct val="150000"/>
+                <a:spcPct val="125000"/>
               </a:lnSpc>
               <a:buSzPct val="100000"/>
               <a:buChar char="•"/>
@@ -29027,13 +28872,13 @@
               </a:rPr>
               <a:t>Label-D: val-2 /uu</a:t>
             </a:r>
-            <a:endParaRPr lang="en-US" sz="2175" dirty="0"/>
-          </a:p>
-        </p:txBody>
-      </p:sp>
-      <p:sp>
-        <p:nvSpPr>
-          <p:cNvPr id="6" name="Shape 4"/>
+            <a:endParaRPr lang="en-US" sz="2392" dirty="0"/>
+          </a:p>
+        </p:txBody>
+      </p:sp>
+      <p:sp>
+        <p:nvSpPr>
+          <p:cNvPr id="4" name="Shape 2"/>
           <p:cNvSpPr/>
           <p:nvPr/>
         </p:nvSpPr>
@@ -29060,7 +28905,7 @@
       </p:sp>
       <p:sp>
         <p:nvSpPr>
-          <p:cNvPr id="7" name="Shape 5"/>
+          <p:cNvPr id="5" name="Shape 3"/>
           <p:cNvSpPr/>
           <p:nvPr/>
         </p:nvSpPr>
@@ -29085,7 +28930,7 @@
       </p:sp>
       <p:sp>
         <p:nvSpPr>
-          <p:cNvPr id="8" name="Text 6"/>
+          <p:cNvPr id="6" name="Text 4"/>
           <p:cNvSpPr/>
           <p:nvPr/>
         </p:nvSpPr>
@@ -29144,7 +28989,7 @@
       </p:sp>
       <p:sp>
         <p:nvSpPr>
-          <p:cNvPr id="9" name="Text 7"/>
+          <p:cNvPr id="7" name="Text 5"/>
           <p:cNvSpPr/>
           <p:nvPr/>
         </p:nvSpPr>
@@ -29329,7 +29174,7 @@
         </p:nvSpPr>
         <p:spPr>
           <a:xfrm>
-            <a:off x="747713" y="2242989"/>
+            <a:off x="747713" y="2245965"/>
             <a:ext cx="11291888" cy="684907"/>
           </a:xfrm>
           <a:prstGeom prst="rect">
@@ -29371,8 +29216,8 @@
         </p:nvSpPr>
         <p:spPr>
           <a:xfrm>
-            <a:off x="747713" y="3080296"/>
-            <a:ext cx="10696575" cy="410766"/>
+            <a:off x="747713" y="3083272"/>
+            <a:ext cx="10696575" cy="404813"/>
           </a:xfrm>
           <a:prstGeom prst="rect">
             <a:avLst/>
@@ -29391,8 +29236,8 @@
         </p:nvSpPr>
         <p:spPr>
           <a:xfrm>
-            <a:off x="747713" y="3080296"/>
-            <a:ext cx="57150" cy="410766"/>
+            <a:off x="747713" y="3083272"/>
+            <a:ext cx="57150" cy="404813"/>
           </a:xfrm>
           <a:prstGeom prst="rect">
             <a:avLst/>
@@ -29416,8 +29261,8 @@
         </p:nvSpPr>
         <p:spPr>
           <a:xfrm>
-            <a:off x="747713" y="3080296"/>
-            <a:ext cx="11077575" cy="410766"/>
+            <a:off x="747713" y="3083272"/>
+            <a:ext cx="11077575" cy="404813"/>
           </a:xfrm>
           <a:prstGeom prst="rect">
             <a:avLst/>
@@ -29546,7 +29391,7 @@
         </p:nvSpPr>
         <p:spPr>
           <a:xfrm>
-            <a:off x="747713" y="3643461"/>
+            <a:off x="747713" y="3640485"/>
             <a:ext cx="11001375" cy="414338"/>
           </a:xfrm>
           <a:prstGeom prst="rect">
@@ -29588,7 +29433,7 @@
         </p:nvSpPr>
         <p:spPr>
           <a:xfrm>
-            <a:off x="747713" y="4210199"/>
+            <a:off x="747713" y="4207222"/>
             <a:ext cx="10696575" cy="404813"/>
           </a:xfrm>
           <a:prstGeom prst="rect">
@@ -29608,7 +29453,7 @@
         </p:nvSpPr>
         <p:spPr>
           <a:xfrm>
-            <a:off x="747713" y="4210199"/>
+            <a:off x="747713" y="4207222"/>
             <a:ext cx="57150" cy="404813"/>
           </a:xfrm>
           <a:prstGeom prst="rect">
@@ -29633,7 +29478,7 @@
         </p:nvSpPr>
         <p:spPr>
           <a:xfrm>
-            <a:off x="747713" y="4210199"/>
+            <a:off x="747713" y="4207222"/>
             <a:ext cx="11077575" cy="404813"/>
           </a:xfrm>
           <a:prstGeom prst="rect">
@@ -29845,8 +29690,8 @@
         </p:nvSpPr>
         <p:spPr>
           <a:xfrm>
-            <a:off x="5129510" y="3026122"/>
-            <a:ext cx="1932831" cy="604838"/>
+            <a:off x="5185321" y="3026122"/>
+            <a:ext cx="1821359" cy="604838"/>
           </a:xfrm>
           <a:prstGeom prst="roundRect">
             <a:avLst>
@@ -29867,8 +29712,8 @@
         </p:nvSpPr>
         <p:spPr>
           <a:xfrm>
-            <a:off x="5129510" y="3026122"/>
-            <a:ext cx="2009031" cy="604838"/>
+            <a:off x="5185321" y="3026122"/>
+            <a:ext cx="1897559" cy="604838"/>
           </a:xfrm>
           <a:prstGeom prst="rect">
             <a:avLst/>
@@ -30447,16 +30292,16 @@
         </p:nvGraphicFramePr>
         <p:xfrm>
           <a:off x="747713" y="3649563"/>
-          <a:ext cx="3917603" cy="914400"/>
+          <a:ext cx="3720257" cy="914400"/>
         </p:xfrm>
         <a:graphic>
           <a:graphicData uri="http://schemas.openxmlformats.org/drawingml/2006/table">
             <a:tbl>
               <a:tblPr/>
               <a:tblGrid>
-                <a:gridCol w="620078"/>
-                <a:gridCol w="1280160"/>
-                <a:gridCol w="2200275"/>
+                <a:gridCol w="590074"/>
+                <a:gridCol w="1210151"/>
+                <a:gridCol w="2090261"/>
               </a:tblGrid>
               <a:tr h="0">
                 <a:tc>
@@ -31359,7 +31204,7 @@
         <p:spPr>
           <a:xfrm>
             <a:off x="747713" y="2065288"/>
-            <a:ext cx="11001375" cy="414338"/>
+            <a:ext cx="10696575" cy="3564731"/>
           </a:xfrm>
           <a:prstGeom prst="rect">
             <a:avLst/>
@@ -31439,30 +31284,14 @@
               </a:rPr>
               <a:t>.</a:t>
             </a:r>
+            <a:pPr algn="l" indent="0" marL="0">
+              <a:lnSpc>
+                <a:spcPct val="150000"/>
+              </a:lnSpc>
+              <a:buNone/>
+            </a:pPr>
             <a:endParaRPr lang="en-US" sz="2175" dirty="0"/>
           </a:p>
-        </p:txBody>
-      </p:sp>
-      <p:sp>
-        <p:nvSpPr>
-          <p:cNvPr id="4" name="Text 2"/>
-          <p:cNvSpPr/>
-          <p:nvPr/>
-        </p:nvSpPr>
-        <p:spPr>
-          <a:xfrm>
-            <a:off x="747713" y="2632025"/>
-            <a:ext cx="11001375" cy="414338"/>
-          </a:xfrm>
-          <a:prstGeom prst="rect">
-            <a:avLst/>
-          </a:prstGeom>
-          <a:noFill/>
-          <a:ln/>
-        </p:spPr>
-        <p:txBody>
-          <a:bodyPr wrap="square" lIns="0" tIns="0" rIns="0" bIns="0" rtlCol="0" anchor="t"/>
-          <a:lstStyle/>
           <a:p>
             <a:pPr algn="l" indent="0" marL="0">
               <a:lnSpc>
@@ -31566,30 +31395,14 @@
               </a:rPr>
               <a:t> — iota kappa.</a:t>
             </a:r>
+            <a:pPr algn="l" indent="0" marL="0">
+              <a:lnSpc>
+                <a:spcPct val="150000"/>
+              </a:lnSpc>
+              <a:buNone/>
+            </a:pPr>
             <a:endParaRPr lang="en-US" sz="2175" dirty="0"/>
           </a:p>
-        </p:txBody>
-      </p:sp>
-      <p:sp>
-        <p:nvSpPr>
-          <p:cNvPr id="5" name="Text 3"/>
-          <p:cNvSpPr/>
-          <p:nvPr/>
-        </p:nvSpPr>
-        <p:spPr>
-          <a:xfrm>
-            <a:off x="747713" y="3198763"/>
-            <a:ext cx="11001375" cy="414338"/>
-          </a:xfrm>
-          <a:prstGeom prst="rect">
-            <a:avLst/>
-          </a:prstGeom>
-          <a:noFill/>
-          <a:ln/>
-        </p:spPr>
-        <p:txBody>
-          <a:bodyPr wrap="square" lIns="0" tIns="0" rIns="0" bIns="0" rtlCol="0" anchor="t"/>
-          <a:lstStyle/>
           <a:p>
             <a:pPr algn="l" indent="0" marL="0">
               <a:lnSpc>
@@ -31608,30 +31421,14 @@
               </a:rPr>
               <a:t>Emoji in lists:</a:t>
             </a:r>
+            <a:pPr algn="l" indent="0" marL="0">
+              <a:lnSpc>
+                <a:spcPct val="150000"/>
+              </a:lnSpc>
+              <a:buNone/>
+            </a:pPr>
             <a:endParaRPr lang="en-US" sz="2175" dirty="0"/>
           </a:p>
-        </p:txBody>
-      </p:sp>
-      <p:sp>
-        <p:nvSpPr>
-          <p:cNvPr id="6" name="Text 4"/>
-          <p:cNvSpPr/>
-          <p:nvPr/>
-        </p:nvSpPr>
-        <p:spPr>
-          <a:xfrm>
-            <a:off x="747713" y="3765500"/>
-            <a:ext cx="10696575" cy="1864519"/>
-          </a:xfrm>
-          <a:prstGeom prst="rect">
-            <a:avLst/>
-          </a:prstGeom>
-          <a:noFill/>
-          <a:ln/>
-        </p:spPr>
-        <p:txBody>
-          <a:bodyPr wrap="square" lIns="0" tIns="0" rIns="0" bIns="0" rtlCol="0" anchor="t"/>
-          <a:lstStyle/>
           <a:p>
             <a:pPr algn="l" marL="342900" indent="-342900">
               <a:lnSpc>
@@ -31882,7 +31679,7 @@
         </p:nvSpPr>
         <p:spPr>
           <a:xfrm>
-            <a:off x="747713" y="2305496"/>
+            <a:off x="747713" y="2310259"/>
             <a:ext cx="11291888" cy="684907"/>
           </a:xfrm>
           <a:prstGeom prst="rect">
@@ -31924,8 +31721,8 @@
         </p:nvSpPr>
         <p:spPr>
           <a:xfrm>
-            <a:off x="747713" y="3142804"/>
-            <a:ext cx="11001375" cy="842814"/>
+            <a:off x="747713" y="3147566"/>
+            <a:ext cx="10696575" cy="1400026"/>
           </a:xfrm>
           <a:prstGeom prst="rect">
             <a:avLst/>
@@ -31971,30 +31768,14 @@
               </a:rPr>
               <a:t> — Multiple filters applied simultaneously.</a:t>
             </a:r>
+            <a:pPr algn="l" indent="0" marL="0">
+              <a:lnSpc>
+                <a:spcPct val="150000"/>
+              </a:lnSpc>
+              <a:buNone/>
+            </a:pPr>
             <a:endParaRPr lang="en-US" sz="1849" dirty="0"/>
           </a:p>
-        </p:txBody>
-      </p:sp>
-      <p:sp>
-        <p:nvSpPr>
-          <p:cNvPr id="4" name="Text 2"/>
-          <p:cNvSpPr/>
-          <p:nvPr/>
-        </p:nvSpPr>
-        <p:spPr>
-          <a:xfrm>
-            <a:off x="747713" y="4138017"/>
-            <a:ext cx="11001375" cy="414338"/>
-          </a:xfrm>
-          <a:prstGeom prst="rect">
-            <a:avLst/>
-          </a:prstGeom>
-          <a:noFill/>
-          <a:ln/>
-        </p:spPr>
-        <p:txBody>
-          <a:bodyPr wrap="square" lIns="0" tIns="0" rIns="0" bIns="0" rtlCol="0" anchor="t"/>
-          <a:lstStyle/>
           <a:p>
             <a:pPr algn="l" indent="0" marL="0">
               <a:lnSpc>
@@ -32013,7 +31794,7 @@
               </a:rPr>
               <a:t>Background image should appear blurred, darkened, and greyscale. Text is white.</a:t>
             </a:r>
-            <a:endParaRPr lang="en-US" sz="2175" dirty="0"/>
+            <a:endParaRPr lang="en-US" sz="1849" dirty="0"/>
           </a:p>
         </p:txBody>
       </p:sp>
@@ -32126,7 +31907,7 @@
         </p:nvSpPr>
         <p:spPr>
           <a:xfrm>
-            <a:off x="747713" y="1822103"/>
+            <a:off x="747713" y="1826865"/>
             <a:ext cx="7038975" cy="684907"/>
           </a:xfrm>
           <a:prstGeom prst="rect">
@@ -32168,8 +31949,8 @@
         </p:nvSpPr>
         <p:spPr>
           <a:xfrm>
-            <a:off x="747713" y="2659410"/>
-            <a:ext cx="7038975" cy="842814"/>
+            <a:off x="747713" y="2664172"/>
+            <a:ext cx="7038975" cy="2366814"/>
           </a:xfrm>
           <a:prstGeom prst="rect">
             <a:avLst/>
@@ -32218,30 +31999,14 @@
               </a:rPr>
               <a:t> — Image occupies right 30%, content uses left 70%.</a:t>
             </a:r>
+            <a:pPr algn="l" indent="0" marL="0">
+              <a:lnSpc>
+                <a:spcPct val="150000"/>
+              </a:lnSpc>
+              <a:buNone/>
+            </a:pPr>
             <a:endParaRPr lang="en-US" sz="1849" dirty="0"/>
           </a:p>
-        </p:txBody>
-      </p:sp>
-      <p:sp>
-        <p:nvSpPr>
-          <p:cNvPr id="5" name="Text 2"/>
-          <p:cNvSpPr/>
-          <p:nvPr/>
-        </p:nvSpPr>
-        <p:spPr>
-          <a:xfrm>
-            <a:off x="747713" y="3654623"/>
-            <a:ext cx="7038975" cy="1381125"/>
-          </a:xfrm>
-          <a:prstGeom prst="rect">
-            <a:avLst/>
-          </a:prstGeom>
-          <a:noFill/>
-          <a:ln/>
-        </p:spPr>
-        <p:txBody>
-          <a:bodyPr wrap="square" lIns="0" tIns="0" rIns="0" bIns="0" rtlCol="0" anchor="t"/>
-          <a:lstStyle/>
           <a:p>
             <a:pPr algn="l" marL="342900" indent="-342900">
               <a:lnSpc>
@@ -32261,7 +32026,7 @@
               </a:rPr>
               <a:t>Verify split layout is reproduced correctly</a:t>
             </a:r>
-            <a:endParaRPr lang="en-US" sz="2175" dirty="0"/>
+            <a:endParaRPr lang="en-US" sz="1849" dirty="0"/>
           </a:p>
           <a:p>
             <a:pPr algn="l" marL="342900" indent="-342900">
@@ -32282,7 +32047,7 @@
               </a:rPr>
               <a:t>Text should be on the left side</a:t>
             </a:r>
-            <a:endParaRPr lang="en-US" sz="2175" dirty="0"/>
+            <a:endParaRPr lang="en-US" sz="1849" dirty="0"/>
           </a:p>
           <a:p>
             <a:pPr algn="l" marL="342900" indent="-342900">
@@ -32303,7 +32068,7 @@
               </a:rPr>
               <a:t>Image should occupy the right 30%</a:t>
             </a:r>
-            <a:endParaRPr lang="en-US" sz="2175" dirty="0"/>
+            <a:endParaRPr lang="en-US" sz="1849" dirty="0"/>
           </a:p>
         </p:txBody>
       </p:sp>
@@ -32831,8 +32596,8 @@
         </p:nvSpPr>
         <p:spPr>
           <a:xfrm>
-            <a:off x="5981700" y="3538091"/>
-            <a:ext cx="381000" cy="342900"/>
+            <a:off x="5997327" y="3538091"/>
+            <a:ext cx="349746" cy="342900"/>
           </a:xfrm>
           <a:prstGeom prst="rect">
             <a:avLst/>
@@ -33472,7 +33237,7 @@
         <p:spPr>
           <a:xfrm>
             <a:off x="747713" y="2873722"/>
-            <a:ext cx="10696575" cy="1381125"/>
+            <a:ext cx="10696575" cy="1947863"/>
           </a:xfrm>
           <a:prstGeom prst="rect">
             <a:avLst/>
@@ -33652,30 +33417,14 @@
               </a:rPr>
               <a:t>note</a:t>
             </a:r>
+            <a:pPr algn="l" indent="0" marL="0">
+              <a:lnSpc>
+                <a:spcPct val="150000"/>
+              </a:lnSpc>
+              <a:buNone/>
+            </a:pPr>
             <a:endParaRPr lang="en-US" sz="2175" dirty="0"/>
           </a:p>
-        </p:txBody>
-      </p:sp>
-      <p:sp>
-        <p:nvSpPr>
-          <p:cNvPr id="4" name="Text 2"/>
-          <p:cNvSpPr/>
-          <p:nvPr/>
-        </p:nvSpPr>
-        <p:spPr>
-          <a:xfrm>
-            <a:off x="747713" y="4407247"/>
-            <a:ext cx="11001375" cy="414338"/>
-          </a:xfrm>
-          <a:prstGeom prst="rect">
-            <a:avLst/>
-          </a:prstGeom>
-          <a:noFill/>
-          <a:ln/>
-        </p:spPr>
-        <p:txBody>
-          <a:bodyPr wrap="square" lIns="0" tIns="0" rIns="0" bIns="0" rtlCol="0" anchor="t"/>
-          <a:lstStyle/>
           <a:p>
             <a:pPr algn="l" indent="0" marL="0">
               <a:lnSpc>
@@ -33852,7 +33601,7 @@
         <p:spPr>
           <a:xfrm>
             <a:off x="0" y="6515100"/>
-            <a:ext cx="261640" cy="342900"/>
+            <a:ext cx="246459" cy="342900"/>
           </a:xfrm>
           <a:prstGeom prst="rect">
             <a:avLst/>
@@ -33871,7 +33620,7 @@
         </p:nvSpPr>
         <p:spPr>
           <a:xfrm>
-            <a:off x="747713" y="2036415"/>
+            <a:off x="747713" y="2243584"/>
             <a:ext cx="11291888" cy="1237357"/>
           </a:xfrm>
           <a:prstGeom prst="rect">
@@ -33913,8 +33662,8 @@
         </p:nvSpPr>
         <p:spPr>
           <a:xfrm>
-            <a:off x="747713" y="3426172"/>
-            <a:ext cx="11001375" cy="414338"/>
+            <a:off x="747713" y="3633341"/>
+            <a:ext cx="10696575" cy="981075"/>
           </a:xfrm>
           <a:prstGeom prst="rect">
             <a:avLst/>
@@ -33977,30 +33726,14 @@
               </a:rPr>
               <a:t>.</a:t>
             </a:r>
+            <a:pPr algn="l" indent="0" marL="0">
+              <a:lnSpc>
+                <a:spcPct val="150000"/>
+              </a:lnSpc>
+              <a:buNone/>
+            </a:pPr>
             <a:endParaRPr lang="en-US" sz="2175" dirty="0"/>
           </a:p>
-        </p:txBody>
-      </p:sp>
-      <p:sp>
-        <p:nvSpPr>
-          <p:cNvPr id="5" name="Text 3"/>
-          <p:cNvSpPr/>
-          <p:nvPr/>
-        </p:nvSpPr>
-        <p:spPr>
-          <a:xfrm>
-            <a:off x="747713" y="3992910"/>
-            <a:ext cx="11001375" cy="828675"/>
-          </a:xfrm>
-          <a:prstGeom prst="rect">
-            <a:avLst/>
-          </a:prstGeom>
-          <a:noFill/>
-          <a:ln/>
-        </p:spPr>
-        <p:txBody>
-          <a:bodyPr wrap="square" lIns="0" tIns="0" rIns="0" bIns="0" rtlCol="0" anchor="t"/>
-          <a:lstStyle/>
           <a:p>
             <a:pPr algn="l" indent="0" marL="0">
               <a:lnSpc>
@@ -34252,7 +33985,7 @@
         <p:spPr>
           <a:xfrm>
             <a:off x="747713" y="3369766"/>
-            <a:ext cx="11001375" cy="1243013"/>
+            <a:ext cx="10696575" cy="2293144"/>
           </a:xfrm>
           <a:prstGeom prst="rect">
             <a:avLst/>
@@ -34438,30 +34171,14 @@
               </a:rPr>
               <a:t> (family ZWJ sequence)</a:t>
             </a:r>
+            <a:pPr algn="l" indent="0" marL="0">
+              <a:lnSpc>
+                <a:spcPct val="150000"/>
+              </a:lnSpc>
+              <a:buNone/>
+            </a:pPr>
             <a:endParaRPr lang="en-US" sz="2175" dirty="0"/>
           </a:p>
-        </p:txBody>
-      </p:sp>
-      <p:sp>
-        <p:nvSpPr>
-          <p:cNvPr id="6" name="Text 4"/>
-          <p:cNvSpPr/>
-          <p:nvPr/>
-        </p:nvSpPr>
-        <p:spPr>
-          <a:xfrm>
-            <a:off x="747713" y="4765179"/>
-            <a:ext cx="10696575" cy="897731"/>
-          </a:xfrm>
-          <a:prstGeom prst="rect">
-            <a:avLst/>
-          </a:prstGeom>
-          <a:noFill/>
-          <a:ln/>
-        </p:spPr>
-        <p:txBody>
-          <a:bodyPr wrap="square" lIns="0" tIns="0" rIns="0" bIns="0" rtlCol="0" anchor="t"/>
-          <a:lstStyle/>
           <a:p>
             <a:pPr algn="l" marL="342900" indent="-342900">
               <a:lnSpc>
@@ -34754,9 +34471,9 @@
             <a:tbl>
               <a:tblPr/>
               <a:tblGrid>
-                <a:gridCol w="870109"/>
-                <a:gridCol w="930116"/>
-                <a:gridCol w="930116"/>
+                <a:gridCol w="830104"/>
+                <a:gridCol w="920115"/>
+                <a:gridCol w="920115"/>
               </a:tblGrid>
               <a:tr h="0">
                 <a:tc>
@@ -35708,7 +35425,7 @@
         <p:spPr>
           <a:xfrm>
             <a:off x="747713" y="3300710"/>
-            <a:ext cx="11001375" cy="828675"/>
+            <a:ext cx="10696575" cy="1878806"/>
           </a:xfrm>
           <a:prstGeom prst="rect">
             <a:avLst/>
@@ -35837,30 +35554,14 @@
               </a:rPr>
               <a:t>Solid colour (#f1c40f) background — not a gradient — should render correctly.</a:t>
             </a:r>
+            <a:pPr algn="l" indent="0" marL="0">
+              <a:lnSpc>
+                <a:spcPct val="150000"/>
+              </a:lnSpc>
+              <a:buNone/>
+            </a:pPr>
             <a:endParaRPr lang="en-US" sz="2175" dirty="0"/>
           </a:p>
-        </p:txBody>
-      </p:sp>
-      <p:sp>
-        <p:nvSpPr>
-          <p:cNvPr id="5" name="Text 3"/>
-          <p:cNvSpPr/>
-          <p:nvPr/>
-        </p:nvSpPr>
-        <p:spPr>
-          <a:xfrm>
-            <a:off x="747713" y="4281785"/>
-            <a:ext cx="10696575" cy="897731"/>
-          </a:xfrm>
-          <a:prstGeom prst="rect">
-            <a:avLst/>
-          </a:prstGeom>
-          <a:noFill/>
-          <a:ln/>
-        </p:spPr>
-        <p:txBody>
-          <a:bodyPr wrap="square" lIns="0" tIns="0" rIns="0" bIns="0" rtlCol="0" anchor="t"/>
-          <a:lstStyle/>
           <a:p>
             <a:pPr algn="l" marL="342900" indent="-342900">
               <a:lnSpc>
@@ -36140,13 +35841,13 @@
             <a:r>
               <a:rPr lang="en-US" sz="1849" dirty="0">
                 <a:solidFill>
-                  <a:srgbClr val="6639BA"/>
+                  <a:srgbClr val="1F2328"/>
                 </a:solidFill>
                 <a:latin typeface="Consolas" pitchFamily="34" charset="0"/>
                 <a:ea typeface="Consolas" pitchFamily="34" charset="-122"/>
                 <a:cs typeface="Consolas" pitchFamily="34" charset="-120"/>
               </a:rPr>
-              <a:t>greet</a:t>
+              <a:t> </a:t>
             </a:r>
             <a:pPr algn="l" indent="0" marL="0">
               <a:lnSpc>
@@ -36157,13 +35858,13 @@
             <a:r>
               <a:rPr lang="en-US" sz="1849" dirty="0">
                 <a:solidFill>
-                  <a:srgbClr val="1F2328"/>
+                  <a:srgbClr val="6639BA"/>
                 </a:solidFill>
                 <a:latin typeface="Consolas" pitchFamily="34" charset="0"/>
                 <a:ea typeface="Consolas" pitchFamily="34" charset="-122"/>
                 <a:cs typeface="Consolas" pitchFamily="34" charset="-120"/>
               </a:rPr>
-              <a:t>(</a:t>
+              <a:t>greet</a:t>
             </a:r>
             <a:pPr algn="l" indent="0" marL="0">
               <a:lnSpc>
@@ -36174,13 +35875,13 @@
             <a:r>
               <a:rPr lang="en-US" sz="1849" dirty="0">
                 <a:solidFill>
-                  <a:srgbClr val="0550AE"/>
+                  <a:srgbClr val="1F2328"/>
                 </a:solidFill>
                 <a:latin typeface="Consolas" pitchFamily="34" charset="0"/>
                 <a:ea typeface="Consolas" pitchFamily="34" charset="-122"/>
                 <a:cs typeface="Consolas" pitchFamily="34" charset="-120"/>
               </a:rPr>
-              <a:t>name</a:t>
+              <a:t>(</a:t>
             </a:r>
             <a:pPr algn="l" indent="0" marL="0">
               <a:lnSpc>
@@ -36191,13 +35892,13 @@
             <a:r>
               <a:rPr lang="en-US" sz="1849" dirty="0">
                 <a:solidFill>
-                  <a:srgbClr val="1F2328"/>
+                  <a:srgbClr val="0550AE"/>
                 </a:solidFill>
                 <a:latin typeface="Consolas" pitchFamily="34" charset="0"/>
                 <a:ea typeface="Consolas" pitchFamily="34" charset="-122"/>
                 <a:cs typeface="Consolas" pitchFamily="34" charset="-120"/>
               </a:rPr>
-              <a:t>: </a:t>
+              <a:t>name</a:t>
             </a:r>
             <a:pPr algn="l" indent="0" marL="0">
               <a:lnSpc>
@@ -36208,13 +35909,13 @@
             <a:r>
               <a:rPr lang="en-US" sz="1849" dirty="0">
                 <a:solidFill>
-                  <a:srgbClr val="953800"/>
+                  <a:srgbClr val="1F2328"/>
                 </a:solidFill>
                 <a:latin typeface="Consolas" pitchFamily="34" charset="0"/>
                 <a:ea typeface="Consolas" pitchFamily="34" charset="-122"/>
                 <a:cs typeface="Consolas" pitchFamily="34" charset="-120"/>
               </a:rPr>
-              <a:t>string</a:t>
+              <a:t>: </a:t>
             </a:r>
             <a:pPr algn="l" indent="0" marL="0">
               <a:lnSpc>
@@ -36225,13 +35926,13 @@
             <a:r>
               <a:rPr lang="en-US" sz="1849" dirty="0">
                 <a:solidFill>
-                  <a:srgbClr val="1F2328"/>
+                  <a:srgbClr val="953800"/>
                 </a:solidFill>
                 <a:latin typeface="Consolas" pitchFamily="34" charset="0"/>
                 <a:ea typeface="Consolas" pitchFamily="34" charset="-122"/>
                 <a:cs typeface="Consolas" pitchFamily="34" charset="-120"/>
               </a:rPr>
-              <a:t>): </a:t>
+              <a:t>string</a:t>
             </a:r>
             <a:pPr algn="l" indent="0" marL="0">
               <a:lnSpc>
@@ -36242,13 +35943,13 @@
             <a:r>
               <a:rPr lang="en-US" sz="1849" dirty="0">
                 <a:solidFill>
-                  <a:srgbClr val="953800"/>
+                  <a:srgbClr val="1F2328"/>
                 </a:solidFill>
                 <a:latin typeface="Consolas" pitchFamily="34" charset="0"/>
                 <a:ea typeface="Consolas" pitchFamily="34" charset="-122"/>
                 <a:cs typeface="Consolas" pitchFamily="34" charset="-120"/>
               </a:rPr>
-              <a:t>string</a:t>
+              <a:t>): </a:t>
             </a:r>
             <a:pPr algn="l" indent="0" marL="0">
               <a:lnSpc>
@@ -36259,23 +35960,14 @@
             <a:r>
               <a:rPr lang="en-US" sz="1849" dirty="0">
                 <a:solidFill>
-                  <a:srgbClr val="1F2328"/>
+                  <a:srgbClr val="953800"/>
                 </a:solidFill>
                 <a:latin typeface="Consolas" pitchFamily="34" charset="0"/>
                 <a:ea typeface="Consolas" pitchFamily="34" charset="-122"/>
                 <a:cs typeface="Consolas" pitchFamily="34" charset="-120"/>
               </a:rPr>
-              <a:t> {</a:t>
-            </a:r>
-            <a:pPr algn="l" indent="0" marL="0">
-              <a:lnSpc>
-                <a:spcPct val="115000"/>
-              </a:lnSpc>
-              <a:buNone/>
-            </a:pPr>
-            <a:endParaRPr lang="en-US" sz="1849" dirty="0"/>
-          </a:p>
-          <a:p>
+              <a:t>string</a:t>
+            </a:r>
             <a:pPr algn="l" indent="0" marL="0">
               <a:lnSpc>
                 <a:spcPct val="115000"/>
@@ -36291,7 +35983,7 @@
                 <a:ea typeface="Consolas" pitchFamily="34" charset="-122"/>
                 <a:cs typeface="Consolas" pitchFamily="34" charset="-120"/>
               </a:rPr>
-              <a:t>  </a:t>
+              <a:t> {</a:t>
             </a:r>
             <a:pPr algn="l" indent="0" marL="0">
               <a:lnSpc>
@@ -36299,16 +35991,59 @@
               </a:lnSpc>
               <a:buNone/>
             </a:pPr>
+            <a:endParaRPr lang="en-US" sz="1849" dirty="0"/>
+          </a:p>
+          <a:p>
+            <a:pPr algn="l" indent="0" marL="0">
+              <a:lnSpc>
+                <a:spcPct val="115000"/>
+              </a:lnSpc>
+              <a:buNone/>
+            </a:pPr>
             <a:r>
               <a:rPr lang="en-US" sz="1849" dirty="0">
                 <a:solidFill>
-                  <a:srgbClr val="CF222E"/>
+                  <a:srgbClr val="1F2328"/>
                 </a:solidFill>
                 <a:latin typeface="Consolas" pitchFamily="34" charset="0"/>
                 <a:ea typeface="Consolas" pitchFamily="34" charset="-122"/>
                 <a:cs typeface="Consolas" pitchFamily="34" charset="-120"/>
               </a:rPr>
+              <a:t>  </a:t>
+            </a:r>
+            <a:pPr algn="l" indent="0" marL="0">
+              <a:lnSpc>
+                <a:spcPct val="115000"/>
+              </a:lnSpc>
+              <a:buNone/>
+            </a:pPr>
+            <a:r>
+              <a:rPr lang="en-US" sz="1849" dirty="0">
+                <a:solidFill>
+                  <a:srgbClr val="CF222E"/>
+                </a:solidFill>
+                <a:latin typeface="Consolas" pitchFamily="34" charset="0"/>
+                <a:ea typeface="Consolas" pitchFamily="34" charset="-122"/>
+                <a:cs typeface="Consolas" pitchFamily="34" charset="-120"/>
+              </a:rPr>
               <a:t>return</a:t>
+            </a:r>
+            <a:pPr algn="l" indent="0" marL="0">
+              <a:lnSpc>
+                <a:spcPct val="115000"/>
+              </a:lnSpc>
+              <a:buNone/>
+            </a:pPr>
+            <a:r>
+              <a:rPr lang="en-US" sz="1849" dirty="0">
+                <a:solidFill>
+                  <a:srgbClr val="1F2328"/>
+                </a:solidFill>
+                <a:latin typeface="Consolas" pitchFamily="34" charset="0"/>
+                <a:ea typeface="Consolas" pitchFamily="34" charset="-122"/>
+                <a:cs typeface="Consolas" pitchFamily="34" charset="-120"/>
+              </a:rPr>
+              <a:t> </a:t>
             </a:r>
             <a:pPr algn="l" indent="0" marL="0">
               <a:lnSpc>
@@ -36865,7 +36600,7 @@
         </p:nvSpPr>
         <p:spPr>
           <a:xfrm>
-            <a:off x="747713" y="841177"/>
+            <a:off x="747713" y="852934"/>
             <a:ext cx="11291888" cy="1237357"/>
           </a:xfrm>
           <a:prstGeom prst="rect">
@@ -36907,8 +36642,8 @@
         </p:nvSpPr>
         <p:spPr>
           <a:xfrm>
-            <a:off x="747713" y="2230934"/>
-            <a:ext cx="11001375" cy="856952"/>
+            <a:off x="747713" y="2242691"/>
+            <a:ext cx="10696575" cy="3762226"/>
           </a:xfrm>
           <a:prstGeom prst="rect">
             <a:avLst/>
@@ -37045,30 +36780,14 @@
               </a:rPr>
               <a:t> as scoped styles.</a:t>
             </a:r>
+            <a:pPr algn="l" indent="0" marL="0">
+              <a:lnSpc>
+                <a:spcPct val="150000"/>
+              </a:lnSpc>
+              <a:buNone/>
+            </a:pPr>
             <a:endParaRPr lang="en-US" sz="2175" dirty="0"/>
           </a:p>
-        </p:txBody>
-      </p:sp>
-      <p:sp>
-        <p:nvSpPr>
-          <p:cNvPr id="6" name="Text 4"/>
-          <p:cNvSpPr/>
-          <p:nvPr/>
-        </p:nvSpPr>
-        <p:spPr>
-          <a:xfrm>
-            <a:off x="747713" y="3240286"/>
-            <a:ext cx="11001375" cy="1243013"/>
-          </a:xfrm>
-          <a:prstGeom prst="rect">
-            <a:avLst/>
-          </a:prstGeom>
-          <a:noFill/>
-          <a:ln/>
-        </p:spPr>
-        <p:txBody>
-          <a:bodyPr wrap="square" lIns="0" tIns="0" rIns="0" bIns="0" rtlCol="0" anchor="t"/>
-          <a:lstStyle/>
           <a:p>
             <a:pPr algn="l" indent="0" marL="0">
               <a:lnSpc>
@@ -37155,30 +36874,14 @@
               </a:rPr>
               <a:t> at the top or bottom.</a:t>
             </a:r>
+            <a:pPr algn="l" indent="0" marL="0">
+              <a:lnSpc>
+                <a:spcPct val="150000"/>
+              </a:lnSpc>
+              <a:buNone/>
+            </a:pPr>
             <a:endParaRPr lang="en-US" sz="2175" dirty="0"/>
           </a:p>
-        </p:txBody>
-      </p:sp>
-      <p:sp>
-        <p:nvSpPr>
-          <p:cNvPr id="7" name="Text 5"/>
-          <p:cNvSpPr/>
-          <p:nvPr/>
-        </p:nvSpPr>
-        <p:spPr>
-          <a:xfrm>
-            <a:off x="747713" y="4635698"/>
-            <a:ext cx="10696575" cy="1381125"/>
-          </a:xfrm>
-          <a:prstGeom prst="rect">
-            <a:avLst/>
-          </a:prstGeom>
-          <a:noFill/>
-          <a:ln/>
-        </p:spPr>
-        <p:txBody>
-          <a:bodyPr wrap="square" lIns="0" tIns="0" rIns="0" bIns="0" rtlCol="0" anchor="t"/>
-          <a:lstStyle/>
           <a:p>
             <a:pPr algn="l" marL="342900" indent="-342900">
               <a:lnSpc>
@@ -38330,8 +38033,8 @@
         </p:nvSpPr>
         <p:spPr>
           <a:xfrm>
-            <a:off x="747713" y="1282750"/>
-            <a:ext cx="11291888" cy="1237357"/>
+            <a:off x="747713" y="1558975"/>
+            <a:ext cx="11291888" cy="684907"/>
           </a:xfrm>
           <a:prstGeom prst="rect">
             <a:avLst/>
@@ -38372,7 +38075,7 @@
         </p:nvSpPr>
         <p:spPr>
           <a:xfrm>
-            <a:off x="747713" y="2672507"/>
+            <a:off x="747713" y="2396282"/>
             <a:ext cx="10696575" cy="2419350"/>
           </a:xfrm>
           <a:prstGeom prst="rect">
@@ -38423,7 +38126,7 @@
         </p:blipFill>
         <p:spPr>
           <a:xfrm>
-            <a:off x="1300163" y="3086844"/>
+            <a:off x="1300163" y="2810619"/>
             <a:ext cx="1905000" cy="1905000"/>
           </a:xfrm>
           <a:prstGeom prst="rect">
@@ -38439,7 +38142,7 @@
         </p:nvSpPr>
         <p:spPr>
           <a:xfrm>
-            <a:off x="747713" y="5160913"/>
+            <a:off x="747713" y="4884688"/>
             <a:ext cx="10696575" cy="414338"/>
           </a:xfrm>
           <a:prstGeom prst="rect">
@@ -38559,7 +38262,7 @@
         </p:nvSpPr>
         <p:spPr>
           <a:xfrm>
-            <a:off x="747713" y="1819721"/>
+            <a:off x="747713" y="1824484"/>
             <a:ext cx="11291888" cy="1237357"/>
           </a:xfrm>
           <a:prstGeom prst="rect">
@@ -38624,7 +38327,7 @@
         </p:nvSpPr>
         <p:spPr>
           <a:xfrm>
-            <a:off x="747713" y="3257104"/>
+            <a:off x="747713" y="3261866"/>
             <a:ext cx="666750" cy="171450"/>
           </a:xfrm>
           <a:prstGeom prst="rect">
@@ -38666,8 +38369,8 @@
         </p:nvSpPr>
         <p:spPr>
           <a:xfrm>
-            <a:off x="4460081" y="3285679"/>
-            <a:ext cx="454670" cy="204788"/>
+            <a:off x="4266009" y="3280916"/>
+            <a:ext cx="456754" cy="204788"/>
           </a:xfrm>
           <a:prstGeom prst="roundRect">
             <a:avLst>
@@ -38688,8 +38391,8 @@
         </p:nvSpPr>
         <p:spPr>
           <a:xfrm>
-            <a:off x="4460081" y="3285679"/>
-            <a:ext cx="530870" cy="204788"/>
+            <a:off x="4266009" y="3280916"/>
+            <a:ext cx="532954" cy="204788"/>
           </a:xfrm>
           <a:prstGeom prst="rect">
             <a:avLst/>
@@ -38730,8 +38433,8 @@
         </p:nvSpPr>
         <p:spPr>
           <a:xfrm>
-            <a:off x="1338263" y="3257104"/>
-            <a:ext cx="3576489" cy="233362"/>
+            <a:off x="1338263" y="3261866"/>
+            <a:ext cx="3384500" cy="228600"/>
           </a:xfrm>
           <a:prstGeom prst="rect">
             <a:avLst/>
@@ -38806,7 +38509,7 @@
         </p:nvSpPr>
         <p:spPr>
           <a:xfrm>
-            <a:off x="747713" y="3885754"/>
+            <a:off x="747713" y="3880991"/>
             <a:ext cx="10696575" cy="9525"/>
           </a:xfrm>
           <a:prstGeom prst="rect">
@@ -38871,8 +38574,8 @@
         </p:nvSpPr>
         <p:spPr>
           <a:xfrm>
-            <a:off x="3472309" y="3623816"/>
-            <a:ext cx="452438" cy="204788"/>
+            <a:off x="3330476" y="3614291"/>
+            <a:ext cx="449163" cy="204788"/>
           </a:xfrm>
           <a:prstGeom prst="roundRect">
             <a:avLst>
@@ -38893,8 +38596,8 @@
         </p:nvSpPr>
         <p:spPr>
           <a:xfrm>
-            <a:off x="3472309" y="3623816"/>
-            <a:ext cx="528638" cy="204788"/>
+            <a:off x="3330476" y="3614291"/>
+            <a:ext cx="525363" cy="204788"/>
           </a:xfrm>
           <a:prstGeom prst="rect">
             <a:avLst/>
@@ -38936,7 +38639,7 @@
         <p:spPr>
           <a:xfrm>
             <a:off x="1338263" y="3595241"/>
-            <a:ext cx="2586484" cy="233362"/>
+            <a:ext cx="2441377" cy="228600"/>
           </a:xfrm>
           <a:prstGeom prst="rect">
             <a:avLst/>
@@ -39011,7 +38714,7 @@
         </p:nvSpPr>
         <p:spPr>
           <a:xfrm>
-            <a:off x="747713" y="3933379"/>
+            <a:off x="747713" y="3928616"/>
             <a:ext cx="666750" cy="171450"/>
           </a:xfrm>
           <a:prstGeom prst="rect">
@@ -39053,8 +38756,8 @@
         </p:nvSpPr>
         <p:spPr>
           <a:xfrm>
-            <a:off x="1338263" y="3933379"/>
-            <a:ext cx="2933551" cy="228600"/>
+            <a:off x="1338263" y="3928616"/>
+            <a:ext cx="2761506" cy="228600"/>
           </a:xfrm>
           <a:prstGeom prst="rect">
             <a:avLst/>
@@ -39129,7 +38832,7 @@
         </p:nvSpPr>
         <p:spPr>
           <a:xfrm>
-            <a:off x="747713" y="4209604"/>
+            <a:off x="747713" y="4204841"/>
             <a:ext cx="11001375" cy="828675"/>
           </a:xfrm>
           <a:prstGeom prst="rect">
@@ -39356,10 +39059,10 @@
               <a:tblPr/>
               <a:tblGrid>
                 <a:gridCol w="420053"/>
-                <a:gridCol w="490061"/>
-                <a:gridCol w="410051"/>
                 <a:gridCol w="470059"/>
-                <a:gridCol w="490061"/>
+                <a:gridCol w="420053"/>
+                <a:gridCol w="460058"/>
+                <a:gridCol w="460058"/>
               </a:tblGrid>
               <a:tr h="0">
                 <a:tc>
@@ -41345,10 +41048,10 @@
               <a:tblPr/>
               <a:tblGrid>
                 <a:gridCol w="420053"/>
-                <a:gridCol w="570071"/>
-                <a:gridCol w="410051"/>
-                <a:gridCol w="470059"/>
-                <a:gridCol w="490061"/>
+                <a:gridCol w="540068"/>
+                <a:gridCol w="420053"/>
+                <a:gridCol w="460058"/>
+                <a:gridCol w="460058"/>
               </a:tblGrid>
               <a:tr h="0">
                 <a:tc>
@@ -43610,8 +43313,8 @@
         </p:nvSpPr>
         <p:spPr>
           <a:xfrm>
-            <a:off x="2603450" y="3294311"/>
-            <a:ext cx="435620" cy="179487"/>
+            <a:off x="2519660" y="3294311"/>
+            <a:ext cx="437704" cy="179487"/>
           </a:xfrm>
           <a:prstGeom prst="roundRect">
             <a:avLst>
@@ -43632,8 +43335,8 @@
         </p:nvSpPr>
         <p:spPr>
           <a:xfrm>
-            <a:off x="2603450" y="3294311"/>
-            <a:ext cx="511820" cy="179487"/>
+            <a:off x="2519660" y="3294311"/>
+            <a:ext cx="513904" cy="179487"/>
           </a:xfrm>
           <a:prstGeom prst="rect">
             <a:avLst/>
@@ -43675,7 +43378,7 @@
         <p:spPr>
           <a:xfrm>
             <a:off x="1157288" y="3294311"/>
-            <a:ext cx="1881783" cy="179487"/>
+            <a:ext cx="1800076" cy="179487"/>
           </a:xfrm>
           <a:prstGeom prst="rect">
             <a:avLst/>
@@ -43780,8 +43483,8 @@
         </p:nvSpPr>
         <p:spPr>
           <a:xfrm>
-            <a:off x="2689622" y="3541961"/>
-            <a:ext cx="433388" cy="179487"/>
+            <a:off x="2591991" y="3541961"/>
+            <a:ext cx="430113" cy="179487"/>
           </a:xfrm>
           <a:prstGeom prst="roundRect">
             <a:avLst>
@@ -43802,8 +43505,8 @@
         </p:nvSpPr>
         <p:spPr>
           <a:xfrm>
-            <a:off x="2689622" y="3541961"/>
-            <a:ext cx="509587" cy="179487"/>
+            <a:off x="2591991" y="3541961"/>
+            <a:ext cx="506313" cy="179487"/>
           </a:xfrm>
           <a:prstGeom prst="rect">
             <a:avLst/>
@@ -43845,7 +43548,7 @@
         <p:spPr>
           <a:xfrm>
             <a:off x="1157288" y="3541961"/>
-            <a:ext cx="1965722" cy="179487"/>
+            <a:ext cx="1864816" cy="179487"/>
           </a:xfrm>
           <a:prstGeom prst="rect">
             <a:avLst/>
@@ -43950,8 +43653,8 @@
         </p:nvSpPr>
         <p:spPr>
           <a:xfrm>
-            <a:off x="2260253" y="3789611"/>
-            <a:ext cx="429071" cy="179487"/>
+            <a:off x="2194322" y="3789611"/>
+            <a:ext cx="428030" cy="179487"/>
           </a:xfrm>
           <a:prstGeom prst="roundRect">
             <a:avLst>
@@ -43972,8 +43675,8 @@
         </p:nvSpPr>
         <p:spPr>
           <a:xfrm>
-            <a:off x="2260253" y="3789611"/>
-            <a:ext cx="505271" cy="179487"/>
+            <a:off x="2194322" y="3789611"/>
+            <a:ext cx="504230" cy="179487"/>
           </a:xfrm>
           <a:prstGeom prst="rect">
             <a:avLst/>
@@ -44015,7 +43718,7 @@
         <p:spPr>
           <a:xfrm>
             <a:off x="1157288" y="3789611"/>
-            <a:ext cx="1532037" cy="179487"/>
+            <a:ext cx="1465064" cy="179487"/>
           </a:xfrm>
           <a:prstGeom prst="rect">
             <a:avLst/>
@@ -44212,7 +43915,7 @@
         <p:spPr>
           <a:xfrm>
             <a:off x="6581775" y="3294311"/>
-            <a:ext cx="1244203" cy="179487"/>
+            <a:ext cx="1172319" cy="179487"/>
           </a:xfrm>
           <a:prstGeom prst="rect">
             <a:avLst/>
@@ -44317,8 +44020,8 @@
         </p:nvSpPr>
         <p:spPr>
           <a:xfrm>
-            <a:off x="7599908" y="3541961"/>
-            <a:ext cx="441722" cy="179487"/>
+            <a:off x="7543949" y="3541961"/>
+            <a:ext cx="442020" cy="179487"/>
           </a:xfrm>
           <a:prstGeom prst="roundRect">
             <a:avLst>
@@ -44339,8 +44042,8 @@
         </p:nvSpPr>
         <p:spPr>
           <a:xfrm>
-            <a:off x="7599908" y="3541961"/>
-            <a:ext cx="517922" cy="179487"/>
+            <a:off x="7543949" y="3541961"/>
+            <a:ext cx="518220" cy="179487"/>
           </a:xfrm>
           <a:prstGeom prst="rect">
             <a:avLst/>
@@ -44382,7 +44085,7 @@
         <p:spPr>
           <a:xfrm>
             <a:off x="6581775" y="3541961"/>
-            <a:ext cx="1459855" cy="179487"/>
+            <a:ext cx="1404193" cy="179487"/>
           </a:xfrm>
           <a:prstGeom prst="rect">
             <a:avLst/>
@@ -44487,8 +44190,8 @@
         </p:nvSpPr>
         <p:spPr>
           <a:xfrm>
-            <a:off x="7531150" y="3789611"/>
-            <a:ext cx="419546" cy="179487"/>
+            <a:off x="7468791" y="3789611"/>
+            <a:ext cx="416570" cy="179487"/>
           </a:xfrm>
           <a:prstGeom prst="roundRect">
             <a:avLst>
@@ -44509,8 +44212,8 @@
         </p:nvSpPr>
         <p:spPr>
           <a:xfrm>
-            <a:off x="7531150" y="3789611"/>
-            <a:ext cx="495746" cy="179487"/>
+            <a:off x="7468791" y="3789611"/>
+            <a:ext cx="492770" cy="179487"/>
           </a:xfrm>
           <a:prstGeom prst="rect">
             <a:avLst/>
@@ -44552,7 +44255,7 @@
         <p:spPr>
           <a:xfrm>
             <a:off x="6581775" y="3789611"/>
-            <a:ext cx="1368921" cy="179487"/>
+            <a:ext cx="1303586" cy="179487"/>
           </a:xfrm>
           <a:prstGeom prst="rect">
             <a:avLst/>
@@ -44830,7 +44533,7 @@
         <p:spPr>
           <a:xfrm>
             <a:off x="1138238" y="3121372"/>
-            <a:ext cx="9371558" cy="400050"/>
+            <a:ext cx="9389864" cy="400050"/>
           </a:xfrm>
           <a:prstGeom prst="rect">
             <a:avLst/>
@@ -44897,8 +44600,8 @@
         </p:nvSpPr>
         <p:spPr>
           <a:xfrm>
-            <a:off x="10147846" y="3164235"/>
-            <a:ext cx="1268923" cy="314325"/>
+            <a:off x="10166152" y="3164235"/>
+            <a:ext cx="1248787" cy="314325"/>
           </a:xfrm>
           <a:prstGeom prst="rect">
             <a:avLst/>
@@ -44982,7 +44685,7 @@
         <p:spPr>
           <a:xfrm>
             <a:off x="890588" y="3702397"/>
-            <a:ext cx="310455" cy="414338"/>
+            <a:ext cx="347811" cy="414338"/>
           </a:xfrm>
           <a:prstGeom prst="rect">
             <a:avLst/>
@@ -45023,8 +44726,8 @@
         </p:nvSpPr>
         <p:spPr>
           <a:xfrm>
-            <a:off x="1143893" y="3809554"/>
-            <a:ext cx="8900666" cy="200025"/>
+            <a:off x="1181249" y="3809554"/>
+            <a:ext cx="8875216" cy="200025"/>
           </a:xfrm>
           <a:prstGeom prst="rect">
             <a:avLst/>
@@ -45065,8 +44768,8 @@
         </p:nvSpPr>
         <p:spPr>
           <a:xfrm>
-            <a:off x="9682609" y="3752404"/>
-            <a:ext cx="1752154" cy="314325"/>
+            <a:off x="9694515" y="3752404"/>
+            <a:ext cx="1740247" cy="314325"/>
           </a:xfrm>
           <a:prstGeom prst="rect">
             <a:avLst/>
@@ -45118,7 +44821,7 @@
       </p:sp>
       <p:sp>
         <p:nvSpPr>
-          <p:cNvPr id="11" name="Shape 9"/>
+          <p:cNvPr id="11" name="Text 9"/>
           <p:cNvSpPr/>
           <p:nvPr/>
         </p:nvSpPr>
@@ -45135,153 +44838,103 @@
           </a:solidFill>
           <a:ln/>
         </p:spPr>
+        <p:txBody>
+          <a:bodyPr wrap="square" lIns="133350" tIns="85725" rIns="10196364" bIns="135731" rtlCol="0" anchor="t"/>
+          <a:lstStyle/>
+          <a:p>
+            <a:pPr algn="ctr" indent="0" marL="0">
+              <a:lnSpc>
+                <a:spcPct val="150000"/>
+              </a:lnSpc>
+              <a:buNone/>
+            </a:pPr>
+            <a:r>
+              <a:rPr lang="en-US" sz="2175" b="1" dirty="0">
+                <a:solidFill>
+                  <a:srgbClr val="0F6CBD"/>
+                </a:solidFill>
+                <a:latin typeface="Segoe UI" pitchFamily="34" charset="0"/>
+                <a:ea typeface="Segoe UI" pitchFamily="34" charset="-122"/>
+                <a:cs typeface="Segoe UI" pitchFamily="34" charset="-120"/>
+              </a:rPr>
+              <a:t>=</a:t>
+            </a:r>
+            <a:pPr algn="ctr" indent="0" marL="0">
+              <a:lnSpc>
+                <a:spcPct val="150000"/>
+              </a:lnSpc>
+              <a:buNone/>
+            </a:pPr>
+            <a:endParaRPr lang="en-US" sz="2175" dirty="0"/>
+          </a:p>
+          <a:p>
+            <a:pPr algn="ctr" indent="0" marL="0">
+              <a:lnSpc>
+                <a:spcPct val="150000"/>
+              </a:lnSpc>
+              <a:buNone/>
+            </a:pPr>
+            <a:r>
+              <a:rPr lang="en-US" sz="1125" b="1" dirty="0">
+                <a:solidFill>
+                  <a:srgbClr val="0F6CBD"/>
+                </a:solidFill>
+                <a:latin typeface="Segoe UI" pitchFamily="34" charset="0"/>
+                <a:ea typeface="Segoe UI" pitchFamily="34" charset="-122"/>
+                <a:cs typeface="Segoe UI" pitchFamily="34" charset="-120"/>
+              </a:rPr>
+              <a:t>Label-C (label-2)</a:t>
+            </a:r>
+            <a:pPr algn="ctr" indent="0" marL="0">
+              <a:lnSpc>
+                <a:spcPct val="150000"/>
+              </a:lnSpc>
+              <a:buNone/>
+            </a:pPr>
+            <a:endParaRPr lang="en-US" sz="2175" dirty="0"/>
+          </a:p>
+          <a:p>
+            <a:pPr algn="ctr" indent="0" marL="0">
+              <a:lnSpc>
+                <a:spcPct val="150000"/>
+              </a:lnSpc>
+              <a:buNone/>
+            </a:pPr>
+            <a:r>
+              <a:rPr lang="en-US" sz="1650" b="1" dirty="0">
+                <a:solidFill>
+                  <a:srgbClr val="0F6CBD"/>
+                </a:solidFill>
+                <a:latin typeface="Segoe UI" pitchFamily="34" charset="0"/>
+                <a:ea typeface="Segoe UI" pitchFamily="34" charset="-122"/>
+                <a:cs typeface="Segoe UI" pitchFamily="34" charset="-120"/>
+              </a:rPr>
+              <a:t>val-1000–val-2000</a:t>
+            </a:r>
+            <a:pPr algn="ctr" indent="0" marL="0">
+              <a:lnSpc>
+                <a:spcPct val="150000"/>
+              </a:lnSpc>
+              <a:buNone/>
+            </a:pPr>
+            <a:r>
+              <a:rPr lang="en-US" sz="1650" dirty="0">
+                <a:solidFill>
+                  <a:srgbClr val="888888"/>
+                </a:solidFill>
+                <a:latin typeface="Segoe UI" pitchFamily="34" charset="0"/>
+                <a:ea typeface="Segoe UI" pitchFamily="34" charset="-122"/>
+                <a:cs typeface="Segoe UI" pitchFamily="34" charset="-120"/>
+              </a:rPr>
+              <a:t>/uu</a:t>
+            </a:r>
+            <a:endParaRPr lang="en-US" sz="2175" dirty="0"/>
+          </a:p>
+        </p:txBody>
       </p:sp>
       <p:sp>
         <p:nvSpPr>
           <p:cNvPr id="12" name="Text 10"/>
-          <p:cNvSpPr/>
-          <p:nvPr/>
-        </p:nvSpPr>
-        <p:spPr>
-          <a:xfrm>
-            <a:off x="890588" y="4297710"/>
-            <a:ext cx="310455" cy="414338"/>
-          </a:xfrm>
-          <a:prstGeom prst="rect">
-            <a:avLst/>
-          </a:prstGeom>
-          <a:noFill/>
-          <a:ln/>
-        </p:spPr>
-        <p:txBody>
-          <a:bodyPr wrap="square" lIns="0" tIns="0" rIns="0" bIns="0" rtlCol="0" anchor="t"/>
-          <a:lstStyle/>
-          <a:p>
-            <a:pPr algn="ctr" indent="0" marL="0">
-              <a:lnSpc>
-                <a:spcPct val="150000"/>
-              </a:lnSpc>
-              <a:buNone/>
-            </a:pPr>
-            <a:r>
-              <a:rPr lang="en-US" sz="2175" b="1" dirty="0">
-                <a:solidFill>
-                  <a:srgbClr val="0F6CBD"/>
-                </a:solidFill>
-                <a:latin typeface="Segoe UI" pitchFamily="34" charset="0"/>
-                <a:ea typeface="Segoe UI" pitchFamily="34" charset="-122"/>
-                <a:cs typeface="Segoe UI" pitchFamily="34" charset="-120"/>
-              </a:rPr>
-              <a:t>=</a:t>
-            </a:r>
-            <a:endParaRPr lang="en-US" sz="2175" dirty="0"/>
-          </a:p>
-        </p:txBody>
-      </p:sp>
-      <p:sp>
-        <p:nvSpPr>
-          <p:cNvPr id="13" name="Text 11"/>
-          <p:cNvSpPr/>
-          <p:nvPr/>
-        </p:nvSpPr>
-        <p:spPr>
-          <a:xfrm>
-            <a:off x="1143893" y="4404866"/>
-            <a:ext cx="8404622" cy="200025"/>
-          </a:xfrm>
-          <a:prstGeom prst="rect">
-            <a:avLst/>
-          </a:prstGeom>
-          <a:noFill/>
-          <a:ln/>
-        </p:spPr>
-        <p:txBody>
-          <a:bodyPr wrap="square" lIns="0" tIns="0" rIns="0" bIns="0" rtlCol="0" anchor="t"/>
-          <a:lstStyle/>
-          <a:p>
-            <a:pPr algn="l" indent="0" marL="0">
-              <a:lnSpc>
-                <a:spcPct val="140000"/>
-              </a:lnSpc>
-              <a:buNone/>
-            </a:pPr>
-            <a:r>
-              <a:rPr lang="en-US" sz="1125" b="1" dirty="0">
-                <a:solidFill>
-                  <a:srgbClr val="0F6CBD"/>
-                </a:solidFill>
-                <a:latin typeface="Segoe UI" pitchFamily="34" charset="0"/>
-                <a:ea typeface="Segoe UI" pitchFamily="34" charset="-122"/>
-                <a:cs typeface="Segoe UI" pitchFamily="34" charset="-120"/>
-              </a:rPr>
-              <a:t>Label-C (label-2)</a:t>
-            </a:r>
-            <a:endParaRPr lang="en-US" sz="1125" dirty="0"/>
-          </a:p>
-        </p:txBody>
-      </p:sp>
-      <p:sp>
-        <p:nvSpPr>
-          <p:cNvPr id="14" name="Text 12"/>
-          <p:cNvSpPr/>
-          <p:nvPr/>
-        </p:nvSpPr>
-        <p:spPr>
-          <a:xfrm>
-            <a:off x="9186565" y="4347716"/>
-            <a:ext cx="2248198" cy="314325"/>
-          </a:xfrm>
-          <a:prstGeom prst="rect">
-            <a:avLst/>
-          </a:prstGeom>
-          <a:noFill/>
-          <a:ln/>
-        </p:spPr>
-        <p:txBody>
-          <a:bodyPr wrap="square" lIns="0" tIns="0" rIns="0" bIns="0" rtlCol="0" anchor="t"/>
-          <a:lstStyle/>
-          <a:p>
-            <a:pPr algn="l" indent="0" marL="0">
-              <a:lnSpc>
-                <a:spcPct val="150000"/>
-              </a:lnSpc>
-              <a:buNone/>
-            </a:pPr>
-            <a:r>
-              <a:rPr lang="en-US" sz="1650" b="1" spc="-37" kern="0" dirty="0">
-                <a:solidFill>
-                  <a:srgbClr val="0F6CBD"/>
-                </a:solidFill>
-                <a:latin typeface="Segoe UI" pitchFamily="34" charset="0"/>
-                <a:ea typeface="Segoe UI" pitchFamily="34" charset="-122"/>
-                <a:cs typeface="Segoe UI" pitchFamily="34" charset="-120"/>
-              </a:rPr>
-              <a:t>val-1000–val-2000</a:t>
-            </a:r>
-            <a:pPr algn="l" indent="0" marL="0">
-              <a:lnSpc>
-                <a:spcPct val="150000"/>
-              </a:lnSpc>
-              <a:buNone/>
-            </a:pPr>
-            <a:r>
-              <a:rPr lang="en-US" sz="1650" spc="-37" kern="0" dirty="0">
-                <a:solidFill>
-                  <a:srgbClr val="888888"/>
-                </a:solidFill>
-                <a:latin typeface="Segoe UI" pitchFamily="34" charset="0"/>
-                <a:ea typeface="Segoe UI" pitchFamily="34" charset="-122"/>
-                <a:cs typeface="Segoe UI" pitchFamily="34" charset="-120"/>
-              </a:rPr>
-              <a:t>/uu</a:t>
-            </a:r>
-            <a:endParaRPr lang="en-US" sz="1650" dirty="0"/>
-          </a:p>
-        </p:txBody>
-      </p:sp>
-      <p:sp>
-        <p:nvSpPr>
-          <p:cNvPr id="15" name="Text 13"/>
           <p:cNvSpPr/>
           <p:nvPr/>
         </p:nvSpPr>
@@ -45449,7 +45102,7 @@
         <p:spPr>
           <a:xfrm>
             <a:off x="747713" y="3040410"/>
-            <a:ext cx="497086" cy="414338"/>
+            <a:ext cx="531763" cy="414338"/>
           </a:xfrm>
           <a:prstGeom prst="rect">
             <a:avLst/>
@@ -45490,8 +45143,8 @@
         </p:nvSpPr>
         <p:spPr>
           <a:xfrm>
-            <a:off x="1159073" y="3040410"/>
-            <a:ext cx="3339554" cy="414338"/>
+            <a:off x="1193750" y="3040410"/>
+            <a:ext cx="3152477" cy="414338"/>
           </a:xfrm>
           <a:prstGeom prst="rect">
             <a:avLst/>
@@ -45533,7 +45186,7 @@
         <p:spPr>
           <a:xfrm>
             <a:off x="747713" y="3502372"/>
-            <a:ext cx="497086" cy="414338"/>
+            <a:ext cx="531763" cy="414338"/>
           </a:xfrm>
           <a:prstGeom prst="rect">
             <a:avLst/>
@@ -45574,8 +45227,8 @@
         </p:nvSpPr>
         <p:spPr>
           <a:xfrm>
-            <a:off x="1159073" y="3502372"/>
-            <a:ext cx="2940397" cy="414338"/>
+            <a:off x="1193750" y="3502372"/>
+            <a:ext cx="2776686" cy="414338"/>
           </a:xfrm>
           <a:prstGeom prst="rect">
             <a:avLst/>
@@ -45617,7 +45270,7 @@
         <p:spPr>
           <a:xfrm>
             <a:off x="747713" y="3964335"/>
-            <a:ext cx="497086" cy="414338"/>
+            <a:ext cx="531763" cy="414338"/>
           </a:xfrm>
           <a:prstGeom prst="rect">
             <a:avLst/>
@@ -45658,8 +45311,8 @@
         </p:nvSpPr>
         <p:spPr>
           <a:xfrm>
-            <a:off x="1159073" y="3964335"/>
-            <a:ext cx="3372148" cy="414338"/>
+            <a:off x="1193750" y="3964335"/>
+            <a:ext cx="3176141" cy="414338"/>
           </a:xfrm>
           <a:prstGeom prst="rect">
             <a:avLst/>
@@ -45819,7 +45472,7 @@
         </p:nvSpPr>
         <p:spPr>
           <a:xfrm>
-            <a:off x="747713" y="1238696"/>
+            <a:off x="747713" y="1657796"/>
             <a:ext cx="11291888" cy="684907"/>
           </a:xfrm>
           <a:prstGeom prst="rect">
@@ -45868,17 +45521,17 @@
           </p:nvPr>
         </p:nvGraphicFramePr>
         <p:xfrm>
-          <a:off x="747713" y="2076004"/>
-          <a:ext cx="10696575" cy="914400"/>
+          <a:off x="747713" y="2495104"/>
+          <a:ext cx="10355312" cy="914400"/>
         </p:xfrm>
         <a:graphic>
           <a:graphicData uri="http://schemas.openxmlformats.org/drawingml/2006/table">
             <a:tbl>
               <a:tblPr/>
               <a:tblGrid>
-                <a:gridCol w="3740468"/>
-                <a:gridCol w="3840480"/>
-                <a:gridCol w="3630454"/>
+                <a:gridCol w="3640455"/>
+                <a:gridCol w="3710464"/>
+                <a:gridCol w="3520440"/>
               </a:tblGrid>
               <a:tr h="0">
                 <a:tc>
@@ -46984,8 +46637,8 @@
         </p:nvSpPr>
         <p:spPr>
           <a:xfrm>
-            <a:off x="747713" y="1751112"/>
-            <a:ext cx="11291888" cy="1237357"/>
+            <a:off x="747713" y="2031355"/>
+            <a:ext cx="11291888" cy="684907"/>
           </a:xfrm>
           <a:prstGeom prst="rect">
             <a:avLst/>
@@ -47026,8 +46679,8 @@
         </p:nvSpPr>
         <p:spPr>
           <a:xfrm>
-            <a:off x="747713" y="3140869"/>
-            <a:ext cx="10696575" cy="1399133"/>
+            <a:off x="747713" y="2868662"/>
+            <a:ext cx="10696575" cy="1391245"/>
           </a:xfrm>
           <a:prstGeom prst="rect">
             <a:avLst/>
@@ -47119,8 +46772,8 @@
         </p:blipFill>
         <p:spPr>
           <a:xfrm>
-            <a:off x="2408188" y="3175992"/>
-            <a:ext cx="1287810" cy="306735"/>
+            <a:off x="2368748" y="2922538"/>
+            <a:ext cx="1201341" cy="286048"/>
           </a:xfrm>
           <a:prstGeom prst="rect">
             <a:avLst/>
@@ -47143,8 +46796,8 @@
         </p:blipFill>
         <p:spPr>
           <a:xfrm>
-            <a:off x="2411164" y="3659237"/>
-            <a:ext cx="1806327" cy="347960"/>
+            <a:off x="2348954" y="3405783"/>
+            <a:ext cx="1685032" cy="324594"/>
           </a:xfrm>
           <a:prstGeom prst="rect">
             <a:avLst/>
@@ -47167,8 +46820,8 @@
         </p:blipFill>
         <p:spPr>
           <a:xfrm>
-            <a:off x="2406253" y="4185493"/>
-            <a:ext cx="272653" cy="354509"/>
+            <a:off x="2361605" y="3929211"/>
+            <a:ext cx="254347" cy="330696"/>
           </a:xfrm>
           <a:prstGeom prst="rect">
             <a:avLst/>
@@ -47191,7 +46844,7 @@
         </p:blipFill>
         <p:spPr>
           <a:xfrm>
-            <a:off x="747713" y="4692402"/>
+            <a:off x="747713" y="4412307"/>
             <a:ext cx="10696575" cy="414338"/>
           </a:xfrm>
           <a:prstGeom prst="rect">
@@ -47284,7 +46937,7 @@
         </p:nvSpPr>
         <p:spPr>
           <a:xfrm>
-            <a:off x="747713" y="2082403"/>
+            <a:off x="747713" y="2120503"/>
             <a:ext cx="11291888" cy="684907"/>
           </a:xfrm>
           <a:prstGeom prst="rect">
@@ -47334,8 +46987,8 @@
         </p:blipFill>
         <p:spPr>
           <a:xfrm>
-            <a:off x="747713" y="2919710"/>
-            <a:ext cx="10696575" cy="814536"/>
+            <a:off x="747713" y="2957810"/>
+            <a:ext cx="10696575" cy="759768"/>
           </a:xfrm>
           <a:prstGeom prst="rect">
             <a:avLst/>
@@ -47350,7 +47003,7 @@
         </p:nvSpPr>
         <p:spPr>
           <a:xfrm>
-            <a:off x="747713" y="3886646"/>
+            <a:off x="747713" y="3869978"/>
             <a:ext cx="11001375" cy="414338"/>
           </a:xfrm>
           <a:prstGeom prst="rect">
@@ -47400,8 +47053,8 @@
         </p:blipFill>
         <p:spPr>
           <a:xfrm>
-            <a:off x="747713" y="4453384"/>
-            <a:ext cx="10696575" cy="322213"/>
+            <a:off x="747713" y="4436715"/>
+            <a:ext cx="10696575" cy="300633"/>
           </a:xfrm>
           <a:prstGeom prst="rect">
             <a:avLst/>
@@ -48011,7 +47664,7 @@
         </p:nvSpPr>
         <p:spPr>
           <a:xfrm>
-            <a:off x="747713" y="2796034"/>
+            <a:off x="747713" y="2800796"/>
             <a:ext cx="11291888" cy="684907"/>
           </a:xfrm>
           <a:prstGeom prst="rect">
@@ -48053,8 +47706,8 @@
         </p:nvSpPr>
         <p:spPr>
           <a:xfrm>
-            <a:off x="747713" y="3633341"/>
-            <a:ext cx="11001375" cy="428476"/>
+            <a:off x="747713" y="3638104"/>
+            <a:ext cx="11001375" cy="418951"/>
           </a:xfrm>
           <a:prstGeom prst="rect">
             <a:avLst/>
@@ -48233,7 +47886,7 @@
         </p:nvSpPr>
         <p:spPr>
           <a:xfrm>
-            <a:off x="747713" y="2796034"/>
+            <a:off x="747713" y="2800796"/>
             <a:ext cx="11291888" cy="684907"/>
           </a:xfrm>
           <a:prstGeom prst="rect">
@@ -48275,8 +47928,8 @@
         </p:nvSpPr>
         <p:spPr>
           <a:xfrm>
-            <a:off x="747713" y="3633341"/>
-            <a:ext cx="11001375" cy="428476"/>
+            <a:off x="747713" y="3638104"/>
+            <a:ext cx="11001375" cy="418951"/>
           </a:xfrm>
           <a:prstGeom prst="rect">
             <a:avLst/>
@@ -48734,7 +48387,7 @@
         </p:nvSpPr>
         <p:spPr>
           <a:xfrm>
-            <a:off x="747713" y="1493044"/>
+            <a:off x="747713" y="1497806"/>
             <a:ext cx="11291888" cy="1237357"/>
           </a:xfrm>
           <a:prstGeom prst="rect">
@@ -48776,7 +48429,7 @@
         </p:nvSpPr>
         <p:spPr>
           <a:xfrm>
-            <a:off x="747713" y="2959001"/>
+            <a:off x="747713" y="2963763"/>
             <a:ext cx="11291888" cy="345281"/>
           </a:xfrm>
           <a:prstGeom prst="rect">
@@ -48818,7 +48471,7 @@
         </p:nvSpPr>
         <p:spPr>
           <a:xfrm>
-            <a:off x="747713" y="3532882"/>
+            <a:off x="747713" y="3537645"/>
             <a:ext cx="11291888" cy="310604"/>
           </a:xfrm>
           <a:prstGeom prst="rect">
@@ -48860,7 +48513,7 @@
         </p:nvSpPr>
         <p:spPr>
           <a:xfrm>
-            <a:off x="747713" y="3995886"/>
+            <a:off x="747713" y="4000649"/>
             <a:ext cx="11001375" cy="414338"/>
           </a:xfrm>
           <a:prstGeom prst="rect">
@@ -48919,7 +48572,7 @@
         </p:nvSpPr>
         <p:spPr>
           <a:xfrm>
-            <a:off x="747713" y="4638824"/>
+            <a:off x="747713" y="4643586"/>
             <a:ext cx="10696575" cy="69056"/>
           </a:xfrm>
           <a:prstGeom prst="rect">
@@ -48939,8 +48592,8 @@
         </p:nvSpPr>
         <p:spPr>
           <a:xfrm>
-            <a:off x="747713" y="4936480"/>
-            <a:ext cx="11001375" cy="428476"/>
+            <a:off x="747713" y="4941243"/>
+            <a:ext cx="11001375" cy="418951"/>
           </a:xfrm>
           <a:prstGeom prst="rect">
             <a:avLst/>
@@ -49247,6 +48900,23 @@
                 <a:ea typeface="Segoe UI" pitchFamily="34" charset="-122"/>
                 <a:cs typeface="Segoe UI" pitchFamily="34" charset="-120"/>
               </a:rPr>
+              <a:t> </a:t>
+            </a:r>
+            <a:pPr algn="l" indent="0" marL="0">
+              <a:lnSpc>
+                <a:spcPct val="150000"/>
+              </a:lnSpc>
+              <a:buNone/>
+            </a:pPr>
+            <a:r>
+              <a:rPr lang="en-US" sz="2175" dirty="0">
+                <a:solidFill>
+                  <a:srgbClr val="1F2328"/>
+                </a:solidFill>
+                <a:latin typeface="Segoe UI" pitchFamily="34" charset="0"/>
+                <a:ea typeface="Segoe UI" pitchFamily="34" charset="-122"/>
+                <a:cs typeface="Segoe UI" pitchFamily="34" charset="-120"/>
+              </a:rPr>
               <a:t>🎉</a:t>
             </a:r>
             <a:pPr algn="l" indent="0" marL="0">
@@ -49264,7 +48934,41 @@
                 <a:ea typeface="Segoe UI" pitchFamily="34" charset="-122"/>
                 <a:cs typeface="Segoe UI" pitchFamily="34" charset="-120"/>
               </a:rPr>
+              <a:t> </a:t>
+            </a:r>
+            <a:pPr algn="l" indent="0" marL="0">
+              <a:lnSpc>
+                <a:spcPct val="150000"/>
+              </a:lnSpc>
+              <a:buNone/>
+            </a:pPr>
+            <a:r>
+              <a:rPr lang="en-US" sz="2175" dirty="0">
+                <a:solidFill>
+                  <a:srgbClr val="1F2328"/>
+                </a:solidFill>
+                <a:latin typeface="Segoe UI" pitchFamily="34" charset="0"/>
+                <a:ea typeface="Segoe UI" pitchFamily="34" charset="-122"/>
+                <a:cs typeface="Segoe UI" pitchFamily="34" charset="-120"/>
+              </a:rPr>
               <a:t>⚠️</a:t>
+            </a:r>
+            <a:pPr algn="l" indent="0" marL="0">
+              <a:lnSpc>
+                <a:spcPct val="150000"/>
+              </a:lnSpc>
+              <a:buNone/>
+            </a:pPr>
+            <a:r>
+              <a:rPr lang="en-US" sz="2175" dirty="0">
+                <a:solidFill>
+                  <a:srgbClr val="1F2328"/>
+                </a:solidFill>
+                <a:latin typeface="Segoe UI" pitchFamily="34" charset="0"/>
+                <a:ea typeface="Segoe UI" pitchFamily="34" charset="-122"/>
+                <a:cs typeface="Segoe UI" pitchFamily="34" charset="-120"/>
+              </a:rPr>
+              <a:t> </a:t>
             </a:r>
             <a:pPr algn="l" indent="0" marL="0">
               <a:lnSpc>
@@ -49415,7 +49119,7 @@
         <p:spPr>
           <a:xfrm>
             <a:off x="747713" y="1585020"/>
-            <a:ext cx="10696575" cy="3659981"/>
+            <a:ext cx="10696575" cy="5272980"/>
           </a:xfrm>
           <a:prstGeom prst="rect">
             <a:avLst/>
@@ -49453,7 +49157,7 @@
                 <a:spcPct val="150000"/>
               </a:lnSpc>
               <a:buSzPct val="100000"/>
-              <a:buChar char="•"/>
+              <a:buChar char="○"/>
             </a:pPr>
             <a:r>
               <a:rPr lang="en-US" sz="2175" dirty="0">
@@ -49470,6 +49174,90 @@
           </a:p>
           <a:p>
             <a:pPr algn="l" lvl="1" marL="685800" indent="-342900">
+              <a:lnSpc>
+                <a:spcPct val="150000"/>
+              </a:lnSpc>
+              <a:buSzPct val="100000"/>
+              <a:buChar char="○"/>
+            </a:pPr>
+            <a:r>
+              <a:rPr lang="en-US" sz="2175" dirty="0">
+                <a:solidFill>
+                  <a:srgbClr val="1F2328"/>
+                </a:solidFill>
+                <a:latin typeface="Segoe UI" pitchFamily="34" charset="0"/>
+                <a:ea typeface="Segoe UI" pitchFamily="34" charset="-122"/>
+                <a:cs typeface="Segoe UI" pitchFamily="34" charset="-120"/>
+              </a:rPr>
+              <a:t>Level 2 item 1-2</a:t>
+            </a:r>
+            <a:endParaRPr lang="en-US" sz="2175" dirty="0"/>
+          </a:p>
+          <a:p>
+            <a:pPr algn="l" lvl="2" marL="1028700" indent="-342900">
+              <a:lnSpc>
+                <a:spcPct val="150000"/>
+              </a:lnSpc>
+              <a:buSzPct val="100000"/>
+              <a:buChar char="▪"/>
+            </a:pPr>
+            <a:r>
+              <a:rPr lang="en-US" sz="2175" dirty="0">
+                <a:solidFill>
+                  <a:srgbClr val="1F2328"/>
+                </a:solidFill>
+                <a:latin typeface="Segoe UI" pitchFamily="34" charset="0"/>
+                <a:ea typeface="Segoe UI" pitchFamily="34" charset="-122"/>
+                <a:cs typeface="Segoe UI" pitchFamily="34" charset="-120"/>
+              </a:rPr>
+              <a:t>Level 3 item 1-2-1</a:t>
+            </a:r>
+            <a:endParaRPr lang="en-US" sz="2175" dirty="0"/>
+          </a:p>
+          <a:p>
+            <a:pPr algn="l" lvl="2" marL="1028700" indent="-342900">
+              <a:lnSpc>
+                <a:spcPct val="150000"/>
+              </a:lnSpc>
+              <a:buSzPct val="100000"/>
+              <a:buChar char="▪"/>
+            </a:pPr>
+            <a:r>
+              <a:rPr lang="en-US" sz="2175" dirty="0">
+                <a:solidFill>
+                  <a:srgbClr val="1F2328"/>
+                </a:solidFill>
+                <a:latin typeface="Segoe UI" pitchFamily="34" charset="0"/>
+                <a:ea typeface="Segoe UI" pitchFamily="34" charset="-122"/>
+                <a:cs typeface="Segoe UI" pitchFamily="34" charset="-120"/>
+              </a:rPr>
+              <a:t>Level 3 item 1-2-2</a:t>
+            </a:r>
+            <a:endParaRPr lang="en-US" sz="2175" dirty="0"/>
+          </a:p>
+          <a:p>
+            <a:pPr algn="l" lvl="1" marL="685800" indent="-342900">
+              <a:lnSpc>
+                <a:spcPct val="150000"/>
+              </a:lnSpc>
+              <a:buSzPct val="100000"/>
+              <a:buChar char="○"/>
+            </a:pPr>
+            <a:r>
+              <a:rPr lang="en-US" sz="2175" dirty="0">
+                <a:solidFill>
+                  <a:srgbClr val="1F2328"/>
+                </a:solidFill>
+                <a:latin typeface="Segoe UI" pitchFamily="34" charset="0"/>
+                <a:ea typeface="Segoe UI" pitchFamily="34" charset="-122"/>
+                <a:cs typeface="Segoe UI" pitchFamily="34" charset="-120"/>
+              </a:rPr>
+              <a:t>Level 2 item 1-3</a:t>
+            </a:r>
+            <a:endParaRPr lang="en-US" sz="2175" dirty="0"/>
+          </a:p>
+          <a:p>
+            <a:pPr algn="l" marL="342900" indent="-342900">
               <a:lnSpc>
                 <a:spcPct val="150000"/>
               </a:lnSpc>
@@ -49485,12 +49273,12 @@
                 <a:ea typeface="Segoe UI" pitchFamily="34" charset="-122"/>
                 <a:cs typeface="Segoe UI" pitchFamily="34" charset="-120"/>
               </a:rPr>
-              <a:t>Level 2 item 1-2</a:t>
+              <a:t>Top-level item 2</a:t>
             </a:r>
             <a:endParaRPr lang="en-US" sz="2175" dirty="0"/>
           </a:p>
           <a:p>
-            <a:pPr algn="l" lvl="2" marL="1028700" indent="-342900">
+            <a:pPr algn="l" marL="342900" indent="-342900">
               <a:lnSpc>
                 <a:spcPct val="150000"/>
               </a:lnSpc>
@@ -49506,12 +49294,9 @@
                 <a:ea typeface="Segoe UI" pitchFamily="34" charset="-122"/>
                 <a:cs typeface="Segoe UI" pitchFamily="34" charset="-120"/>
               </a:rPr>
-              <a:t>Level 3 item 1-2-1</a:t>
-            </a:r>
-            <a:endParaRPr lang="en-US" sz="2175" dirty="0"/>
-          </a:p>
-          <a:p>
-            <a:pPr algn="l" lvl="2" marL="1028700" indent="-342900">
+              <a:t>Top-level item 3 (</a:t>
+            </a:r>
+            <a:pPr algn="l" marL="342900" indent="-342900">
               <a:lnSpc>
                 <a:spcPct val="150000"/>
               </a:lnSpc>
@@ -49519,20 +49304,17 @@
               <a:buChar char="•"/>
             </a:pPr>
             <a:r>
-              <a:rPr lang="en-US" sz="2175" dirty="0">
-                <a:solidFill>
-                  <a:srgbClr val="1F2328"/>
-                </a:solidFill>
-                <a:latin typeface="Segoe UI" pitchFamily="34" charset="0"/>
-                <a:ea typeface="Segoe UI" pitchFamily="34" charset="-122"/>
-                <a:cs typeface="Segoe UI" pitchFamily="34" charset="-120"/>
-              </a:rPr>
-              <a:t>Level 3 item 1-2-2</a:t>
-            </a:r>
-            <a:endParaRPr lang="en-US" sz="2175" dirty="0"/>
-          </a:p>
-          <a:p>
-            <a:pPr algn="l" lvl="1" marL="685800" indent="-342900">
+              <a:rPr lang="en-US" sz="2175" b="1" dirty="0">
+                <a:solidFill>
+                  <a:srgbClr val="1F2328"/>
+                </a:solidFill>
+                <a:latin typeface="Segoe UI" pitchFamily="34" charset="0"/>
+                <a:ea typeface="Segoe UI" pitchFamily="34" charset="-122"/>
+                <a:cs typeface="Segoe UI" pitchFamily="34" charset="-120"/>
+              </a:rPr>
+              <a:t>bold</a:t>
+            </a:r>
+            <a:pPr algn="l" marL="342900" indent="-342900">
               <a:lnSpc>
                 <a:spcPct val="150000"/>
               </a:lnSpc>
@@ -49548,110 +49330,16 @@
                 <a:ea typeface="Segoe UI" pitchFamily="34" charset="-122"/>
                 <a:cs typeface="Segoe UI" pitchFamily="34" charset="-120"/>
               </a:rPr>
-              <a:t>Level 2 item 1-3</a:t>
-            </a:r>
+              <a:t> included)</a:t>
+            </a:r>
+            <a:pPr algn="l" indent="0" marL="0">
+              <a:lnSpc>
+                <a:spcPct val="150000"/>
+              </a:lnSpc>
+              <a:buNone/>
+            </a:pPr>
             <a:endParaRPr lang="en-US" sz="2175" dirty="0"/>
           </a:p>
-          <a:p>
-            <a:pPr algn="l" marL="342900" indent="-342900">
-              <a:lnSpc>
-                <a:spcPct val="150000"/>
-              </a:lnSpc>
-              <a:buSzPct val="100000"/>
-              <a:buChar char="•"/>
-            </a:pPr>
-            <a:r>
-              <a:rPr lang="en-US" sz="2175" dirty="0">
-                <a:solidFill>
-                  <a:srgbClr val="1F2328"/>
-                </a:solidFill>
-                <a:latin typeface="Segoe UI" pitchFamily="34" charset="0"/>
-                <a:ea typeface="Segoe UI" pitchFamily="34" charset="-122"/>
-                <a:cs typeface="Segoe UI" pitchFamily="34" charset="-120"/>
-              </a:rPr>
-              <a:t>Top-level item 2</a:t>
-            </a:r>
-            <a:endParaRPr lang="en-US" sz="2175" dirty="0"/>
-          </a:p>
-          <a:p>
-            <a:pPr algn="l" marL="342900" indent="-342900">
-              <a:lnSpc>
-                <a:spcPct val="150000"/>
-              </a:lnSpc>
-              <a:buSzPct val="100000"/>
-              <a:buChar char="•"/>
-            </a:pPr>
-            <a:r>
-              <a:rPr lang="en-US" sz="2175" dirty="0">
-                <a:solidFill>
-                  <a:srgbClr val="1F2328"/>
-                </a:solidFill>
-                <a:latin typeface="Segoe UI" pitchFamily="34" charset="0"/>
-                <a:ea typeface="Segoe UI" pitchFamily="34" charset="-122"/>
-                <a:cs typeface="Segoe UI" pitchFamily="34" charset="-120"/>
-              </a:rPr>
-              <a:t>Top-level item 3 (</a:t>
-            </a:r>
-            <a:pPr algn="l" marL="342900" indent="-342900">
-              <a:lnSpc>
-                <a:spcPct val="150000"/>
-              </a:lnSpc>
-              <a:buSzPct val="100000"/>
-              <a:buChar char="•"/>
-            </a:pPr>
-            <a:r>
-              <a:rPr lang="en-US" sz="2175" b="1" dirty="0">
-                <a:solidFill>
-                  <a:srgbClr val="1F2328"/>
-                </a:solidFill>
-                <a:latin typeface="Segoe UI" pitchFamily="34" charset="0"/>
-                <a:ea typeface="Segoe UI" pitchFamily="34" charset="-122"/>
-                <a:cs typeface="Segoe UI" pitchFamily="34" charset="-120"/>
-              </a:rPr>
-              <a:t>bold</a:t>
-            </a:r>
-            <a:pPr algn="l" marL="342900" indent="-342900">
-              <a:lnSpc>
-                <a:spcPct val="150000"/>
-              </a:lnSpc>
-              <a:buSzPct val="100000"/>
-              <a:buChar char="•"/>
-            </a:pPr>
-            <a:r>
-              <a:rPr lang="en-US" sz="2175" dirty="0">
-                <a:solidFill>
-                  <a:srgbClr val="1F2328"/>
-                </a:solidFill>
-                <a:latin typeface="Segoe UI" pitchFamily="34" charset="0"/>
-                <a:ea typeface="Segoe UI" pitchFamily="34" charset="-122"/>
-                <a:cs typeface="Segoe UI" pitchFamily="34" charset="-120"/>
-              </a:rPr>
-              <a:t> included)</a:t>
-            </a:r>
-            <a:endParaRPr lang="en-US" sz="2175" dirty="0"/>
-          </a:p>
-        </p:txBody>
-      </p:sp>
-      <p:sp>
-        <p:nvSpPr>
-          <p:cNvPr id="4" name="Text 2"/>
-          <p:cNvSpPr/>
-          <p:nvPr/>
-        </p:nvSpPr>
-        <p:spPr>
-          <a:xfrm>
-            <a:off x="747713" y="5397401"/>
-            <a:ext cx="10696575" cy="1460599"/>
-          </a:xfrm>
-          <a:prstGeom prst="rect">
-            <a:avLst/>
-          </a:prstGeom>
-          <a:noFill/>
-          <a:ln/>
-        </p:spPr>
-        <p:txBody>
-          <a:bodyPr wrap="square" lIns="0" tIns="0" rIns="0" bIns="0" rtlCol="0" anchor="t"/>
-          <a:lstStyle/>
           <a:p>
             <a:pPr algn="l" marL="342900" indent="-342900">
               <a:lnSpc>
@@ -49703,7 +49391,7 @@
               </a:lnSpc>
               <a:buSzPct val="100000"/>
               <a:buFont typeface="+mj-lt"/>
-              <a:buAutoNum type="arabicPeriod" startAt="1"/>
+              <a:buAutoNum type="romanLcPeriod" startAt="1"/>
             </a:pPr>
             <a:r>
               <a:rPr lang="en-US" sz="2175" dirty="0">
@@ -49725,7 +49413,7 @@
               </a:lnSpc>
               <a:buSzPct val="100000"/>
               <a:buFont typeface="+mj-lt"/>
-              <a:buAutoNum type="arabicPeriod" startAt="1"/>
+              <a:buAutoNum type="romanLcPeriod" startAt="1"/>
             </a:pPr>
             <a:r>
               <a:rPr lang="en-US" sz="2175" dirty="0">
@@ -49804,6 +49492,1957 @@
             <a:fld id="{F7021451-1387-4CA6-816F-3879F97B5CBC}" type="slidenum">
               <a:rPr b="0" lang="en-US"/>
               <a:t>8</a:t>
+            </a:fld>
+            <a:endParaRPr lang="en-US"/>
+          </a:p>
+        </p:txBody>
+      </p:sp>
+    </p:spTree>
+  </p:cSld>
+  <p:clrMapOvr>
+    <a:masterClrMapping/>
+  </p:clrMapOvr>
+</p:sld>
+</file>
+
+<file path=ppt/slides/slide80.xml><?xml version="1.0" encoding="utf-8"?>
+<p:sld xmlns:a="http://schemas.openxmlformats.org/drawingml/2006/main" xmlns:r="http://schemas.openxmlformats.org/officeDocument/2006/relationships" xmlns:p="http://schemas.openxmlformats.org/presentationml/2006/main">
+  <p:cSld name="Slide 80">
+    <p:bg>
+      <p:bgPr>
+        <a:solidFill>
+          <a:srgbClr val="FFFFFF"/>
+        </a:solidFill>
+      </p:bgPr>
+    </p:bg>
+    <p:spTree>
+      <p:nvGrpSpPr>
+        <p:cNvPr id="1" name=""/>
+        <p:cNvGrpSpPr/>
+        <p:nvPr/>
+      </p:nvGrpSpPr>
+      <p:grpSpPr>
+        <a:xfrm>
+          <a:off x="0" y="0"/>
+          <a:ext cx="0" cy="0"/>
+          <a:chOff x="0" y="0"/>
+          <a:chExt cx="0" cy="0"/>
+        </a:xfrm>
+      </p:grpSpPr>
+      <p:sp>
+        <p:nvSpPr>
+          <p:cNvPr id="2" name="Text 0"/>
+          <p:cNvSpPr/>
+          <p:nvPr/>
+        </p:nvSpPr>
+        <p:spPr>
+          <a:xfrm>
+            <a:off x="747713" y="2043559"/>
+            <a:ext cx="11291888" cy="1237357"/>
+          </a:xfrm>
+          <a:prstGeom prst="rect">
+            <a:avLst/>
+          </a:prstGeom>
+          <a:noFill/>
+          <a:ln/>
+        </p:spPr>
+        <p:txBody>
+          <a:bodyPr wrap="square" lIns="0" tIns="0" rIns="0" bIns="132588" rtlCol="0" anchor="t"/>
+          <a:lstStyle/>
+          <a:p>
+            <a:pPr algn="l" indent="0" marL="0">
+              <a:lnSpc>
+                <a:spcPct val="125000"/>
+              </a:lnSpc>
+              <a:buNone/>
+            </a:pPr>
+            <a:r>
+              <a:rPr lang="en-US" sz="3480" b="1" dirty="0">
+                <a:solidFill>
+                  <a:srgbClr val="224466"/>
+                </a:solidFill>
+                <a:latin typeface="Segoe UI" pitchFamily="34" charset="0"/>
+                <a:ea typeface="Segoe UI" pitchFamily="34" charset="-122"/>
+                <a:cs typeface="Segoe UI" pitchFamily="34" charset="-120"/>
+              </a:rPr>
+              <a:t>Slide 80: linear-gradient marker highlight on strong inside list item</a:t>
+            </a:r>
+            <a:endParaRPr lang="en-US" sz="3480" dirty="0"/>
+          </a:p>
+        </p:txBody>
+      </p:sp>
+      <p:sp>
+        <p:nvSpPr>
+          <p:cNvPr id="3" name="Text 1"/>
+          <p:cNvSpPr/>
+          <p:nvPr/>
+        </p:nvSpPr>
+        <p:spPr>
+          <a:xfrm>
+            <a:off x="747713" y="3433316"/>
+            <a:ext cx="10696575" cy="1381125"/>
+          </a:xfrm>
+          <a:prstGeom prst="rect">
+            <a:avLst/>
+          </a:prstGeom>
+          <a:noFill/>
+          <a:ln/>
+        </p:spPr>
+        <p:txBody>
+          <a:bodyPr wrap="square" lIns="0" tIns="0" rIns="0" bIns="0" rtlCol="0" anchor="t"/>
+          <a:lstStyle/>
+          <a:p>
+            <a:pPr algn="l" marL="342900" indent="-342900">
+              <a:lnSpc>
+                <a:spcPct val="150000"/>
+              </a:lnSpc>
+              <a:buSzPct val="100000"/>
+              <a:buChar char="•"/>
+            </a:pPr>
+            <a:r>
+              <a:rPr lang="en-US" sz="2175" dirty="0">
+                <a:solidFill>
+                  <a:srgbClr val="1F2328"/>
+                </a:solidFill>
+                <a:latin typeface="Segoe UI" pitchFamily="34" charset="0"/>
+                <a:ea typeface="Segoe UI" pitchFamily="34" charset="-122"/>
+                <a:cs typeface="Segoe UI" pitchFamily="34" charset="-120"/>
+              </a:rPr>
+              <a:t>Alpha beta gamma </a:t>
+            </a:r>
+            <a:pPr algn="l" marL="342900" indent="-342900">
+              <a:lnSpc>
+                <a:spcPct val="150000"/>
+              </a:lnSpc>
+              <a:buSzPct val="100000"/>
+              <a:buChar char="•"/>
+            </a:pPr>
+            <a:r>
+              <a:rPr lang="en-US" sz="2175" b="1" dirty="0">
+                <a:solidFill>
+                  <a:srgbClr val="1F2328"/>
+                </a:solidFill>
+                <a:highlight>
+                  <a:srgbClr val="FFF2A8"/>
+                </a:highlight>
+                <a:latin typeface="Segoe UI" pitchFamily="34" charset="0"/>
+                <a:ea typeface="Segoe UI" pitchFamily="34" charset="-122"/>
+                <a:cs typeface="Segoe UI" pitchFamily="34" charset="-120"/>
+              </a:rPr>
+              <a:t>Item-1</a:t>
+            </a:r>
+            <a:pPr algn="l" marL="342900" indent="-342900">
+              <a:lnSpc>
+                <a:spcPct val="150000"/>
+              </a:lnSpc>
+              <a:buSzPct val="100000"/>
+              <a:buChar char="•"/>
+            </a:pPr>
+            <a:r>
+              <a:rPr lang="en-US" sz="2175" dirty="0">
+                <a:solidFill>
+                  <a:srgbClr val="1F2328"/>
+                </a:solidFill>
+                <a:latin typeface="Segoe UI" pitchFamily="34" charset="0"/>
+                <a:ea typeface="Segoe UI" pitchFamily="34" charset="-122"/>
+                <a:cs typeface="Segoe UI" pitchFamily="34" charset="-120"/>
+              </a:rPr>
+              <a:t> delta epsilon</a:t>
+            </a:r>
+            <a:endParaRPr lang="en-US" sz="2175" dirty="0"/>
+          </a:p>
+          <a:p>
+            <a:pPr algn="l" marL="342900" indent="-342900">
+              <a:lnSpc>
+                <a:spcPct val="150000"/>
+              </a:lnSpc>
+              <a:buSzPct val="100000"/>
+              <a:buChar char="•"/>
+            </a:pPr>
+            <a:r>
+              <a:rPr lang="en-US" sz="2175" b="1" dirty="0">
+                <a:solidFill>
+                  <a:srgbClr val="1F2328"/>
+                </a:solidFill>
+                <a:highlight>
+                  <a:srgbClr val="FFF2A8"/>
+                </a:highlight>
+                <a:latin typeface="Segoe UI" pitchFamily="34" charset="0"/>
+                <a:ea typeface="Segoe UI" pitchFamily="34" charset="-122"/>
+                <a:cs typeface="Segoe UI" pitchFamily="34" charset="-120"/>
+              </a:rPr>
+              <a:t>Item-2</a:t>
+            </a:r>
+            <a:pPr algn="l" marL="342900" indent="-342900">
+              <a:lnSpc>
+                <a:spcPct val="150000"/>
+              </a:lnSpc>
+              <a:buSzPct val="100000"/>
+              <a:buChar char="•"/>
+            </a:pPr>
+            <a:r>
+              <a:rPr lang="en-US" sz="2175" dirty="0">
+                <a:solidFill>
+                  <a:srgbClr val="1F2328"/>
+                </a:solidFill>
+                <a:latin typeface="Segoe UI" pitchFamily="34" charset="0"/>
+                <a:ea typeface="Segoe UI" pitchFamily="34" charset="-122"/>
+                <a:cs typeface="Segoe UI" pitchFamily="34" charset="-120"/>
+              </a:rPr>
+              <a:t> zeta nu eta</a:t>
+            </a:r>
+            <a:endParaRPr lang="en-US" sz="2175" dirty="0"/>
+          </a:p>
+          <a:p>
+            <a:pPr algn="l" marL="342900" indent="-342900">
+              <a:lnSpc>
+                <a:spcPct val="150000"/>
+              </a:lnSpc>
+              <a:buSzPct val="100000"/>
+              <a:buChar char="•"/>
+            </a:pPr>
+            <a:r>
+              <a:rPr lang="en-US" sz="2175" dirty="0">
+                <a:solidFill>
+                  <a:srgbClr val="1F2328"/>
+                </a:solidFill>
+                <a:latin typeface="Segoe UI" pitchFamily="34" charset="0"/>
+                <a:ea typeface="Segoe UI" pitchFamily="34" charset="-122"/>
+                <a:cs typeface="Segoe UI" pitchFamily="34" charset="-120"/>
+              </a:rPr>
+              <a:t>Theta iota </a:t>
+            </a:r>
+            <a:pPr algn="l" marL="342900" indent="-342900">
+              <a:lnSpc>
+                <a:spcPct val="150000"/>
+              </a:lnSpc>
+              <a:buSzPct val="100000"/>
+              <a:buChar char="•"/>
+            </a:pPr>
+            <a:r>
+              <a:rPr lang="en-US" sz="2175" b="1" dirty="0">
+                <a:solidFill>
+                  <a:srgbClr val="1F2328"/>
+                </a:solidFill>
+                <a:highlight>
+                  <a:srgbClr val="FFF2A8"/>
+                </a:highlight>
+                <a:latin typeface="Segoe UI" pitchFamily="34" charset="0"/>
+                <a:ea typeface="Segoe UI" pitchFamily="34" charset="-122"/>
+                <a:cs typeface="Segoe UI" pitchFamily="34" charset="-120"/>
+              </a:rPr>
+              <a:t>Item-3</a:t>
+            </a:r>
+            <a:pPr algn="l" marL="342900" indent="-342900">
+              <a:lnSpc>
+                <a:spcPct val="150000"/>
+              </a:lnSpc>
+              <a:buSzPct val="100000"/>
+              <a:buChar char="•"/>
+            </a:pPr>
+            <a:r>
+              <a:rPr lang="en-US" sz="2175" dirty="0">
+                <a:solidFill>
+                  <a:srgbClr val="1F2328"/>
+                </a:solidFill>
+                <a:latin typeface="Segoe UI" pitchFamily="34" charset="0"/>
+                <a:ea typeface="Segoe UI" pitchFamily="34" charset="-122"/>
+                <a:cs typeface="Segoe UI" pitchFamily="34" charset="-120"/>
+              </a:rPr>
+              <a:t> kappa lambda</a:t>
+            </a:r>
+            <a:endParaRPr lang="en-US" sz="2175" dirty="0"/>
+          </a:p>
+        </p:txBody>
+      </p:sp>
+      <p:sp>
+        <p:nvSpPr>
+          <p:cNvPr id="25" name="Slide Number Placeholder 0"/>
+          <p:cNvSpPr>
+            <a:spLocks noGrp="1"/>
+          </p:cNvSpPr>
+          <p:nvPr>
+            <p:ph type="sldNum" sz="quarter" idx="4294967295"/>
+          </p:nvPr>
+        </p:nvSpPr>
+        <p:spPr>
+          <a:xfrm>
+            <a:off x="0" y="6343650"/>
+            <a:ext cx="11811000" cy="228600"/>
+          </a:xfrm>
+          <a:prstGeom prst="rect">
+            <a:avLst/>
+          </a:prstGeom>
+          <a:extLst>
+            <a:ext uri="{C572A759-6A51-4108-AA02-DFA0A04FC94B}">
+              <ma14:wrappingTextBoxFlag xmlns:ma14="http://schemas.microsoft.com/office/mac/drawingml/2011/main" val="0"/>
+            </a:ext>
+          </a:extLst>
+        </p:spPr>
+        <p:txBody>
+          <a:bodyPr lIns="0" tIns="0" rIns="0" bIns="0"/>
+          <a:lstStyle>
+            <a:lvl1pPr>
+              <a:defRPr sz="1350">
+                <a:solidFill>
+                  <a:srgbClr val="777777"/>
+                </a:solidFill>
+              </a:defRPr>
+            </a:lvl1pPr>
+          </a:lstStyle>
+          <a:p>
+            <a:pPr algn="r"/>
+            <a:fld id="{F7021451-1387-4CA6-816F-3879F97B5CBC}" type="slidenum">
+              <a:rPr b="0" lang="en-US"/>
+              <a:t>80</a:t>
+            </a:fld>
+            <a:endParaRPr lang="en-US"/>
+          </a:p>
+        </p:txBody>
+      </p:sp>
+    </p:spTree>
+  </p:cSld>
+  <p:clrMapOvr>
+    <a:masterClrMapping/>
+  </p:clrMapOvr>
+</p:sld>
+</file>
+
+<file path=ppt/slides/slide81.xml><?xml version="1.0" encoding="utf-8"?>
+<p:sld xmlns:a="http://schemas.openxmlformats.org/drawingml/2006/main" xmlns:r="http://schemas.openxmlformats.org/officeDocument/2006/relationships" xmlns:p="http://schemas.openxmlformats.org/presentationml/2006/main">
+  <p:cSld name="Slide 81">
+    <p:bg>
+      <p:bgPr>
+        <a:solidFill>
+          <a:srgbClr val="FFFFFF"/>
+        </a:solidFill>
+      </p:bgPr>
+    </p:bg>
+    <p:spTree>
+      <p:nvGrpSpPr>
+        <p:cNvPr id="1" name=""/>
+        <p:cNvGrpSpPr/>
+        <p:nvPr/>
+      </p:nvGrpSpPr>
+      <p:grpSpPr>
+        <a:xfrm>
+          <a:off x="0" y="0"/>
+          <a:ext cx="0" cy="0"/>
+          <a:chOff x="0" y="0"/>
+          <a:chExt cx="0" cy="0"/>
+        </a:xfrm>
+      </p:grpSpPr>
+      <p:sp>
+        <p:nvSpPr>
+          <p:cNvPr id="2" name="Text 0"/>
+          <p:cNvSpPr/>
+          <p:nvPr/>
+        </p:nvSpPr>
+        <p:spPr>
+          <a:xfrm>
+            <a:off x="747713" y="1784003"/>
+            <a:ext cx="11291888" cy="684907"/>
+          </a:xfrm>
+          <a:prstGeom prst="rect">
+            <a:avLst/>
+          </a:prstGeom>
+          <a:noFill/>
+          <a:ln/>
+        </p:spPr>
+        <p:txBody>
+          <a:bodyPr wrap="square" lIns="0" tIns="0" rIns="0" bIns="132588" rtlCol="0" anchor="t"/>
+          <a:lstStyle/>
+          <a:p>
+            <a:pPr algn="l" indent="0" marL="0">
+              <a:lnSpc>
+                <a:spcPct val="125000"/>
+              </a:lnSpc>
+              <a:buNone/>
+            </a:pPr>
+            <a:r>
+              <a:rPr lang="en-US" sz="3480" b="1" dirty="0">
+                <a:solidFill>
+                  <a:srgbClr val="224466"/>
+                </a:solidFill>
+                <a:latin typeface="Segoe UI" pitchFamily="34" charset="0"/>
+                <a:ea typeface="Segoe UI" pitchFamily="34" charset="-122"/>
+                <a:cs typeface="Segoe UI" pitchFamily="34" charset="-120"/>
+              </a:rPr>
+              <a:t>Slide 81: Table with colspan and rowspan</a:t>
+            </a:r>
+            <a:endParaRPr lang="en-US" sz="3480" dirty="0"/>
+          </a:p>
+        </p:txBody>
+      </p:sp>
+      <p:graphicFrame>
+        <p:nvGraphicFramePr>
+          <p:cNvPr id="82" name="Table 0"/>
+          <p:cNvGraphicFramePr>
+            <a:graphicFrameLocks noGrp="1"/>
+          </p:cNvGraphicFramePr>
+          <p:nvPr>
+            <p:extLst>
+              <p:ext uri="{D42A27DB-BD31-4B8C-83A1-F6EECF244321}">
+                <p14:modId xmlns:p14="http://schemas.microsoft.com/office/powerpoint/2010/main" val="1579011935"/>
+              </p:ext>
+            </p:extLst>
+          </p:nvPr>
+        </p:nvGraphicFramePr>
+        <p:xfrm>
+          <a:off x="747713" y="2621310"/>
+          <a:ext cx="4851053" cy="914400"/>
+        </p:xfrm>
+        <a:graphic>
+          <a:graphicData uri="http://schemas.openxmlformats.org/drawingml/2006/table">
+            <a:tbl>
+              <a:tblPr/>
+              <a:tblGrid>
+                <a:gridCol w="1870234"/>
+                <a:gridCol w="1870234"/>
+                <a:gridCol w="1340168"/>
+              </a:tblGrid>
+              <a:tr h="0">
+                <a:tc gridSpan="2">
+                  <a:txBody>
+                    <a:bodyPr/>
+                    <a:lstStyle/>
+                    <a:p>
+                      <a:pPr algn="ctr" indent="0" marL="0">
+                        <a:buNone/>
+                      </a:pPr>
+                      <a:r>
+                        <a:rPr lang="en-US" sz="2175" b="1" dirty="0">
+                          <a:solidFill>
+                            <a:srgbClr val="1F2328"/>
+                          </a:solidFill>
+                          <a:latin typeface="Segoe UI" pitchFamily="34" charset="0"/>
+                          <a:ea typeface="Segoe UI" pitchFamily="34" charset="-122"/>
+                          <a:cs typeface="Segoe UI" pitchFamily="34" charset="-120"/>
+                        </a:rPr>
+                        <a:t>Col-A / Col-B (merged)</a:t>
+                      </a:r>
+                      <a:endParaRPr lang="en-US" sz="1200" dirty="0"/>
+                    </a:p>
+                  </a:txBody>
+                  <a:tcPr marL="123825" marR="123825" marT="57150" marB="57150">
+                    <a:lnL w="12700" cap="flat" cmpd="sng" algn="ctr">
+                      <a:solidFill>
+                        <a:srgbClr val="D1D9E0"/>
+                      </a:solidFill>
+                      <a:prstDash val="solid"/>
+                      <a:round/>
+                      <a:headEnd type="none" w="med" len="med"/>
+                      <a:tailEnd type="none" w="med" len="med"/>
+                    </a:lnL>
+                    <a:lnR w="12700" cap="flat" cmpd="sng" algn="ctr">
+                      <a:solidFill>
+                        <a:srgbClr val="D1D9E0"/>
+                      </a:solidFill>
+                      <a:prstDash val="solid"/>
+                      <a:round/>
+                      <a:headEnd type="none" w="med" len="med"/>
+                      <a:tailEnd type="none" w="med" len="med"/>
+                    </a:lnR>
+                    <a:lnT w="12700" cap="flat" cmpd="sng" algn="ctr">
+                      <a:solidFill>
+                        <a:srgbClr val="D1D9E0"/>
+                      </a:solidFill>
+                      <a:prstDash val="solid"/>
+                      <a:round/>
+                      <a:headEnd type="none" w="med" len="med"/>
+                      <a:tailEnd type="none" w="med" len="med"/>
+                    </a:lnT>
+                    <a:lnB w="12700" cap="flat" cmpd="sng" algn="ctr">
+                      <a:solidFill>
+                        <a:srgbClr val="D1D9E0"/>
+                      </a:solidFill>
+                      <a:prstDash val="solid"/>
+                      <a:round/>
+                      <a:headEnd type="none" w="med" len="med"/>
+                      <a:tailEnd type="none" w="med" len="med"/>
+                    </a:lnB>
+                    <a:solidFill>
+                      <a:srgbClr val="FFFFFF"/>
+                    </a:solidFill>
+                  </a:tcPr>
+                </a:tc>
+                <a:tc hMerge="1">
+                  <a:tcPr/>
+                </a:tc>
+                <a:tc>
+                  <a:txBody>
+                    <a:bodyPr/>
+                    <a:lstStyle/>
+                    <a:p>
+                      <a:pPr algn="ctr" indent="0" marL="0">
+                        <a:buNone/>
+                      </a:pPr>
+                      <a:r>
+                        <a:rPr lang="en-US" sz="2175" b="1" dirty="0">
+                          <a:solidFill>
+                            <a:srgbClr val="1F2328"/>
+                          </a:solidFill>
+                          <a:latin typeface="Segoe UI" pitchFamily="34" charset="0"/>
+                          <a:ea typeface="Segoe UI" pitchFamily="34" charset="-122"/>
+                          <a:cs typeface="Segoe UI" pitchFamily="34" charset="-120"/>
+                        </a:rPr>
+                        <a:t>Col-C</a:t>
+                      </a:r>
+                      <a:endParaRPr lang="en-US" sz="1200" dirty="0"/>
+                    </a:p>
+                  </a:txBody>
+                  <a:tcPr marL="123825" marR="123825" marT="57150" marB="57150">
+                    <a:lnL w="12700" cap="flat" cmpd="sng" algn="ctr">
+                      <a:solidFill>
+                        <a:srgbClr val="D1D9E0"/>
+                      </a:solidFill>
+                      <a:prstDash val="solid"/>
+                      <a:round/>
+                      <a:headEnd type="none" w="med" len="med"/>
+                      <a:tailEnd type="none" w="med" len="med"/>
+                    </a:lnL>
+                    <a:lnR w="12700" cap="flat" cmpd="sng" algn="ctr">
+                      <a:solidFill>
+                        <a:srgbClr val="D1D9E0"/>
+                      </a:solidFill>
+                      <a:prstDash val="solid"/>
+                      <a:round/>
+                      <a:headEnd type="none" w="med" len="med"/>
+                      <a:tailEnd type="none" w="med" len="med"/>
+                    </a:lnR>
+                    <a:lnT w="12700" cap="flat" cmpd="sng" algn="ctr">
+                      <a:solidFill>
+                        <a:srgbClr val="D1D9E0"/>
+                      </a:solidFill>
+                      <a:prstDash val="solid"/>
+                      <a:round/>
+                      <a:headEnd type="none" w="med" len="med"/>
+                      <a:tailEnd type="none" w="med" len="med"/>
+                    </a:lnT>
+                    <a:lnB w="12700" cap="flat" cmpd="sng" algn="ctr">
+                      <a:solidFill>
+                        <a:srgbClr val="D1D9E0"/>
+                      </a:solidFill>
+                      <a:prstDash val="solid"/>
+                      <a:round/>
+                      <a:headEnd type="none" w="med" len="med"/>
+                      <a:tailEnd type="none" w="med" len="med"/>
+                    </a:lnB>
+                    <a:solidFill>
+                      <a:srgbClr val="FFFFFF"/>
+                    </a:solidFill>
+                  </a:tcPr>
+                </a:tc>
+              </a:tr>
+              <a:tr h="0">
+                <a:tc rowSpan="2">
+                  <a:txBody>
+                    <a:bodyPr/>
+                    <a:lstStyle/>
+                    <a:p>
+                      <a:pPr indent="0" marL="0">
+                        <a:buNone/>
+                      </a:pPr>
+                      <a:r>
+                        <a:rPr lang="en-US" sz="2175" dirty="0">
+                          <a:solidFill>
+                            <a:srgbClr val="1F2328"/>
+                          </a:solidFill>
+                          <a:latin typeface="Segoe UI" pitchFamily="34" charset="0"/>
+                          <a:ea typeface="Segoe UI" pitchFamily="34" charset="-122"/>
+                          <a:cs typeface="Segoe UI" pitchFamily="34" charset="-120"/>
+                        </a:rPr>
+                        <a:t>Row-1</a:t>
+                      </a:r>
+                      <a:endParaRPr lang="en-US" sz="1200" dirty="0"/>
+                    </a:p>
+                    <a:p>
+                      <a:pPr indent="0" marL="0">
+                        <a:buNone/>
+                      </a:pPr>
+                      <a:r>
+                        <a:rPr lang="en-US" sz="2175" dirty="0">
+                          <a:solidFill>
+                            <a:srgbClr val="1F2328"/>
+                          </a:solidFill>
+                          <a:latin typeface="Segoe UI" pitchFamily="34" charset="0"/>
+                          <a:ea typeface="Segoe UI" pitchFamily="34" charset="-122"/>
+                          <a:cs typeface="Segoe UI" pitchFamily="34" charset="-120"/>
+                        </a:rPr>
+                        <a:t>Row-2</a:t>
+                      </a:r>
+                      <a:endParaRPr lang="en-US" sz="1200" dirty="0"/>
+                    </a:p>
+                    <a:p>
+                      <a:pPr indent="0" marL="0">
+                        <a:buNone/>
+                      </a:pPr>
+                      <a:r>
+                        <a:rPr lang="en-US" sz="2175" dirty="0">
+                          <a:solidFill>
+                            <a:srgbClr val="1F2328"/>
+                          </a:solidFill>
+                          <a:latin typeface="Segoe UI" pitchFamily="34" charset="0"/>
+                          <a:ea typeface="Segoe UI" pitchFamily="34" charset="-122"/>
+                          <a:cs typeface="Segoe UI" pitchFamily="34" charset="-120"/>
+                        </a:rPr>
+                        <a:t>(merged)</a:t>
+                      </a:r>
+                      <a:endParaRPr lang="en-US" sz="1200" dirty="0"/>
+                    </a:p>
+                  </a:txBody>
+                  <a:tcPr marL="123825" marR="123825" marT="57150" marB="57150">
+                    <a:lnL w="12700" cap="flat" cmpd="sng" algn="ctr">
+                      <a:solidFill>
+                        <a:srgbClr val="D1D9E0"/>
+                      </a:solidFill>
+                      <a:prstDash val="solid"/>
+                      <a:round/>
+                      <a:headEnd type="none" w="med" len="med"/>
+                      <a:tailEnd type="none" w="med" len="med"/>
+                    </a:lnL>
+                    <a:lnR w="12700" cap="flat" cmpd="sng" algn="ctr">
+                      <a:solidFill>
+                        <a:srgbClr val="D1D9E0"/>
+                      </a:solidFill>
+                      <a:prstDash val="solid"/>
+                      <a:round/>
+                      <a:headEnd type="none" w="med" len="med"/>
+                      <a:tailEnd type="none" w="med" len="med"/>
+                    </a:lnR>
+                    <a:lnT w="12700" cap="flat" cmpd="sng" algn="ctr">
+                      <a:solidFill>
+                        <a:srgbClr val="D1D9E0"/>
+                      </a:solidFill>
+                      <a:prstDash val="solid"/>
+                      <a:round/>
+                      <a:headEnd type="none" w="med" len="med"/>
+                      <a:tailEnd type="none" w="med" len="med"/>
+                    </a:lnT>
+                    <a:lnB w="12700" cap="flat" cmpd="sng" algn="ctr">
+                      <a:solidFill>
+                        <a:srgbClr val="D1D9E0"/>
+                      </a:solidFill>
+                      <a:prstDash val="solid"/>
+                      <a:round/>
+                      <a:headEnd type="none" w="med" len="med"/>
+                      <a:tailEnd type="none" w="med" len="med"/>
+                    </a:lnB>
+                    <a:solidFill>
+                      <a:srgbClr val="FFFFFF"/>
+                    </a:solidFill>
+                  </a:tcPr>
+                </a:tc>
+                <a:tc>
+                  <a:txBody>
+                    <a:bodyPr/>
+                    <a:lstStyle/>
+                    <a:p>
+                      <a:pPr indent="0" marL="0">
+                        <a:buNone/>
+                      </a:pPr>
+                      <a:r>
+                        <a:rPr lang="en-US" sz="2175" dirty="0">
+                          <a:solidFill>
+                            <a:srgbClr val="1F2328"/>
+                          </a:solidFill>
+                          <a:latin typeface="Segoe UI" pitchFamily="34" charset="0"/>
+                          <a:ea typeface="Segoe UI" pitchFamily="34" charset="-122"/>
+                          <a:cs typeface="Segoe UI" pitchFamily="34" charset="-120"/>
+                        </a:rPr>
+                        <a:t>val-1</a:t>
+                      </a:r>
+                      <a:endParaRPr lang="en-US" sz="1200" dirty="0"/>
+                    </a:p>
+                  </a:txBody>
+                  <a:tcPr marL="123825" marR="123825" marT="57150" marB="57150">
+                    <a:lnL w="12700" cap="flat" cmpd="sng" algn="ctr">
+                      <a:solidFill>
+                        <a:srgbClr val="D1D9E0"/>
+                      </a:solidFill>
+                      <a:prstDash val="solid"/>
+                      <a:round/>
+                      <a:headEnd type="none" w="med" len="med"/>
+                      <a:tailEnd type="none" w="med" len="med"/>
+                    </a:lnL>
+                    <a:lnR w="12700" cap="flat" cmpd="sng" algn="ctr">
+                      <a:solidFill>
+                        <a:srgbClr val="D1D9E0"/>
+                      </a:solidFill>
+                      <a:prstDash val="solid"/>
+                      <a:round/>
+                      <a:headEnd type="none" w="med" len="med"/>
+                      <a:tailEnd type="none" w="med" len="med"/>
+                    </a:lnR>
+                    <a:lnT w="12700" cap="flat" cmpd="sng" algn="ctr">
+                      <a:solidFill>
+                        <a:srgbClr val="D1D9E0"/>
+                      </a:solidFill>
+                      <a:prstDash val="solid"/>
+                      <a:round/>
+                      <a:headEnd type="none" w="med" len="med"/>
+                      <a:tailEnd type="none" w="med" len="med"/>
+                    </a:lnT>
+                    <a:lnB w="12700" cap="flat" cmpd="sng" algn="ctr">
+                      <a:solidFill>
+                        <a:srgbClr val="D1D9E0"/>
+                      </a:solidFill>
+                      <a:prstDash val="solid"/>
+                      <a:round/>
+                      <a:headEnd type="none" w="med" len="med"/>
+                      <a:tailEnd type="none" w="med" len="med"/>
+                    </a:lnB>
+                    <a:solidFill>
+                      <a:srgbClr val="FFFFFF"/>
+                    </a:solidFill>
+                  </a:tcPr>
+                </a:tc>
+                <a:tc>
+                  <a:txBody>
+                    <a:bodyPr/>
+                    <a:lstStyle/>
+                    <a:p>
+                      <a:pPr indent="0" marL="0">
+                        <a:buNone/>
+                      </a:pPr>
+                      <a:r>
+                        <a:rPr lang="en-US" sz="2175" dirty="0">
+                          <a:solidFill>
+                            <a:srgbClr val="1F2328"/>
+                          </a:solidFill>
+                          <a:latin typeface="Segoe UI" pitchFamily="34" charset="0"/>
+                          <a:ea typeface="Segoe UI" pitchFamily="34" charset="-122"/>
+                          <a:cs typeface="Segoe UI" pitchFamily="34" charset="-120"/>
+                        </a:rPr>
+                        <a:t>val-2</a:t>
+                      </a:r>
+                      <a:endParaRPr lang="en-US" sz="1200" dirty="0"/>
+                    </a:p>
+                  </a:txBody>
+                  <a:tcPr marL="123825" marR="123825" marT="57150" marB="57150">
+                    <a:lnL w="12700" cap="flat" cmpd="sng" algn="ctr">
+                      <a:solidFill>
+                        <a:srgbClr val="D1D9E0"/>
+                      </a:solidFill>
+                      <a:prstDash val="solid"/>
+                      <a:round/>
+                      <a:headEnd type="none" w="med" len="med"/>
+                      <a:tailEnd type="none" w="med" len="med"/>
+                    </a:lnL>
+                    <a:lnR w="12700" cap="flat" cmpd="sng" algn="ctr">
+                      <a:solidFill>
+                        <a:srgbClr val="D1D9E0"/>
+                      </a:solidFill>
+                      <a:prstDash val="solid"/>
+                      <a:round/>
+                      <a:headEnd type="none" w="med" len="med"/>
+                      <a:tailEnd type="none" w="med" len="med"/>
+                    </a:lnR>
+                    <a:lnT w="12700" cap="flat" cmpd="sng" algn="ctr">
+                      <a:solidFill>
+                        <a:srgbClr val="D1D9E0"/>
+                      </a:solidFill>
+                      <a:prstDash val="solid"/>
+                      <a:round/>
+                      <a:headEnd type="none" w="med" len="med"/>
+                      <a:tailEnd type="none" w="med" len="med"/>
+                    </a:lnT>
+                    <a:lnB w="12700" cap="flat" cmpd="sng" algn="ctr">
+                      <a:solidFill>
+                        <a:srgbClr val="D1D9E0"/>
+                      </a:solidFill>
+                      <a:prstDash val="solid"/>
+                      <a:round/>
+                      <a:headEnd type="none" w="med" len="med"/>
+                      <a:tailEnd type="none" w="med" len="med"/>
+                    </a:lnB>
+                    <a:solidFill>
+                      <a:srgbClr val="FFFFFF"/>
+                    </a:solidFill>
+                  </a:tcPr>
+                </a:tc>
+              </a:tr>
+              <a:tr h="0">
+                <a:tc vMerge="1">
+                  <a:tcPr/>
+                </a:tc>
+                <a:tc>
+                  <a:txBody>
+                    <a:bodyPr/>
+                    <a:lstStyle/>
+                    <a:p>
+                      <a:pPr indent="0" marL="0">
+                        <a:buNone/>
+                      </a:pPr>
+                      <a:r>
+                        <a:rPr lang="en-US" sz="2175" dirty="0">
+                          <a:solidFill>
+                            <a:srgbClr val="1F2328"/>
+                          </a:solidFill>
+                          <a:latin typeface="Segoe UI" pitchFamily="34" charset="0"/>
+                          <a:ea typeface="Segoe UI" pitchFamily="34" charset="-122"/>
+                          <a:cs typeface="Segoe UI" pitchFamily="34" charset="-120"/>
+                        </a:rPr>
+                        <a:t>val-3</a:t>
+                      </a:r>
+                      <a:endParaRPr lang="en-US" sz="1200" dirty="0"/>
+                    </a:p>
+                  </a:txBody>
+                  <a:tcPr marL="123825" marR="123825" marT="57150" marB="57150">
+                    <a:lnL w="12700" cap="flat" cmpd="sng" algn="ctr">
+                      <a:solidFill>
+                        <a:srgbClr val="D1D9E0"/>
+                      </a:solidFill>
+                      <a:prstDash val="solid"/>
+                      <a:round/>
+                      <a:headEnd type="none" w="med" len="med"/>
+                      <a:tailEnd type="none" w="med" len="med"/>
+                    </a:lnL>
+                    <a:lnR w="12700" cap="flat" cmpd="sng" algn="ctr">
+                      <a:solidFill>
+                        <a:srgbClr val="D1D9E0"/>
+                      </a:solidFill>
+                      <a:prstDash val="solid"/>
+                      <a:round/>
+                      <a:headEnd type="none" w="med" len="med"/>
+                      <a:tailEnd type="none" w="med" len="med"/>
+                    </a:lnR>
+                    <a:lnT w="12700" cap="flat" cmpd="sng" algn="ctr">
+                      <a:solidFill>
+                        <a:srgbClr val="D1D9E0"/>
+                      </a:solidFill>
+                      <a:prstDash val="solid"/>
+                      <a:round/>
+                      <a:headEnd type="none" w="med" len="med"/>
+                      <a:tailEnd type="none" w="med" len="med"/>
+                    </a:lnT>
+                    <a:lnB w="12700" cap="flat" cmpd="sng" algn="ctr">
+                      <a:solidFill>
+                        <a:srgbClr val="D1D9E0"/>
+                      </a:solidFill>
+                      <a:prstDash val="solid"/>
+                      <a:round/>
+                      <a:headEnd type="none" w="med" len="med"/>
+                      <a:tailEnd type="none" w="med" len="med"/>
+                    </a:lnB>
+                    <a:solidFill>
+                      <a:srgbClr val="F6F8FA"/>
+                    </a:solidFill>
+                  </a:tcPr>
+                </a:tc>
+                <a:tc>
+                  <a:txBody>
+                    <a:bodyPr/>
+                    <a:lstStyle/>
+                    <a:p>
+                      <a:pPr indent="0" marL="0">
+                        <a:buNone/>
+                      </a:pPr>
+                      <a:r>
+                        <a:rPr lang="en-US" sz="2175" dirty="0">
+                          <a:solidFill>
+                            <a:srgbClr val="1F2328"/>
+                          </a:solidFill>
+                          <a:latin typeface="Segoe UI" pitchFamily="34" charset="0"/>
+                          <a:ea typeface="Segoe UI" pitchFamily="34" charset="-122"/>
+                          <a:cs typeface="Segoe UI" pitchFamily="34" charset="-120"/>
+                        </a:rPr>
+                        <a:t>val-4</a:t>
+                      </a:r>
+                      <a:endParaRPr lang="en-US" sz="1200" dirty="0"/>
+                    </a:p>
+                  </a:txBody>
+                  <a:tcPr marL="123825" marR="123825" marT="57150" marB="57150">
+                    <a:lnL w="12700" cap="flat" cmpd="sng" algn="ctr">
+                      <a:solidFill>
+                        <a:srgbClr val="D1D9E0"/>
+                      </a:solidFill>
+                      <a:prstDash val="solid"/>
+                      <a:round/>
+                      <a:headEnd type="none" w="med" len="med"/>
+                      <a:tailEnd type="none" w="med" len="med"/>
+                    </a:lnL>
+                    <a:lnR w="12700" cap="flat" cmpd="sng" algn="ctr">
+                      <a:solidFill>
+                        <a:srgbClr val="D1D9E0"/>
+                      </a:solidFill>
+                      <a:prstDash val="solid"/>
+                      <a:round/>
+                      <a:headEnd type="none" w="med" len="med"/>
+                      <a:tailEnd type="none" w="med" len="med"/>
+                    </a:lnR>
+                    <a:lnT w="12700" cap="flat" cmpd="sng" algn="ctr">
+                      <a:solidFill>
+                        <a:srgbClr val="D1D9E0"/>
+                      </a:solidFill>
+                      <a:prstDash val="solid"/>
+                      <a:round/>
+                      <a:headEnd type="none" w="med" len="med"/>
+                      <a:tailEnd type="none" w="med" len="med"/>
+                    </a:lnT>
+                    <a:lnB w="12700" cap="flat" cmpd="sng" algn="ctr">
+                      <a:solidFill>
+                        <a:srgbClr val="D1D9E0"/>
+                      </a:solidFill>
+                      <a:prstDash val="solid"/>
+                      <a:round/>
+                      <a:headEnd type="none" w="med" len="med"/>
+                      <a:tailEnd type="none" w="med" len="med"/>
+                    </a:lnB>
+                    <a:solidFill>
+                      <a:srgbClr val="F6F8FA"/>
+                    </a:solidFill>
+                  </a:tcPr>
+                </a:tc>
+              </a:tr>
+              <a:tr h="0">
+                <a:tc>
+                  <a:txBody>
+                    <a:bodyPr/>
+                    <a:lstStyle/>
+                    <a:p>
+                      <a:pPr indent="0" marL="0">
+                        <a:buNone/>
+                      </a:pPr>
+                      <a:r>
+                        <a:rPr lang="en-US" sz="2175" dirty="0">
+                          <a:solidFill>
+                            <a:srgbClr val="1F2328"/>
+                          </a:solidFill>
+                          <a:latin typeface="Segoe UI" pitchFamily="34" charset="0"/>
+                          <a:ea typeface="Segoe UI" pitchFamily="34" charset="-122"/>
+                          <a:cs typeface="Segoe UI" pitchFamily="34" charset="-120"/>
+                        </a:rPr>
+                        <a:t>Row-3</a:t>
+                      </a:r>
+                      <a:endParaRPr lang="en-US" sz="1200" dirty="0"/>
+                    </a:p>
+                  </a:txBody>
+                  <a:tcPr marL="123825" marR="123825" marT="57150" marB="57150">
+                    <a:lnL w="12700" cap="flat" cmpd="sng" algn="ctr">
+                      <a:solidFill>
+                        <a:srgbClr val="D1D9E0"/>
+                      </a:solidFill>
+                      <a:prstDash val="solid"/>
+                      <a:round/>
+                      <a:headEnd type="none" w="med" len="med"/>
+                      <a:tailEnd type="none" w="med" len="med"/>
+                    </a:lnL>
+                    <a:lnR w="12700" cap="flat" cmpd="sng" algn="ctr">
+                      <a:solidFill>
+                        <a:srgbClr val="D1D9E0"/>
+                      </a:solidFill>
+                      <a:prstDash val="solid"/>
+                      <a:round/>
+                      <a:headEnd type="none" w="med" len="med"/>
+                      <a:tailEnd type="none" w="med" len="med"/>
+                    </a:lnR>
+                    <a:lnT w="12700" cap="flat" cmpd="sng" algn="ctr">
+                      <a:solidFill>
+                        <a:srgbClr val="D1D9E0"/>
+                      </a:solidFill>
+                      <a:prstDash val="solid"/>
+                      <a:round/>
+                      <a:headEnd type="none" w="med" len="med"/>
+                      <a:tailEnd type="none" w="med" len="med"/>
+                    </a:lnT>
+                    <a:lnB w="12700" cap="flat" cmpd="sng" algn="ctr">
+                      <a:solidFill>
+                        <a:srgbClr val="D1D9E0"/>
+                      </a:solidFill>
+                      <a:prstDash val="solid"/>
+                      <a:round/>
+                      <a:headEnd type="none" w="med" len="med"/>
+                      <a:tailEnd type="none" w="med" len="med"/>
+                    </a:lnB>
+                    <a:solidFill>
+                      <a:srgbClr val="FFFFFF"/>
+                    </a:solidFill>
+                  </a:tcPr>
+                </a:tc>
+                <a:tc gridSpan="2">
+                  <a:txBody>
+                    <a:bodyPr/>
+                    <a:lstStyle/>
+                    <a:p>
+                      <a:pPr indent="0" marL="0">
+                        <a:buNone/>
+                      </a:pPr>
+                      <a:r>
+                        <a:rPr lang="en-US" sz="2175" dirty="0">
+                          <a:solidFill>
+                            <a:srgbClr val="1F2328"/>
+                          </a:solidFill>
+                          <a:latin typeface="Segoe UI" pitchFamily="34" charset="0"/>
+                          <a:ea typeface="Segoe UI" pitchFamily="34" charset="-122"/>
+                          <a:cs typeface="Segoe UI" pitchFamily="34" charset="-120"/>
+                        </a:rPr>
+                        <a:t>val-5 / val-6 (merged)</a:t>
+                      </a:r>
+                      <a:endParaRPr lang="en-US" sz="1200" dirty="0"/>
+                    </a:p>
+                  </a:txBody>
+                  <a:tcPr marL="123825" marR="123825" marT="57150" marB="57150">
+                    <a:lnL w="12700" cap="flat" cmpd="sng" algn="ctr">
+                      <a:solidFill>
+                        <a:srgbClr val="D1D9E0"/>
+                      </a:solidFill>
+                      <a:prstDash val="solid"/>
+                      <a:round/>
+                      <a:headEnd type="none" w="med" len="med"/>
+                      <a:tailEnd type="none" w="med" len="med"/>
+                    </a:lnL>
+                    <a:lnR w="12700" cap="flat" cmpd="sng" algn="ctr">
+                      <a:solidFill>
+                        <a:srgbClr val="D1D9E0"/>
+                      </a:solidFill>
+                      <a:prstDash val="solid"/>
+                      <a:round/>
+                      <a:headEnd type="none" w="med" len="med"/>
+                      <a:tailEnd type="none" w="med" len="med"/>
+                    </a:lnR>
+                    <a:lnT w="12700" cap="flat" cmpd="sng" algn="ctr">
+                      <a:solidFill>
+                        <a:srgbClr val="D1D9E0"/>
+                      </a:solidFill>
+                      <a:prstDash val="solid"/>
+                      <a:round/>
+                      <a:headEnd type="none" w="med" len="med"/>
+                      <a:tailEnd type="none" w="med" len="med"/>
+                    </a:lnT>
+                    <a:lnB w="12700" cap="flat" cmpd="sng" algn="ctr">
+                      <a:solidFill>
+                        <a:srgbClr val="D1D9E0"/>
+                      </a:solidFill>
+                      <a:prstDash val="solid"/>
+                      <a:round/>
+                      <a:headEnd type="none" w="med" len="med"/>
+                      <a:tailEnd type="none" w="med" len="med"/>
+                    </a:lnB>
+                    <a:solidFill>
+                      <a:srgbClr val="FFFFFF"/>
+                    </a:solidFill>
+                  </a:tcPr>
+                </a:tc>
+                <a:tc hMerge="1">
+                  <a:tcPr/>
+                </a:tc>
+              </a:tr>
+            </a:tbl>
+          </a:graphicData>
+        </a:graphic>
+      </p:graphicFrame>
+      <p:sp>
+        <p:nvSpPr>
+          <p:cNvPr id="25" name="Slide Number Placeholder 0"/>
+          <p:cNvSpPr>
+            <a:spLocks noGrp="1"/>
+          </p:cNvSpPr>
+          <p:nvPr>
+            <p:ph type="sldNum" sz="quarter" idx="4294967295"/>
+          </p:nvPr>
+        </p:nvSpPr>
+        <p:spPr>
+          <a:xfrm>
+            <a:off x="0" y="6343650"/>
+            <a:ext cx="11811000" cy="228600"/>
+          </a:xfrm>
+          <a:prstGeom prst="rect">
+            <a:avLst/>
+          </a:prstGeom>
+          <a:extLst>
+            <a:ext uri="{C572A759-6A51-4108-AA02-DFA0A04FC94B}">
+              <ma14:wrappingTextBoxFlag xmlns:ma14="http://schemas.microsoft.com/office/mac/drawingml/2011/main" val="0"/>
+            </a:ext>
+          </a:extLst>
+        </p:spPr>
+        <p:txBody>
+          <a:bodyPr lIns="0" tIns="0" rIns="0" bIns="0"/>
+          <a:lstStyle>
+            <a:lvl1pPr>
+              <a:defRPr sz="1350">
+                <a:solidFill>
+                  <a:srgbClr val="777777"/>
+                </a:solidFill>
+              </a:defRPr>
+            </a:lvl1pPr>
+          </a:lstStyle>
+          <a:p>
+            <a:pPr algn="r"/>
+            <a:fld id="{F7021451-1387-4CA6-816F-3879F97B5CBC}" type="slidenum">
+              <a:rPr b="0" lang="en-US"/>
+              <a:t>81</a:t>
+            </a:fld>
+            <a:endParaRPr lang="en-US"/>
+          </a:p>
+        </p:txBody>
+      </p:sp>
+    </p:spTree>
+  </p:cSld>
+  <p:clrMapOvr>
+    <a:masterClrMapping/>
+  </p:clrMapOvr>
+</p:sld>
+</file>
+
+<file path=ppt/slides/slide82.xml><?xml version="1.0" encoding="utf-8"?>
+<p:sld xmlns:a="http://schemas.openxmlformats.org/drawingml/2006/main" xmlns:r="http://schemas.openxmlformats.org/officeDocument/2006/relationships" xmlns:p="http://schemas.openxmlformats.org/presentationml/2006/main">
+  <p:cSld name="Slide 82">
+    <p:bg>
+      <p:bgPr>
+        <a:solidFill>
+          <a:srgbClr val="FFFFFF"/>
+        </a:solidFill>
+      </p:bgPr>
+    </p:bg>
+    <p:spTree>
+      <p:nvGrpSpPr>
+        <p:cNvPr id="1" name=""/>
+        <p:cNvGrpSpPr/>
+        <p:nvPr/>
+      </p:nvGrpSpPr>
+      <p:grpSpPr>
+        <a:xfrm>
+          <a:off x="0" y="0"/>
+          <a:ext cx="0" cy="0"/>
+          <a:chOff x="0" y="0"/>
+          <a:chExt cx="0" cy="0"/>
+        </a:xfrm>
+      </p:grpSpPr>
+      <p:sp>
+        <p:nvSpPr>
+          <p:cNvPr id="2" name="Text 0"/>
+          <p:cNvSpPr/>
+          <p:nvPr/>
+        </p:nvSpPr>
+        <p:spPr>
+          <a:xfrm>
+            <a:off x="747713" y="1227981"/>
+            <a:ext cx="11291888" cy="684907"/>
+          </a:xfrm>
+          <a:prstGeom prst="rect">
+            <a:avLst/>
+          </a:prstGeom>
+          <a:noFill/>
+          <a:ln/>
+        </p:spPr>
+        <p:txBody>
+          <a:bodyPr wrap="square" lIns="0" tIns="0" rIns="0" bIns="132588" rtlCol="0" anchor="t"/>
+          <a:lstStyle/>
+          <a:p>
+            <a:pPr algn="l" indent="0" marL="0">
+              <a:lnSpc>
+                <a:spcPct val="125000"/>
+              </a:lnSpc>
+              <a:buNone/>
+            </a:pPr>
+            <a:r>
+              <a:rPr lang="en-US" sz="3480" b="1" dirty="0">
+                <a:solidFill>
+                  <a:srgbClr val="224466"/>
+                </a:solidFill>
+                <a:latin typeface="Segoe UI" pitchFamily="34" charset="0"/>
+                <a:ea typeface="Segoe UI" pitchFamily="34" charset="-122"/>
+                <a:cs typeface="Segoe UI" pitchFamily="34" charset="-120"/>
+              </a:rPr>
+              <a:t>Slide 82: Ordered list with start number</a:t>
+            </a:r>
+            <a:endParaRPr lang="en-US" sz="3480" dirty="0"/>
+          </a:p>
+        </p:txBody>
+      </p:sp>
+      <p:sp>
+        <p:nvSpPr>
+          <p:cNvPr id="3" name="Text 1"/>
+          <p:cNvSpPr/>
+          <p:nvPr/>
+        </p:nvSpPr>
+        <p:spPr>
+          <a:xfrm>
+            <a:off x="747713" y="2065288"/>
+            <a:ext cx="10696575" cy="3564731"/>
+          </a:xfrm>
+          <a:prstGeom prst="rect">
+            <a:avLst/>
+          </a:prstGeom>
+          <a:noFill/>
+          <a:ln/>
+        </p:spPr>
+        <p:txBody>
+          <a:bodyPr wrap="square" lIns="0" tIns="0" rIns="0" bIns="0" rtlCol="0" anchor="t"/>
+          <a:lstStyle/>
+          <a:p>
+            <a:pPr algn="l" indent="0" marL="0">
+              <a:lnSpc>
+                <a:spcPct val="150000"/>
+              </a:lnSpc>
+              <a:buNone/>
+            </a:pPr>
+            <a:r>
+              <a:rPr lang="en-US" sz="2175" dirty="0">
+                <a:solidFill>
+                  <a:srgbClr val="1F2328"/>
+                </a:solidFill>
+                <a:latin typeface="Segoe UI" pitchFamily="34" charset="0"/>
+                <a:ea typeface="Segoe UI" pitchFamily="34" charset="-122"/>
+                <a:cs typeface="Segoe UI" pitchFamily="34" charset="-120"/>
+              </a:rPr>
+              <a:t>Alpha beta gamma:</a:t>
+            </a:r>
+            <a:pPr algn="l" indent="0" marL="0">
+              <a:lnSpc>
+                <a:spcPct val="150000"/>
+              </a:lnSpc>
+              <a:buNone/>
+            </a:pPr>
+            <a:endParaRPr lang="en-US" sz="2175" dirty="0"/>
+          </a:p>
+          <a:p>
+            <a:pPr algn="l" marL="342900" indent="-342900">
+              <a:lnSpc>
+                <a:spcPct val="150000"/>
+              </a:lnSpc>
+              <a:buSzPct val="100000"/>
+              <a:buFont typeface="+mj-lt"/>
+              <a:buAutoNum type="arabicPeriod" startAt="5"/>
+            </a:pPr>
+            <a:r>
+              <a:rPr lang="en-US" sz="2175" dirty="0">
+                <a:solidFill>
+                  <a:srgbClr val="1F2328"/>
+                </a:solidFill>
+                <a:latin typeface="Segoe UI" pitchFamily="34" charset="0"/>
+                <a:ea typeface="Segoe UI" pitchFamily="34" charset="-122"/>
+                <a:cs typeface="Segoe UI" pitchFamily="34" charset="-120"/>
+              </a:rPr>
+              <a:t>Item-5 alpha beta</a:t>
+            </a:r>
+            <a:endParaRPr lang="en-US" sz="2175" dirty="0"/>
+          </a:p>
+          <a:p>
+            <a:pPr algn="l" marL="342900" indent="-342900">
+              <a:lnSpc>
+                <a:spcPct val="150000"/>
+              </a:lnSpc>
+              <a:buSzPct val="100000"/>
+              <a:buFont typeface="+mj-lt"/>
+              <a:buAutoNum type="arabicPeriod" startAt="6"/>
+            </a:pPr>
+            <a:r>
+              <a:rPr lang="en-US" sz="2175" dirty="0">
+                <a:solidFill>
+                  <a:srgbClr val="1F2328"/>
+                </a:solidFill>
+                <a:latin typeface="Segoe UI" pitchFamily="34" charset="0"/>
+                <a:ea typeface="Segoe UI" pitchFamily="34" charset="-122"/>
+                <a:cs typeface="Segoe UI" pitchFamily="34" charset="-120"/>
+              </a:rPr>
+              <a:t>Item-6 gamma delta</a:t>
+            </a:r>
+            <a:endParaRPr lang="en-US" sz="2175" dirty="0"/>
+          </a:p>
+          <a:p>
+            <a:pPr algn="l" marL="342900" indent="-342900">
+              <a:lnSpc>
+                <a:spcPct val="150000"/>
+              </a:lnSpc>
+              <a:buSzPct val="100000"/>
+              <a:buFont typeface="+mj-lt"/>
+              <a:buAutoNum type="arabicPeriod" startAt="7"/>
+            </a:pPr>
+            <a:r>
+              <a:rPr lang="en-US" sz="2175" dirty="0">
+                <a:solidFill>
+                  <a:srgbClr val="1F2328"/>
+                </a:solidFill>
+                <a:latin typeface="Segoe UI" pitchFamily="34" charset="0"/>
+                <a:ea typeface="Segoe UI" pitchFamily="34" charset="-122"/>
+                <a:cs typeface="Segoe UI" pitchFamily="34" charset="-120"/>
+              </a:rPr>
+              <a:t>Item-7 epsilon zeta</a:t>
+            </a:r>
+            <a:pPr algn="l" indent="0" marL="0">
+              <a:lnSpc>
+                <a:spcPct val="150000"/>
+              </a:lnSpc>
+              <a:buNone/>
+            </a:pPr>
+            <a:endParaRPr lang="en-US" sz="2175" dirty="0"/>
+          </a:p>
+          <a:p>
+            <a:pPr algn="l" indent="0" marL="0">
+              <a:lnSpc>
+                <a:spcPct val="150000"/>
+              </a:lnSpc>
+              <a:buNone/>
+            </a:pPr>
+            <a:r>
+              <a:rPr lang="en-US" sz="2175" dirty="0">
+                <a:solidFill>
+                  <a:srgbClr val="1F2328"/>
+                </a:solidFill>
+                <a:latin typeface="Segoe UI" pitchFamily="34" charset="0"/>
+                <a:ea typeface="Segoe UI" pitchFamily="34" charset="-122"/>
+                <a:cs typeface="Segoe UI" pitchFamily="34" charset="-120"/>
+              </a:rPr>
+              <a:t>Delta epsilon:</a:t>
+            </a:r>
+            <a:pPr algn="l" indent="0" marL="0">
+              <a:lnSpc>
+                <a:spcPct val="150000"/>
+              </a:lnSpc>
+              <a:buNone/>
+            </a:pPr>
+            <a:endParaRPr lang="en-US" sz="2175" dirty="0"/>
+          </a:p>
+          <a:p>
+            <a:pPr algn="l" marL="342900" indent="-342900">
+              <a:lnSpc>
+                <a:spcPct val="150000"/>
+              </a:lnSpc>
+              <a:buSzPct val="100000"/>
+              <a:buFont typeface="+mj-lt"/>
+              <a:buAutoNum type="arabicPeriod" startAt="10"/>
+            </a:pPr>
+            <a:r>
+              <a:rPr lang="en-US" sz="2175" dirty="0">
+                <a:solidFill>
+                  <a:srgbClr val="1F2328"/>
+                </a:solidFill>
+                <a:latin typeface="Segoe UI" pitchFamily="34" charset="0"/>
+                <a:ea typeface="Segoe UI" pitchFamily="34" charset="-122"/>
+                <a:cs typeface="Segoe UI" pitchFamily="34" charset="-120"/>
+              </a:rPr>
+              <a:t>Item-10 eta theta</a:t>
+            </a:r>
+            <a:endParaRPr lang="en-US" sz="2175" dirty="0"/>
+          </a:p>
+          <a:p>
+            <a:pPr algn="l" marL="342900" indent="-342900">
+              <a:lnSpc>
+                <a:spcPct val="150000"/>
+              </a:lnSpc>
+              <a:buSzPct val="100000"/>
+              <a:buFont typeface="+mj-lt"/>
+              <a:buAutoNum type="arabicPeriod" startAt="11"/>
+            </a:pPr>
+            <a:r>
+              <a:rPr lang="en-US" sz="2175" dirty="0">
+                <a:solidFill>
+                  <a:srgbClr val="1F2328"/>
+                </a:solidFill>
+                <a:latin typeface="Segoe UI" pitchFamily="34" charset="0"/>
+                <a:ea typeface="Segoe UI" pitchFamily="34" charset="-122"/>
+                <a:cs typeface="Segoe UI" pitchFamily="34" charset="-120"/>
+              </a:rPr>
+              <a:t>Item-11 iota kappa</a:t>
+            </a:r>
+            <a:endParaRPr lang="en-US" sz="2175" dirty="0"/>
+          </a:p>
+        </p:txBody>
+      </p:sp>
+      <p:sp>
+        <p:nvSpPr>
+          <p:cNvPr id="25" name="Slide Number Placeholder 0"/>
+          <p:cNvSpPr>
+            <a:spLocks noGrp="1"/>
+          </p:cNvSpPr>
+          <p:nvPr>
+            <p:ph type="sldNum" sz="quarter" idx="4294967295"/>
+          </p:nvPr>
+        </p:nvSpPr>
+        <p:spPr>
+          <a:xfrm>
+            <a:off x="0" y="6343650"/>
+            <a:ext cx="11811000" cy="228600"/>
+          </a:xfrm>
+          <a:prstGeom prst="rect">
+            <a:avLst/>
+          </a:prstGeom>
+          <a:extLst>
+            <a:ext uri="{C572A759-6A51-4108-AA02-DFA0A04FC94B}">
+              <ma14:wrappingTextBoxFlag xmlns:ma14="http://schemas.microsoft.com/office/mac/drawingml/2011/main" val="0"/>
+            </a:ext>
+          </a:extLst>
+        </p:spPr>
+        <p:txBody>
+          <a:bodyPr lIns="0" tIns="0" rIns="0" bIns="0"/>
+          <a:lstStyle>
+            <a:lvl1pPr>
+              <a:defRPr sz="1350">
+                <a:solidFill>
+                  <a:srgbClr val="777777"/>
+                </a:solidFill>
+              </a:defRPr>
+            </a:lvl1pPr>
+          </a:lstStyle>
+          <a:p>
+            <a:pPr algn="r"/>
+            <a:fld id="{F7021451-1387-4CA6-816F-3879F97B5CBC}" type="slidenum">
+              <a:rPr b="0" lang="en-US"/>
+              <a:t>82</a:t>
+            </a:fld>
+            <a:endParaRPr lang="en-US"/>
+          </a:p>
+        </p:txBody>
+      </p:sp>
+    </p:spTree>
+  </p:cSld>
+  <p:clrMapOvr>
+    <a:masterClrMapping/>
+  </p:clrMapOvr>
+</p:sld>
+</file>
+
+<file path=ppt/slides/slide83.xml><?xml version="1.0" encoding="utf-8"?>
+<p:sld xmlns:a="http://schemas.openxmlformats.org/drawingml/2006/main" xmlns:r="http://schemas.openxmlformats.org/officeDocument/2006/relationships" xmlns:p="http://schemas.openxmlformats.org/presentationml/2006/main">
+  <p:cSld name="Slide 83">
+    <p:bg>
+      <p:bgPr>
+        <a:solidFill>
+          <a:srgbClr val="FFFFFF"/>
+        </a:solidFill>
+      </p:bgPr>
+    </p:bg>
+    <p:spTree>
+      <p:nvGrpSpPr>
+        <p:cNvPr id="1" name=""/>
+        <p:cNvGrpSpPr/>
+        <p:nvPr/>
+      </p:nvGrpSpPr>
+      <p:grpSpPr>
+        <a:xfrm>
+          <a:off x="0" y="0"/>
+          <a:ext cx="0" cy="0"/>
+          <a:chOff x="0" y="0"/>
+          <a:chExt cx="0" cy="0"/>
+        </a:xfrm>
+      </p:grpSpPr>
+      <p:sp>
+        <p:nvSpPr>
+          <p:cNvPr id="2" name="Text 0"/>
+          <p:cNvSpPr/>
+          <p:nvPr/>
+        </p:nvSpPr>
+        <p:spPr>
+          <a:xfrm>
+            <a:off x="747713" y="1422053"/>
+            <a:ext cx="11291888" cy="684907"/>
+          </a:xfrm>
+          <a:prstGeom prst="rect">
+            <a:avLst/>
+          </a:prstGeom>
+          <a:noFill/>
+          <a:ln/>
+        </p:spPr>
+        <p:txBody>
+          <a:bodyPr wrap="square" lIns="0" tIns="0" rIns="0" bIns="132588" rtlCol="0" anchor="t"/>
+          <a:lstStyle/>
+          <a:p>
+            <a:pPr algn="l" indent="0" marL="0">
+              <a:lnSpc>
+                <a:spcPct val="125000"/>
+              </a:lnSpc>
+              <a:buNone/>
+            </a:pPr>
+            <a:r>
+              <a:rPr lang="en-US" sz="3480" b="1" dirty="0">
+                <a:solidFill>
+                  <a:srgbClr val="224466"/>
+                </a:solidFill>
+                <a:latin typeface="Segoe UI" pitchFamily="34" charset="0"/>
+                <a:ea typeface="Segoe UI" pitchFamily="34" charset="-122"/>
+                <a:cs typeface="Segoe UI" pitchFamily="34" charset="-120"/>
+              </a:rPr>
+              <a:t>Slide 83: Nested unordered list inside ordered list</a:t>
+            </a:r>
+            <a:endParaRPr lang="en-US" sz="3480" dirty="0"/>
+          </a:p>
+        </p:txBody>
+      </p:sp>
+      <p:sp>
+        <p:nvSpPr>
+          <p:cNvPr id="3" name="Text 1"/>
+          <p:cNvSpPr/>
+          <p:nvPr/>
+        </p:nvSpPr>
+        <p:spPr>
+          <a:xfrm>
+            <a:off x="747713" y="2259360"/>
+            <a:ext cx="10696575" cy="3176588"/>
+          </a:xfrm>
+          <a:prstGeom prst="rect">
+            <a:avLst/>
+          </a:prstGeom>
+          <a:noFill/>
+          <a:ln/>
+        </p:spPr>
+        <p:txBody>
+          <a:bodyPr wrap="square" lIns="0" tIns="0" rIns="0" bIns="0" rtlCol="0" anchor="t"/>
+          <a:lstStyle/>
+          <a:p>
+            <a:pPr algn="l" marL="342900" indent="-342900">
+              <a:lnSpc>
+                <a:spcPct val="150000"/>
+              </a:lnSpc>
+              <a:buSzPct val="100000"/>
+              <a:buFont typeface="+mj-lt"/>
+              <a:buAutoNum type="arabicPeriod" startAt="1"/>
+            </a:pPr>
+            <a:r>
+              <a:rPr lang="en-US" sz="2175" dirty="0">
+                <a:solidFill>
+                  <a:srgbClr val="1F2328"/>
+                </a:solidFill>
+                <a:latin typeface="Segoe UI" pitchFamily="34" charset="0"/>
+                <a:ea typeface="Segoe UI" pitchFamily="34" charset="-122"/>
+                <a:cs typeface="Segoe UI" pitchFamily="34" charset="-120"/>
+              </a:rPr>
+              <a:t>First ordered item</a:t>
+            </a:r>
+            <a:endParaRPr lang="en-US" sz="2175" dirty="0"/>
+          </a:p>
+          <a:p>
+            <a:pPr algn="l" lvl="1" marL="685800" indent="-342900">
+              <a:lnSpc>
+                <a:spcPct val="150000"/>
+              </a:lnSpc>
+              <a:buSzPct val="100000"/>
+              <a:buChar char="○"/>
+            </a:pPr>
+            <a:r>
+              <a:rPr lang="en-US" sz="2175" dirty="0">
+                <a:solidFill>
+                  <a:srgbClr val="1F2328"/>
+                </a:solidFill>
+                <a:latin typeface="Segoe UI" pitchFamily="34" charset="0"/>
+                <a:ea typeface="Segoe UI" pitchFamily="34" charset="-122"/>
+                <a:cs typeface="Segoe UI" pitchFamily="34" charset="-120"/>
+              </a:rPr>
+              <a:t>Nested unordered alpha</a:t>
+            </a:r>
+            <a:endParaRPr lang="en-US" sz="2175" dirty="0"/>
+          </a:p>
+          <a:p>
+            <a:pPr algn="l" lvl="1" marL="685800" indent="-342900">
+              <a:lnSpc>
+                <a:spcPct val="150000"/>
+              </a:lnSpc>
+              <a:buSzPct val="100000"/>
+              <a:buChar char="○"/>
+            </a:pPr>
+            <a:r>
+              <a:rPr lang="en-US" sz="2175" dirty="0">
+                <a:solidFill>
+                  <a:srgbClr val="1F2328"/>
+                </a:solidFill>
+                <a:latin typeface="Segoe UI" pitchFamily="34" charset="0"/>
+                <a:ea typeface="Segoe UI" pitchFamily="34" charset="-122"/>
+                <a:cs typeface="Segoe UI" pitchFamily="34" charset="-120"/>
+              </a:rPr>
+              <a:t>Nested unordered beta</a:t>
+            </a:r>
+            <a:endParaRPr lang="en-US" sz="2175" dirty="0"/>
+          </a:p>
+          <a:p>
+            <a:pPr algn="l" marL="342900" indent="-342900">
+              <a:lnSpc>
+                <a:spcPct val="150000"/>
+              </a:lnSpc>
+              <a:buSzPct val="100000"/>
+              <a:buFont typeface="+mj-lt"/>
+              <a:buAutoNum type="arabicPeriod" startAt="1"/>
+            </a:pPr>
+            <a:r>
+              <a:rPr lang="en-US" sz="2175" dirty="0">
+                <a:solidFill>
+                  <a:srgbClr val="1F2328"/>
+                </a:solidFill>
+                <a:latin typeface="Segoe UI" pitchFamily="34" charset="0"/>
+                <a:ea typeface="Segoe UI" pitchFamily="34" charset="-122"/>
+                <a:cs typeface="Segoe UI" pitchFamily="34" charset="-120"/>
+              </a:rPr>
+              <a:t>Second ordered item</a:t>
+            </a:r>
+            <a:endParaRPr lang="en-US" sz="2175" dirty="0"/>
+          </a:p>
+          <a:p>
+            <a:pPr algn="l" lvl="1" marL="685800" indent="-342900">
+              <a:lnSpc>
+                <a:spcPct val="150000"/>
+              </a:lnSpc>
+              <a:buSzPct val="100000"/>
+              <a:buChar char="○"/>
+            </a:pPr>
+            <a:r>
+              <a:rPr lang="en-US" sz="2175" dirty="0">
+                <a:solidFill>
+                  <a:srgbClr val="1F2328"/>
+                </a:solidFill>
+                <a:latin typeface="Segoe UI" pitchFamily="34" charset="0"/>
+                <a:ea typeface="Segoe UI" pitchFamily="34" charset="-122"/>
+                <a:cs typeface="Segoe UI" pitchFamily="34" charset="-120"/>
+              </a:rPr>
+              <a:t>Nested unordered gamma</a:t>
+            </a:r>
+            <a:endParaRPr lang="en-US" sz="2175" dirty="0"/>
+          </a:p>
+          <a:p>
+            <a:pPr algn="l" lvl="1" marL="685800" indent="-342900">
+              <a:lnSpc>
+                <a:spcPct val="150000"/>
+              </a:lnSpc>
+              <a:buSzPct val="100000"/>
+              <a:buChar char="○"/>
+            </a:pPr>
+            <a:r>
+              <a:rPr lang="en-US" sz="2175" dirty="0">
+                <a:solidFill>
+                  <a:srgbClr val="1F2328"/>
+                </a:solidFill>
+                <a:latin typeface="Segoe UI" pitchFamily="34" charset="0"/>
+                <a:ea typeface="Segoe UI" pitchFamily="34" charset="-122"/>
+                <a:cs typeface="Segoe UI" pitchFamily="34" charset="-120"/>
+              </a:rPr>
+              <a:t>Nested unordered delta</a:t>
+            </a:r>
+            <a:endParaRPr lang="en-US" sz="2175" dirty="0"/>
+          </a:p>
+          <a:p>
+            <a:pPr algn="l" marL="342900" indent="-342900">
+              <a:lnSpc>
+                <a:spcPct val="150000"/>
+              </a:lnSpc>
+              <a:buSzPct val="100000"/>
+              <a:buFont typeface="+mj-lt"/>
+              <a:buAutoNum type="arabicPeriod" startAt="1"/>
+            </a:pPr>
+            <a:r>
+              <a:rPr lang="en-US" sz="2175" dirty="0">
+                <a:solidFill>
+                  <a:srgbClr val="1F2328"/>
+                </a:solidFill>
+                <a:latin typeface="Segoe UI" pitchFamily="34" charset="0"/>
+                <a:ea typeface="Segoe UI" pitchFamily="34" charset="-122"/>
+                <a:cs typeface="Segoe UI" pitchFamily="34" charset="-120"/>
+              </a:rPr>
+              <a:t>Third ordered item</a:t>
+            </a:r>
+            <a:endParaRPr lang="en-US" sz="2175" dirty="0"/>
+          </a:p>
+        </p:txBody>
+      </p:sp>
+      <p:sp>
+        <p:nvSpPr>
+          <p:cNvPr id="25" name="Slide Number Placeholder 0"/>
+          <p:cNvSpPr>
+            <a:spLocks noGrp="1"/>
+          </p:cNvSpPr>
+          <p:nvPr>
+            <p:ph type="sldNum" sz="quarter" idx="4294967295"/>
+          </p:nvPr>
+        </p:nvSpPr>
+        <p:spPr>
+          <a:xfrm>
+            <a:off x="0" y="6343650"/>
+            <a:ext cx="11811000" cy="228600"/>
+          </a:xfrm>
+          <a:prstGeom prst="rect">
+            <a:avLst/>
+          </a:prstGeom>
+          <a:extLst>
+            <a:ext uri="{C572A759-6A51-4108-AA02-DFA0A04FC94B}">
+              <ma14:wrappingTextBoxFlag xmlns:ma14="http://schemas.microsoft.com/office/mac/drawingml/2011/main" val="0"/>
+            </a:ext>
+          </a:extLst>
+        </p:spPr>
+        <p:txBody>
+          <a:bodyPr lIns="0" tIns="0" rIns="0" bIns="0"/>
+          <a:lstStyle>
+            <a:lvl1pPr>
+              <a:defRPr sz="1350">
+                <a:solidFill>
+                  <a:srgbClr val="777777"/>
+                </a:solidFill>
+              </a:defRPr>
+            </a:lvl1pPr>
+          </a:lstStyle>
+          <a:p>
+            <a:pPr algn="r"/>
+            <a:fld id="{F7021451-1387-4CA6-816F-3879F97B5CBC}" type="slidenum">
+              <a:rPr b="0" lang="en-US"/>
+              <a:t>83</a:t>
+            </a:fld>
+            <a:endParaRPr lang="en-US"/>
+          </a:p>
+        </p:txBody>
+      </p:sp>
+    </p:spTree>
+  </p:cSld>
+  <p:clrMapOvr>
+    <a:masterClrMapping/>
+  </p:clrMapOvr>
+</p:sld>
+</file>
+
+<file path=ppt/slides/slide84.xml><?xml version="1.0" encoding="utf-8"?>
+<p:sld xmlns:a="http://schemas.openxmlformats.org/drawingml/2006/main" xmlns:r="http://schemas.openxmlformats.org/officeDocument/2006/relationships" xmlns:p="http://schemas.openxmlformats.org/presentationml/2006/main">
+  <p:cSld name="Slide 84">
+    <p:bg>
+      <p:bgPr>
+        <a:solidFill>
+          <a:srgbClr val="FFFFFF"/>
+        </a:solidFill>
+      </p:bgPr>
+    </p:bg>
+    <p:spTree>
+      <p:nvGrpSpPr>
+        <p:cNvPr id="1" name=""/>
+        <p:cNvGrpSpPr/>
+        <p:nvPr/>
+      </p:nvGrpSpPr>
+      <p:grpSpPr>
+        <a:xfrm>
+          <a:off x="0" y="0"/>
+          <a:ext cx="0" cy="0"/>
+          <a:chOff x="0" y="0"/>
+          <a:chExt cx="0" cy="0"/>
+        </a:xfrm>
+      </p:grpSpPr>
+      <p:sp>
+        <p:nvSpPr>
+          <p:cNvPr id="2" name="Text 0"/>
+          <p:cNvSpPr/>
+          <p:nvPr/>
+        </p:nvSpPr>
+        <p:spPr>
+          <a:xfrm>
+            <a:off x="747713" y="1663750"/>
+            <a:ext cx="11291888" cy="684907"/>
+          </a:xfrm>
+          <a:prstGeom prst="rect">
+            <a:avLst/>
+          </a:prstGeom>
+          <a:noFill/>
+          <a:ln/>
+        </p:spPr>
+        <p:txBody>
+          <a:bodyPr wrap="square" lIns="0" tIns="0" rIns="0" bIns="132588" rtlCol="0" anchor="t"/>
+          <a:lstStyle/>
+          <a:p>
+            <a:pPr algn="l" indent="0" marL="0">
+              <a:lnSpc>
+                <a:spcPct val="125000"/>
+              </a:lnSpc>
+              <a:buNone/>
+            </a:pPr>
+            <a:r>
+              <a:rPr lang="en-US" sz="3480" b="1" dirty="0">
+                <a:solidFill>
+                  <a:srgbClr val="224466"/>
+                </a:solidFill>
+                <a:latin typeface="Segoe UI" pitchFamily="34" charset="0"/>
+                <a:ea typeface="Segoe UI" pitchFamily="34" charset="-122"/>
+                <a:cs typeface="Segoe UI" pitchFamily="34" charset="-120"/>
+              </a:rPr>
+              <a:t>Slide 84: Nested ordered list inside unordered list</a:t>
+            </a:r>
+            <a:endParaRPr lang="en-US" sz="3480" dirty="0"/>
+          </a:p>
+        </p:txBody>
+      </p:sp>
+      <p:sp>
+        <p:nvSpPr>
+          <p:cNvPr id="3" name="Text 1"/>
+          <p:cNvSpPr/>
+          <p:nvPr/>
+        </p:nvSpPr>
+        <p:spPr>
+          <a:xfrm>
+            <a:off x="747713" y="2501057"/>
+            <a:ext cx="10696575" cy="2693194"/>
+          </a:xfrm>
+          <a:prstGeom prst="rect">
+            <a:avLst/>
+          </a:prstGeom>
+          <a:noFill/>
+          <a:ln/>
+        </p:spPr>
+        <p:txBody>
+          <a:bodyPr wrap="square" lIns="0" tIns="0" rIns="0" bIns="0" rtlCol="0" anchor="t"/>
+          <a:lstStyle/>
+          <a:p>
+            <a:pPr algn="l" marL="342900" indent="-342900">
+              <a:lnSpc>
+                <a:spcPct val="150000"/>
+              </a:lnSpc>
+              <a:buSzPct val="100000"/>
+              <a:buChar char="•"/>
+            </a:pPr>
+            <a:r>
+              <a:rPr lang="en-US" sz="2175" dirty="0">
+                <a:solidFill>
+                  <a:srgbClr val="1F2328"/>
+                </a:solidFill>
+                <a:latin typeface="Segoe UI" pitchFamily="34" charset="0"/>
+                <a:ea typeface="Segoe UI" pitchFamily="34" charset="-122"/>
+                <a:cs typeface="Segoe UI" pitchFamily="34" charset="-120"/>
+              </a:rPr>
+              <a:t>Unordered item one</a:t>
+            </a:r>
+            <a:endParaRPr lang="en-US" sz="2175" dirty="0"/>
+          </a:p>
+          <a:p>
+            <a:pPr algn="l" lvl="1" marL="685800" indent="-342900">
+              <a:lnSpc>
+                <a:spcPct val="150000"/>
+              </a:lnSpc>
+              <a:buSzPct val="100000"/>
+              <a:buFont typeface="+mj-lt"/>
+              <a:buAutoNum type="romanLcPeriod" startAt="1"/>
+            </a:pPr>
+            <a:r>
+              <a:rPr lang="en-US" sz="2175" dirty="0">
+                <a:solidFill>
+                  <a:srgbClr val="1F2328"/>
+                </a:solidFill>
+                <a:latin typeface="Segoe UI" pitchFamily="34" charset="0"/>
+                <a:ea typeface="Segoe UI" pitchFamily="34" charset="-122"/>
+                <a:cs typeface="Segoe UI" pitchFamily="34" charset="-120"/>
+              </a:rPr>
+              <a:t>Nested ordered first</a:t>
+            </a:r>
+            <a:endParaRPr lang="en-US" sz="2175" dirty="0"/>
+          </a:p>
+          <a:p>
+            <a:pPr algn="l" lvl="1" marL="685800" indent="-342900">
+              <a:lnSpc>
+                <a:spcPct val="150000"/>
+              </a:lnSpc>
+              <a:buSzPct val="100000"/>
+              <a:buFont typeface="+mj-lt"/>
+              <a:buAutoNum type="romanLcPeriod" startAt="1"/>
+            </a:pPr>
+            <a:r>
+              <a:rPr lang="en-US" sz="2175" dirty="0">
+                <a:solidFill>
+                  <a:srgbClr val="1F2328"/>
+                </a:solidFill>
+                <a:latin typeface="Segoe UI" pitchFamily="34" charset="0"/>
+                <a:ea typeface="Segoe UI" pitchFamily="34" charset="-122"/>
+                <a:cs typeface="Segoe UI" pitchFamily="34" charset="-120"/>
+              </a:rPr>
+              <a:t>Nested ordered second</a:t>
+            </a:r>
+            <a:endParaRPr lang="en-US" sz="2175" dirty="0"/>
+          </a:p>
+          <a:p>
+            <a:pPr algn="l" marL="342900" indent="-342900">
+              <a:lnSpc>
+                <a:spcPct val="150000"/>
+              </a:lnSpc>
+              <a:buSzPct val="100000"/>
+              <a:buChar char="•"/>
+            </a:pPr>
+            <a:r>
+              <a:rPr lang="en-US" sz="2175" dirty="0">
+                <a:solidFill>
+                  <a:srgbClr val="1F2328"/>
+                </a:solidFill>
+                <a:latin typeface="Segoe UI" pitchFamily="34" charset="0"/>
+                <a:ea typeface="Segoe UI" pitchFamily="34" charset="-122"/>
+                <a:cs typeface="Segoe UI" pitchFamily="34" charset="-120"/>
+              </a:rPr>
+              <a:t>Unordered item two</a:t>
+            </a:r>
+            <a:endParaRPr lang="en-US" sz="2175" dirty="0"/>
+          </a:p>
+          <a:p>
+            <a:pPr algn="l" lvl="1" marL="685800" indent="-342900">
+              <a:lnSpc>
+                <a:spcPct val="150000"/>
+              </a:lnSpc>
+              <a:buSzPct val="100000"/>
+              <a:buFont typeface="+mj-lt"/>
+              <a:buAutoNum type="romanLcPeriod" startAt="1"/>
+            </a:pPr>
+            <a:r>
+              <a:rPr lang="en-US" sz="2175" dirty="0">
+                <a:solidFill>
+                  <a:srgbClr val="1F2328"/>
+                </a:solidFill>
+                <a:latin typeface="Segoe UI" pitchFamily="34" charset="0"/>
+                <a:ea typeface="Segoe UI" pitchFamily="34" charset="-122"/>
+                <a:cs typeface="Segoe UI" pitchFamily="34" charset="-120"/>
+              </a:rPr>
+              <a:t>Nested ordered third</a:t>
+            </a:r>
+            <a:endParaRPr lang="en-US" sz="2175" dirty="0"/>
+          </a:p>
+          <a:p>
+            <a:pPr algn="l" lvl="1" marL="685800" indent="-342900">
+              <a:lnSpc>
+                <a:spcPct val="150000"/>
+              </a:lnSpc>
+              <a:buSzPct val="100000"/>
+              <a:buFont typeface="+mj-lt"/>
+              <a:buAutoNum type="romanLcPeriod" startAt="1"/>
+            </a:pPr>
+            <a:r>
+              <a:rPr lang="en-US" sz="2175" dirty="0">
+                <a:solidFill>
+                  <a:srgbClr val="1F2328"/>
+                </a:solidFill>
+                <a:latin typeface="Segoe UI" pitchFamily="34" charset="0"/>
+                <a:ea typeface="Segoe UI" pitchFamily="34" charset="-122"/>
+                <a:cs typeface="Segoe UI" pitchFamily="34" charset="-120"/>
+              </a:rPr>
+              <a:t>Nested ordered fourth</a:t>
+            </a:r>
+            <a:endParaRPr lang="en-US" sz="2175" dirty="0"/>
+          </a:p>
+        </p:txBody>
+      </p:sp>
+      <p:sp>
+        <p:nvSpPr>
+          <p:cNvPr id="25" name="Slide Number Placeholder 0"/>
+          <p:cNvSpPr>
+            <a:spLocks noGrp="1"/>
+          </p:cNvSpPr>
+          <p:nvPr>
+            <p:ph type="sldNum" sz="quarter" idx="4294967295"/>
+          </p:nvPr>
+        </p:nvSpPr>
+        <p:spPr>
+          <a:xfrm>
+            <a:off x="0" y="6343650"/>
+            <a:ext cx="11811000" cy="228600"/>
+          </a:xfrm>
+          <a:prstGeom prst="rect">
+            <a:avLst/>
+          </a:prstGeom>
+          <a:extLst>
+            <a:ext uri="{C572A759-6A51-4108-AA02-DFA0A04FC94B}">
+              <ma14:wrappingTextBoxFlag xmlns:ma14="http://schemas.microsoft.com/office/mac/drawingml/2011/main" val="0"/>
+            </a:ext>
+          </a:extLst>
+        </p:spPr>
+        <p:txBody>
+          <a:bodyPr lIns="0" tIns="0" rIns="0" bIns="0"/>
+          <a:lstStyle>
+            <a:lvl1pPr>
+              <a:defRPr sz="1350">
+                <a:solidFill>
+                  <a:srgbClr val="777777"/>
+                </a:solidFill>
+              </a:defRPr>
+            </a:lvl1pPr>
+          </a:lstStyle>
+          <a:p>
+            <a:pPr algn="r"/>
+            <a:fld id="{F7021451-1387-4CA6-816F-3879F97B5CBC}" type="slidenum">
+              <a:rPr b="0" lang="en-US"/>
+              <a:t>84</a:t>
             </a:fld>
             <a:endParaRPr lang="en-US"/>
           </a:p>
@@ -50026,13 +51665,13 @@
             <a:r>
               <a:rPr lang="en-US" sz="1849" dirty="0">
                 <a:solidFill>
-                  <a:srgbClr val="CF222E"/>
+                  <a:srgbClr val="1F2328"/>
                 </a:solidFill>
                 <a:latin typeface="Consolas" pitchFamily="34" charset="0"/>
                 <a:ea typeface="Consolas" pitchFamily="34" charset="-122"/>
                 <a:cs typeface="Consolas" pitchFamily="34" charset="-120"/>
               </a:rPr>
-              <a:t>def</a:t>
+              <a:t> </a:t>
             </a:r>
             <a:pPr algn="l" indent="0" marL="0">
               <a:lnSpc>
@@ -50043,13 +51682,13 @@
             <a:r>
               <a:rPr lang="en-US" sz="1849" dirty="0">
                 <a:solidFill>
-                  <a:srgbClr val="6639BA"/>
+                  <a:srgbClr val="CF222E"/>
                 </a:solidFill>
                 <a:latin typeface="Consolas" pitchFamily="34" charset="0"/>
                 <a:ea typeface="Consolas" pitchFamily="34" charset="-122"/>
                 <a:cs typeface="Consolas" pitchFamily="34" charset="-120"/>
               </a:rPr>
-              <a:t>fetch_data</a:t>
+              <a:t>def</a:t>
             </a:r>
             <a:pPr algn="l" indent="0" marL="0">
               <a:lnSpc>
@@ -50066,7 +51705,7 @@
                 <a:ea typeface="Consolas" pitchFamily="34" charset="-122"/>
                 <a:cs typeface="Consolas" pitchFamily="34" charset="-120"/>
               </a:rPr>
-              <a:t>(</a:t>
+              <a:t> </a:t>
             </a:r>
             <a:pPr algn="l" indent="0" marL="0">
               <a:lnSpc>
@@ -50077,13 +51716,13 @@
             <a:r>
               <a:rPr lang="en-US" sz="1849" dirty="0">
                 <a:solidFill>
-                  <a:srgbClr val="1F2328"/>
+                  <a:srgbClr val="6639BA"/>
                 </a:solidFill>
                 <a:latin typeface="Consolas" pitchFamily="34" charset="0"/>
                 <a:ea typeface="Consolas" pitchFamily="34" charset="-122"/>
                 <a:cs typeface="Consolas" pitchFamily="34" charset="-120"/>
               </a:rPr>
-              <a:t>url: </a:t>
+              <a:t>fetch_data</a:t>
             </a:r>
             <a:pPr algn="l" indent="0" marL="0">
               <a:lnSpc>
@@ -50094,13 +51733,13 @@
             <a:r>
               <a:rPr lang="en-US" sz="1849" dirty="0">
                 <a:solidFill>
-                  <a:srgbClr val="953800"/>
+                  <a:srgbClr val="1F2328"/>
                 </a:solidFill>
                 <a:latin typeface="Consolas" pitchFamily="34" charset="0"/>
                 <a:ea typeface="Consolas" pitchFamily="34" charset="-122"/>
                 <a:cs typeface="Consolas" pitchFamily="34" charset="-120"/>
               </a:rPr>
-              <a:t>str</a:t>
+              <a:t>(</a:t>
             </a:r>
             <a:pPr algn="l" indent="0" marL="0">
               <a:lnSpc>
@@ -50117,7 +51756,7 @@
                 <a:ea typeface="Consolas" pitchFamily="34" charset="-122"/>
                 <a:cs typeface="Consolas" pitchFamily="34" charset="-120"/>
               </a:rPr>
-              <a:t>) -&gt; </a:t>
+              <a:t>url: </a:t>
             </a:r>
             <a:pPr algn="l" indent="0" marL="0">
               <a:lnSpc>
@@ -50134,7 +51773,7 @@
                 <a:ea typeface="Consolas" pitchFamily="34" charset="-122"/>
                 <a:cs typeface="Consolas" pitchFamily="34" charset="-120"/>
               </a:rPr>
-              <a:t>dict</a:t>
+              <a:t>str</a:t>
             </a:r>
             <a:pPr algn="l" indent="0" marL="0">
               <a:lnSpc>
@@ -50151,7 +51790,7 @@
                 <a:ea typeface="Consolas" pitchFamily="34" charset="-122"/>
                 <a:cs typeface="Consolas" pitchFamily="34" charset="-120"/>
               </a:rPr>
-              <a:t>:</a:t>
+              <a:t>) -&gt; </a:t>
             </a:r>
             <a:pPr algn="l" indent="0" marL="0">
               <a:lnSpc>
@@ -50159,25 +51798,16 @@
               </a:lnSpc>
               <a:buNone/>
             </a:pPr>
-            <a:endParaRPr lang="en-US" sz="1849" dirty="0"/>
-          </a:p>
-          <a:p>
-            <a:pPr algn="l" indent="0" marL="0">
-              <a:lnSpc>
-                <a:spcPct val="115000"/>
-              </a:lnSpc>
-              <a:buNone/>
-            </a:pPr>
             <a:r>
               <a:rPr lang="en-US" sz="1849" dirty="0">
                 <a:solidFill>
-                  <a:srgbClr val="1F2328"/>
+                  <a:srgbClr val="953800"/>
                 </a:solidFill>
                 <a:latin typeface="Consolas" pitchFamily="34" charset="0"/>
                 <a:ea typeface="Consolas" pitchFamily="34" charset="-122"/>
                 <a:cs typeface="Consolas" pitchFamily="34" charset="-120"/>
               </a:rPr>
-              <a:t>    </a:t>
+              <a:t>dict</a:t>
             </a:r>
             <a:pPr algn="l" indent="0" marL="0">
               <a:lnSpc>
@@ -50188,13 +51818,13 @@
             <a:r>
               <a:rPr lang="en-US" sz="1849" dirty="0">
                 <a:solidFill>
-                  <a:srgbClr val="0A3069"/>
+                  <a:srgbClr val="1F2328"/>
                 </a:solidFill>
                 <a:latin typeface="Consolas" pitchFamily="34" charset="0"/>
                 <a:ea typeface="Consolas" pitchFamily="34" charset="-122"/>
                 <a:cs typeface="Consolas" pitchFamily="34" charset="-120"/>
               </a:rPr>
-              <a:t>"""Fetch data asynchronously"""</a:t>
+              <a:t>:</a:t>
             </a:r>
             <a:pPr algn="l" indent="0" marL="0">
               <a:lnSpc>
@@ -50214,13 +51844,13 @@
             <a:r>
               <a:rPr lang="en-US" sz="1849" dirty="0">
                 <a:solidFill>
-                  <a:srgbClr val="CF222E"/>
+                  <a:srgbClr val="1F2328"/>
                 </a:solidFill>
                 <a:latin typeface="Consolas" pitchFamily="34" charset="0"/>
                 <a:ea typeface="Consolas" pitchFamily="34" charset="-122"/>
                 <a:cs typeface="Consolas" pitchFamily="34" charset="-120"/>
               </a:rPr>
-              <a:t>async</a:t>
+              <a:t>    </a:t>
             </a:r>
             <a:pPr algn="l" indent="0" marL="0">
               <a:lnSpc>
@@ -50231,13 +51861,13 @@
             <a:r>
               <a:rPr lang="en-US" sz="1849" dirty="0">
                 <a:solidFill>
-                  <a:srgbClr val="CF222E"/>
+                  <a:srgbClr val="0A3069"/>
                 </a:solidFill>
                 <a:latin typeface="Consolas" pitchFamily="34" charset="0"/>
                 <a:ea typeface="Consolas" pitchFamily="34" charset="-122"/>
                 <a:cs typeface="Consolas" pitchFamily="34" charset="-120"/>
               </a:rPr>
-              <a:t>with</a:t>
+              <a:t>"""Fetch data asynchronously"""</a:t>
             </a:r>
             <a:pPr algn="l" indent="0" marL="0">
               <a:lnSpc>
@@ -50245,16 +51875,25 @@
               </a:lnSpc>
               <a:buNone/>
             </a:pPr>
+            <a:endParaRPr lang="en-US" sz="1849" dirty="0"/>
+          </a:p>
+          <a:p>
+            <a:pPr algn="l" indent="0" marL="0">
+              <a:lnSpc>
+                <a:spcPct val="115000"/>
+              </a:lnSpc>
+              <a:buNone/>
+            </a:pPr>
             <a:r>
               <a:rPr lang="en-US" sz="1849" dirty="0">
                 <a:solidFill>
-                  <a:srgbClr val="1F2328"/>
+                  <a:srgbClr val="CF222E"/>
                 </a:solidFill>
                 <a:latin typeface="Consolas" pitchFamily="34" charset="0"/>
                 <a:ea typeface="Consolas" pitchFamily="34" charset="-122"/>
                 <a:cs typeface="Consolas" pitchFamily="34" charset="-120"/>
               </a:rPr>
-              <a:t> aiohttp.ClientSession() </a:t>
+              <a:t>async</a:t>
             </a:r>
             <a:pPr algn="l" indent="0" marL="0">
               <a:lnSpc>
@@ -50265,13 +51904,13 @@
             <a:r>
               <a:rPr lang="en-US" sz="1849" dirty="0">
                 <a:solidFill>
-                  <a:srgbClr val="CF222E"/>
+                  <a:srgbClr val="1F2328"/>
                 </a:solidFill>
                 <a:latin typeface="Consolas" pitchFamily="34" charset="0"/>
                 <a:ea typeface="Consolas" pitchFamily="34" charset="-122"/>
                 <a:cs typeface="Consolas" pitchFamily="34" charset="-120"/>
               </a:rPr>
-              <a:t>as</a:t>
+              <a:t> </a:t>
             </a:r>
             <a:pPr algn="l" indent="0" marL="0">
               <a:lnSpc>
@@ -50282,23 +51921,14 @@
             <a:r>
               <a:rPr lang="en-US" sz="1849" dirty="0">
                 <a:solidFill>
-                  <a:srgbClr val="1F2328"/>
+                  <a:srgbClr val="CF222E"/>
                 </a:solidFill>
                 <a:latin typeface="Consolas" pitchFamily="34" charset="0"/>
                 <a:ea typeface="Consolas" pitchFamily="34" charset="-122"/>
                 <a:cs typeface="Consolas" pitchFamily="34" charset="-120"/>
               </a:rPr>
-              <a:t> session:</a:t>
-            </a:r>
-            <a:pPr algn="l" indent="0" marL="0">
-              <a:lnSpc>
-                <a:spcPct val="115000"/>
-              </a:lnSpc>
-              <a:buNone/>
-            </a:pPr>
-            <a:endParaRPr lang="en-US" sz="1849" dirty="0"/>
-          </a:p>
-          <a:p>
+              <a:t>with</a:t>
+            </a:r>
             <a:pPr algn="l" indent="0" marL="0">
               <a:lnSpc>
                 <a:spcPct val="115000"/>
@@ -50314,7 +51944,7 @@
                 <a:ea typeface="Consolas" pitchFamily="34" charset="-122"/>
                 <a:cs typeface="Consolas" pitchFamily="34" charset="-120"/>
               </a:rPr>
-              <a:t>        </a:t>
+              <a:t> aiohttp.ClientSession() </a:t>
             </a:r>
             <a:pPr algn="l" indent="0" marL="0">
               <a:lnSpc>
@@ -50331,7 +51961,7 @@
                 <a:ea typeface="Consolas" pitchFamily="34" charset="-122"/>
                 <a:cs typeface="Consolas" pitchFamily="34" charset="-120"/>
               </a:rPr>
-              <a:t>async</a:t>
+              <a:t>as</a:t>
             </a:r>
             <a:pPr algn="l" indent="0" marL="0">
               <a:lnSpc>
@@ -50342,14 +51972,23 @@
             <a:r>
               <a:rPr lang="en-US" sz="1849" dirty="0">
                 <a:solidFill>
-                  <a:srgbClr val="CF222E"/>
+                  <a:srgbClr val="1F2328"/>
                 </a:solidFill>
                 <a:latin typeface="Consolas" pitchFamily="34" charset="0"/>
                 <a:ea typeface="Consolas" pitchFamily="34" charset="-122"/>
                 <a:cs typeface="Consolas" pitchFamily="34" charset="-120"/>
               </a:rPr>
-              <a:t>with</a:t>
-            </a:r>
+              <a:t> session:</a:t>
+            </a:r>
+            <a:pPr algn="l" indent="0" marL="0">
+              <a:lnSpc>
+                <a:spcPct val="115000"/>
+              </a:lnSpc>
+              <a:buNone/>
+            </a:pPr>
+            <a:endParaRPr lang="en-US" sz="1849" dirty="0"/>
+          </a:p>
+          <a:p>
             <a:pPr algn="l" indent="0" marL="0">
               <a:lnSpc>
                 <a:spcPct val="115000"/>
@@ -50365,7 +52004,7 @@
                 <a:ea typeface="Consolas" pitchFamily="34" charset="-122"/>
                 <a:cs typeface="Consolas" pitchFamily="34" charset="-120"/>
               </a:rPr>
-              <a:t> session.get(url) </a:t>
+              <a:t>        </a:t>
             </a:r>
             <a:pPr algn="l" indent="0" marL="0">
               <a:lnSpc>
@@ -50382,7 +52021,7 @@
                 <a:ea typeface="Consolas" pitchFamily="34" charset="-122"/>
                 <a:cs typeface="Consolas" pitchFamily="34" charset="-120"/>
               </a:rPr>
-              <a:t>as</a:t>
+              <a:t>async</a:t>
             </a:r>
             <a:pPr algn="l" indent="0" marL="0">
               <a:lnSpc>
@@ -50399,7 +52038,7 @@
                 <a:ea typeface="Consolas" pitchFamily="34" charset="-122"/>
                 <a:cs typeface="Consolas" pitchFamily="34" charset="-120"/>
               </a:rPr>
-              <a:t> response:</a:t>
+              <a:t> </a:t>
             </a:r>
             <a:pPr algn="l" indent="0" marL="0">
               <a:lnSpc>
@@ -50407,25 +52046,16 @@
               </a:lnSpc>
               <a:buNone/>
             </a:pPr>
-            <a:endParaRPr lang="en-US" sz="1849" dirty="0"/>
-          </a:p>
-          <a:p>
-            <a:pPr algn="l" indent="0" marL="0">
-              <a:lnSpc>
-                <a:spcPct val="115000"/>
-              </a:lnSpc>
-              <a:buNone/>
-            </a:pPr>
             <a:r>
               <a:rPr lang="en-US" sz="1849" dirty="0">
                 <a:solidFill>
-                  <a:srgbClr val="1F2328"/>
+                  <a:srgbClr val="CF222E"/>
                 </a:solidFill>
                 <a:latin typeface="Consolas" pitchFamily="34" charset="0"/>
                 <a:ea typeface="Consolas" pitchFamily="34" charset="-122"/>
                 <a:cs typeface="Consolas" pitchFamily="34" charset="-120"/>
               </a:rPr>
-              <a:t>            </a:t>
+              <a:t>with</a:t>
             </a:r>
             <a:pPr algn="l" indent="0" marL="0">
               <a:lnSpc>
@@ -50436,13 +52066,107 @@
             <a:r>
               <a:rPr lang="en-US" sz="1849" dirty="0">
                 <a:solidFill>
-                  <a:srgbClr val="CF222E"/>
+                  <a:srgbClr val="1F2328"/>
                 </a:solidFill>
                 <a:latin typeface="Consolas" pitchFamily="34" charset="0"/>
                 <a:ea typeface="Consolas" pitchFamily="34" charset="-122"/>
                 <a:cs typeface="Consolas" pitchFamily="34" charset="-120"/>
               </a:rPr>
+              <a:t> session.get(url) </a:t>
+            </a:r>
+            <a:pPr algn="l" indent="0" marL="0">
+              <a:lnSpc>
+                <a:spcPct val="115000"/>
+              </a:lnSpc>
+              <a:buNone/>
+            </a:pPr>
+            <a:r>
+              <a:rPr lang="en-US" sz="1849" dirty="0">
+                <a:solidFill>
+                  <a:srgbClr val="CF222E"/>
+                </a:solidFill>
+                <a:latin typeface="Consolas" pitchFamily="34" charset="0"/>
+                <a:ea typeface="Consolas" pitchFamily="34" charset="-122"/>
+                <a:cs typeface="Consolas" pitchFamily="34" charset="-120"/>
+              </a:rPr>
+              <a:t>as</a:t>
+            </a:r>
+            <a:pPr algn="l" indent="0" marL="0">
+              <a:lnSpc>
+                <a:spcPct val="115000"/>
+              </a:lnSpc>
+              <a:buNone/>
+            </a:pPr>
+            <a:r>
+              <a:rPr lang="en-US" sz="1849" dirty="0">
+                <a:solidFill>
+                  <a:srgbClr val="1F2328"/>
+                </a:solidFill>
+                <a:latin typeface="Consolas" pitchFamily="34" charset="0"/>
+                <a:ea typeface="Consolas" pitchFamily="34" charset="-122"/>
+                <a:cs typeface="Consolas" pitchFamily="34" charset="-120"/>
+              </a:rPr>
+              <a:t> response:</a:t>
+            </a:r>
+            <a:pPr algn="l" indent="0" marL="0">
+              <a:lnSpc>
+                <a:spcPct val="115000"/>
+              </a:lnSpc>
+              <a:buNone/>
+            </a:pPr>
+            <a:endParaRPr lang="en-US" sz="1849" dirty="0"/>
+          </a:p>
+          <a:p>
+            <a:pPr algn="l" indent="0" marL="0">
+              <a:lnSpc>
+                <a:spcPct val="115000"/>
+              </a:lnSpc>
+              <a:buNone/>
+            </a:pPr>
+            <a:r>
+              <a:rPr lang="en-US" sz="1849" dirty="0">
+                <a:solidFill>
+                  <a:srgbClr val="1F2328"/>
+                </a:solidFill>
+                <a:latin typeface="Consolas" pitchFamily="34" charset="0"/>
+                <a:ea typeface="Consolas" pitchFamily="34" charset="-122"/>
+                <a:cs typeface="Consolas" pitchFamily="34" charset="-120"/>
+              </a:rPr>
+              <a:t>            </a:t>
+            </a:r>
+            <a:pPr algn="l" indent="0" marL="0">
+              <a:lnSpc>
+                <a:spcPct val="115000"/>
+              </a:lnSpc>
+              <a:buNone/>
+            </a:pPr>
+            <a:r>
+              <a:rPr lang="en-US" sz="1849" dirty="0">
+                <a:solidFill>
+                  <a:srgbClr val="CF222E"/>
+                </a:solidFill>
+                <a:latin typeface="Consolas" pitchFamily="34" charset="0"/>
+                <a:ea typeface="Consolas" pitchFamily="34" charset="-122"/>
+                <a:cs typeface="Consolas" pitchFamily="34" charset="-120"/>
+              </a:rPr>
               <a:t>return</a:t>
+            </a:r>
+            <a:pPr algn="l" indent="0" marL="0">
+              <a:lnSpc>
+                <a:spcPct val="115000"/>
+              </a:lnSpc>
+              <a:buNone/>
+            </a:pPr>
+            <a:r>
+              <a:rPr lang="en-US" sz="1849" dirty="0">
+                <a:solidFill>
+                  <a:srgbClr val="1F2328"/>
+                </a:solidFill>
+                <a:latin typeface="Consolas" pitchFamily="34" charset="0"/>
+                <a:ea typeface="Consolas" pitchFamily="34" charset="-122"/>
+                <a:cs typeface="Consolas" pitchFamily="34" charset="-120"/>
+              </a:rPr>
+              <a:t> </a:t>
             </a:r>
             <a:pPr algn="l" indent="0" marL="0">
               <a:lnSpc>
@@ -50710,13 +52434,13 @@
             <a:r>
               <a:rPr lang="en-US" sz="1849" dirty="0">
                 <a:solidFill>
-                  <a:srgbClr val="CF222E"/>
+                  <a:srgbClr val="1F2328"/>
                 </a:solidFill>
                 <a:latin typeface="Consolas" pitchFamily="34" charset="0"/>
                 <a:ea typeface="Consolas" pitchFamily="34" charset="-122"/>
                 <a:cs typeface="Consolas" pitchFamily="34" charset="-120"/>
               </a:rPr>
-              <a:t>JOIN</a:t>
+              <a:t> </a:t>
             </a:r>
             <a:pPr algn="l" indent="0" marL="0">
               <a:lnSpc>
@@ -50727,13 +52451,13 @@
             <a:r>
               <a:rPr lang="en-US" sz="1849" dirty="0">
                 <a:solidFill>
-                  <a:srgbClr val="1F2328"/>
+                  <a:srgbClr val="CF222E"/>
                 </a:solidFill>
                 <a:latin typeface="Consolas" pitchFamily="34" charset="0"/>
                 <a:ea typeface="Consolas" pitchFamily="34" charset="-122"/>
                 <a:cs typeface="Consolas" pitchFamily="34" charset="-120"/>
               </a:rPr>
-              <a:t> orders o </a:t>
+              <a:t>JOIN</a:t>
             </a:r>
             <a:pPr algn="l" indent="0" marL="0">
               <a:lnSpc>
@@ -50744,13 +52468,13 @@
             <a:r>
               <a:rPr lang="en-US" sz="1849" dirty="0">
                 <a:solidFill>
-                  <a:srgbClr val="CF222E"/>
+                  <a:srgbClr val="1F2328"/>
                 </a:solidFill>
                 <a:latin typeface="Consolas" pitchFamily="34" charset="0"/>
                 <a:ea typeface="Consolas" pitchFamily="34" charset="-122"/>
                 <a:cs typeface="Consolas" pitchFamily="34" charset="-120"/>
               </a:rPr>
-              <a:t>ON</a:t>
+              <a:t> orders o </a:t>
             </a:r>
             <a:pPr algn="l" indent="0" marL="0">
               <a:lnSpc>
@@ -50761,13 +52485,13 @@
             <a:r>
               <a:rPr lang="en-US" sz="1849" dirty="0">
                 <a:solidFill>
-                  <a:srgbClr val="1F2328"/>
+                  <a:srgbClr val="CF222E"/>
                 </a:solidFill>
                 <a:latin typeface="Consolas" pitchFamily="34" charset="0"/>
                 <a:ea typeface="Consolas" pitchFamily="34" charset="-122"/>
                 <a:cs typeface="Consolas" pitchFamily="34" charset="-120"/>
               </a:rPr>
-              <a:t> u.id </a:t>
+              <a:t>ON</a:t>
             </a:r>
             <a:pPr algn="l" indent="0" marL="0">
               <a:lnSpc>
@@ -50778,13 +52502,13 @@
             <a:r>
               <a:rPr lang="en-US" sz="1849" dirty="0">
                 <a:solidFill>
-                  <a:srgbClr val="0550AE"/>
+                  <a:srgbClr val="1F2328"/>
                 </a:solidFill>
                 <a:latin typeface="Consolas" pitchFamily="34" charset="0"/>
                 <a:ea typeface="Consolas" pitchFamily="34" charset="-122"/>
                 <a:cs typeface="Consolas" pitchFamily="34" charset="-120"/>
               </a:rPr>
-              <a:t>=</a:t>
+              <a:t> u.id </a:t>
             </a:r>
             <a:pPr algn="l" indent="0" marL="0">
               <a:lnSpc>
@@ -50795,13 +52519,13 @@
             <a:r>
               <a:rPr lang="en-US" sz="1849" dirty="0">
                 <a:solidFill>
-                  <a:srgbClr val="1F2328"/>
+                  <a:srgbClr val="0550AE"/>
                 </a:solidFill>
                 <a:latin typeface="Consolas" pitchFamily="34" charset="0"/>
                 <a:ea typeface="Consolas" pitchFamily="34" charset="-122"/>
                 <a:cs typeface="Consolas" pitchFamily="34" charset="-120"/>
               </a:rPr>
-              <a:t> o.user_id</a:t>
+              <a:t>=</a:t>
             </a:r>
             <a:pPr algn="l" indent="0" marL="0">
               <a:lnSpc>
@@ -50809,25 +52533,16 @@
               </a:lnSpc>
               <a:buNone/>
             </a:pPr>
-            <a:endParaRPr lang="en-US" sz="1849" dirty="0"/>
-          </a:p>
-          <a:p>
-            <a:pPr algn="l" indent="0" marL="0">
-              <a:lnSpc>
-                <a:spcPct val="115000"/>
-              </a:lnSpc>
-              <a:buNone/>
-            </a:pPr>
             <a:r>
               <a:rPr lang="en-US" sz="1849" dirty="0">
                 <a:solidFill>
-                  <a:srgbClr val="CF222E"/>
+                  <a:srgbClr val="1F2328"/>
                 </a:solidFill>
                 <a:latin typeface="Consolas" pitchFamily="34" charset="0"/>
                 <a:ea typeface="Consolas" pitchFamily="34" charset="-122"/>
                 <a:cs typeface="Consolas" pitchFamily="34" charset="-120"/>
               </a:rPr>
-              <a:t>WHERE</a:t>
+              <a:t> o.user_id</a:t>
             </a:r>
             <a:pPr algn="l" indent="0" marL="0">
               <a:lnSpc>
@@ -50835,16 +52550,25 @@
               </a:lnSpc>
               <a:buNone/>
             </a:pPr>
+            <a:endParaRPr lang="en-US" sz="1849" dirty="0"/>
+          </a:p>
+          <a:p>
+            <a:pPr algn="l" indent="0" marL="0">
+              <a:lnSpc>
+                <a:spcPct val="115000"/>
+              </a:lnSpc>
+              <a:buNone/>
+            </a:pPr>
             <a:r>
               <a:rPr lang="en-US" sz="1849" dirty="0">
                 <a:solidFill>
-                  <a:srgbClr val="1F2328"/>
+                  <a:srgbClr val="CF222E"/>
                 </a:solidFill>
                 <a:latin typeface="Consolas" pitchFamily="34" charset="0"/>
                 <a:ea typeface="Consolas" pitchFamily="34" charset="-122"/>
                 <a:cs typeface="Consolas" pitchFamily="34" charset="-120"/>
               </a:rPr>
-              <a:t> u.created_at </a:t>
+              <a:t>WHERE</a:t>
             </a:r>
             <a:pPr algn="l" indent="0" marL="0">
               <a:lnSpc>
@@ -50855,13 +52579,13 @@
             <a:r>
               <a:rPr lang="en-US" sz="1849" dirty="0">
                 <a:solidFill>
-                  <a:srgbClr val="0550AE"/>
+                  <a:srgbClr val="1F2328"/>
                 </a:solidFill>
                 <a:latin typeface="Consolas" pitchFamily="34" charset="0"/>
                 <a:ea typeface="Consolas" pitchFamily="34" charset="-122"/>
                 <a:cs typeface="Consolas" pitchFamily="34" charset="-120"/>
               </a:rPr>
-              <a:t>&gt;=</a:t>
+              <a:t> u.created_at </a:t>
             </a:r>
             <a:pPr algn="l" indent="0" marL="0">
               <a:lnSpc>
@@ -50872,13 +52596,13 @@
             <a:r>
               <a:rPr lang="en-US" sz="1849" dirty="0">
                 <a:solidFill>
-                  <a:srgbClr val="0A3069"/>
+                  <a:srgbClr val="0550AE"/>
                 </a:solidFill>
                 <a:latin typeface="Consolas" pitchFamily="34" charset="0"/>
                 <a:ea typeface="Consolas" pitchFamily="34" charset="-122"/>
                 <a:cs typeface="Consolas" pitchFamily="34" charset="-120"/>
               </a:rPr>
-              <a:t>'2024-01-01'</a:t>
+              <a:t>&gt;=</a:t>
             </a:r>
             <a:pPr algn="l" indent="0" marL="0">
               <a:lnSpc>
@@ -50886,25 +52610,16 @@
               </a:lnSpc>
               <a:buNone/>
             </a:pPr>
-            <a:endParaRPr lang="en-US" sz="1849" dirty="0"/>
-          </a:p>
-          <a:p>
-            <a:pPr algn="l" indent="0" marL="0">
-              <a:lnSpc>
-                <a:spcPct val="115000"/>
-              </a:lnSpc>
-              <a:buNone/>
-            </a:pPr>
             <a:r>
               <a:rPr lang="en-US" sz="1849" dirty="0">
                 <a:solidFill>
-                  <a:srgbClr val="CF222E"/>
+                  <a:srgbClr val="1F2328"/>
                 </a:solidFill>
                 <a:latin typeface="Consolas" pitchFamily="34" charset="0"/>
                 <a:ea typeface="Consolas" pitchFamily="34" charset="-122"/>
                 <a:cs typeface="Consolas" pitchFamily="34" charset="-120"/>
               </a:rPr>
-              <a:t>GROUP</a:t>
+              <a:t> </a:t>
             </a:r>
             <a:pPr algn="l" indent="0" marL="0">
               <a:lnSpc>
@@ -50915,13 +52630,13 @@
             <a:r>
               <a:rPr lang="en-US" sz="1849" dirty="0">
                 <a:solidFill>
-                  <a:srgbClr val="CF222E"/>
+                  <a:srgbClr val="0A3069"/>
                 </a:solidFill>
                 <a:latin typeface="Consolas" pitchFamily="34" charset="0"/>
                 <a:ea typeface="Consolas" pitchFamily="34" charset="-122"/>
                 <a:cs typeface="Consolas" pitchFamily="34" charset="-120"/>
               </a:rPr>
-              <a:t>BY</a:t>
+              <a:t>'2024-01-01'</a:t>
             </a:r>
             <a:pPr algn="l" indent="0" marL="0">
               <a:lnSpc>
@@ -50929,16 +52644,25 @@
               </a:lnSpc>
               <a:buNone/>
             </a:pPr>
+            <a:endParaRPr lang="en-US" sz="1849" dirty="0"/>
+          </a:p>
+          <a:p>
+            <a:pPr algn="l" indent="0" marL="0">
+              <a:lnSpc>
+                <a:spcPct val="115000"/>
+              </a:lnSpc>
+              <a:buNone/>
+            </a:pPr>
             <a:r>
               <a:rPr lang="en-US" sz="1849" dirty="0">
                 <a:solidFill>
-                  <a:srgbClr val="1F2328"/>
+                  <a:srgbClr val="CF222E"/>
                 </a:solidFill>
                 <a:latin typeface="Consolas" pitchFamily="34" charset="0"/>
                 <a:ea typeface="Consolas" pitchFamily="34" charset="-122"/>
                 <a:cs typeface="Consolas" pitchFamily="34" charset="-120"/>
               </a:rPr>
-              <a:t> u.id</a:t>
+              <a:t>GROUP</a:t>
             </a:r>
             <a:pPr algn="l" indent="0" marL="0">
               <a:lnSpc>
@@ -50946,25 +52670,93 @@
               </a:lnSpc>
               <a:buNone/>
             </a:pPr>
-            <a:endParaRPr lang="en-US" sz="1849" dirty="0"/>
-          </a:p>
-          <a:p>
-            <a:pPr algn="l" indent="0" marL="0">
-              <a:lnSpc>
-                <a:spcPct val="115000"/>
-              </a:lnSpc>
-              <a:buNone/>
-            </a:pPr>
             <a:r>
               <a:rPr lang="en-US" sz="1849" dirty="0">
                 <a:solidFill>
-                  <a:srgbClr val="CF222E"/>
+                  <a:srgbClr val="1F2328"/>
                 </a:solidFill>
                 <a:latin typeface="Consolas" pitchFamily="34" charset="0"/>
                 <a:ea typeface="Consolas" pitchFamily="34" charset="-122"/>
                 <a:cs typeface="Consolas" pitchFamily="34" charset="-120"/>
               </a:rPr>
+              <a:t> </a:t>
+            </a:r>
+            <a:pPr algn="l" indent="0" marL="0">
+              <a:lnSpc>
+                <a:spcPct val="115000"/>
+              </a:lnSpc>
+              <a:buNone/>
+            </a:pPr>
+            <a:r>
+              <a:rPr lang="en-US" sz="1849" dirty="0">
+                <a:solidFill>
+                  <a:srgbClr val="CF222E"/>
+                </a:solidFill>
+                <a:latin typeface="Consolas" pitchFamily="34" charset="0"/>
+                <a:ea typeface="Consolas" pitchFamily="34" charset="-122"/>
+                <a:cs typeface="Consolas" pitchFamily="34" charset="-120"/>
+              </a:rPr>
+              <a:t>BY</a:t>
+            </a:r>
+            <a:pPr algn="l" indent="0" marL="0">
+              <a:lnSpc>
+                <a:spcPct val="115000"/>
+              </a:lnSpc>
+              <a:buNone/>
+            </a:pPr>
+            <a:r>
+              <a:rPr lang="en-US" sz="1849" dirty="0">
+                <a:solidFill>
+                  <a:srgbClr val="1F2328"/>
+                </a:solidFill>
+                <a:latin typeface="Consolas" pitchFamily="34" charset="0"/>
+                <a:ea typeface="Consolas" pitchFamily="34" charset="-122"/>
+                <a:cs typeface="Consolas" pitchFamily="34" charset="-120"/>
+              </a:rPr>
+              <a:t> u.id</a:t>
+            </a:r>
+            <a:pPr algn="l" indent="0" marL="0">
+              <a:lnSpc>
+                <a:spcPct val="115000"/>
+              </a:lnSpc>
+              <a:buNone/>
+            </a:pPr>
+            <a:endParaRPr lang="en-US" sz="1849" dirty="0"/>
+          </a:p>
+          <a:p>
+            <a:pPr algn="l" indent="0" marL="0">
+              <a:lnSpc>
+                <a:spcPct val="115000"/>
+              </a:lnSpc>
+              <a:buNone/>
+            </a:pPr>
+            <a:r>
+              <a:rPr lang="en-US" sz="1849" dirty="0">
+                <a:solidFill>
+                  <a:srgbClr val="CF222E"/>
+                </a:solidFill>
+                <a:latin typeface="Consolas" pitchFamily="34" charset="0"/>
+                <a:ea typeface="Consolas" pitchFamily="34" charset="-122"/>
+                <a:cs typeface="Consolas" pitchFamily="34" charset="-120"/>
+              </a:rPr>
               <a:t>ORDER</a:t>
+            </a:r>
+            <a:pPr algn="l" indent="0" marL="0">
+              <a:lnSpc>
+                <a:spcPct val="115000"/>
+              </a:lnSpc>
+              <a:buNone/>
+            </a:pPr>
+            <a:r>
+              <a:rPr lang="en-US" sz="1849" dirty="0">
+                <a:solidFill>
+                  <a:srgbClr val="1F2328"/>
+                </a:solidFill>
+                <a:latin typeface="Consolas" pitchFamily="34" charset="0"/>
+                <a:ea typeface="Consolas" pitchFamily="34" charset="-122"/>
+                <a:cs typeface="Consolas" pitchFamily="34" charset="-120"/>
+              </a:rPr>
+              <a:t> </a:t>
             </a:r>
             <a:pPr algn="l" indent="0" marL="0">
               <a:lnSpc>
